--- a/documents/Jannis_Meyer_Presentation_11_05_2026.pptx
+++ b/documents/Jannis_Meyer_Presentation_11_05_2026.pptx
@@ -335,11 +335,96 @@
             <a:pPr>
               <a:buNone/>
             </a:pPr>
-            <a:endParaRPr dirty="0"/>
+            <a:endParaRPr dirty="0">
+              <a:latin typeface="Abadi" panose="020B0604020104020204" pitchFamily="34" charset="0"/>
+            </a:endParaRPr>
           </a:p>
         </p:txBody>
       </p:sp>
     </p:spTree>
+  </p:cSld>
+  <p:clrMapOvr>
+    <a:masterClrMapping/>
+  </p:clrMapOvr>
+</p:notes>
+</file>
+
+<file path=ppt/notesSlides/notesSlide2.xml><?xml version="1.0" encoding="utf-8"?>
+<p:notes xmlns:a="http://schemas.openxmlformats.org/drawingml/2006/main" xmlns:r="http://schemas.openxmlformats.org/officeDocument/2006/relationships" xmlns:p="http://schemas.openxmlformats.org/presentationml/2006/main">
+  <p:cSld>
+    <p:spTree>
+      <p:nvGrpSpPr>
+        <p:cNvPr id="1" name=""/>
+        <p:cNvGrpSpPr/>
+        <p:nvPr/>
+      </p:nvGrpSpPr>
+      <p:grpSpPr>
+        <a:xfrm>
+          <a:off x="0" y="0"/>
+          <a:ext cx="0" cy="0"/>
+          <a:chOff x="0" y="0"/>
+          <a:chExt cx="0" cy="0"/>
+        </a:xfrm>
+      </p:grpSpPr>
+      <p:sp>
+        <p:nvSpPr>
+          <p:cNvPr id="2" name="Slide Image Placeholder 1"/>
+          <p:cNvSpPr>
+            <a:spLocks noGrp="1" noRot="1" noChangeAspect="1"/>
+          </p:cNvSpPr>
+          <p:nvPr>
+            <p:ph type="sldImg"/>
+          </p:nvPr>
+        </p:nvSpPr>
+        <p:spPr>
+          <a:xfrm>
+            <a:off x="2514600" y="857250"/>
+            <a:ext cx="4114800" cy="2314575"/>
+          </a:xfrm>
+          <a:prstGeom prst="rect">
+            <a:avLst/>
+          </a:prstGeom>
+          <a:noFill/>
+          <a:ln w="12700">
+            <a:solidFill>
+              <a:prstClr val="black"/>
+            </a:solidFill>
+          </a:ln>
+        </p:spPr>
+      </p:sp>
+      <p:sp>
+        <p:nvSpPr>
+          <p:cNvPr id="3" name="Notes Placeholder 2"/>
+          <p:cNvSpPr>
+            <a:spLocks noGrp="1"/>
+          </p:cNvSpPr>
+          <p:nvPr>
+            <p:ph type="body" idx="1"/>
+          </p:nvPr>
+        </p:nvSpPr>
+        <p:spPr>
+          <a:xfrm>
+            <a:off x="914400" y="3300413"/>
+            <a:ext cx="7315200" cy="2700337"/>
+          </a:xfrm>
+          <a:prstGeom prst="rect">
+            <a:avLst/>
+          </a:prstGeom>
+        </p:spPr>
+        <p:txBody>
+          <a:bodyPr/>
+          <a:lstStyle/>
+          <a:p>
+            <a:endParaRPr lang="en-US" dirty="0"/>
+          </a:p>
+        </p:txBody>
+      </p:sp>
+    </p:spTree>
+    <p:extLst>
+      <p:ext uri="{BB962C8B-B14F-4D97-AF65-F5344CB8AC3E}">
+        <p14:creationId xmlns:p14="http://schemas.microsoft.com/office/powerpoint/2010/main" val="828316252"/>
+      </p:ext>
+    </p:extLst>
   </p:cSld>
   <p:clrMapOvr>
     <a:masterClrMapping/>
@@ -1319,7 +1404,7 @@
           <a:p>
             <a:fld id="{8664C608-40B1-4030-A28D-5B74BC98ADCE}" type="datetimeFigureOut">
               <a:rPr lang="en-US" dirty="0"/>
-              <a:t>5/7/2026</a:t>
+              <a:t>5/8/2026</a:t>
             </a:fld>
             <a:endParaRPr lang="en-US" dirty="0"/>
           </a:p>
@@ -2155,7 +2240,6 @@
             </a:pPr>
             <a:r>
               <a:rPr lang="en-US" sz="2400" b="0" dirty="0">
-                <a:latin typeface="Times New Roman"/>
                 <a:ea typeface="游ゴシック Medium"/>
                 <a:cs typeface="Times New Roman"/>
               </a:rPr>
@@ -2443,7 +2527,6 @@
             </a:pPr>
             <a:r>
               <a:rPr lang="en-US" sz="2000" dirty="0">
-                <a:latin typeface="Medium"/>
                 <a:ea typeface="游ゴシック Medium"/>
                 <a:cs typeface="Times New Roman"/>
               </a:rPr>
@@ -2459,7 +2542,6 @@
             </a:pPr>
             <a:r>
               <a:rPr lang="en-US" sz="2000" b="0" dirty="0">
-                <a:latin typeface="Medium"/>
                 <a:ea typeface="游ゴシック Medium"/>
                 <a:cs typeface="Times New Roman"/>
               </a:rPr>
@@ -2473,7 +2555,6 @@
               </a:buClr>
             </a:pPr>
             <a:endParaRPr lang="en-US" sz="2000" b="0" dirty="0">
-              <a:latin typeface="Medium"/>
               <a:ea typeface="游ゴシック Medium"/>
               <a:cs typeface="Times New Roman"/>
             </a:endParaRPr>
@@ -2485,7 +2566,6 @@
               </a:buClr>
             </a:pPr>
             <a:endParaRPr lang="en-US" sz="2000" b="0" dirty="0">
-              <a:latin typeface="Medium"/>
               <a:ea typeface="游ゴシック Medium"/>
               <a:cs typeface="Times New Roman"/>
             </a:endParaRPr>
@@ -2497,7 +2577,6 @@
               </a:buClr>
             </a:pPr>
             <a:endParaRPr lang="en-US" sz="2000" b="0" dirty="0">
-              <a:latin typeface="Medium"/>
               <a:ea typeface="游ゴシック Medium"/>
               <a:cs typeface="Times New Roman"/>
             </a:endParaRPr>
@@ -2509,7 +2588,6 @@
               </a:buClr>
             </a:pPr>
             <a:endParaRPr lang="en-US" sz="2000" b="0" dirty="0">
-              <a:latin typeface="Medium"/>
               <a:ea typeface="游ゴシック Medium"/>
               <a:cs typeface="Times New Roman"/>
             </a:endParaRPr>
@@ -2522,7 +2600,6 @@
               <a:buNone/>
             </a:pPr>
             <a:endParaRPr lang="en-US" sz="2000" b="0" dirty="0">
-              <a:latin typeface="Medium"/>
               <a:ea typeface="游ゴシック Medium"/>
               <a:cs typeface="Times New Roman"/>
             </a:endParaRPr>
@@ -2536,7 +2613,6 @@
               <a:buNone/>
             </a:pPr>
             <a:endParaRPr lang="en-US" sz="2000" b="0" dirty="0">
-              <a:latin typeface="Times New Roman"/>
               <a:ea typeface="游ゴシック Medium"/>
               <a:cs typeface="Times New Roman"/>
             </a:endParaRPr>
@@ -2605,7 +2681,7 @@
         <p:spPr>
           <a:xfrm>
             <a:off x="683568" y="3170146"/>
-            <a:ext cx="6648809" cy="215444"/>
+            <a:ext cx="6648809" cy="338554"/>
           </a:xfrm>
           <a:prstGeom prst="rect">
             <a:avLst/>
@@ -2620,7 +2696,7 @@
           <a:p>
             <a:r>
               <a:rPr lang="en-US" sz="800" dirty="0">
-                <a:latin typeface="Medium"/>
+                <a:latin typeface="游ゴシック Medium" panose="020B0500000000000000" pitchFamily="50" charset="-128"/>
               </a:rPr>
               <a:t>Source: https://www.researchgate.net/figure/Basic-example-of-an-image-registration-procedure-F-is-the-target-image-M-is-the-image_fig4_320212021</a:t>
             </a:r>
@@ -2642,7 +2718,7 @@
         <p:spPr>
           <a:xfrm>
             <a:off x="284138" y="4084367"/>
-            <a:ext cx="7506157" cy="400110"/>
+            <a:ext cx="8361904" cy="400110"/>
           </a:xfrm>
           <a:prstGeom prst="rect">
             <a:avLst/>
@@ -2660,27 +2736,33 @@
                 <a:solidFill>
                   <a:schemeClr val="accent1"/>
                 </a:solidFill>
-                <a:latin typeface="Medium"/>
+                <a:latin typeface="游ゴシック Medium" panose="020B0500000000000000" pitchFamily="50" charset="-128"/>
               </a:rPr>
               <a:t>➔ </a:t>
             </a:r>
             <a:r>
               <a:rPr lang="en-US" sz="2000" dirty="0">
-                <a:latin typeface="Medium"/>
+                <a:latin typeface="游ゴシック Medium" panose="020B0500000000000000" pitchFamily="50" charset="-128"/>
               </a:rPr>
               <a:t>Create new edges for non-adjacent pairs of frame (</a:t>
             </a:r>
             <a:r>
-              <a:rPr lang="en-US" sz="2000" dirty="0" err="1"/>
+              <a:rPr lang="en-US" sz="2000" dirty="0" err="1">
+                <a:latin typeface="Cambria Math" panose="02040503050406030204" pitchFamily="18" charset="0"/>
+                <a:ea typeface="Cambria Math" panose="02040503050406030204" pitchFamily="18" charset="0"/>
+              </a:rPr>
               <a:t>i</a:t>
             </a:r>
             <a:r>
-              <a:rPr lang="en-US" sz="2000" dirty="0"/>
+              <a:rPr lang="en-US" sz="2000" dirty="0">
+                <a:latin typeface="Cambria Math" panose="02040503050406030204" pitchFamily="18" charset="0"/>
+                <a:ea typeface="Cambria Math" panose="02040503050406030204" pitchFamily="18" charset="0"/>
+              </a:rPr>
               <a:t> - j &gt;= k, k &gt; 1</a:t>
             </a:r>
             <a:r>
               <a:rPr lang="en-US" sz="2000" dirty="0">
-                <a:latin typeface="Medium"/>
+                <a:latin typeface="游ゴシック Medium" panose="020B0500000000000000" pitchFamily="50" charset="-128"/>
               </a:rPr>
               <a:t>)</a:t>
             </a:r>
@@ -2841,6 +2923,14 @@
           <a:prstGeom prst="rect">
             <a:avLst/>
           </a:prstGeom>
+          <a:pattFill prst="smGrid">
+            <a:fgClr>
+              <a:schemeClr val="accent1"/>
+            </a:fgClr>
+            <a:bgClr>
+              <a:schemeClr val="bg1"/>
+            </a:bgClr>
+          </a:pattFill>
           <a:ln>
             <a:noFill/>
           </a:ln>
@@ -2976,7 +3066,6 @@
             </a:pPr>
             <a:r>
               <a:rPr lang="en-US" sz="2400" b="0" dirty="0">
-                <a:latin typeface="Times New Roman"/>
                 <a:ea typeface="游ゴシック Medium"/>
                 <a:cs typeface="Times New Roman"/>
               </a:rPr>
@@ -3264,7 +3353,6 @@
             </a:pPr>
             <a:r>
               <a:rPr lang="en-US" sz="2000" dirty="0">
-                <a:latin typeface="Medium"/>
                 <a:ea typeface="游ゴシック Medium"/>
                 <a:cs typeface="Times New Roman"/>
               </a:rPr>
@@ -3280,7 +3368,6 @@
             </a:pPr>
             <a:r>
               <a:rPr lang="en-US" sz="1800" b="0" dirty="0">
-                <a:latin typeface="Medium"/>
                 <a:ea typeface="游ゴシック Medium"/>
                 <a:cs typeface="Times New Roman"/>
               </a:rPr>
@@ -3294,7 +3381,6 @@
               </a:buClr>
             </a:pPr>
             <a:endParaRPr lang="en-US" sz="2000" b="0" dirty="0">
-              <a:latin typeface="Medium"/>
               <a:ea typeface="游ゴシック Medium"/>
               <a:cs typeface="Times New Roman"/>
             </a:endParaRPr>
@@ -3306,7 +3392,6 @@
               </a:buClr>
             </a:pPr>
             <a:endParaRPr lang="en-US" sz="2000" b="0" dirty="0">
-              <a:latin typeface="Medium"/>
               <a:ea typeface="游ゴシック Medium"/>
               <a:cs typeface="Times New Roman"/>
             </a:endParaRPr>
@@ -3319,7 +3404,6 @@
               <a:buNone/>
             </a:pPr>
             <a:endParaRPr lang="en-US" sz="2000" b="0" dirty="0">
-              <a:latin typeface="Medium"/>
               <a:ea typeface="游ゴシック Medium"/>
               <a:cs typeface="Times New Roman"/>
             </a:endParaRPr>
@@ -3333,7 +3417,6 @@
               <a:buNone/>
             </a:pPr>
             <a:endParaRPr lang="en-US" sz="2000" b="0" dirty="0">
-              <a:latin typeface="Times New Roman"/>
               <a:ea typeface="游ゴシック Medium"/>
               <a:cs typeface="Times New Roman"/>
             </a:endParaRPr>
@@ -3705,7 +3788,6 @@
             </a:pPr>
             <a:r>
               <a:rPr lang="en-US" sz="1200" b="0" dirty="0">
-                <a:latin typeface="Times New Roman"/>
                 <a:ea typeface="游ゴシック Medium"/>
                 <a:cs typeface="Times New Roman"/>
               </a:rPr>
@@ -3713,7 +3795,6 @@
             </a:r>
             <a:r>
               <a:rPr lang="en-US" sz="1200" b="0" baseline="-25000" dirty="0">
-                <a:latin typeface="Times New Roman"/>
                 <a:ea typeface="游ゴシック Medium"/>
                 <a:cs typeface="Times New Roman"/>
               </a:rPr>
@@ -4002,7 +4083,6 @@
             </a:pPr>
             <a:r>
               <a:rPr lang="en-US" sz="1200" b="0" dirty="0">
-                <a:latin typeface="Times New Roman"/>
                 <a:ea typeface="游ゴシック Medium"/>
                 <a:cs typeface="Times New Roman"/>
               </a:rPr>
@@ -4010,7 +4090,6 @@
             </a:r>
             <a:r>
               <a:rPr lang="en-US" sz="1200" b="0" baseline="-25000" dirty="0">
-                <a:latin typeface="Times New Roman"/>
                 <a:ea typeface="游ゴシック Medium"/>
                 <a:cs typeface="Times New Roman"/>
               </a:rPr>
@@ -4299,7 +4378,6 @@
             </a:pPr>
             <a:r>
               <a:rPr lang="en-US" sz="1200" b="0" dirty="0">
-                <a:latin typeface="Times New Roman"/>
                 <a:ea typeface="游ゴシック Medium"/>
                 <a:cs typeface="Times New Roman"/>
               </a:rPr>
@@ -4307,7 +4385,6 @@
             </a:r>
             <a:r>
               <a:rPr lang="en-US" sz="1200" b="0" baseline="-25000" dirty="0">
-                <a:latin typeface="Times New Roman"/>
                 <a:ea typeface="游ゴシック Medium"/>
                 <a:cs typeface="Times New Roman"/>
               </a:rPr>
@@ -4596,7 +4673,6 @@
             </a:pPr>
             <a:r>
               <a:rPr lang="en-US" sz="1200" b="0" dirty="0">
-                <a:latin typeface="Times New Roman"/>
                 <a:ea typeface="游ゴシック Medium"/>
                 <a:cs typeface="Times New Roman"/>
               </a:rPr>
@@ -4604,7 +4680,6 @@
             </a:r>
             <a:r>
               <a:rPr lang="en-US" sz="1200" b="0" baseline="-25000" dirty="0">
-                <a:latin typeface="Times New Roman"/>
                 <a:ea typeface="游ゴシック Medium"/>
                 <a:cs typeface="Times New Roman"/>
               </a:rPr>
@@ -4893,10 +4968,6 @@
             </a:pPr>
             <a:r>
               <a:rPr lang="en-US" sz="1200" b="0" dirty="0">
-                <a:solidFill>
-                  <a:schemeClr val="accent1"/>
-                </a:solidFill>
-                <a:latin typeface="Times New Roman"/>
                 <a:ea typeface="游ゴシック Medium"/>
                 <a:cs typeface="Times New Roman"/>
               </a:rPr>
@@ -4904,10 +4975,6 @@
             </a:r>
             <a:r>
               <a:rPr lang="en-US" sz="1200" b="0" baseline="-25000" dirty="0">
-                <a:solidFill>
-                  <a:schemeClr val="accent1"/>
-                </a:solidFill>
-                <a:latin typeface="Times New Roman"/>
                 <a:ea typeface="游ゴシック Medium"/>
                 <a:cs typeface="Times New Roman"/>
               </a:rPr>
@@ -5196,10 +5263,6 @@
             </a:pPr>
             <a:r>
               <a:rPr lang="en-US" sz="1200" b="0" dirty="0">
-                <a:solidFill>
-                  <a:schemeClr val="accent1"/>
-                </a:solidFill>
-                <a:latin typeface="Times New Roman"/>
                 <a:ea typeface="游ゴシック Medium"/>
                 <a:cs typeface="Times New Roman"/>
               </a:rPr>
@@ -5207,10 +5270,6 @@
             </a:r>
             <a:r>
               <a:rPr lang="en-US" sz="1200" b="0" baseline="-25000" dirty="0">
-                <a:solidFill>
-                  <a:schemeClr val="accent1"/>
-                </a:solidFill>
-                <a:latin typeface="Times New Roman"/>
                 <a:ea typeface="游ゴシック Medium"/>
                 <a:cs typeface="Times New Roman"/>
               </a:rPr>
@@ -5499,10 +5558,6 @@
             </a:pPr>
             <a:r>
               <a:rPr lang="en-US" sz="1200" b="0" dirty="0">
-                <a:solidFill>
-                  <a:schemeClr val="accent1"/>
-                </a:solidFill>
-                <a:latin typeface="Times New Roman"/>
                 <a:ea typeface="游ゴシック Medium"/>
                 <a:cs typeface="Times New Roman"/>
               </a:rPr>
@@ -5510,10 +5565,6 @@
             </a:r>
             <a:r>
               <a:rPr lang="en-US" sz="1200" b="0" baseline="-25000" dirty="0">
-                <a:solidFill>
-                  <a:schemeClr val="accent1"/>
-                </a:solidFill>
-                <a:latin typeface="Times New Roman"/>
                 <a:ea typeface="游ゴシック Medium"/>
                 <a:cs typeface="Times New Roman"/>
               </a:rPr>
@@ -5804,7 +5855,6 @@
                 <a:solidFill>
                   <a:schemeClr val="bg1"/>
                 </a:solidFill>
-                <a:latin typeface="Medium"/>
                 <a:ea typeface="游ゴシック Medium"/>
                 <a:cs typeface="Times New Roman"/>
               </a:rPr>
@@ -5820,7 +5870,6 @@
               <a:buNone/>
             </a:pPr>
             <a:endParaRPr lang="en-US" sz="2000" b="0" dirty="0">
-              <a:latin typeface="Times New Roman"/>
               <a:ea typeface="游ゴシック Medium"/>
               <a:cs typeface="Times New Roman"/>
             </a:endParaRPr>
@@ -5843,8 +5892,8 @@
         </p:nvSpPr>
         <p:spPr>
           <a:xfrm>
-            <a:off x="2042952" y="4032921"/>
-            <a:ext cx="1091612" cy="429556"/>
+            <a:off x="2030042" y="4018175"/>
+            <a:ext cx="983346" cy="252384"/>
           </a:xfrm>
           <a:prstGeom prst="rect">
             <a:avLst/>
@@ -6105,40 +6154,37 @@
               <a:buNone/>
             </a:pPr>
             <a:r>
-              <a:rPr lang="en-US" sz="2000" dirty="0">
+              <a:rPr lang="en-US" sz="1200" b="0" dirty="0">
                 <a:solidFill>
                   <a:schemeClr val="accent1"/>
                 </a:solidFill>
-                <a:latin typeface="Medium"/>
                 <a:ea typeface="游ゴシック Medium"/>
                 <a:cs typeface="Times New Roman"/>
               </a:rPr>
-              <a:t>T</a:t>
+              <a:t>FV T</a:t>
             </a:r>
             <a:r>
-              <a:rPr lang="en-US" sz="2000" baseline="-25000" dirty="0">
+              <a:rPr lang="en-US" sz="1200" b="0" baseline="-25000" dirty="0">
                 <a:solidFill>
                   <a:schemeClr val="accent1"/>
                 </a:solidFill>
-                <a:latin typeface="Medium"/>
                 <a:ea typeface="游ゴシック Medium"/>
                 <a:cs typeface="Times New Roman"/>
               </a:rPr>
               <a:t>4</a:t>
             </a:r>
             <a:r>
-              <a:rPr lang="en-US" sz="2000" dirty="0">
+              <a:rPr lang="en-US" sz="1200" b="0" dirty="0">
                 <a:solidFill>
                   <a:schemeClr val="accent1"/>
                 </a:solidFill>
-                <a:latin typeface="Medium"/>
                 <a:ea typeface="游ゴシック Medium"/>
                 <a:cs typeface="Times New Roman"/>
               </a:rPr>
               <a:t> </a:t>
             </a:r>
             <a:r>
-              <a:rPr lang="en-US" dirty="0">
+              <a:rPr lang="en-US" sz="1200" b="0" dirty="0">
                 <a:solidFill>
                   <a:schemeClr val="accent1"/>
                 </a:solidFill>
@@ -6146,22 +6192,20 @@
               <a:t>≈</a:t>
             </a:r>
             <a:r>
-              <a:rPr lang="en-US" sz="2000" dirty="0">
+              <a:rPr lang="en-US" sz="1200" b="0" dirty="0">
                 <a:solidFill>
                   <a:schemeClr val="accent1"/>
                 </a:solidFill>
-                <a:latin typeface="Medium"/>
                 <a:ea typeface="游ゴシック Medium"/>
                 <a:cs typeface="Times New Roman"/>
               </a:rPr>
-              <a:t> T</a:t>
+              <a:t> FV T</a:t>
             </a:r>
             <a:r>
-              <a:rPr lang="en-US" sz="2000" baseline="-25000" dirty="0">
+              <a:rPr lang="en-US" sz="1200" b="0" baseline="-25000" dirty="0">
                 <a:solidFill>
                   <a:schemeClr val="accent1"/>
                 </a:solidFill>
-                <a:latin typeface="Medium"/>
                 <a:ea typeface="游ゴシック Medium"/>
                 <a:cs typeface="Times New Roman"/>
               </a:rPr>
@@ -6177,7 +6221,6 @@
               <a:buNone/>
             </a:pPr>
             <a:endParaRPr lang="en-US" sz="2000" b="0" dirty="0">
-              <a:latin typeface="Times New Roman"/>
               <a:ea typeface="游ゴシック Medium"/>
               <a:cs typeface="Times New Roman"/>
             </a:endParaRPr>
@@ -6317,7 +6360,7 @@
           <a:lstStyle/>
           <a:p>
             <a:pPr algn="ctr"/>
-            <a:endParaRPr lang="en-US"/>
+            <a:endParaRPr lang="en-US" dirty="0"/>
           </a:p>
         </p:txBody>
       </p:sp>
@@ -6601,7 +6644,6 @@
             </a:pPr>
             <a:r>
               <a:rPr lang="en-US" sz="1200" b="0" dirty="0">
-                <a:latin typeface="Times New Roman"/>
                 <a:ea typeface="游ゴシック Medium"/>
                 <a:cs typeface="Times New Roman"/>
               </a:rPr>
@@ -6609,7 +6651,6 @@
             </a:r>
             <a:r>
               <a:rPr lang="en-US" sz="1200" b="0" baseline="-25000" dirty="0">
-                <a:latin typeface="Times New Roman"/>
                 <a:ea typeface="游ゴシック Medium"/>
                 <a:cs typeface="Times New Roman"/>
               </a:rPr>
@@ -6898,7 +6939,6 @@
             </a:pPr>
             <a:r>
               <a:rPr lang="en-US" sz="1200" b="0" dirty="0">
-                <a:latin typeface="Times New Roman"/>
                 <a:ea typeface="游ゴシック Medium"/>
                 <a:cs typeface="Times New Roman"/>
               </a:rPr>
@@ -6906,7 +6946,6 @@
             </a:r>
             <a:r>
               <a:rPr lang="en-US" sz="1200" b="0" baseline="-25000" dirty="0">
-                <a:latin typeface="Times New Roman"/>
                 <a:ea typeface="游ゴシック Medium"/>
                 <a:cs typeface="Times New Roman"/>
               </a:rPr>
@@ -7195,7 +7234,6 @@
             </a:pPr>
             <a:r>
               <a:rPr lang="en-US" sz="1200" b="0" dirty="0">
-                <a:latin typeface="Times New Roman"/>
                 <a:ea typeface="游ゴシック Medium"/>
                 <a:cs typeface="Times New Roman"/>
               </a:rPr>
@@ -7203,7 +7241,6 @@
             </a:r>
             <a:r>
               <a:rPr lang="en-US" sz="1200" b="0" baseline="-25000" dirty="0">
-                <a:latin typeface="Times New Roman"/>
                 <a:ea typeface="游ゴシック Medium"/>
                 <a:cs typeface="Times New Roman"/>
               </a:rPr>
@@ -7492,7 +7529,6 @@
             </a:pPr>
             <a:r>
               <a:rPr lang="en-US" sz="1200" b="0" dirty="0">
-                <a:latin typeface="Times New Roman"/>
                 <a:ea typeface="游ゴシック Medium"/>
                 <a:cs typeface="Times New Roman"/>
               </a:rPr>
@@ -7500,7 +7536,6 @@
             </a:r>
             <a:r>
               <a:rPr lang="en-US" sz="1200" b="0" baseline="-25000" dirty="0">
-                <a:latin typeface="Times New Roman"/>
                 <a:ea typeface="游ゴシック Medium"/>
                 <a:cs typeface="Times New Roman"/>
               </a:rPr>
@@ -7789,10 +7824,6 @@
             </a:pPr>
             <a:r>
               <a:rPr lang="en-US" sz="1200" b="0" dirty="0">
-                <a:solidFill>
-                  <a:schemeClr val="accent1"/>
-                </a:solidFill>
-                <a:latin typeface="Times New Roman"/>
                 <a:ea typeface="游ゴシック Medium"/>
                 <a:cs typeface="Times New Roman"/>
               </a:rPr>
@@ -7800,10 +7831,6 @@
             </a:r>
             <a:r>
               <a:rPr lang="en-US" sz="1200" b="0" baseline="-25000" dirty="0">
-                <a:solidFill>
-                  <a:schemeClr val="accent1"/>
-                </a:solidFill>
-                <a:latin typeface="Times New Roman"/>
                 <a:ea typeface="游ゴシック Medium"/>
                 <a:cs typeface="Times New Roman"/>
               </a:rPr>
@@ -8092,10 +8119,6 @@
             </a:pPr>
             <a:r>
               <a:rPr lang="en-US" sz="1200" b="0" dirty="0">
-                <a:solidFill>
-                  <a:schemeClr val="accent1"/>
-                </a:solidFill>
-                <a:latin typeface="Times New Roman"/>
                 <a:ea typeface="游ゴシック Medium"/>
                 <a:cs typeface="Times New Roman"/>
               </a:rPr>
@@ -8103,10 +8126,6 @@
             </a:r>
             <a:r>
               <a:rPr lang="en-US" sz="1200" b="0" baseline="-25000" dirty="0">
-                <a:solidFill>
-                  <a:schemeClr val="accent1"/>
-                </a:solidFill>
-                <a:latin typeface="Times New Roman"/>
                 <a:ea typeface="游ゴシック Medium"/>
                 <a:cs typeface="Times New Roman"/>
               </a:rPr>
@@ -8395,10 +8414,6 @@
             </a:pPr>
             <a:r>
               <a:rPr lang="en-US" sz="1200" b="0" dirty="0">
-                <a:solidFill>
-                  <a:schemeClr val="accent1"/>
-                </a:solidFill>
-                <a:latin typeface="Times New Roman"/>
                 <a:ea typeface="游ゴシック Medium"/>
                 <a:cs typeface="Times New Roman"/>
               </a:rPr>
@@ -8406,10 +8421,6 @@
             </a:r>
             <a:r>
               <a:rPr lang="en-US" sz="1200" b="0" baseline="-25000" dirty="0">
-                <a:solidFill>
-                  <a:schemeClr val="accent1"/>
-                </a:solidFill>
-                <a:latin typeface="Times New Roman"/>
                 <a:ea typeface="游ゴシック Medium"/>
                 <a:cs typeface="Times New Roman"/>
               </a:rPr>
@@ -8700,7 +8711,6 @@
                 <a:solidFill>
                   <a:schemeClr val="bg1"/>
                 </a:solidFill>
-                <a:latin typeface="Medium"/>
                 <a:ea typeface="游ゴシック Medium"/>
                 <a:cs typeface="Times New Roman"/>
               </a:rPr>
@@ -8716,7 +8726,6 @@
               <a:buNone/>
             </a:pPr>
             <a:endParaRPr lang="en-US" sz="2000" b="0" dirty="0">
-              <a:latin typeface="Times New Roman"/>
               <a:ea typeface="游ゴシック Medium"/>
               <a:cs typeface="Times New Roman"/>
             </a:endParaRPr>
@@ -8739,8 +8748,8 @@
         </p:nvSpPr>
         <p:spPr>
           <a:xfrm>
-            <a:off x="5336191" y="2965393"/>
-            <a:ext cx="766163" cy="429555"/>
+            <a:off x="5336191" y="2965394"/>
+            <a:ext cx="552556" cy="273578"/>
           </a:xfrm>
           <a:prstGeom prst="rect">
             <a:avLst/>
@@ -9002,22 +9011,20 @@
               <a:buNone/>
             </a:pPr>
             <a:r>
-              <a:rPr lang="en-US" sz="2000" dirty="0">
+              <a:rPr lang="en-US" sz="1200" dirty="0">
                 <a:solidFill>
                   <a:schemeClr val="accent1"/>
                 </a:solidFill>
-                <a:latin typeface="Times New Roman"/>
                 <a:ea typeface="游ゴシック Medium"/>
                 <a:cs typeface="Times New Roman"/>
               </a:rPr>
               <a:t>T</a:t>
             </a:r>
             <a:r>
-              <a:rPr lang="en-US" sz="2000" baseline="-25000" dirty="0">
+              <a:rPr lang="en-US" sz="1200" baseline="-25000" dirty="0">
                 <a:solidFill>
                   <a:schemeClr val="accent1"/>
                 </a:solidFill>
-                <a:latin typeface="Times New Roman"/>
                 <a:ea typeface="游ゴシック Medium"/>
                 <a:cs typeface="Times New Roman"/>
               </a:rPr>
@@ -9433,7 +9440,6 @@
                 <a:solidFill>
                   <a:schemeClr val="accent1"/>
                 </a:solidFill>
-                <a:latin typeface="Times New Roman"/>
                 <a:ea typeface="游ゴシック Medium"/>
                 <a:cs typeface="Times New Roman"/>
               </a:rPr>
@@ -9444,7 +9450,6 @@
                 <a:solidFill>
                   <a:schemeClr val="accent1"/>
                 </a:solidFill>
-                <a:latin typeface="Times New Roman"/>
                 <a:ea typeface="游ゴシック Medium"/>
                 <a:cs typeface="Times New Roman"/>
               </a:rPr>
@@ -9455,7 +9460,6 @@
                 <a:solidFill>
                   <a:schemeClr val="accent1"/>
                 </a:solidFill>
-                <a:latin typeface="Times New Roman"/>
                 <a:ea typeface="游ゴシック Medium"/>
                 <a:cs typeface="Times New Roman"/>
               </a:rPr>
@@ -9780,7 +9784,6 @@
             </a:pPr>
             <a:r>
               <a:rPr lang="en-US" sz="1200" b="0" dirty="0">
-                <a:latin typeface="Times New Roman"/>
                 <a:ea typeface="游ゴシック Medium"/>
                 <a:cs typeface="Times New Roman"/>
               </a:rPr>
@@ -9788,7 +9791,6 @@
             </a:r>
             <a:r>
               <a:rPr lang="en-US" sz="1200" b="0" baseline="-25000" dirty="0">
-                <a:latin typeface="Times New Roman"/>
                 <a:ea typeface="游ゴシック Medium"/>
                 <a:cs typeface="Times New Roman"/>
               </a:rPr>
@@ -10077,10 +10079,6 @@
             </a:pPr>
             <a:r>
               <a:rPr lang="en-US" sz="1200" b="0" dirty="0">
-                <a:solidFill>
-                  <a:schemeClr val="accent1"/>
-                </a:solidFill>
-                <a:latin typeface="Times New Roman"/>
                 <a:ea typeface="游ゴシック Medium"/>
                 <a:cs typeface="Times New Roman"/>
               </a:rPr>
@@ -10088,10 +10086,6 @@
             </a:r>
             <a:r>
               <a:rPr lang="en-US" sz="1200" b="0" baseline="-25000" dirty="0">
-                <a:solidFill>
-                  <a:schemeClr val="accent1"/>
-                </a:solidFill>
-                <a:latin typeface="Times New Roman"/>
                 <a:ea typeface="游ゴシック Medium"/>
                 <a:cs typeface="Times New Roman"/>
               </a:rPr>
@@ -10380,10 +10374,6 @@
             </a:pPr>
             <a:r>
               <a:rPr lang="en-US" sz="1200" b="0" dirty="0">
-                <a:solidFill>
-                  <a:schemeClr val="accent1"/>
-                </a:solidFill>
-                <a:latin typeface="Times New Roman"/>
                 <a:ea typeface="游ゴシック Medium"/>
                 <a:cs typeface="Times New Roman"/>
               </a:rPr>
@@ -10391,10 +10381,6 @@
             </a:r>
             <a:r>
               <a:rPr lang="en-US" sz="1200" b="0" baseline="-25000" dirty="0">
-                <a:solidFill>
-                  <a:schemeClr val="accent1"/>
-                </a:solidFill>
-                <a:latin typeface="Times New Roman"/>
                 <a:ea typeface="游ゴシック Medium"/>
                 <a:cs typeface="Times New Roman"/>
               </a:rPr>
@@ -10683,7 +10669,6 @@
             </a:pPr>
             <a:r>
               <a:rPr lang="en-US" sz="1200" b="0" dirty="0">
-                <a:latin typeface="Times New Roman"/>
                 <a:ea typeface="游ゴシック Medium"/>
                 <a:cs typeface="Times New Roman"/>
               </a:rPr>
@@ -10691,7 +10676,6 @@
             </a:r>
             <a:r>
               <a:rPr lang="en-US" sz="1200" b="0" baseline="-25000" dirty="0">
-                <a:latin typeface="Times New Roman"/>
                 <a:ea typeface="游ゴシック Medium"/>
                 <a:cs typeface="Times New Roman"/>
               </a:rPr>
@@ -10980,7 +10964,6 @@
             </a:pPr>
             <a:r>
               <a:rPr lang="en-US" sz="1200" b="0" dirty="0">
-                <a:latin typeface="Times New Roman"/>
                 <a:ea typeface="游ゴシック Medium"/>
                 <a:cs typeface="Times New Roman"/>
               </a:rPr>
@@ -10988,7 +10971,6 @@
             </a:r>
             <a:r>
               <a:rPr lang="en-US" sz="1200" b="0" baseline="-25000" dirty="0">
-                <a:latin typeface="Times New Roman"/>
                 <a:ea typeface="游ゴシック Medium"/>
                 <a:cs typeface="Times New Roman"/>
               </a:rPr>
@@ -11277,7 +11259,6 @@
             </a:pPr>
             <a:r>
               <a:rPr lang="en-US" sz="1200" b="0" dirty="0">
-                <a:latin typeface="Times New Roman"/>
                 <a:ea typeface="游ゴシック Medium"/>
                 <a:cs typeface="Times New Roman"/>
               </a:rPr>
@@ -11285,7 +11266,6 @@
             </a:r>
             <a:r>
               <a:rPr lang="en-US" sz="1200" b="0" baseline="-25000" dirty="0">
-                <a:latin typeface="Times New Roman"/>
                 <a:ea typeface="游ゴシック Medium"/>
                 <a:cs typeface="Times New Roman"/>
               </a:rPr>
@@ -11574,10 +11554,6 @@
             </a:pPr>
             <a:r>
               <a:rPr lang="en-US" sz="1200" b="0" dirty="0">
-                <a:solidFill>
-                  <a:schemeClr val="accent1"/>
-                </a:solidFill>
-                <a:latin typeface="Times New Roman"/>
                 <a:ea typeface="游ゴシック Medium"/>
                 <a:cs typeface="Times New Roman"/>
               </a:rPr>
@@ -11585,10 +11561,6 @@
             </a:r>
             <a:r>
               <a:rPr lang="en-US" sz="1200" b="0" baseline="-25000" dirty="0">
-                <a:solidFill>
-                  <a:schemeClr val="accent1"/>
-                </a:solidFill>
-                <a:latin typeface="Times New Roman"/>
                 <a:ea typeface="游ゴシック Medium"/>
                 <a:cs typeface="Times New Roman"/>
               </a:rPr>
@@ -11880,7 +11852,6 @@
                 <a:solidFill>
                   <a:schemeClr val="accent1"/>
                 </a:solidFill>
-                <a:latin typeface="Times New Roman"/>
                 <a:ea typeface="游ゴシック Medium"/>
                 <a:cs typeface="Times New Roman"/>
               </a:rPr>
@@ -11891,7 +11862,6 @@
                 <a:solidFill>
                   <a:schemeClr val="accent1"/>
                 </a:solidFill>
-                <a:latin typeface="Times New Roman"/>
                 <a:ea typeface="游ゴシック Medium"/>
                 <a:cs typeface="Times New Roman"/>
               </a:rPr>
@@ -12183,7 +12153,6 @@
                 <a:solidFill>
                   <a:schemeClr val="accent1"/>
                 </a:solidFill>
-                <a:latin typeface="Times New Roman"/>
                 <a:ea typeface="游ゴシック Medium"/>
                 <a:cs typeface="Times New Roman"/>
               </a:rPr>
@@ -12194,7 +12163,6 @@
                 <a:solidFill>
                   <a:schemeClr val="accent1"/>
                 </a:solidFill>
-                <a:latin typeface="Times New Roman"/>
                 <a:ea typeface="游ゴシック Medium"/>
                 <a:cs typeface="Times New Roman"/>
               </a:rPr>
@@ -12486,7 +12454,6 @@
                 <a:solidFill>
                   <a:schemeClr val="accent1"/>
                 </a:solidFill>
-                <a:latin typeface="Times New Roman"/>
                 <a:ea typeface="游ゴシック Medium"/>
                 <a:cs typeface="Times New Roman"/>
               </a:rPr>
@@ -12497,7 +12464,6 @@
                 <a:solidFill>
                   <a:schemeClr val="accent1"/>
                 </a:solidFill>
-                <a:latin typeface="Times New Roman"/>
                 <a:ea typeface="游ゴシック Medium"/>
                 <a:cs typeface="Times New Roman"/>
               </a:rPr>
@@ -12521,7 +12487,7 @@
         <p:spPr>
           <a:xfrm>
             <a:off x="322116" y="4417248"/>
-            <a:ext cx="5880199" cy="400110"/>
+            <a:ext cx="6742551" cy="400110"/>
           </a:xfrm>
           <a:prstGeom prst="rect">
             <a:avLst/>
@@ -12539,13 +12505,13 @@
                 <a:solidFill>
                   <a:schemeClr val="accent1"/>
                 </a:solidFill>
-                <a:latin typeface="Medium"/>
+                <a:latin typeface="游ゴシック Medium" panose="020B0500000000000000" pitchFamily="50" charset="-128"/>
               </a:rPr>
               <a:t>➔ </a:t>
             </a:r>
             <a:r>
               <a:rPr lang="en-US" sz="2000" dirty="0">
-                <a:latin typeface="Medium"/>
+                <a:latin typeface="游ゴシック Medium" panose="020B0500000000000000" pitchFamily="50" charset="-128"/>
               </a:rPr>
               <a:t>Create new edges for pairs of frames exhibiting a LC</a:t>
             </a:r>
@@ -12647,6 +12613,909 @@
           <a:p>
             <a:pPr algn="ctr"/>
             <a:endParaRPr lang="en-US"/>
+          </a:p>
+        </p:txBody>
+      </p:sp>
+      <p:sp>
+        <p:nvSpPr>
+          <p:cNvPr id="15" name="Text Placeholder 1">
+            <a:extLst>
+              <a:ext uri="{FF2B5EF4-FFF2-40B4-BE49-F238E27FC236}">
+                <a16:creationId xmlns:a16="http://schemas.microsoft.com/office/drawing/2014/main" id="{4FC9D2D7-B67E-D631-FA0D-BB88AAE3999D}"/>
+              </a:ext>
+            </a:extLst>
+          </p:cNvPr>
+          <p:cNvSpPr txBox="1">
+            <a:spLocks/>
+          </p:cNvSpPr>
+          <p:nvPr/>
+        </p:nvSpPr>
+        <p:spPr>
+          <a:xfrm>
+            <a:off x="2258216" y="3346300"/>
+            <a:ext cx="538303" cy="288612"/>
+          </a:xfrm>
+          <a:prstGeom prst="rect">
+            <a:avLst/>
+          </a:prstGeom>
+          <a:noFill/>
+        </p:spPr>
+        <p:txBody>
+          <a:bodyPr vert="horz" lIns="91440" tIns="45720" rIns="91440" bIns="45720" rtlCol="0" anchor="t">
+            <a:noAutofit/>
+          </a:bodyPr>
+          <a:lstStyle>
+            <a:lvl1pPr marL="137160" indent="-137160" algn="l" defTabSz="685800" rtl="0" eaLnBrk="1" latinLnBrk="0" hangingPunct="1">
+              <a:lnSpc>
+                <a:spcPct val="90000"/>
+              </a:lnSpc>
+              <a:spcBef>
+                <a:spcPts val="900"/>
+              </a:spcBef>
+              <a:buClr>
+                <a:schemeClr val="accent1">
+                  <a:lumMod val="75000"/>
+                </a:schemeClr>
+              </a:buClr>
+              <a:buSzPct val="100000"/>
+              <a:buFont typeface="Arial" panose="020B0604020202020204" pitchFamily="34" charset="0"/>
+              <a:buChar char="•"/>
+              <a:defRPr kumimoji="1" sz="1500" b="1" kern="1200">
+                <a:solidFill>
+                  <a:schemeClr val="tx1"/>
+                </a:solidFill>
+                <a:latin typeface="游ゴシック Medium" panose="020B0500000000000000" pitchFamily="50" charset="-128"/>
+                <a:ea typeface="游ゴシック Medium" panose="020B0500000000000000" pitchFamily="50" charset="-128"/>
+                <a:cs typeface="+mn-cs"/>
+              </a:defRPr>
+            </a:lvl1pPr>
+            <a:lvl2pPr marL="342900" indent="-137160" algn="l" defTabSz="685800" rtl="0" eaLnBrk="1" latinLnBrk="0" hangingPunct="1">
+              <a:lnSpc>
+                <a:spcPct val="90000"/>
+              </a:lnSpc>
+              <a:spcBef>
+                <a:spcPts val="300"/>
+              </a:spcBef>
+              <a:spcAft>
+                <a:spcPts val="150"/>
+              </a:spcAft>
+              <a:buClr>
+                <a:schemeClr val="accent1">
+                  <a:lumMod val="75000"/>
+                </a:schemeClr>
+              </a:buClr>
+              <a:buSzPct val="100000"/>
+              <a:buFont typeface="Arial" panose="020B0604020202020204" pitchFamily="34" charset="0"/>
+              <a:buChar char="•"/>
+              <a:defRPr kumimoji="1" sz="1350" b="1" kern="1200">
+                <a:solidFill>
+                  <a:schemeClr val="tx1"/>
+                </a:solidFill>
+                <a:latin typeface="游ゴシック Medium" panose="020B0500000000000000" pitchFamily="50" charset="-128"/>
+                <a:ea typeface="游ゴシック Medium" panose="020B0500000000000000" pitchFamily="50" charset="-128"/>
+                <a:cs typeface="+mn-cs"/>
+              </a:defRPr>
+            </a:lvl2pPr>
+            <a:lvl3pPr marL="548640" indent="-137160" algn="l" defTabSz="685800" rtl="0" eaLnBrk="1" latinLnBrk="0" hangingPunct="1">
+              <a:lnSpc>
+                <a:spcPct val="90000"/>
+              </a:lnSpc>
+              <a:spcBef>
+                <a:spcPts val="300"/>
+              </a:spcBef>
+              <a:spcAft>
+                <a:spcPts val="150"/>
+              </a:spcAft>
+              <a:buClr>
+                <a:schemeClr val="accent1">
+                  <a:lumMod val="75000"/>
+                </a:schemeClr>
+              </a:buClr>
+              <a:buSzPct val="100000"/>
+              <a:buFont typeface="Arial" panose="020B0604020202020204" pitchFamily="34" charset="0"/>
+              <a:buChar char="•"/>
+              <a:defRPr kumimoji="1" sz="1200" b="1" kern="1200">
+                <a:solidFill>
+                  <a:schemeClr val="tx1"/>
+                </a:solidFill>
+                <a:latin typeface="游ゴシック Medium" panose="020B0500000000000000" pitchFamily="50" charset="-128"/>
+                <a:ea typeface="游ゴシック Medium" panose="020B0500000000000000" pitchFamily="50" charset="-128"/>
+                <a:cs typeface="+mn-cs"/>
+              </a:defRPr>
+            </a:lvl3pPr>
+            <a:lvl4pPr marL="754380" indent="-137160" algn="l" defTabSz="685800" rtl="0" eaLnBrk="1" latinLnBrk="0" hangingPunct="1">
+              <a:lnSpc>
+                <a:spcPct val="90000"/>
+              </a:lnSpc>
+              <a:spcBef>
+                <a:spcPts val="300"/>
+              </a:spcBef>
+              <a:spcAft>
+                <a:spcPts val="150"/>
+              </a:spcAft>
+              <a:buClr>
+                <a:schemeClr val="accent1">
+                  <a:lumMod val="75000"/>
+                </a:schemeClr>
+              </a:buClr>
+              <a:buSzPct val="100000"/>
+              <a:buFont typeface="Arial" panose="020B0604020202020204" pitchFamily="34" charset="0"/>
+              <a:buChar char="•"/>
+              <a:defRPr kumimoji="1" sz="1200" b="1" kern="1200">
+                <a:solidFill>
+                  <a:schemeClr val="tx1"/>
+                </a:solidFill>
+                <a:latin typeface="游ゴシック Medium" panose="020B0500000000000000" pitchFamily="50" charset="-128"/>
+                <a:ea typeface="游ゴシック Medium" panose="020B0500000000000000" pitchFamily="50" charset="-128"/>
+                <a:cs typeface="+mn-cs"/>
+              </a:defRPr>
+            </a:lvl4pPr>
+            <a:lvl5pPr marL="960120" indent="-137160" algn="l" defTabSz="685800" rtl="0" eaLnBrk="1" latinLnBrk="0" hangingPunct="1">
+              <a:lnSpc>
+                <a:spcPct val="90000"/>
+              </a:lnSpc>
+              <a:spcBef>
+                <a:spcPts val="300"/>
+              </a:spcBef>
+              <a:spcAft>
+                <a:spcPts val="150"/>
+              </a:spcAft>
+              <a:buClr>
+                <a:schemeClr val="accent1">
+                  <a:lumMod val="75000"/>
+                </a:schemeClr>
+              </a:buClr>
+              <a:buSzPct val="100000"/>
+              <a:buFont typeface="Arial" panose="020B0604020202020204" pitchFamily="34" charset="0"/>
+              <a:buChar char="•"/>
+              <a:defRPr kumimoji="1" sz="1200" b="1" kern="1200">
+                <a:solidFill>
+                  <a:schemeClr val="tx1"/>
+                </a:solidFill>
+                <a:latin typeface="游ゴシック Medium" panose="020B0500000000000000" pitchFamily="50" charset="-128"/>
+                <a:ea typeface="游ゴシック Medium" panose="020B0500000000000000" pitchFamily="50" charset="-128"/>
+                <a:cs typeface="+mn-cs"/>
+              </a:defRPr>
+            </a:lvl5pPr>
+            <a:lvl6pPr marL="1200000" indent="-171450" algn="l" defTabSz="685800" rtl="0" eaLnBrk="1" latinLnBrk="0" hangingPunct="1">
+              <a:lnSpc>
+                <a:spcPct val="90000"/>
+              </a:lnSpc>
+              <a:spcBef>
+                <a:spcPts val="300"/>
+              </a:spcBef>
+              <a:spcAft>
+                <a:spcPts val="150"/>
+              </a:spcAft>
+              <a:buClr>
+                <a:schemeClr val="accent1">
+                  <a:lumMod val="75000"/>
+                </a:schemeClr>
+              </a:buClr>
+              <a:buSzPct val="100000"/>
+              <a:buFont typeface="Arial" panose="020B0604020202020204" pitchFamily="34" charset="0"/>
+              <a:buChar char="•"/>
+              <a:defRPr kumimoji="1" sz="1200" kern="1200">
+                <a:solidFill>
+                  <a:schemeClr val="tx1"/>
+                </a:solidFill>
+                <a:latin typeface="+mn-lt"/>
+                <a:ea typeface="+mn-ea"/>
+                <a:cs typeface="+mn-cs"/>
+              </a:defRPr>
+            </a:lvl6pPr>
+            <a:lvl7pPr marL="1425000" indent="-171450" algn="l" defTabSz="685800" rtl="0" eaLnBrk="1" latinLnBrk="0" hangingPunct="1">
+              <a:lnSpc>
+                <a:spcPct val="90000"/>
+              </a:lnSpc>
+              <a:spcBef>
+                <a:spcPts val="300"/>
+              </a:spcBef>
+              <a:spcAft>
+                <a:spcPts val="150"/>
+              </a:spcAft>
+              <a:buClr>
+                <a:schemeClr val="accent1">
+                  <a:lumMod val="75000"/>
+                </a:schemeClr>
+              </a:buClr>
+              <a:buSzPct val="100000"/>
+              <a:buFont typeface="Arial" panose="020B0604020202020204" pitchFamily="34" charset="0"/>
+              <a:buChar char="•"/>
+              <a:defRPr kumimoji="1" sz="1200" kern="1200">
+                <a:solidFill>
+                  <a:schemeClr val="tx1"/>
+                </a:solidFill>
+                <a:latin typeface="+mn-lt"/>
+                <a:ea typeface="+mn-ea"/>
+                <a:cs typeface="+mn-cs"/>
+              </a:defRPr>
+            </a:lvl7pPr>
+            <a:lvl8pPr marL="1650000" indent="-171450" algn="l" defTabSz="685800" rtl="0" eaLnBrk="1" latinLnBrk="0" hangingPunct="1">
+              <a:lnSpc>
+                <a:spcPct val="90000"/>
+              </a:lnSpc>
+              <a:spcBef>
+                <a:spcPts val="300"/>
+              </a:spcBef>
+              <a:spcAft>
+                <a:spcPts val="150"/>
+              </a:spcAft>
+              <a:buClr>
+                <a:schemeClr val="accent1">
+                  <a:lumMod val="75000"/>
+                </a:schemeClr>
+              </a:buClr>
+              <a:buSzPct val="100000"/>
+              <a:buFont typeface="Arial" panose="020B0604020202020204" pitchFamily="34" charset="0"/>
+              <a:buChar char="•"/>
+              <a:defRPr kumimoji="1" sz="1200" kern="1200">
+                <a:solidFill>
+                  <a:schemeClr val="tx1"/>
+                </a:solidFill>
+                <a:latin typeface="+mn-lt"/>
+                <a:ea typeface="+mn-ea"/>
+                <a:cs typeface="+mn-cs"/>
+              </a:defRPr>
+            </a:lvl8pPr>
+            <a:lvl9pPr marL="1875000" indent="-171450" algn="l" defTabSz="685800" rtl="0" eaLnBrk="1" latinLnBrk="0" hangingPunct="1">
+              <a:lnSpc>
+                <a:spcPct val="90000"/>
+              </a:lnSpc>
+              <a:spcBef>
+                <a:spcPts val="300"/>
+              </a:spcBef>
+              <a:spcAft>
+                <a:spcPts val="150"/>
+              </a:spcAft>
+              <a:buClr>
+                <a:schemeClr val="accent1">
+                  <a:lumMod val="75000"/>
+                </a:schemeClr>
+              </a:buClr>
+              <a:buSzPct val="100000"/>
+              <a:buFont typeface="Arial" panose="020B0604020202020204" pitchFamily="34" charset="0"/>
+              <a:buChar char="•"/>
+              <a:defRPr kumimoji="1" sz="1200" kern="1200">
+                <a:solidFill>
+                  <a:schemeClr val="tx1"/>
+                </a:solidFill>
+                <a:latin typeface="+mn-lt"/>
+                <a:ea typeface="+mn-ea"/>
+                <a:cs typeface="+mn-cs"/>
+              </a:defRPr>
+            </a:lvl9pPr>
+          </a:lstStyle>
+          <a:p>
+            <a:pPr marL="0" indent="0">
+              <a:buClr>
+                <a:srgbClr val="9E3611"/>
+              </a:buClr>
+              <a:buFont typeface="Arial" panose="020B0604020202020204" pitchFamily="34" charset="0"/>
+              <a:buNone/>
+            </a:pPr>
+            <a:r>
+              <a:rPr lang="en-US" sz="1200" b="0" dirty="0">
+                <a:solidFill>
+                  <a:schemeClr val="accent1"/>
+                </a:solidFill>
+                <a:ea typeface="游ゴシック Medium"/>
+                <a:cs typeface="Times New Roman"/>
+              </a:rPr>
+              <a:t>T</a:t>
+            </a:r>
+            <a:r>
+              <a:rPr lang="en-US" sz="1200" b="0" baseline="-25000" dirty="0">
+                <a:solidFill>
+                  <a:schemeClr val="accent1"/>
+                </a:solidFill>
+                <a:ea typeface="游ゴシック Medium"/>
+                <a:cs typeface="Times New Roman"/>
+              </a:rPr>
+              <a:t>4</a:t>
+            </a:r>
+          </a:p>
+        </p:txBody>
+      </p:sp>
+      <p:sp>
+        <p:nvSpPr>
+          <p:cNvPr id="16" name="Text Placeholder 1">
+            <a:extLst>
+              <a:ext uri="{FF2B5EF4-FFF2-40B4-BE49-F238E27FC236}">
+                <a16:creationId xmlns:a16="http://schemas.microsoft.com/office/drawing/2014/main" id="{94C25CEC-F1C2-B1BF-8998-56ACAD2614A1}"/>
+              </a:ext>
+            </a:extLst>
+          </p:cNvPr>
+          <p:cNvSpPr txBox="1">
+            <a:spLocks/>
+          </p:cNvSpPr>
+          <p:nvPr/>
+        </p:nvSpPr>
+        <p:spPr>
+          <a:xfrm>
+            <a:off x="7998811" y="2311855"/>
+            <a:ext cx="538303" cy="288612"/>
+          </a:xfrm>
+          <a:prstGeom prst="rect">
+            <a:avLst/>
+          </a:prstGeom>
+          <a:noFill/>
+        </p:spPr>
+        <p:txBody>
+          <a:bodyPr vert="horz" lIns="91440" tIns="45720" rIns="91440" bIns="45720" rtlCol="0" anchor="t">
+            <a:noAutofit/>
+          </a:bodyPr>
+          <a:lstStyle>
+            <a:lvl1pPr marL="137160" indent="-137160" algn="l" defTabSz="685800" rtl="0" eaLnBrk="1" latinLnBrk="0" hangingPunct="1">
+              <a:lnSpc>
+                <a:spcPct val="90000"/>
+              </a:lnSpc>
+              <a:spcBef>
+                <a:spcPts val="900"/>
+              </a:spcBef>
+              <a:buClr>
+                <a:schemeClr val="accent1">
+                  <a:lumMod val="75000"/>
+                </a:schemeClr>
+              </a:buClr>
+              <a:buSzPct val="100000"/>
+              <a:buFont typeface="Arial" panose="020B0604020202020204" pitchFamily="34" charset="0"/>
+              <a:buChar char="•"/>
+              <a:defRPr kumimoji="1" sz="1500" b="1" kern="1200">
+                <a:solidFill>
+                  <a:schemeClr val="tx1"/>
+                </a:solidFill>
+                <a:latin typeface="游ゴシック Medium" panose="020B0500000000000000" pitchFamily="50" charset="-128"/>
+                <a:ea typeface="游ゴシック Medium" panose="020B0500000000000000" pitchFamily="50" charset="-128"/>
+                <a:cs typeface="+mn-cs"/>
+              </a:defRPr>
+            </a:lvl1pPr>
+            <a:lvl2pPr marL="342900" indent="-137160" algn="l" defTabSz="685800" rtl="0" eaLnBrk="1" latinLnBrk="0" hangingPunct="1">
+              <a:lnSpc>
+                <a:spcPct val="90000"/>
+              </a:lnSpc>
+              <a:spcBef>
+                <a:spcPts val="300"/>
+              </a:spcBef>
+              <a:spcAft>
+                <a:spcPts val="150"/>
+              </a:spcAft>
+              <a:buClr>
+                <a:schemeClr val="accent1">
+                  <a:lumMod val="75000"/>
+                </a:schemeClr>
+              </a:buClr>
+              <a:buSzPct val="100000"/>
+              <a:buFont typeface="Arial" panose="020B0604020202020204" pitchFamily="34" charset="0"/>
+              <a:buChar char="•"/>
+              <a:defRPr kumimoji="1" sz="1350" b="1" kern="1200">
+                <a:solidFill>
+                  <a:schemeClr val="tx1"/>
+                </a:solidFill>
+                <a:latin typeface="游ゴシック Medium" panose="020B0500000000000000" pitchFamily="50" charset="-128"/>
+                <a:ea typeface="游ゴシック Medium" panose="020B0500000000000000" pitchFamily="50" charset="-128"/>
+                <a:cs typeface="+mn-cs"/>
+              </a:defRPr>
+            </a:lvl2pPr>
+            <a:lvl3pPr marL="548640" indent="-137160" algn="l" defTabSz="685800" rtl="0" eaLnBrk="1" latinLnBrk="0" hangingPunct="1">
+              <a:lnSpc>
+                <a:spcPct val="90000"/>
+              </a:lnSpc>
+              <a:spcBef>
+                <a:spcPts val="300"/>
+              </a:spcBef>
+              <a:spcAft>
+                <a:spcPts val="150"/>
+              </a:spcAft>
+              <a:buClr>
+                <a:schemeClr val="accent1">
+                  <a:lumMod val="75000"/>
+                </a:schemeClr>
+              </a:buClr>
+              <a:buSzPct val="100000"/>
+              <a:buFont typeface="Arial" panose="020B0604020202020204" pitchFamily="34" charset="0"/>
+              <a:buChar char="•"/>
+              <a:defRPr kumimoji="1" sz="1200" b="1" kern="1200">
+                <a:solidFill>
+                  <a:schemeClr val="tx1"/>
+                </a:solidFill>
+                <a:latin typeface="游ゴシック Medium" panose="020B0500000000000000" pitchFamily="50" charset="-128"/>
+                <a:ea typeface="游ゴシック Medium" panose="020B0500000000000000" pitchFamily="50" charset="-128"/>
+                <a:cs typeface="+mn-cs"/>
+              </a:defRPr>
+            </a:lvl3pPr>
+            <a:lvl4pPr marL="754380" indent="-137160" algn="l" defTabSz="685800" rtl="0" eaLnBrk="1" latinLnBrk="0" hangingPunct="1">
+              <a:lnSpc>
+                <a:spcPct val="90000"/>
+              </a:lnSpc>
+              <a:spcBef>
+                <a:spcPts val="300"/>
+              </a:spcBef>
+              <a:spcAft>
+                <a:spcPts val="150"/>
+              </a:spcAft>
+              <a:buClr>
+                <a:schemeClr val="accent1">
+                  <a:lumMod val="75000"/>
+                </a:schemeClr>
+              </a:buClr>
+              <a:buSzPct val="100000"/>
+              <a:buFont typeface="Arial" panose="020B0604020202020204" pitchFamily="34" charset="0"/>
+              <a:buChar char="•"/>
+              <a:defRPr kumimoji="1" sz="1200" b="1" kern="1200">
+                <a:solidFill>
+                  <a:schemeClr val="tx1"/>
+                </a:solidFill>
+                <a:latin typeface="游ゴシック Medium" panose="020B0500000000000000" pitchFamily="50" charset="-128"/>
+                <a:ea typeface="游ゴシック Medium" panose="020B0500000000000000" pitchFamily="50" charset="-128"/>
+                <a:cs typeface="+mn-cs"/>
+              </a:defRPr>
+            </a:lvl4pPr>
+            <a:lvl5pPr marL="960120" indent="-137160" algn="l" defTabSz="685800" rtl="0" eaLnBrk="1" latinLnBrk="0" hangingPunct="1">
+              <a:lnSpc>
+                <a:spcPct val="90000"/>
+              </a:lnSpc>
+              <a:spcBef>
+                <a:spcPts val="300"/>
+              </a:spcBef>
+              <a:spcAft>
+                <a:spcPts val="150"/>
+              </a:spcAft>
+              <a:buClr>
+                <a:schemeClr val="accent1">
+                  <a:lumMod val="75000"/>
+                </a:schemeClr>
+              </a:buClr>
+              <a:buSzPct val="100000"/>
+              <a:buFont typeface="Arial" panose="020B0604020202020204" pitchFamily="34" charset="0"/>
+              <a:buChar char="•"/>
+              <a:defRPr kumimoji="1" sz="1200" b="1" kern="1200">
+                <a:solidFill>
+                  <a:schemeClr val="tx1"/>
+                </a:solidFill>
+                <a:latin typeface="游ゴシック Medium" panose="020B0500000000000000" pitchFamily="50" charset="-128"/>
+                <a:ea typeface="游ゴシック Medium" panose="020B0500000000000000" pitchFamily="50" charset="-128"/>
+                <a:cs typeface="+mn-cs"/>
+              </a:defRPr>
+            </a:lvl5pPr>
+            <a:lvl6pPr marL="1200000" indent="-171450" algn="l" defTabSz="685800" rtl="0" eaLnBrk="1" latinLnBrk="0" hangingPunct="1">
+              <a:lnSpc>
+                <a:spcPct val="90000"/>
+              </a:lnSpc>
+              <a:spcBef>
+                <a:spcPts val="300"/>
+              </a:spcBef>
+              <a:spcAft>
+                <a:spcPts val="150"/>
+              </a:spcAft>
+              <a:buClr>
+                <a:schemeClr val="accent1">
+                  <a:lumMod val="75000"/>
+                </a:schemeClr>
+              </a:buClr>
+              <a:buSzPct val="100000"/>
+              <a:buFont typeface="Arial" panose="020B0604020202020204" pitchFamily="34" charset="0"/>
+              <a:buChar char="•"/>
+              <a:defRPr kumimoji="1" sz="1200" kern="1200">
+                <a:solidFill>
+                  <a:schemeClr val="tx1"/>
+                </a:solidFill>
+                <a:latin typeface="+mn-lt"/>
+                <a:ea typeface="+mn-ea"/>
+                <a:cs typeface="+mn-cs"/>
+              </a:defRPr>
+            </a:lvl6pPr>
+            <a:lvl7pPr marL="1425000" indent="-171450" algn="l" defTabSz="685800" rtl="0" eaLnBrk="1" latinLnBrk="0" hangingPunct="1">
+              <a:lnSpc>
+                <a:spcPct val="90000"/>
+              </a:lnSpc>
+              <a:spcBef>
+                <a:spcPts val="300"/>
+              </a:spcBef>
+              <a:spcAft>
+                <a:spcPts val="150"/>
+              </a:spcAft>
+              <a:buClr>
+                <a:schemeClr val="accent1">
+                  <a:lumMod val="75000"/>
+                </a:schemeClr>
+              </a:buClr>
+              <a:buSzPct val="100000"/>
+              <a:buFont typeface="Arial" panose="020B0604020202020204" pitchFamily="34" charset="0"/>
+              <a:buChar char="•"/>
+              <a:defRPr kumimoji="1" sz="1200" kern="1200">
+                <a:solidFill>
+                  <a:schemeClr val="tx1"/>
+                </a:solidFill>
+                <a:latin typeface="+mn-lt"/>
+                <a:ea typeface="+mn-ea"/>
+                <a:cs typeface="+mn-cs"/>
+              </a:defRPr>
+            </a:lvl7pPr>
+            <a:lvl8pPr marL="1650000" indent="-171450" algn="l" defTabSz="685800" rtl="0" eaLnBrk="1" latinLnBrk="0" hangingPunct="1">
+              <a:lnSpc>
+                <a:spcPct val="90000"/>
+              </a:lnSpc>
+              <a:spcBef>
+                <a:spcPts val="300"/>
+              </a:spcBef>
+              <a:spcAft>
+                <a:spcPts val="150"/>
+              </a:spcAft>
+              <a:buClr>
+                <a:schemeClr val="accent1">
+                  <a:lumMod val="75000"/>
+                </a:schemeClr>
+              </a:buClr>
+              <a:buSzPct val="100000"/>
+              <a:buFont typeface="Arial" panose="020B0604020202020204" pitchFamily="34" charset="0"/>
+              <a:buChar char="•"/>
+              <a:defRPr kumimoji="1" sz="1200" kern="1200">
+                <a:solidFill>
+                  <a:schemeClr val="tx1"/>
+                </a:solidFill>
+                <a:latin typeface="+mn-lt"/>
+                <a:ea typeface="+mn-ea"/>
+                <a:cs typeface="+mn-cs"/>
+              </a:defRPr>
+            </a:lvl8pPr>
+            <a:lvl9pPr marL="1875000" indent="-171450" algn="l" defTabSz="685800" rtl="0" eaLnBrk="1" latinLnBrk="0" hangingPunct="1">
+              <a:lnSpc>
+                <a:spcPct val="90000"/>
+              </a:lnSpc>
+              <a:spcBef>
+                <a:spcPts val="300"/>
+              </a:spcBef>
+              <a:spcAft>
+                <a:spcPts val="150"/>
+              </a:spcAft>
+              <a:buClr>
+                <a:schemeClr val="accent1">
+                  <a:lumMod val="75000"/>
+                </a:schemeClr>
+              </a:buClr>
+              <a:buSzPct val="100000"/>
+              <a:buFont typeface="Arial" panose="020B0604020202020204" pitchFamily="34" charset="0"/>
+              <a:buChar char="•"/>
+              <a:defRPr kumimoji="1" sz="1200" kern="1200">
+                <a:solidFill>
+                  <a:schemeClr val="tx1"/>
+                </a:solidFill>
+                <a:latin typeface="+mn-lt"/>
+                <a:ea typeface="+mn-ea"/>
+                <a:cs typeface="+mn-cs"/>
+              </a:defRPr>
+            </a:lvl9pPr>
+          </a:lstStyle>
+          <a:p>
+            <a:pPr marL="0" indent="0">
+              <a:buClr>
+                <a:srgbClr val="9E3611"/>
+              </a:buClr>
+              <a:buFont typeface="Arial" panose="020B0604020202020204" pitchFamily="34" charset="0"/>
+              <a:buNone/>
+            </a:pPr>
+            <a:r>
+              <a:rPr lang="en-US" sz="1200" b="0" dirty="0">
+                <a:solidFill>
+                  <a:schemeClr val="accent1"/>
+                </a:solidFill>
+                <a:ea typeface="游ゴシック Medium"/>
+                <a:cs typeface="Times New Roman"/>
+              </a:rPr>
+              <a:t>T</a:t>
+            </a:r>
+            <a:r>
+              <a:rPr lang="en-US" sz="1200" b="0" baseline="-25000" dirty="0">
+                <a:solidFill>
+                  <a:schemeClr val="accent1"/>
+                </a:solidFill>
+                <a:ea typeface="游ゴシック Medium"/>
+                <a:cs typeface="Times New Roman"/>
+              </a:rPr>
+              <a:t>4</a:t>
+            </a:r>
+          </a:p>
+        </p:txBody>
+      </p:sp>
+      <p:sp>
+        <p:nvSpPr>
+          <p:cNvPr id="18" name="Text Placeholder 1">
+            <a:extLst>
+              <a:ext uri="{FF2B5EF4-FFF2-40B4-BE49-F238E27FC236}">
+                <a16:creationId xmlns:a16="http://schemas.microsoft.com/office/drawing/2014/main" id="{D06801EA-96E7-90E1-5594-6CC0CFBE5ECD}"/>
+              </a:ext>
+            </a:extLst>
+          </p:cNvPr>
+          <p:cNvSpPr txBox="1">
+            <a:spLocks/>
+          </p:cNvSpPr>
+          <p:nvPr/>
+        </p:nvSpPr>
+        <p:spPr>
+          <a:xfrm>
+            <a:off x="5553420" y="4038422"/>
+            <a:ext cx="538303" cy="288612"/>
+          </a:xfrm>
+          <a:prstGeom prst="rect">
+            <a:avLst/>
+          </a:prstGeom>
+          <a:noFill/>
+        </p:spPr>
+        <p:txBody>
+          <a:bodyPr vert="horz" lIns="91440" tIns="45720" rIns="91440" bIns="45720" rtlCol="0" anchor="t">
+            <a:noAutofit/>
+          </a:bodyPr>
+          <a:lstStyle>
+            <a:lvl1pPr marL="137160" indent="-137160" algn="l" defTabSz="685800" rtl="0" eaLnBrk="1" latinLnBrk="0" hangingPunct="1">
+              <a:lnSpc>
+                <a:spcPct val="90000"/>
+              </a:lnSpc>
+              <a:spcBef>
+                <a:spcPts val="900"/>
+              </a:spcBef>
+              <a:buClr>
+                <a:schemeClr val="accent1">
+                  <a:lumMod val="75000"/>
+                </a:schemeClr>
+              </a:buClr>
+              <a:buSzPct val="100000"/>
+              <a:buFont typeface="Arial" panose="020B0604020202020204" pitchFamily="34" charset="0"/>
+              <a:buChar char="•"/>
+              <a:defRPr kumimoji="1" sz="1500" b="1" kern="1200">
+                <a:solidFill>
+                  <a:schemeClr val="tx1"/>
+                </a:solidFill>
+                <a:latin typeface="游ゴシック Medium" panose="020B0500000000000000" pitchFamily="50" charset="-128"/>
+                <a:ea typeface="游ゴシック Medium" panose="020B0500000000000000" pitchFamily="50" charset="-128"/>
+                <a:cs typeface="+mn-cs"/>
+              </a:defRPr>
+            </a:lvl1pPr>
+            <a:lvl2pPr marL="342900" indent="-137160" algn="l" defTabSz="685800" rtl="0" eaLnBrk="1" latinLnBrk="0" hangingPunct="1">
+              <a:lnSpc>
+                <a:spcPct val="90000"/>
+              </a:lnSpc>
+              <a:spcBef>
+                <a:spcPts val="300"/>
+              </a:spcBef>
+              <a:spcAft>
+                <a:spcPts val="150"/>
+              </a:spcAft>
+              <a:buClr>
+                <a:schemeClr val="accent1">
+                  <a:lumMod val="75000"/>
+                </a:schemeClr>
+              </a:buClr>
+              <a:buSzPct val="100000"/>
+              <a:buFont typeface="Arial" panose="020B0604020202020204" pitchFamily="34" charset="0"/>
+              <a:buChar char="•"/>
+              <a:defRPr kumimoji="1" sz="1350" b="1" kern="1200">
+                <a:solidFill>
+                  <a:schemeClr val="tx1"/>
+                </a:solidFill>
+                <a:latin typeface="游ゴシック Medium" panose="020B0500000000000000" pitchFamily="50" charset="-128"/>
+                <a:ea typeface="游ゴシック Medium" panose="020B0500000000000000" pitchFamily="50" charset="-128"/>
+                <a:cs typeface="+mn-cs"/>
+              </a:defRPr>
+            </a:lvl2pPr>
+            <a:lvl3pPr marL="548640" indent="-137160" algn="l" defTabSz="685800" rtl="0" eaLnBrk="1" latinLnBrk="0" hangingPunct="1">
+              <a:lnSpc>
+                <a:spcPct val="90000"/>
+              </a:lnSpc>
+              <a:spcBef>
+                <a:spcPts val="300"/>
+              </a:spcBef>
+              <a:spcAft>
+                <a:spcPts val="150"/>
+              </a:spcAft>
+              <a:buClr>
+                <a:schemeClr val="accent1">
+                  <a:lumMod val="75000"/>
+                </a:schemeClr>
+              </a:buClr>
+              <a:buSzPct val="100000"/>
+              <a:buFont typeface="Arial" panose="020B0604020202020204" pitchFamily="34" charset="0"/>
+              <a:buChar char="•"/>
+              <a:defRPr kumimoji="1" sz="1200" b="1" kern="1200">
+                <a:solidFill>
+                  <a:schemeClr val="tx1"/>
+                </a:solidFill>
+                <a:latin typeface="游ゴシック Medium" panose="020B0500000000000000" pitchFamily="50" charset="-128"/>
+                <a:ea typeface="游ゴシック Medium" panose="020B0500000000000000" pitchFamily="50" charset="-128"/>
+                <a:cs typeface="+mn-cs"/>
+              </a:defRPr>
+            </a:lvl3pPr>
+            <a:lvl4pPr marL="754380" indent="-137160" algn="l" defTabSz="685800" rtl="0" eaLnBrk="1" latinLnBrk="0" hangingPunct="1">
+              <a:lnSpc>
+                <a:spcPct val="90000"/>
+              </a:lnSpc>
+              <a:spcBef>
+                <a:spcPts val="300"/>
+              </a:spcBef>
+              <a:spcAft>
+                <a:spcPts val="150"/>
+              </a:spcAft>
+              <a:buClr>
+                <a:schemeClr val="accent1">
+                  <a:lumMod val="75000"/>
+                </a:schemeClr>
+              </a:buClr>
+              <a:buSzPct val="100000"/>
+              <a:buFont typeface="Arial" panose="020B0604020202020204" pitchFamily="34" charset="0"/>
+              <a:buChar char="•"/>
+              <a:defRPr kumimoji="1" sz="1200" b="1" kern="1200">
+                <a:solidFill>
+                  <a:schemeClr val="tx1"/>
+                </a:solidFill>
+                <a:latin typeface="游ゴシック Medium" panose="020B0500000000000000" pitchFamily="50" charset="-128"/>
+                <a:ea typeface="游ゴシック Medium" panose="020B0500000000000000" pitchFamily="50" charset="-128"/>
+                <a:cs typeface="+mn-cs"/>
+              </a:defRPr>
+            </a:lvl4pPr>
+            <a:lvl5pPr marL="960120" indent="-137160" algn="l" defTabSz="685800" rtl="0" eaLnBrk="1" latinLnBrk="0" hangingPunct="1">
+              <a:lnSpc>
+                <a:spcPct val="90000"/>
+              </a:lnSpc>
+              <a:spcBef>
+                <a:spcPts val="300"/>
+              </a:spcBef>
+              <a:spcAft>
+                <a:spcPts val="150"/>
+              </a:spcAft>
+              <a:buClr>
+                <a:schemeClr val="accent1">
+                  <a:lumMod val="75000"/>
+                </a:schemeClr>
+              </a:buClr>
+              <a:buSzPct val="100000"/>
+              <a:buFont typeface="Arial" panose="020B0604020202020204" pitchFamily="34" charset="0"/>
+              <a:buChar char="•"/>
+              <a:defRPr kumimoji="1" sz="1200" b="1" kern="1200">
+                <a:solidFill>
+                  <a:schemeClr val="tx1"/>
+                </a:solidFill>
+                <a:latin typeface="游ゴシック Medium" panose="020B0500000000000000" pitchFamily="50" charset="-128"/>
+                <a:ea typeface="游ゴシック Medium" panose="020B0500000000000000" pitchFamily="50" charset="-128"/>
+                <a:cs typeface="+mn-cs"/>
+              </a:defRPr>
+            </a:lvl5pPr>
+            <a:lvl6pPr marL="1200000" indent="-171450" algn="l" defTabSz="685800" rtl="0" eaLnBrk="1" latinLnBrk="0" hangingPunct="1">
+              <a:lnSpc>
+                <a:spcPct val="90000"/>
+              </a:lnSpc>
+              <a:spcBef>
+                <a:spcPts val="300"/>
+              </a:spcBef>
+              <a:spcAft>
+                <a:spcPts val="150"/>
+              </a:spcAft>
+              <a:buClr>
+                <a:schemeClr val="accent1">
+                  <a:lumMod val="75000"/>
+                </a:schemeClr>
+              </a:buClr>
+              <a:buSzPct val="100000"/>
+              <a:buFont typeface="Arial" panose="020B0604020202020204" pitchFamily="34" charset="0"/>
+              <a:buChar char="•"/>
+              <a:defRPr kumimoji="1" sz="1200" kern="1200">
+                <a:solidFill>
+                  <a:schemeClr val="tx1"/>
+                </a:solidFill>
+                <a:latin typeface="+mn-lt"/>
+                <a:ea typeface="+mn-ea"/>
+                <a:cs typeface="+mn-cs"/>
+              </a:defRPr>
+            </a:lvl6pPr>
+            <a:lvl7pPr marL="1425000" indent="-171450" algn="l" defTabSz="685800" rtl="0" eaLnBrk="1" latinLnBrk="0" hangingPunct="1">
+              <a:lnSpc>
+                <a:spcPct val="90000"/>
+              </a:lnSpc>
+              <a:spcBef>
+                <a:spcPts val="300"/>
+              </a:spcBef>
+              <a:spcAft>
+                <a:spcPts val="150"/>
+              </a:spcAft>
+              <a:buClr>
+                <a:schemeClr val="accent1">
+                  <a:lumMod val="75000"/>
+                </a:schemeClr>
+              </a:buClr>
+              <a:buSzPct val="100000"/>
+              <a:buFont typeface="Arial" panose="020B0604020202020204" pitchFamily="34" charset="0"/>
+              <a:buChar char="•"/>
+              <a:defRPr kumimoji="1" sz="1200" kern="1200">
+                <a:solidFill>
+                  <a:schemeClr val="tx1"/>
+                </a:solidFill>
+                <a:latin typeface="+mn-lt"/>
+                <a:ea typeface="+mn-ea"/>
+                <a:cs typeface="+mn-cs"/>
+              </a:defRPr>
+            </a:lvl7pPr>
+            <a:lvl8pPr marL="1650000" indent="-171450" algn="l" defTabSz="685800" rtl="0" eaLnBrk="1" latinLnBrk="0" hangingPunct="1">
+              <a:lnSpc>
+                <a:spcPct val="90000"/>
+              </a:lnSpc>
+              <a:spcBef>
+                <a:spcPts val="300"/>
+              </a:spcBef>
+              <a:spcAft>
+                <a:spcPts val="150"/>
+              </a:spcAft>
+              <a:buClr>
+                <a:schemeClr val="accent1">
+                  <a:lumMod val="75000"/>
+                </a:schemeClr>
+              </a:buClr>
+              <a:buSzPct val="100000"/>
+              <a:buFont typeface="Arial" panose="020B0604020202020204" pitchFamily="34" charset="0"/>
+              <a:buChar char="•"/>
+              <a:defRPr kumimoji="1" sz="1200" kern="1200">
+                <a:solidFill>
+                  <a:schemeClr val="tx1"/>
+                </a:solidFill>
+                <a:latin typeface="+mn-lt"/>
+                <a:ea typeface="+mn-ea"/>
+                <a:cs typeface="+mn-cs"/>
+              </a:defRPr>
+            </a:lvl8pPr>
+            <a:lvl9pPr marL="1875000" indent="-171450" algn="l" defTabSz="685800" rtl="0" eaLnBrk="1" latinLnBrk="0" hangingPunct="1">
+              <a:lnSpc>
+                <a:spcPct val="90000"/>
+              </a:lnSpc>
+              <a:spcBef>
+                <a:spcPts val="300"/>
+              </a:spcBef>
+              <a:spcAft>
+                <a:spcPts val="150"/>
+              </a:spcAft>
+              <a:buClr>
+                <a:schemeClr val="accent1">
+                  <a:lumMod val="75000"/>
+                </a:schemeClr>
+              </a:buClr>
+              <a:buSzPct val="100000"/>
+              <a:buFont typeface="Arial" panose="020B0604020202020204" pitchFamily="34" charset="0"/>
+              <a:buChar char="•"/>
+              <a:defRPr kumimoji="1" sz="1200" kern="1200">
+                <a:solidFill>
+                  <a:schemeClr val="tx1"/>
+                </a:solidFill>
+                <a:latin typeface="+mn-lt"/>
+                <a:ea typeface="+mn-ea"/>
+                <a:cs typeface="+mn-cs"/>
+              </a:defRPr>
+            </a:lvl9pPr>
+          </a:lstStyle>
+          <a:p>
+            <a:pPr marL="0" indent="0">
+              <a:buClr>
+                <a:srgbClr val="9E3611"/>
+              </a:buClr>
+              <a:buFont typeface="Arial" panose="020B0604020202020204" pitchFamily="34" charset="0"/>
+              <a:buNone/>
+            </a:pPr>
+            <a:r>
+              <a:rPr lang="en-US" sz="1200" b="0" dirty="0">
+                <a:solidFill>
+                  <a:schemeClr val="accent1"/>
+                </a:solidFill>
+                <a:ea typeface="游ゴシック Medium"/>
+                <a:cs typeface="Times New Roman"/>
+              </a:rPr>
+              <a:t>T</a:t>
+            </a:r>
+            <a:r>
+              <a:rPr lang="en-US" sz="1200" b="0" baseline="-25000" dirty="0">
+                <a:solidFill>
+                  <a:schemeClr val="accent1"/>
+                </a:solidFill>
+                <a:ea typeface="游ゴシック Medium"/>
+                <a:cs typeface="Times New Roman"/>
+              </a:rPr>
+              <a:t>4</a:t>
+            </a:r>
           </a:p>
         </p:txBody>
       </p:sp>
@@ -12893,7 +13762,6 @@
             </a:pPr>
             <a:r>
               <a:rPr lang="en-US" sz="2400" b="0" dirty="0">
-                <a:latin typeface="Times New Roman"/>
                 <a:ea typeface="游ゴシック Medium"/>
                 <a:cs typeface="Times New Roman"/>
               </a:rPr>
@@ -13233,7 +14101,6 @@
             </a:pPr>
             <a:r>
               <a:rPr lang="en-US" sz="2000" b="0" dirty="0">
-                <a:latin typeface="Medium"/>
                 <a:ea typeface="游ゴシック Medium"/>
                 <a:cs typeface="Times New Roman"/>
               </a:rPr>
@@ -13249,7 +14116,6 @@
               <a:buNone/>
             </a:pPr>
             <a:endParaRPr lang="en-US" sz="2000" b="0" dirty="0">
-              <a:latin typeface="Times New Roman"/>
               <a:ea typeface="游ゴシック Medium"/>
               <a:cs typeface="Times New Roman"/>
             </a:endParaRPr>
@@ -13583,7 +14449,6 @@
             </a:pPr>
             <a:r>
               <a:rPr lang="en-US" sz="1200" b="0" dirty="0">
-                <a:latin typeface="Times New Roman"/>
                 <a:ea typeface="游ゴシック Medium"/>
                 <a:cs typeface="Times New Roman"/>
               </a:rPr>
@@ -13591,7 +14456,6 @@
             </a:r>
             <a:r>
               <a:rPr lang="en-US" sz="1200" b="0" baseline="-25000" dirty="0">
-                <a:latin typeface="Times New Roman"/>
                 <a:ea typeface="游ゴシック Medium"/>
                 <a:cs typeface="Times New Roman"/>
               </a:rPr>
@@ -13880,7 +14744,6 @@
             </a:pPr>
             <a:r>
               <a:rPr lang="en-US" sz="1200" b="0" dirty="0">
-                <a:latin typeface="Times New Roman"/>
                 <a:ea typeface="游ゴシック Medium"/>
                 <a:cs typeface="Times New Roman"/>
               </a:rPr>
@@ -13888,7 +14751,6 @@
             </a:r>
             <a:r>
               <a:rPr lang="en-US" sz="1200" b="0" baseline="-25000" dirty="0">
-                <a:latin typeface="Times New Roman"/>
                 <a:ea typeface="游ゴシック Medium"/>
                 <a:cs typeface="Times New Roman"/>
               </a:rPr>
@@ -14177,7 +15039,6 @@
             </a:pPr>
             <a:r>
               <a:rPr lang="en-US" sz="1200" b="0" dirty="0">
-                <a:latin typeface="Times New Roman"/>
                 <a:ea typeface="游ゴシック Medium"/>
                 <a:cs typeface="Times New Roman"/>
               </a:rPr>
@@ -14185,7 +15046,6 @@
             </a:r>
             <a:r>
               <a:rPr lang="en-US" sz="1200" b="0" baseline="-25000" dirty="0">
-                <a:latin typeface="Times New Roman"/>
                 <a:ea typeface="游ゴシック Medium"/>
                 <a:cs typeface="Times New Roman"/>
               </a:rPr>
@@ -14474,7 +15334,6 @@
             </a:pPr>
             <a:r>
               <a:rPr lang="en-US" sz="1200" b="0" dirty="0">
-                <a:latin typeface="Times New Roman"/>
                 <a:ea typeface="游ゴシック Medium"/>
                 <a:cs typeface="Times New Roman"/>
               </a:rPr>
@@ -14482,7 +15341,6 @@
             </a:r>
             <a:r>
               <a:rPr lang="en-US" sz="1200" b="0" baseline="-25000" dirty="0">
-                <a:latin typeface="Times New Roman"/>
                 <a:ea typeface="游ゴシック Medium"/>
                 <a:cs typeface="Times New Roman"/>
               </a:rPr>
@@ -14771,10 +15629,6 @@
             </a:pPr>
             <a:r>
               <a:rPr lang="en-US" sz="1200" b="0" dirty="0">
-                <a:solidFill>
-                  <a:schemeClr val="accent1"/>
-                </a:solidFill>
-                <a:latin typeface="Times New Roman"/>
                 <a:ea typeface="游ゴシック Medium"/>
                 <a:cs typeface="Times New Roman"/>
               </a:rPr>
@@ -14782,10 +15636,6 @@
             </a:r>
             <a:r>
               <a:rPr lang="en-US" sz="1200" b="0" baseline="-25000" dirty="0">
-                <a:solidFill>
-                  <a:schemeClr val="accent1"/>
-                </a:solidFill>
-                <a:latin typeface="Times New Roman"/>
                 <a:ea typeface="游ゴシック Medium"/>
                 <a:cs typeface="Times New Roman"/>
               </a:rPr>
@@ -15074,10 +15924,6 @@
             </a:pPr>
             <a:r>
               <a:rPr lang="en-US" sz="1200" b="0" dirty="0">
-                <a:solidFill>
-                  <a:schemeClr val="accent1"/>
-                </a:solidFill>
-                <a:latin typeface="Times New Roman"/>
                 <a:ea typeface="游ゴシック Medium"/>
                 <a:cs typeface="Times New Roman"/>
               </a:rPr>
@@ -15085,10 +15931,6 @@
             </a:r>
             <a:r>
               <a:rPr lang="en-US" sz="1200" b="0" baseline="-25000" dirty="0">
-                <a:solidFill>
-                  <a:schemeClr val="accent1"/>
-                </a:solidFill>
-                <a:latin typeface="Times New Roman"/>
                 <a:ea typeface="游ゴシック Medium"/>
                 <a:cs typeface="Times New Roman"/>
               </a:rPr>
@@ -15377,10 +16219,6 @@
             </a:pPr>
             <a:r>
               <a:rPr lang="en-US" sz="1200" b="0" dirty="0">
-                <a:solidFill>
-                  <a:schemeClr val="accent1"/>
-                </a:solidFill>
-                <a:latin typeface="Times New Roman"/>
                 <a:ea typeface="游ゴシック Medium"/>
                 <a:cs typeface="Times New Roman"/>
               </a:rPr>
@@ -15388,10 +16226,6 @@
             </a:r>
             <a:r>
               <a:rPr lang="en-US" sz="1200" b="0" baseline="-25000" dirty="0">
-                <a:solidFill>
-                  <a:schemeClr val="accent1"/>
-                </a:solidFill>
-                <a:latin typeface="Times New Roman"/>
                 <a:ea typeface="游ゴシック Medium"/>
                 <a:cs typeface="Times New Roman"/>
               </a:rPr>
@@ -15679,7 +16513,6 @@
             </a:pPr>
             <a:r>
               <a:rPr lang="en-US" sz="2000" b="0" dirty="0">
-                <a:latin typeface="Medium"/>
                 <a:ea typeface="游ゴシック Medium"/>
                 <a:cs typeface="Times New Roman"/>
               </a:rPr>
@@ -15695,7 +16528,6 @@
               <a:buNone/>
             </a:pPr>
             <a:endParaRPr lang="en-US" sz="2000" b="0" dirty="0">
-              <a:latin typeface="Times New Roman"/>
               <a:ea typeface="游ゴシック Medium"/>
               <a:cs typeface="Times New Roman"/>
             </a:endParaRPr>
@@ -15982,7 +16814,6 @@
             </a:pPr>
             <a:r>
               <a:rPr lang="en-US" sz="1200" b="0" dirty="0">
-                <a:latin typeface="Times New Roman"/>
                 <a:ea typeface="游ゴシック Medium"/>
                 <a:cs typeface="Times New Roman"/>
               </a:rPr>
@@ -15990,7 +16821,6 @@
             </a:r>
             <a:r>
               <a:rPr lang="en-US" sz="1200" b="0" baseline="-25000" dirty="0">
-                <a:latin typeface="Times New Roman"/>
                 <a:ea typeface="游ゴシック Medium"/>
                 <a:cs typeface="Times New Roman"/>
               </a:rPr>
@@ -16279,7 +17109,6 @@
             </a:pPr>
             <a:r>
               <a:rPr lang="en-US" sz="1200" b="0" dirty="0">
-                <a:latin typeface="Times New Roman"/>
                 <a:ea typeface="游ゴシック Medium"/>
                 <a:cs typeface="Times New Roman"/>
               </a:rPr>
@@ -16287,7 +17116,6 @@
             </a:r>
             <a:r>
               <a:rPr lang="en-US" sz="1200" b="0" baseline="-25000" dirty="0">
-                <a:latin typeface="Times New Roman"/>
                 <a:ea typeface="游ゴシック Medium"/>
                 <a:cs typeface="Times New Roman"/>
               </a:rPr>
@@ -16576,7 +17404,6 @@
             </a:pPr>
             <a:r>
               <a:rPr lang="en-US" sz="1200" b="0" dirty="0">
-                <a:latin typeface="Times New Roman"/>
                 <a:ea typeface="游ゴシック Medium"/>
                 <a:cs typeface="Times New Roman"/>
               </a:rPr>
@@ -16584,7 +17411,6 @@
             </a:r>
             <a:r>
               <a:rPr lang="en-US" sz="1200" b="0" baseline="-25000" dirty="0">
-                <a:latin typeface="Times New Roman"/>
                 <a:ea typeface="游ゴシック Medium"/>
                 <a:cs typeface="Times New Roman"/>
               </a:rPr>
@@ -16873,7 +17699,6 @@
             </a:pPr>
             <a:r>
               <a:rPr lang="en-US" sz="1200" b="0" dirty="0">
-                <a:latin typeface="Times New Roman"/>
                 <a:ea typeface="游ゴシック Medium"/>
                 <a:cs typeface="Times New Roman"/>
               </a:rPr>
@@ -16881,7 +17706,6 @@
             </a:r>
             <a:r>
               <a:rPr lang="en-US" sz="1200" b="0" baseline="-25000" dirty="0">
-                <a:latin typeface="Times New Roman"/>
                 <a:ea typeface="游ゴシック Medium"/>
                 <a:cs typeface="Times New Roman"/>
               </a:rPr>
@@ -17170,10 +17994,6 @@
             </a:pPr>
             <a:r>
               <a:rPr lang="en-US" sz="1200" b="0" dirty="0">
-                <a:solidFill>
-                  <a:schemeClr val="accent1"/>
-                </a:solidFill>
-                <a:latin typeface="Times New Roman"/>
                 <a:ea typeface="游ゴシック Medium"/>
                 <a:cs typeface="Times New Roman"/>
               </a:rPr>
@@ -17181,10 +18001,6 @@
             </a:r>
             <a:r>
               <a:rPr lang="en-US" sz="1200" b="0" baseline="-25000" dirty="0">
-                <a:solidFill>
-                  <a:schemeClr val="accent1"/>
-                </a:solidFill>
-                <a:latin typeface="Times New Roman"/>
                 <a:ea typeface="游ゴシック Medium"/>
                 <a:cs typeface="Times New Roman"/>
               </a:rPr>
@@ -17473,10 +18289,6 @@
             </a:pPr>
             <a:r>
               <a:rPr lang="en-US" sz="1200" b="0" dirty="0">
-                <a:solidFill>
-                  <a:schemeClr val="accent1"/>
-                </a:solidFill>
-                <a:latin typeface="Times New Roman"/>
                 <a:ea typeface="游ゴシック Medium"/>
                 <a:cs typeface="Times New Roman"/>
               </a:rPr>
@@ -17484,10 +18296,6 @@
             </a:r>
             <a:r>
               <a:rPr lang="en-US" sz="1200" b="0" baseline="-25000" dirty="0">
-                <a:solidFill>
-                  <a:schemeClr val="accent1"/>
-                </a:solidFill>
-                <a:latin typeface="Times New Roman"/>
                 <a:ea typeface="游ゴシック Medium"/>
                 <a:cs typeface="Times New Roman"/>
               </a:rPr>
@@ -17776,10 +18584,6 @@
             </a:pPr>
             <a:r>
               <a:rPr lang="en-US" sz="1200" b="0" dirty="0">
-                <a:solidFill>
-                  <a:schemeClr val="accent1"/>
-                </a:solidFill>
-                <a:latin typeface="Times New Roman"/>
                 <a:ea typeface="游ゴシック Medium"/>
                 <a:cs typeface="Times New Roman"/>
               </a:rPr>
@@ -17787,10 +18591,6 @@
             </a:r>
             <a:r>
               <a:rPr lang="en-US" sz="1200" b="0" baseline="-25000" dirty="0">
-                <a:solidFill>
-                  <a:schemeClr val="accent1"/>
-                </a:solidFill>
-                <a:latin typeface="Times New Roman"/>
                 <a:ea typeface="游ゴシック Medium"/>
                 <a:cs typeface="Times New Roman"/>
               </a:rPr>
@@ -18078,22 +18878,20 @@
               <a:buNone/>
             </a:pPr>
             <a:r>
-              <a:rPr lang="en-US" sz="2000" dirty="0">
+              <a:rPr lang="en-US" sz="1200" b="0" dirty="0">
                 <a:solidFill>
                   <a:schemeClr val="accent1"/>
                 </a:solidFill>
-                <a:latin typeface="Times New Roman"/>
                 <a:ea typeface="游ゴシック Medium"/>
                 <a:cs typeface="Times New Roman"/>
               </a:rPr>
               <a:t>T</a:t>
             </a:r>
             <a:r>
-              <a:rPr lang="en-US" sz="2000" baseline="-25000" dirty="0">
+              <a:rPr lang="en-US" sz="1200" b="0" baseline="-25000" dirty="0">
                 <a:solidFill>
                   <a:schemeClr val="accent1"/>
                 </a:solidFill>
-                <a:latin typeface="Times New Roman"/>
                 <a:ea typeface="游ゴシック Medium"/>
                 <a:cs typeface="Times New Roman"/>
               </a:rPr>
@@ -18381,22 +19179,20 @@
               <a:buNone/>
             </a:pPr>
             <a:r>
-              <a:rPr lang="en-US" sz="2000" dirty="0">
+              <a:rPr lang="en-US" sz="1200" b="0" dirty="0">
                 <a:solidFill>
                   <a:schemeClr val="accent1"/>
                 </a:solidFill>
-                <a:latin typeface="Times New Roman"/>
                 <a:ea typeface="游ゴシック Medium"/>
                 <a:cs typeface="Times New Roman"/>
               </a:rPr>
               <a:t>T</a:t>
             </a:r>
             <a:r>
-              <a:rPr lang="en-US" sz="2000" baseline="-25000" dirty="0">
+              <a:rPr lang="en-US" sz="1200" b="0" baseline="-25000" dirty="0">
                 <a:solidFill>
                   <a:schemeClr val="accent1"/>
                 </a:solidFill>
-                <a:latin typeface="Times New Roman"/>
                 <a:ea typeface="游ゴシック Medium"/>
                 <a:cs typeface="Times New Roman"/>
               </a:rPr>
@@ -18421,8 +19217,8 @@
         </p:nvSpPr>
         <p:spPr>
           <a:xfrm>
-            <a:off x="2998320" y="2446938"/>
-            <a:ext cx="2629489" cy="863139"/>
+            <a:off x="2826680" y="2446938"/>
+            <a:ext cx="2990513" cy="1094240"/>
           </a:xfrm>
           <a:prstGeom prst="rect">
             <a:avLst/>
@@ -18684,7 +19480,6 @@
             </a:pPr>
             <a:r>
               <a:rPr lang="en-US" sz="2000" b="0" dirty="0">
-                <a:latin typeface="Medium"/>
                 <a:ea typeface="游ゴシック Medium"/>
                 <a:cs typeface="Times New Roman"/>
               </a:rPr>
@@ -18700,7 +19495,6 @@
             </a:pPr>
             <a:r>
               <a:rPr lang="en-US" sz="2000" b="0" dirty="0">
-                <a:latin typeface="Medium"/>
                 <a:ea typeface="游ゴシック Medium"/>
                 <a:cs typeface="Times New Roman"/>
               </a:rPr>
@@ -18716,7 +19510,6 @@
               <a:buNone/>
             </a:pPr>
             <a:endParaRPr lang="en-US" sz="2000" b="0" dirty="0">
-              <a:latin typeface="Times New Roman"/>
               <a:ea typeface="游ゴシック Medium"/>
               <a:cs typeface="Times New Roman"/>
             </a:endParaRPr>
@@ -18865,7 +19658,6 @@
             </a:pPr>
             <a:r>
               <a:rPr lang="en-US" sz="2400" b="0" dirty="0">
-                <a:latin typeface="Times New Roman"/>
                 <a:ea typeface="游ゴシック Medium"/>
                 <a:cs typeface="Times New Roman"/>
               </a:rPr>
@@ -19205,7 +19997,6 @@
             </a:pPr>
             <a:r>
               <a:rPr lang="en-US" sz="2000" dirty="0">
-                <a:latin typeface="Medium"/>
                 <a:ea typeface="游ゴシック Medium"/>
                 <a:cs typeface="Times New Roman"/>
               </a:rPr>
@@ -19221,7 +20012,6 @@
             </a:pPr>
             <a:r>
               <a:rPr lang="en-US" sz="2000" b="0" dirty="0">
-                <a:latin typeface="Medium"/>
                 <a:ea typeface="游ゴシック Medium"/>
                 <a:cs typeface="Times New Roman"/>
               </a:rPr>
@@ -19236,7 +20026,6 @@
               <a:buNone/>
             </a:pPr>
             <a:endParaRPr lang="en-US" sz="2000" b="0" dirty="0">
-              <a:latin typeface="Medium"/>
               <a:ea typeface="游ゴシック Medium"/>
               <a:cs typeface="Times New Roman"/>
             </a:endParaRPr>
@@ -19250,7 +20039,6 @@
               <a:buNone/>
             </a:pPr>
             <a:endParaRPr lang="en-US" sz="2000" b="0" dirty="0">
-              <a:latin typeface="Times New Roman"/>
               <a:ea typeface="游ゴシック Medium"/>
               <a:cs typeface="Times New Roman"/>
             </a:endParaRPr>
@@ -19687,7 +20475,6 @@
             </a:pPr>
             <a:r>
               <a:rPr lang="en-US" sz="1200" b="0" dirty="0">
-                <a:latin typeface="Times New Roman"/>
                 <a:ea typeface="游ゴシック Medium"/>
                 <a:cs typeface="Times New Roman"/>
               </a:rPr>
@@ -19695,7 +20482,6 @@
             </a:r>
             <a:r>
               <a:rPr lang="en-US" sz="1200" b="0" baseline="-25000" dirty="0">
-                <a:latin typeface="Times New Roman"/>
                 <a:ea typeface="游ゴシック Medium"/>
                 <a:cs typeface="Times New Roman"/>
               </a:rPr>
@@ -19984,7 +20770,6 @@
             </a:pPr>
             <a:r>
               <a:rPr lang="en-US" sz="1200" b="0" dirty="0">
-                <a:latin typeface="Times New Roman"/>
                 <a:ea typeface="游ゴシック Medium"/>
                 <a:cs typeface="Times New Roman"/>
               </a:rPr>
@@ -19992,7 +20777,6 @@
             </a:r>
             <a:r>
               <a:rPr lang="en-US" sz="1200" b="0" baseline="-25000" dirty="0">
-                <a:latin typeface="Times New Roman"/>
                 <a:ea typeface="游ゴシック Medium"/>
                 <a:cs typeface="Times New Roman"/>
               </a:rPr>
@@ -20281,7 +21065,6 @@
             </a:pPr>
             <a:r>
               <a:rPr lang="en-US" sz="1200" b="0" dirty="0">
-                <a:latin typeface="Times New Roman"/>
                 <a:ea typeface="游ゴシック Medium"/>
                 <a:cs typeface="Times New Roman"/>
               </a:rPr>
@@ -20289,7 +21072,6 @@
             </a:r>
             <a:r>
               <a:rPr lang="en-US" sz="1200" b="0" baseline="-25000" dirty="0">
-                <a:latin typeface="Times New Roman"/>
                 <a:ea typeface="游ゴシック Medium"/>
                 <a:cs typeface="Times New Roman"/>
               </a:rPr>
@@ -20578,7 +21360,6 @@
             </a:pPr>
             <a:r>
               <a:rPr lang="en-US" sz="1200" b="0" dirty="0">
-                <a:latin typeface="Times New Roman"/>
                 <a:ea typeface="游ゴシック Medium"/>
                 <a:cs typeface="Times New Roman"/>
               </a:rPr>
@@ -20586,7 +21367,6 @@
             </a:r>
             <a:r>
               <a:rPr lang="en-US" sz="1200" b="0" baseline="-25000" dirty="0">
-                <a:latin typeface="Times New Roman"/>
                 <a:ea typeface="游ゴシック Medium"/>
                 <a:cs typeface="Times New Roman"/>
               </a:rPr>
@@ -20878,7 +21658,6 @@
                 <a:solidFill>
                   <a:schemeClr val="accent1"/>
                 </a:solidFill>
-                <a:latin typeface="Times New Roman"/>
                 <a:ea typeface="游ゴシック Medium"/>
                 <a:cs typeface="Times New Roman"/>
               </a:rPr>
@@ -20888,7 +21667,6 @@
               <a:solidFill>
                 <a:schemeClr val="accent1"/>
               </a:solidFill>
-              <a:latin typeface="Times New Roman"/>
               <a:ea typeface="游ゴシック Medium"/>
               <a:cs typeface="Times New Roman"/>
             </a:endParaRPr>
@@ -21178,7 +21956,6 @@
                 <a:solidFill>
                   <a:schemeClr val="accent1"/>
                 </a:solidFill>
-                <a:latin typeface="Times New Roman"/>
                 <a:ea typeface="游ゴシック Medium"/>
                 <a:cs typeface="Times New Roman"/>
               </a:rPr>
@@ -21188,7 +21965,6 @@
               <a:solidFill>
                 <a:schemeClr val="accent1"/>
               </a:solidFill>
-              <a:latin typeface="Times New Roman"/>
               <a:ea typeface="游ゴシック Medium"/>
               <a:cs typeface="Times New Roman"/>
             </a:endParaRPr>
@@ -21478,7 +22254,6 @@
                 <a:solidFill>
                   <a:schemeClr val="accent1"/>
                 </a:solidFill>
-                <a:latin typeface="Times New Roman"/>
                 <a:ea typeface="游ゴシック Medium"/>
                 <a:cs typeface="Times New Roman"/>
               </a:rPr>
@@ -21488,7 +22263,6 @@
               <a:solidFill>
                 <a:schemeClr val="accent1"/>
               </a:solidFill>
-              <a:latin typeface="Times New Roman"/>
               <a:ea typeface="游ゴシック Medium"/>
               <a:cs typeface="Times New Roman"/>
             </a:endParaRPr>
@@ -21778,7 +22552,6 @@
                 <a:solidFill>
                   <a:schemeClr val="accent1"/>
                 </a:solidFill>
-                <a:latin typeface="Medium"/>
                 <a:ea typeface="游ゴシック Medium"/>
                 <a:cs typeface="Times New Roman"/>
               </a:rPr>
@@ -21788,7 +22561,6 @@
               <a:solidFill>
                 <a:schemeClr val="accent1"/>
               </a:solidFill>
-              <a:latin typeface="Medium"/>
               <a:ea typeface="游ゴシック Medium"/>
               <a:cs typeface="Times New Roman"/>
             </a:endParaRPr>
@@ -21861,7 +22633,7 @@
             <p:spPr>
               <a:xfrm>
                 <a:off x="4062865" y="3065607"/>
-                <a:ext cx="4074513" cy="415691"/>
+                <a:ext cx="4137030" cy="404663"/>
               </a:xfrm>
               <a:prstGeom prst="rect">
                 <a:avLst/>
@@ -21876,7 +22648,7 @@
               <a:p>
                 <a:r>
                   <a:rPr lang="pt-BR" sz="2000" dirty="0">
-                    <a:latin typeface="Medium"/>
+                    <a:latin typeface="游ゴシック Medium" panose="020B0500000000000000" pitchFamily="50" charset="-128"/>
                     <a:ea typeface="游ゴシック Medium"/>
                     <a:cs typeface="Times New Roman"/>
                   </a:rPr>
@@ -21886,7 +22658,7 @@
                   <m:oMath xmlns:m="http://schemas.openxmlformats.org/officeDocument/2006/math">
                     <m:r>
                       <a:rPr lang="pt-BR" sz="2000" i="1">
-                        <a:latin typeface="Medium"/>
+                        <a:latin typeface="Cambria Math" panose="02040503050406030204" pitchFamily="18" charset="0"/>
                         <a:ea typeface="游ゴシック Medium"/>
                         <a:cs typeface="Times New Roman"/>
                       </a:rPr>
@@ -21897,7 +22669,7 @@
                         <m:chr m:val="∑"/>
                         <m:ctrlPr>
                           <a:rPr lang="pt-BR" sz="2000" i="1">
-                            <a:latin typeface="Medium"/>
+                            <a:latin typeface="Cambria Math" panose="02040503050406030204" pitchFamily="18" charset="0"/>
                             <a:ea typeface="游ゴシック Medium"/>
                             <a:cs typeface="Times New Roman"/>
                           </a:rPr>
@@ -21906,7 +22678,7 @@
                       <m:sub>
                         <m:r>
                           <a:rPr lang="pt-BR" sz="2000" i="1">
-                            <a:latin typeface="Medium"/>
+                            <a:latin typeface="Cambria Math" panose="02040503050406030204" pitchFamily="18" charset="0"/>
                             <a:ea typeface="游ゴシック Medium"/>
                             <a:cs typeface="Times New Roman"/>
                           </a:rPr>
@@ -21914,7 +22686,7 @@
                         </m:r>
                         <m:r>
                           <a:rPr lang="pt-BR" sz="2000" i="1">
-                            <a:latin typeface="Medium"/>
+                            <a:latin typeface="Cambria Math" panose="02040503050406030204" pitchFamily="18" charset="0"/>
                             <a:ea typeface="游ゴシック Medium"/>
                             <a:cs typeface="Times New Roman"/>
                           </a:rPr>
@@ -21924,7 +22696,7 @@
                       <m:sup>
                         <m:r>
                           <a:rPr lang="pt-BR" sz="2000" i="1">
-                            <a:latin typeface="Medium"/>
+                            <a:latin typeface="Cambria Math" panose="02040503050406030204" pitchFamily="18" charset="0"/>
                             <a:ea typeface="游ゴシック Medium"/>
                             <a:cs typeface="Times New Roman"/>
                           </a:rPr>
@@ -21937,7 +22709,7 @@
                             <m:sty m:val="p"/>
                           </m:rPr>
                           <a:rPr lang="en-US" sz="2000">
-                            <a:latin typeface="Medium"/>
+                            <a:latin typeface="Cambria Math" panose="02040503050406030204" pitchFamily="18" charset="0"/>
                             <a:ea typeface="游ゴシック Medium"/>
                             <a:cs typeface="Times New Roman"/>
                           </a:rPr>
@@ -21945,7 +22717,7 @@
                         </m:r>
                         <m:r>
                           <a:rPr lang="en-US" sz="2000" i="1">
-                            <a:latin typeface="Medium"/>
+                            <a:latin typeface="Cambria Math" panose="02040503050406030204" pitchFamily="18" charset="0"/>
                             <a:ea typeface="游ゴシック Medium"/>
                             <a:cs typeface="Times New Roman"/>
                           </a:rPr>
@@ -21955,7 +22727,7 @@
                           <m:sSupPr>
                             <m:ctrlPr>
                               <a:rPr lang="en-US" sz="2000" i="1">
-                                <a:latin typeface="Medium"/>
+                                <a:latin typeface="Cambria Math" panose="02040503050406030204" pitchFamily="18" charset="0"/>
                                 <a:ea typeface="游ゴシック Medium"/>
                                 <a:cs typeface="Times New Roman"/>
                               </a:rPr>
@@ -21988,7 +22760,7 @@
                             </m:r>
                             <m:r>
                               <a:rPr lang="en-US" sz="2000" i="1">
-                                <a:latin typeface="Medium"/>
+                                <a:latin typeface="Cambria Math" panose="02040503050406030204" pitchFamily="18" charset="0"/>
                                 <a:ea typeface="游ゴシック Medium"/>
                                 <a:cs typeface="Times New Roman"/>
                               </a:rPr>
@@ -21996,7 +22768,7 @@
                             </m:r>
                             <m:r>
                               <a:rPr lang="en-US" sz="2000" i="1" baseline="-25000">
-                                <a:latin typeface="Medium"/>
+                                <a:latin typeface="Cambria Math" panose="02040503050406030204" pitchFamily="18" charset="0"/>
                                 <a:ea typeface="游ゴシック Medium"/>
                                 <a:cs typeface="Times New Roman"/>
                               </a:rPr>
@@ -22006,7 +22778,7 @@
                           <m:sup>
                             <m:r>
                               <a:rPr lang="en-US" sz="2000" i="1">
-                                <a:latin typeface="Medium"/>
+                                <a:latin typeface="Cambria Math" panose="02040503050406030204" pitchFamily="18" charset="0"/>
                                 <a:ea typeface="游ゴシック Medium"/>
                                 <a:cs typeface="Times New Roman"/>
                               </a:rPr>
@@ -22016,7 +22788,7 @@
                         </m:sSup>
                         <m:r>
                           <a:rPr lang="en-US" sz="2000" i="1">
-                            <a:latin typeface="Medium"/>
+                            <a:latin typeface="Cambria Math" panose="02040503050406030204" pitchFamily="18" charset="0"/>
                             <a:ea typeface="Cambria Math" panose="02040503050406030204" pitchFamily="18" charset="0"/>
                             <a:cs typeface="Times New Roman"/>
                           </a:rPr>
@@ -22026,7 +22798,7 @@
                           <m:sSupPr>
                             <m:ctrlPr>
                               <a:rPr lang="en-US" sz="2000" i="1">
-                                <a:latin typeface="Medium"/>
+                                <a:latin typeface="Cambria Math" panose="02040503050406030204" pitchFamily="18" charset="0"/>
                                 <a:ea typeface="游ゴシック Medium"/>
                                 <a:cs typeface="Times New Roman"/>
                               </a:rPr>
@@ -22035,7 +22807,7 @@
                           <m:e>
                             <m:r>
                               <a:rPr lang="en-US" sz="2000" i="1">
-                                <a:latin typeface="Medium"/>
+                                <a:latin typeface="Cambria Math" panose="02040503050406030204" pitchFamily="18" charset="0"/>
                                 <a:ea typeface="游ゴシック Medium"/>
                                 <a:cs typeface="Times New Roman"/>
                               </a:rPr>
@@ -22043,7 +22815,7 @@
                             </m:r>
                             <m:r>
                               <a:rPr lang="en-US" sz="2000" i="1" baseline="-25000">
-                                <a:latin typeface="Medium"/>
+                                <a:latin typeface="Cambria Math" panose="02040503050406030204" pitchFamily="18" charset="0"/>
                                 <a:ea typeface="游ゴシック Medium"/>
                                 <a:cs typeface="Times New Roman"/>
                               </a:rPr>
@@ -22053,7 +22825,7 @@
                           <m:sup>
                             <m:r>
                               <a:rPr lang="en-US" sz="2000" i="1">
-                                <a:latin typeface="Medium"/>
+                                <a:latin typeface="Cambria Math" panose="02040503050406030204" pitchFamily="18" charset="0"/>
                                 <a:ea typeface="游ゴシック Medium"/>
                                 <a:cs typeface="Times New Roman"/>
                               </a:rPr>
@@ -22063,7 +22835,7 @@
                         </m:sSup>
                         <m:r>
                           <a:rPr lang="en-US" sz="2000" i="1">
-                            <a:latin typeface="Medium"/>
+                            <a:latin typeface="Cambria Math" panose="02040503050406030204" pitchFamily="18" charset="0"/>
                             <a:ea typeface="Cambria Math" panose="02040503050406030204" pitchFamily="18" charset="0"/>
                             <a:cs typeface="Times New Roman"/>
                           </a:rPr>
@@ -22071,7 +22843,7 @@
                         </m:r>
                         <m:r>
                           <a:rPr lang="en-US" sz="2000" i="1">
-                            <a:latin typeface="Medium"/>
+                            <a:latin typeface="Cambria Math" panose="02040503050406030204" pitchFamily="18" charset="0"/>
                             <a:ea typeface="Cambria Math" panose="02040503050406030204" pitchFamily="18" charset="0"/>
                             <a:cs typeface="Times New Roman"/>
                           </a:rPr>
@@ -22079,7 +22851,7 @@
                         </m:r>
                         <m:r>
                           <a:rPr lang="en-US" sz="2000" i="1">
-                            <a:latin typeface="Medium"/>
+                            <a:latin typeface="Cambria Math" panose="02040503050406030204" pitchFamily="18" charset="0"/>
                             <a:ea typeface="Cambria Math" panose="02040503050406030204" pitchFamily="18" charset="0"/>
                             <a:cs typeface="Times New Roman"/>
                           </a:rPr>
@@ -22090,7 +22862,7 @@
                   </m:oMath>
                 </a14:m>
                 <a:endParaRPr lang="en-US" sz="2000" dirty="0">
-                  <a:latin typeface="Medium"/>
+                  <a:latin typeface="游ゴシック Medium" panose="020B0500000000000000" pitchFamily="50" charset="-128"/>
                 </a:endParaRPr>
               </a:p>
             </p:txBody>
@@ -22114,7 +22886,7 @@
             <p:spPr>
               <a:xfrm>
                 <a:off x="4062865" y="3065607"/>
-                <a:ext cx="4074513" cy="415691"/>
+                <a:ext cx="4137030" cy="404663"/>
               </a:xfrm>
               <a:prstGeom prst="rect">
                 <a:avLst/>
@@ -22122,7 +22894,7 @@
               <a:blipFill>
                 <a:blip r:embed="rId3"/>
                 <a:stretch>
-                  <a:fillRect l="-1495" t="-114706" b="-177941"/>
+                  <a:fillRect l="-1473" t="-122727" b="-181818"/>
                 </a:stretch>
               </a:blipFill>
             </p:spPr>
@@ -22156,7 +22928,7 @@
         <p:spPr>
           <a:xfrm>
             <a:off x="2836894" y="3962150"/>
-            <a:ext cx="5345181" cy="646331"/>
+            <a:ext cx="6072496" cy="646331"/>
           </a:xfrm>
           <a:prstGeom prst="rect">
             <a:avLst/>
@@ -22171,7 +22943,7 @@
           <a:p>
             <a:r>
               <a:rPr lang="en-US" dirty="0">
-                <a:latin typeface="Medium"/>
+                <a:latin typeface="游ゴシック Medium" panose="020B0500000000000000" pitchFamily="50" charset="-128"/>
               </a:rPr>
               <a:t>➔</a:t>
             </a:r>
@@ -22180,13 +22952,13 @@
                 <a:solidFill>
                   <a:schemeClr val="accent1"/>
                 </a:solidFill>
-                <a:latin typeface="Medium"/>
+                <a:latin typeface="游ゴシック Medium" panose="020B0500000000000000" pitchFamily="50" charset="-128"/>
               </a:rPr>
               <a:t> </a:t>
             </a:r>
             <a:r>
               <a:rPr lang="en-US" dirty="0">
-                <a:latin typeface="Medium"/>
+                <a:latin typeface="游ゴシック Medium" panose="020B0500000000000000" pitchFamily="50" charset="-128"/>
               </a:rPr>
               <a:t>High weights: Edge has high impact on cost function</a:t>
             </a:r>
@@ -22194,7 +22966,7 @@
           <a:p>
             <a:r>
               <a:rPr lang="en-US" dirty="0">
-                <a:latin typeface="Medium"/>
+                <a:latin typeface="游ゴシック Medium" panose="020B0500000000000000" pitchFamily="50" charset="-128"/>
               </a:rPr>
               <a:t>(vice versa for low weights)</a:t>
             </a:r>
@@ -22294,7 +23066,6 @@
             </a:pPr>
             <a:r>
               <a:rPr lang="en-US" sz="2400" b="0" dirty="0">
-                <a:latin typeface="Times New Roman"/>
                 <a:ea typeface="游ゴシック Medium"/>
                 <a:cs typeface="Times New Roman"/>
               </a:rPr>
@@ -22634,7 +23405,6 @@
             </a:pPr>
             <a:r>
               <a:rPr lang="en-US" sz="2000" dirty="0">
-                <a:latin typeface="Medium"/>
                 <a:ea typeface="游ゴシック Medium"/>
                 <a:cs typeface="Times New Roman"/>
               </a:rPr>
@@ -22650,7 +23420,6 @@
             </a:pPr>
             <a:r>
               <a:rPr lang="en-US" sz="2000" b="0" dirty="0">
-                <a:latin typeface="Medium"/>
                 <a:ea typeface="游ゴシック Medium"/>
                 <a:cs typeface="Times New Roman"/>
               </a:rPr>
@@ -22665,7 +23434,6 @@
               <a:buNone/>
             </a:pPr>
             <a:endParaRPr lang="en-US" sz="2000" b="0" dirty="0">
-              <a:latin typeface="Medium"/>
               <a:ea typeface="游ゴシック Medium"/>
               <a:cs typeface="Times New Roman"/>
             </a:endParaRPr>
@@ -22679,7 +23447,6 @@
             </a:pPr>
             <a:r>
               <a:rPr lang="en-US" sz="2000" dirty="0">
-                <a:latin typeface="Medium"/>
                 <a:ea typeface="游ゴシック Medium"/>
                 <a:cs typeface="Times New Roman"/>
               </a:rPr>
@@ -22695,7 +23462,6 @@
             </a:pPr>
             <a:r>
               <a:rPr lang="en-US" sz="2000" b="0" dirty="0">
-                <a:latin typeface="Medium"/>
                 <a:ea typeface="游ゴシック Medium"/>
                 <a:cs typeface="Times New Roman"/>
               </a:rPr>
@@ -22710,7 +23476,6 @@
             </a:pPr>
             <a:r>
               <a:rPr lang="en-US" sz="2000" b="0" dirty="0">
-                <a:latin typeface="Medium"/>
                 <a:ea typeface="游ゴシック Medium"/>
                 <a:cs typeface="Times New Roman"/>
               </a:rPr>
@@ -22725,7 +23490,6 @@
             </a:pPr>
             <a:r>
               <a:rPr lang="en-US" sz="2000" b="0" dirty="0">
-                <a:latin typeface="Medium"/>
                 <a:ea typeface="游ゴシック Medium"/>
                 <a:cs typeface="Times New Roman"/>
               </a:rPr>
@@ -22741,7 +23505,6 @@
               <a:buNone/>
             </a:pPr>
             <a:endParaRPr lang="en-US" sz="2000" b="0" dirty="0">
-              <a:latin typeface="Times New Roman"/>
               <a:ea typeface="游ゴシック Medium"/>
               <a:cs typeface="Times New Roman"/>
             </a:endParaRPr>
@@ -22841,7 +23604,6 @@
             </a:pPr>
             <a:r>
               <a:rPr lang="en-US" sz="2400" b="0" dirty="0">
-                <a:latin typeface="Times New Roman"/>
                 <a:ea typeface="游ゴシック Medium"/>
                 <a:cs typeface="Times New Roman"/>
               </a:rPr>
@@ -23180,7 +23942,6 @@
             </a:pPr>
             <a:r>
               <a:rPr lang="en-US" sz="2000" b="0" dirty="0">
-                <a:latin typeface="Times New Roman"/>
                 <a:ea typeface="游ゴシック Medium"/>
                 <a:cs typeface="Times New Roman"/>
               </a:rPr>
@@ -23195,7 +23956,6 @@
             </a:pPr>
             <a:r>
               <a:rPr lang="en-US" sz="2000" b="0" dirty="0">
-                <a:latin typeface="Times New Roman"/>
                 <a:ea typeface="游ゴシック Medium"/>
                 <a:cs typeface="Times New Roman"/>
               </a:rPr>
@@ -23210,7 +23970,6 @@
             </a:pPr>
             <a:r>
               <a:rPr lang="en-US" sz="2000" b="0" dirty="0">
-                <a:latin typeface="Times New Roman"/>
                 <a:ea typeface="游ゴシック Medium"/>
                 <a:cs typeface="Times New Roman"/>
               </a:rPr>
@@ -23290,9 +24049,7 @@
               <a:buNone/>
             </a:pPr>
             <a:r>
-              <a:rPr lang="en-US" sz="2000" dirty="0">
-                <a:latin typeface="Medium"/>
-              </a:rPr>
+              <a:rPr lang="en-US" sz="2000" dirty="0"/>
               <a:t>Commonly used error metrics in 3d UR reconstruction</a:t>
             </a:r>
           </a:p>
@@ -23303,9 +24060,7 @@
               </a:buClr>
             </a:pPr>
             <a:r>
-              <a:rPr lang="en-US" sz="2000" b="0" dirty="0">
-                <a:latin typeface="Medium"/>
-              </a:rPr>
+              <a:rPr lang="en-US" sz="2000" b="0" dirty="0"/>
               <a:t>Final Drift (FD): Offset of final frame compared to GT</a:t>
             </a:r>
           </a:p>
@@ -23316,9 +24071,7 @@
               </a:buClr>
             </a:pPr>
             <a:r>
-              <a:rPr lang="en-US" sz="2000" b="0" dirty="0">
-                <a:latin typeface="Medium"/>
-              </a:rPr>
+              <a:rPr lang="en-US" sz="2000" b="0" dirty="0"/>
               <a:t>Final Drift Rate (FDR): FD divided by trajectory length</a:t>
             </a:r>
           </a:p>
@@ -23329,9 +24082,7 @@
               </a:buClr>
             </a:pPr>
             <a:r>
-              <a:rPr lang="en-US" sz="2000" b="0" dirty="0">
-                <a:latin typeface="Medium"/>
-              </a:rPr>
+              <a:rPr lang="en-US" sz="2000" b="0" dirty="0"/>
               <a:t>Average error for relative transforms between frames</a:t>
             </a:r>
           </a:p>
@@ -23342,9 +24093,7 @@
               </a:buClr>
             </a:pPr>
             <a:r>
-              <a:rPr lang="en-US" sz="2000" b="0" dirty="0">
-                <a:latin typeface="Medium"/>
-              </a:rPr>
+              <a:rPr lang="en-US" sz="2000" b="0" dirty="0"/>
               <a:t>Average error for absolute poses</a:t>
             </a:r>
           </a:p>
@@ -23355,9 +24104,7 @@
               </a:buClr>
             </a:pPr>
             <a:r>
-              <a:rPr lang="en-US" sz="2000" b="0" dirty="0">
-                <a:latin typeface="Medium"/>
-              </a:rPr>
+              <a:rPr lang="en-US" sz="2000" b="0" dirty="0"/>
               <a:t>Maximum error in absolute poses</a:t>
             </a:r>
           </a:p>
@@ -23368,9 +24115,7 @@
               </a:buClr>
               <a:buNone/>
             </a:pPr>
-            <a:endParaRPr lang="en-US" sz="2000" b="0" dirty="0">
-              <a:latin typeface="Medium"/>
-            </a:endParaRPr>
+            <a:endParaRPr lang="en-US" sz="2000" b="0" dirty="0"/>
           </a:p>
           <a:p>
             <a:pPr marL="0" indent="0">
@@ -23384,7 +24129,6 @@
                 <a:solidFill>
                   <a:schemeClr val="accent1"/>
                 </a:solidFill>
-                <a:latin typeface="Medium"/>
               </a:rPr>
               <a:t>➔</a:t>
             </a:r>
@@ -23393,14 +24137,11 @@
                 <a:solidFill>
                   <a:schemeClr val="accent1"/>
                 </a:solidFill>
-                <a:latin typeface="Medium"/>
               </a:rPr>
               <a:t> </a:t>
             </a:r>
             <a:r>
-              <a:rPr lang="en-US" sz="2000" b="0" dirty="0">
-                <a:latin typeface="Medium"/>
-              </a:rPr>
+              <a:rPr lang="en-US" sz="2000" b="0" dirty="0"/>
               <a:t>Use these to compare optimized poses with GT</a:t>
             </a:r>
           </a:p>
@@ -23416,7 +24157,6 @@
                 <a:solidFill>
                   <a:schemeClr val="accent1"/>
                 </a:solidFill>
-                <a:latin typeface="Medium"/>
               </a:rPr>
               <a:t>➔</a:t>
             </a:r>
@@ -23425,14 +24165,11 @@
                 <a:solidFill>
                   <a:schemeClr val="accent1"/>
                 </a:solidFill>
-                <a:latin typeface="Medium"/>
               </a:rPr>
               <a:t> </a:t>
             </a:r>
             <a:r>
-              <a:rPr lang="en-US" sz="2000" b="0" dirty="0">
-                <a:latin typeface="Medium"/>
-              </a:rPr>
+              <a:rPr lang="en-US" sz="2000" b="0" dirty="0"/>
               <a:t>Learn for fitting parameters or find heuristic for PGO</a:t>
             </a:r>
           </a:p>
@@ -23551,12 +24288,12 @@
         <p:spPr>
           <a:xfrm>
             <a:off x="170325" y="707816"/>
-            <a:ext cx="8218099" cy="3986866"/>
+            <a:ext cx="8506131" cy="3986866"/>
           </a:xfrm>
         </p:spPr>
         <p:txBody>
           <a:bodyPr vert="horz" lIns="91440" tIns="45720" rIns="91440" bIns="45720" rtlCol="0" anchor="t">
-            <a:normAutofit lnSpcReduction="10000"/>
+            <a:normAutofit fontScale="92500" lnSpcReduction="10000"/>
           </a:bodyPr>
           <a:lstStyle/>
           <a:p>
@@ -23567,9 +24304,7 @@
               <a:buNone/>
             </a:pPr>
             <a:r>
-              <a:rPr lang="en-US" sz="2000" dirty="0">
-                <a:latin typeface="Medium"/>
-              </a:rPr>
+              <a:rPr lang="en-US" sz="2000" dirty="0"/>
               <a:t>Models</a:t>
             </a:r>
           </a:p>
@@ -23580,15 +24315,11 @@
               </a:buClr>
             </a:pPr>
             <a:r>
-              <a:rPr lang="en-US" sz="2000" b="0" i="1" dirty="0">
-                <a:latin typeface="Medium"/>
-              </a:rPr>
+              <a:rPr lang="en-US" sz="2000" b="0" i="1" dirty="0"/>
               <a:t>DLCNet:</a:t>
             </a:r>
             <a:r>
-              <a:rPr lang="en-US" sz="2000" b="0" dirty="0">
-                <a:latin typeface="Medium"/>
-              </a:rPr>
+              <a:rPr lang="en-US" sz="2000" b="0" dirty="0"/>
               <a:t>			FD of 17mm</a:t>
             </a:r>
           </a:p>
@@ -23599,15 +24330,11 @@
               </a:buClr>
             </a:pPr>
             <a:r>
-              <a:rPr lang="en-US" sz="2000" b="0" i="1" dirty="0">
-                <a:latin typeface="Medium"/>
-              </a:rPr>
+              <a:rPr lang="en-US" sz="2000" b="0" i="1" dirty="0"/>
               <a:t>&lt;No name&gt;:	</a:t>
             </a:r>
             <a:r>
-              <a:rPr lang="en-US" sz="2000" b="0" dirty="0">
-                <a:latin typeface="Medium"/>
-              </a:rPr>
+              <a:rPr lang="en-US" sz="2000" b="0" dirty="0"/>
               <a:t>	Approximate FDR of 15%</a:t>
             </a:r>
           </a:p>
@@ -23618,21 +24345,15 @@
               </a:buClr>
             </a:pPr>
             <a:r>
-              <a:rPr lang="en-US" sz="2000" b="0" i="1" dirty="0" err="1">
-                <a:latin typeface="Medium"/>
-              </a:rPr>
+              <a:rPr lang="en-US" sz="2000" b="0" i="1" dirty="0" err="1"/>
               <a:t>DualTrack</a:t>
             </a:r>
             <a:r>
-              <a:rPr lang="en-US" sz="2000" b="0" i="1" dirty="0">
-                <a:latin typeface="Medium"/>
-              </a:rPr>
+              <a:rPr lang="en-US" sz="2000" b="0" i="1" dirty="0"/>
               <a:t> (SODA):	</a:t>
             </a:r>
             <a:r>
-              <a:rPr lang="en-US" sz="2000" b="0" dirty="0">
-                <a:latin typeface="Medium"/>
-              </a:rPr>
+              <a:rPr lang="en-US" sz="2000" b="0" dirty="0"/>
               <a:t> 	FD of 8mm</a:t>
             </a:r>
           </a:p>
@@ -23648,7 +24369,6 @@
                 <a:solidFill>
                   <a:schemeClr val="accent1"/>
                 </a:solidFill>
-                <a:latin typeface="Medium"/>
               </a:rPr>
               <a:t>➔</a:t>
             </a:r>
@@ -23657,14 +24377,11 @@
                 <a:solidFill>
                   <a:schemeClr val="accent1"/>
                 </a:solidFill>
-                <a:latin typeface="Medium"/>
               </a:rPr>
               <a:t> </a:t>
             </a:r>
             <a:r>
-              <a:rPr lang="en-US" sz="2000" b="0" dirty="0">
-                <a:latin typeface="Medium"/>
-              </a:rPr>
+              <a:rPr lang="en-US" sz="2000" b="0" dirty="0"/>
               <a:t>Room for improvement</a:t>
             </a:r>
           </a:p>
@@ -23675,9 +24392,7 @@
               </a:buClr>
               <a:buNone/>
             </a:pPr>
-            <a:endParaRPr lang="en-US" sz="2000" b="0" dirty="0">
-              <a:latin typeface="Medium"/>
-            </a:endParaRPr>
+            <a:endParaRPr lang="en-US" sz="2000" b="0" dirty="0"/>
           </a:p>
           <a:p>
             <a:pPr marL="0" indent="0">
@@ -23687,9 +24402,7 @@
               <a:buNone/>
             </a:pPr>
             <a:r>
-              <a:rPr lang="en-US" sz="2000" dirty="0">
-                <a:latin typeface="Medium"/>
-              </a:rPr>
+              <a:rPr lang="en-US" sz="2000" dirty="0"/>
               <a:t>Data sets</a:t>
             </a:r>
           </a:p>
@@ -23700,21 +24413,15 @@
               </a:buClr>
             </a:pPr>
             <a:r>
-              <a:rPr lang="en-US" sz="2000" b="0" i="1" dirty="0" err="1">
-                <a:latin typeface="Medium"/>
-              </a:rPr>
+              <a:rPr lang="en-US" sz="2000" b="0" i="1" dirty="0" err="1"/>
               <a:t>FreehandUS</a:t>
             </a:r>
             <a:r>
-              <a:rPr lang="en-US" sz="2000" b="0" i="1" dirty="0">
-                <a:latin typeface="Medium"/>
-              </a:rPr>
+              <a:rPr lang="en-US" sz="2000" b="0" i="1" dirty="0"/>
               <a:t> data set:</a:t>
             </a:r>
             <a:r>
-              <a:rPr lang="en-US" sz="2000" b="0" dirty="0">
-                <a:latin typeface="Medium"/>
-              </a:rPr>
+              <a:rPr lang="en-US" sz="2000" b="0" dirty="0"/>
               <a:t>	Training data for No-name-model		</a:t>
             </a:r>
           </a:p>
@@ -23725,15 +24432,11 @@
               </a:buClr>
             </a:pPr>
             <a:r>
-              <a:rPr lang="en-US" sz="2000" b="0" i="1" dirty="0">
-                <a:latin typeface="Medium"/>
-              </a:rPr>
+              <a:rPr lang="en-US" sz="2000" b="0" i="1" dirty="0"/>
               <a:t>TUS-REC24 data set:</a:t>
             </a:r>
             <a:r>
-              <a:rPr lang="en-US" sz="2000" b="0" dirty="0">
-                <a:latin typeface="Medium"/>
-              </a:rPr>
+              <a:rPr lang="en-US" sz="2000" b="0" dirty="0"/>
               <a:t>	TUS-REC challenge 2024		</a:t>
             </a:r>
           </a:p>
@@ -23744,15 +24447,11 @@
               </a:buClr>
             </a:pPr>
             <a:r>
-              <a:rPr lang="en-US" sz="2000" b="0" i="1" dirty="0">
-                <a:latin typeface="Medium"/>
-              </a:rPr>
+              <a:rPr lang="en-US" sz="2000" b="0" i="1" dirty="0"/>
               <a:t>TUS-REC25 data set:</a:t>
             </a:r>
             <a:r>
-              <a:rPr lang="en-US" sz="2000" b="0" dirty="0">
-                <a:latin typeface="Medium"/>
-              </a:rPr>
+              <a:rPr lang="en-US" sz="2000" b="0" dirty="0"/>
               <a:t>	TUS-REC challenge 2025</a:t>
             </a:r>
           </a:p>
@@ -23768,7 +24467,6 @@
                 <a:solidFill>
                   <a:schemeClr val="accent1"/>
                 </a:solidFill>
-                <a:latin typeface="Medium"/>
               </a:rPr>
               <a:t>➔</a:t>
             </a:r>
@@ -23777,14 +24475,11 @@
                 <a:solidFill>
                   <a:schemeClr val="accent1"/>
                 </a:solidFill>
-                <a:latin typeface="Medium"/>
               </a:rPr>
               <a:t> </a:t>
             </a:r>
             <a:r>
-              <a:rPr lang="en-US" sz="2000" b="0" dirty="0">
-                <a:latin typeface="Medium"/>
-              </a:rPr>
+              <a:rPr lang="en-US" sz="2000" b="0" dirty="0"/>
               <a:t>Realistic, publicly available data sets with 3d UR frames and GT poses</a:t>
             </a:r>
           </a:p>
@@ -23794,9 +24489,7 @@
                 <a:srgbClr val="9E3611"/>
               </a:buClr>
             </a:pPr>
-            <a:endParaRPr lang="en-US" sz="2000" b="0" dirty="0">
-              <a:latin typeface="Medium"/>
-            </a:endParaRPr>
+            <a:endParaRPr lang="en-US" sz="2000" b="0" dirty="0"/>
           </a:p>
         </p:txBody>
       </p:sp>
@@ -23918,18 +24611,208 @@
         </p:spPr>
         <p:txBody>
           <a:bodyPr vert="horz" lIns="91440" tIns="45720" rIns="91440" bIns="45720" rtlCol="0" anchor="t">
-            <a:normAutofit/>
+            <a:noAutofit/>
           </a:bodyPr>
           <a:lstStyle/>
           <a:p>
-            <a:pPr>
-              <a:buClr>
-                <a:srgbClr val="9E3611"/>
-              </a:buClr>
+            <a:pPr marL="0" indent="0">
+              <a:buNone/>
             </a:pPr>
-            <a:endParaRPr lang="en-US" sz="2000" b="0" dirty="0">
-              <a:latin typeface="Medium"/>
-            </a:endParaRPr>
+            <a:r>
+              <a:rPr lang="en-US" sz="1200" b="0" dirty="0"/>
+              <a:t>[1] Chrissy A. Adriaans, Mark </a:t>
+            </a:r>
+            <a:r>
+              <a:rPr lang="en-US" sz="1200" b="0" dirty="0" err="1"/>
+              <a:t>Wijkhuizen</a:t>
+            </a:r>
+            <a:r>
+              <a:rPr lang="en-US" sz="1200" b="0" dirty="0"/>
+              <a:t>, Lennard M. van </a:t>
+            </a:r>
+            <a:r>
+              <a:rPr lang="en-US" sz="1200" b="0" dirty="0" err="1"/>
+              <a:t>Karnenbeek</a:t>
+            </a:r>
+            <a:r>
+              <a:rPr lang="en-US" sz="1200" b="0" dirty="0"/>
+              <a:t>, Freija Geldof, and Behdad </a:t>
+            </a:r>
+            <a:r>
+              <a:rPr lang="en-US" sz="1200" b="0" dirty="0" err="1"/>
+              <a:t>Dashtbozorg</a:t>
+            </a:r>
+            <a:r>
+              <a:rPr lang="en-US" sz="1200" b="0" dirty="0"/>
+              <a:t>. 	</a:t>
+            </a:r>
+            <a:r>
+              <a:rPr lang="en-US" sz="1200" b="0" dirty="0" err="1"/>
+              <a:t>Trackerless</a:t>
+            </a:r>
+            <a:r>
+              <a:rPr lang="en-US" sz="1200" b="0" dirty="0"/>
+              <a:t> 3d freehand ultrasound reconstruction: A review. Applied Sciences, 14(17):7991, 2024.</a:t>
+            </a:r>
+          </a:p>
+          <a:p>
+            <a:pPr marL="0" indent="0">
+              <a:buNone/>
+            </a:pPr>
+            <a:r>
+              <a:rPr lang="en-US" sz="1200" b="0" dirty="0"/>
+              <a:t>[2] Russell Buchanan et al. 3d freehand ultrasound using visual inertial and deep inertial odometry for measuring 	patellar tracking. 2024.</a:t>
+            </a:r>
+          </a:p>
+          <a:p>
+            <a:pPr marL="0" indent="0">
+              <a:buNone/>
+            </a:pPr>
+            <a:r>
+              <a:rPr lang="en-US" sz="1200" b="0" dirty="0"/>
+              <a:t>[3] Andrew H. Gee et al. </a:t>
+            </a:r>
+            <a:r>
+              <a:rPr lang="en-US" sz="1200" b="0" dirty="0" err="1"/>
+              <a:t>Sensorless</a:t>
+            </a:r>
+            <a:r>
+              <a:rPr lang="en-US" sz="1200" b="0" dirty="0"/>
+              <a:t> freehand 3d ultrasound in real tissue: speckle decorrelation without fully 	developed speckle. Medical image analysis, 10(2):137–149, 2006.</a:t>
+            </a:r>
+          </a:p>
+          <a:p>
+            <a:pPr marL="0" indent="0">
+              <a:buNone/>
+            </a:pPr>
+            <a:r>
+              <a:rPr lang="en-US" sz="1200" b="0" dirty="0"/>
+              <a:t>[4] </a:t>
+            </a:r>
+            <a:r>
+              <a:rPr lang="en-US" sz="1200" b="0" dirty="0" err="1"/>
+              <a:t>Hengtao</a:t>
+            </a:r>
+            <a:r>
+              <a:rPr lang="en-US" sz="1200" b="0" dirty="0"/>
+              <a:t> Guo, Sheng Xu, Bradford Wood, and </a:t>
+            </a:r>
+            <a:r>
+              <a:rPr lang="en-US" sz="1200" b="0" dirty="0" err="1"/>
+              <a:t>Pingkun</a:t>
+            </a:r>
+            <a:r>
+              <a:rPr lang="en-US" sz="1200" b="0" dirty="0"/>
+              <a:t> Yan. </a:t>
+            </a:r>
+            <a:r>
+              <a:rPr lang="en-US" sz="1200" b="0" dirty="0" err="1"/>
+              <a:t>Sensorless</a:t>
+            </a:r>
+            <a:r>
+              <a:rPr lang="en-US" sz="1200" b="0" dirty="0"/>
+              <a:t> freehand 3d ultrasound reconstruction 	via deep contextual learning.</a:t>
+            </a:r>
+          </a:p>
+          <a:p>
+            <a:pPr marL="0" indent="0">
+              <a:buNone/>
+            </a:pPr>
+            <a:r>
+              <a:rPr lang="en-US" sz="1200" b="0" dirty="0"/>
+              <a:t>[5] Qi Li et al. Tus-rec2024: A challenge to reconstruct 3d freehand ultrasound without external tracker.</a:t>
+            </a:r>
+          </a:p>
+          <a:p>
+            <a:pPr marL="0" indent="0">
+              <a:buNone/>
+            </a:pPr>
+            <a:r>
+              <a:rPr lang="en-US" sz="1200" b="0" dirty="0"/>
+              <a:t>[6] Loïc </a:t>
+            </a:r>
+            <a:r>
+              <a:rPr lang="en-US" sz="1200" b="0" dirty="0" err="1"/>
+              <a:t>Tetrel</a:t>
+            </a:r>
+            <a:r>
+              <a:rPr lang="en-US" sz="1200" b="0" dirty="0"/>
+              <a:t>, </a:t>
+            </a:r>
+            <a:r>
+              <a:rPr lang="en-US" sz="1200" b="0" dirty="0" err="1"/>
+              <a:t>Hacène</a:t>
+            </a:r>
+            <a:r>
+              <a:rPr lang="en-US" sz="1200" b="0" dirty="0"/>
+              <a:t> </a:t>
+            </a:r>
+            <a:r>
+              <a:rPr lang="en-US" sz="1200" b="0" dirty="0" err="1"/>
+              <a:t>Chebrek</a:t>
+            </a:r>
+            <a:r>
+              <a:rPr lang="en-US" sz="1200" b="0" dirty="0"/>
+              <a:t>, and Catherine Laporte. Learning for graph-based </a:t>
+            </a:r>
+            <a:r>
+              <a:rPr lang="en-US" sz="1200" b="0" dirty="0" err="1"/>
+              <a:t>sensorless</a:t>
+            </a:r>
+            <a:r>
+              <a:rPr lang="en-US" sz="1200" b="0" dirty="0"/>
+              <a:t> freehand 3d 	ultrasound. In Li Wang, Ehsan Adeli, Qian Wang, </a:t>
+            </a:r>
+            <a:r>
+              <a:rPr lang="en-US" sz="1200" b="0" dirty="0" err="1"/>
+              <a:t>Yinghuan</a:t>
+            </a:r>
+            <a:r>
+              <a:rPr lang="en-US" sz="1200" b="0" dirty="0"/>
+              <a:t> Shi, and Heung-Il Suk, editors, Machine 	Learning in Medical Imaging, volume 10019 of Lecture Notes in Computer Science, pages 205–212. 	Springer International Publishing, Cham, 2016.</a:t>
+            </a:r>
+          </a:p>
+          <a:p>
+            <a:pPr marL="0" indent="0">
+              <a:buNone/>
+            </a:pPr>
+            <a:r>
+              <a:rPr lang="en-US" sz="1200" b="0" dirty="0"/>
+              <a:t>[7] Paul F. R. Wilson et al. </a:t>
+            </a:r>
+            <a:r>
+              <a:rPr lang="en-US" sz="1200" b="0" dirty="0" err="1"/>
+              <a:t>Dualtrack</a:t>
+            </a:r>
+            <a:r>
+              <a:rPr lang="en-US" sz="1200" b="0" dirty="0"/>
+              <a:t>: </a:t>
+            </a:r>
+            <a:r>
+              <a:rPr lang="en-US" sz="1200" b="0" dirty="0" err="1"/>
+              <a:t>Sensorless</a:t>
+            </a:r>
+            <a:r>
+              <a:rPr lang="en-US" sz="1200" b="0" dirty="0"/>
+              <a:t> 3d ultrasound needs local and global context.</a:t>
+            </a:r>
+          </a:p>
+          <a:p>
+            <a:pPr marL="0" indent="0">
+              <a:buNone/>
+            </a:pPr>
+            <a:r>
+              <a:rPr lang="en-US" sz="1200" b="0" dirty="0"/>
+              <a:t>[8] Feng Youyang, Wang Qing, and Yang </a:t>
+            </a:r>
+            <a:r>
+              <a:rPr lang="en-US" sz="1200" b="0" dirty="0" err="1"/>
+              <a:t>Gaochao</a:t>
+            </a:r>
+            <a:r>
+              <a:rPr lang="en-US" sz="1200" b="0" dirty="0"/>
+              <a:t>. Incremental 3-d pose graph optimization for slam algorithm 	without marginalization. International Journal of Advanced Robotic Systems, 17(3), 2020.</a:t>
+            </a:r>
           </a:p>
         </p:txBody>
       </p:sp>
@@ -24068,7 +24951,6 @@
             </a:pPr>
             <a:r>
               <a:rPr lang="en-US" sz="2000" b="0" dirty="0">
-                <a:latin typeface="Times New Roman"/>
                 <a:ea typeface="游ゴシック Medium"/>
                 <a:cs typeface="Times New Roman"/>
               </a:rPr>
@@ -24083,7 +24965,6 @@
             </a:pPr>
             <a:r>
               <a:rPr lang="en-US" sz="2000" b="0" dirty="0">
-                <a:latin typeface="Times New Roman"/>
                 <a:ea typeface="游ゴシック Medium"/>
                 <a:cs typeface="Times New Roman"/>
               </a:rPr>
@@ -24098,7 +24979,6 @@
             </a:pPr>
             <a:r>
               <a:rPr lang="en-US" sz="2000" b="0" dirty="0">
-                <a:latin typeface="Times New Roman"/>
                 <a:ea typeface="游ゴシック Medium"/>
                 <a:cs typeface="Times New Roman"/>
               </a:rPr>
@@ -24838,7 +25718,6 @@
               <a:t>Tracking Probe</a:t>
             </a:r>
             <a:endParaRPr lang="en-US" sz="2000" b="0" dirty="0">
-              <a:latin typeface="Times New Roman"/>
               <a:ea typeface="游ゴシック Medium"/>
               <a:cs typeface="Times New Roman"/>
             </a:endParaRPr>
@@ -25269,7 +26148,6 @@
               <a:t>Speckle Decorrelation</a:t>
             </a:r>
             <a:endParaRPr lang="en-US" sz="2000" b="0" dirty="0">
-              <a:latin typeface="Times New Roman"/>
               <a:ea typeface="游ゴシック Medium"/>
               <a:cs typeface="Times New Roman"/>
             </a:endParaRPr>
@@ -25606,7 +26484,6 @@
               <a:t>Deep Learning (DL)</a:t>
             </a:r>
             <a:endParaRPr lang="en-US" sz="2000" b="0" dirty="0">
-              <a:latin typeface="Times New Roman"/>
               <a:ea typeface="游ゴシック Medium"/>
               <a:cs typeface="Times New Roman"/>
             </a:endParaRPr>
@@ -26077,7 +26954,6 @@
               <a:t>Drift, Generalizability, Reproducibility</a:t>
             </a:r>
             <a:endParaRPr lang="en-US" sz="2000" b="0" dirty="0">
-              <a:latin typeface="Times New Roman"/>
               <a:ea typeface="游ゴシック Medium"/>
               <a:cs typeface="Times New Roman"/>
             </a:endParaRPr>
@@ -26091,7 +26967,6 @@
               <a:buNone/>
             </a:pPr>
             <a:endParaRPr lang="en-US" sz="2000" b="0" dirty="0">
-              <a:latin typeface="Times New Roman"/>
               <a:ea typeface="游ゴシック Medium"/>
               <a:cs typeface="Times New Roman"/>
             </a:endParaRPr>
@@ -26168,9 +27043,7 @@
               </a:buClr>
             </a:pPr>
             <a:r>
-              <a:rPr lang="en-US" sz="2000" b="0" dirty="0">
-                <a:latin typeface="Medium"/>
-              </a:rPr>
+              <a:rPr lang="en-US" sz="2000" b="0" dirty="0"/>
               <a:t>Build a pose graph from estimated probe poses</a:t>
             </a:r>
           </a:p>
@@ -26181,9 +27054,7 @@
               </a:buClr>
             </a:pPr>
             <a:r>
-              <a:rPr lang="en-US" sz="2000" b="0" dirty="0">
-                <a:latin typeface="Medium"/>
-              </a:rPr>
+              <a:rPr lang="en-US" sz="2000" b="0" dirty="0"/>
               <a:t>Use Pose Graph Optimization (PGO) to increase pose reconstruction accuracy</a:t>
             </a:r>
           </a:p>
@@ -26194,9 +27065,7 @@
               </a:buClr>
             </a:pPr>
             <a:r>
-              <a:rPr lang="en-US" sz="2000" b="0" dirty="0">
-                <a:latin typeface="Medium"/>
-              </a:rPr>
+              <a:rPr lang="en-US" sz="2000" b="0" dirty="0"/>
               <a:t>Existing research: Use of external sensor or IMU data, tests on non-public data sets; implicit global consistency</a:t>
             </a:r>
           </a:p>
@@ -26212,14 +27081,11 @@
                 <a:solidFill>
                   <a:schemeClr val="accent1"/>
                 </a:solidFill>
-                <a:latin typeface="Medium"/>
               </a:rPr>
               <a:t>➔ </a:t>
             </a:r>
             <a:r>
-              <a:rPr lang="en-US" sz="2000" b="0" dirty="0">
-                <a:latin typeface="Medium"/>
-              </a:rPr>
+              <a:rPr lang="en-US" sz="2000" b="0" dirty="0"/>
               <a:t>Vision-only; explicit attention to global consistency; usage of realistic, publicly available data</a:t>
             </a:r>
           </a:p>
@@ -26230,9 +27096,7 @@
               </a:buClr>
               <a:buNone/>
             </a:pPr>
-            <a:endParaRPr lang="en-US" sz="2000" b="0" dirty="0">
-              <a:latin typeface="Medium"/>
-            </a:endParaRPr>
+            <a:endParaRPr lang="en-US" sz="2000" b="0" dirty="0"/>
           </a:p>
           <a:p>
             <a:pPr marL="0" indent="0">
@@ -26242,9 +27106,7 @@
               <a:buNone/>
             </a:pPr>
             <a:r>
-              <a:rPr lang="en-US" sz="2000" dirty="0">
-                <a:latin typeface="Medium"/>
-              </a:rPr>
+              <a:rPr lang="en-US" sz="2000" dirty="0"/>
               <a:t>Research hypothesis</a:t>
             </a:r>
           </a:p>
@@ -26256,15 +27118,11 @@
               <a:buNone/>
             </a:pPr>
             <a:r>
-              <a:rPr lang="en-US" sz="2000" b="0" dirty="0">
-                <a:latin typeface="Medium"/>
-              </a:rPr>
+              <a:rPr lang="en-US" sz="2000" b="0" dirty="0"/>
               <a:t>“</a:t>
             </a:r>
             <a:r>
-              <a:rPr lang="en-US" sz="2000" b="0" i="1" dirty="0">
-                <a:latin typeface="Medium"/>
-              </a:rPr>
+              <a:rPr lang="en-US" sz="2000" b="0" i="1" dirty="0"/>
               <a:t>PGO will improve pose estimation performance and consistency of vision-based DL methods for 3d UR reconstruction.”</a:t>
             </a:r>
           </a:p>
@@ -26415,7 +27273,6 @@
               <a:t>(SLAM)</a:t>
             </a:r>
             <a:endParaRPr lang="en-US" sz="2000" b="0" dirty="0">
-              <a:latin typeface="Times New Roman"/>
               <a:ea typeface="游ゴシック Medium"/>
               <a:cs typeface="Times New Roman"/>
             </a:endParaRPr>
@@ -26872,7 +27729,6 @@
             </a:pPr>
             <a:r>
               <a:rPr lang="en-US" sz="1200" b="0" dirty="0">
-                <a:latin typeface="Times New Roman"/>
                 <a:ea typeface="游ゴシック Medium"/>
                 <a:cs typeface="Times New Roman"/>
               </a:rPr>
@@ -26880,7 +27736,6 @@
             </a:r>
             <a:r>
               <a:rPr lang="en-US" sz="1200" b="0" baseline="-25000" dirty="0">
-                <a:latin typeface="Times New Roman"/>
                 <a:ea typeface="游ゴシック Medium"/>
                 <a:cs typeface="Times New Roman"/>
               </a:rPr>
@@ -27169,7 +28024,6 @@
             </a:pPr>
             <a:r>
               <a:rPr lang="en-US" sz="1200" b="0" dirty="0">
-                <a:latin typeface="Times New Roman"/>
                 <a:ea typeface="游ゴシック Medium"/>
                 <a:cs typeface="Times New Roman"/>
               </a:rPr>
@@ -27177,7 +28031,6 @@
             </a:r>
             <a:r>
               <a:rPr lang="en-US" sz="1200" b="0" baseline="-25000" dirty="0">
-                <a:latin typeface="Times New Roman"/>
                 <a:ea typeface="游ゴシック Medium"/>
                 <a:cs typeface="Times New Roman"/>
               </a:rPr>
@@ -27466,7 +28319,6 @@
             </a:pPr>
             <a:r>
               <a:rPr lang="en-US" sz="1200" b="0" dirty="0">
-                <a:latin typeface="Times New Roman"/>
                 <a:ea typeface="游ゴシック Medium"/>
                 <a:cs typeface="Times New Roman"/>
               </a:rPr>
@@ -27474,7 +28326,6 @@
             </a:r>
             <a:r>
               <a:rPr lang="en-US" sz="1200" b="0" baseline="-25000" dirty="0">
-                <a:latin typeface="Times New Roman"/>
                 <a:ea typeface="游ゴシック Medium"/>
                 <a:cs typeface="Times New Roman"/>
               </a:rPr>
@@ -27763,7 +28614,6 @@
             </a:pPr>
             <a:r>
               <a:rPr lang="en-US" sz="1200" b="0" dirty="0">
-                <a:latin typeface="Times New Roman"/>
                 <a:ea typeface="游ゴシック Medium"/>
                 <a:cs typeface="Times New Roman"/>
               </a:rPr>
@@ -27771,7 +28621,6 @@
             </a:r>
             <a:r>
               <a:rPr lang="en-US" sz="1200" b="0" baseline="-25000" dirty="0">
-                <a:latin typeface="Times New Roman"/>
                 <a:ea typeface="游ゴシック Medium"/>
                 <a:cs typeface="Times New Roman"/>
               </a:rPr>
@@ -28060,10 +28909,6 @@
             </a:pPr>
             <a:r>
               <a:rPr lang="en-US" sz="1200" b="0" dirty="0">
-                <a:solidFill>
-                  <a:schemeClr val="accent1"/>
-                </a:solidFill>
-                <a:latin typeface="Times New Roman"/>
                 <a:ea typeface="游ゴシック Medium"/>
                 <a:cs typeface="Times New Roman"/>
               </a:rPr>
@@ -28071,10 +28916,6 @@
             </a:r>
             <a:r>
               <a:rPr lang="en-US" sz="1200" b="0" baseline="-25000" dirty="0">
-                <a:solidFill>
-                  <a:schemeClr val="accent1"/>
-                </a:solidFill>
-                <a:latin typeface="Times New Roman"/>
                 <a:ea typeface="游ゴシック Medium"/>
                 <a:cs typeface="Times New Roman"/>
               </a:rPr>
@@ -28363,10 +29204,6 @@
             </a:pPr>
             <a:r>
               <a:rPr lang="en-US" sz="1200" b="0" dirty="0">
-                <a:solidFill>
-                  <a:schemeClr val="accent1"/>
-                </a:solidFill>
-                <a:latin typeface="Times New Roman"/>
                 <a:ea typeface="游ゴシック Medium"/>
                 <a:cs typeface="Times New Roman"/>
               </a:rPr>
@@ -28374,10 +29211,6 @@
             </a:r>
             <a:r>
               <a:rPr lang="en-US" sz="1200" b="0" baseline="-25000" dirty="0">
-                <a:solidFill>
-                  <a:schemeClr val="accent1"/>
-                </a:solidFill>
-                <a:latin typeface="Times New Roman"/>
                 <a:ea typeface="游ゴシック Medium"/>
                 <a:cs typeface="Times New Roman"/>
               </a:rPr>
@@ -28666,10 +29499,6 @@
             </a:pPr>
             <a:r>
               <a:rPr lang="en-US" sz="1200" b="0" dirty="0">
-                <a:solidFill>
-                  <a:schemeClr val="accent1"/>
-                </a:solidFill>
-                <a:latin typeface="Times New Roman"/>
                 <a:ea typeface="游ゴシック Medium"/>
                 <a:cs typeface="Times New Roman"/>
               </a:rPr>
@@ -28677,10 +29506,6 @@
             </a:r>
             <a:r>
               <a:rPr lang="en-US" sz="1200" b="0" baseline="-25000" dirty="0">
-                <a:solidFill>
-                  <a:schemeClr val="accent1"/>
-                </a:solidFill>
-                <a:latin typeface="Times New Roman"/>
                 <a:ea typeface="游ゴシック Medium"/>
                 <a:cs typeface="Times New Roman"/>
               </a:rPr>
@@ -28703,8 +29528,8 @@
         </p:nvSpPr>
         <p:spPr>
           <a:xfrm>
-            <a:off x="5769182" y="3984117"/>
-            <a:ext cx="2938454" cy="523220"/>
+            <a:off x="5553070" y="4018953"/>
+            <a:ext cx="3305076" cy="523220"/>
           </a:xfrm>
           <a:prstGeom prst="rect">
             <a:avLst/>
@@ -28719,7 +29544,7 @@
           <a:p>
             <a:r>
               <a:rPr lang="en-US" sz="1400" dirty="0">
-                <a:latin typeface="Times New Roman"/>
+                <a:latin typeface="游ゴシック Medium" panose="020B0500000000000000" pitchFamily="50" charset="-128"/>
                 <a:ea typeface="游ゴシック Medium"/>
                 <a:cs typeface="Times New Roman"/>
               </a:rPr>
@@ -28727,7 +29552,7 @@
             </a:r>
             <a:r>
               <a:rPr lang="en-US" sz="1400" baseline="-25000" dirty="0">
-                <a:latin typeface="Times New Roman"/>
+                <a:latin typeface="游ゴシック Medium" panose="020B0500000000000000" pitchFamily="50" charset="-128"/>
                 <a:ea typeface="游ゴシック Medium"/>
                 <a:cs typeface="Times New Roman"/>
               </a:rPr>
@@ -28735,27 +29560,24 @@
             </a:r>
             <a:r>
               <a:rPr lang="en-US" sz="1400" dirty="0">
-                <a:latin typeface="Medium"/>
+                <a:latin typeface="游ゴシック Medium" panose="020B0500000000000000" pitchFamily="50" charset="-128"/>
               </a:rPr>
-              <a:t>:        Pose at node </a:t>
+              <a:t>:       Pose at node </a:t>
             </a:r>
             <a:r>
               <a:rPr lang="en-US" sz="1400" dirty="0" err="1">
-                <a:latin typeface="Medium"/>
+                <a:latin typeface="游ゴシック Medium" panose="020B0500000000000000" pitchFamily="50" charset="-128"/>
               </a:rPr>
               <a:t>i</a:t>
             </a:r>
             <a:endParaRPr lang="en-US" sz="1400" dirty="0">
-              <a:latin typeface="Medium"/>
+              <a:latin typeface="游ゴシック Medium" panose="020B0500000000000000" pitchFamily="50" charset="-128"/>
             </a:endParaRPr>
           </a:p>
           <a:p>
             <a:r>
               <a:rPr lang="en-US" sz="1400" dirty="0">
-                <a:solidFill>
-                  <a:schemeClr val="accent1"/>
-                </a:solidFill>
-                <a:latin typeface="Times New Roman"/>
+                <a:latin typeface="游ゴシック Medium" panose="020B0500000000000000" pitchFamily="50" charset="-128"/>
                 <a:ea typeface="游ゴシック Medium"/>
                 <a:cs typeface="Times New Roman"/>
               </a:rPr>
@@ -28763,10 +29585,7 @@
             </a:r>
             <a:r>
               <a:rPr lang="en-US" sz="1400" baseline="-25000" dirty="0">
-                <a:solidFill>
-                  <a:schemeClr val="accent1"/>
-                </a:solidFill>
-                <a:latin typeface="Times New Roman"/>
+                <a:latin typeface="游ゴシック Medium" panose="020B0500000000000000" pitchFamily="50" charset="-128"/>
                 <a:ea typeface="游ゴシック Medium"/>
                 <a:cs typeface="Times New Roman"/>
               </a:rPr>
@@ -28774,28 +29593,19 @@
             </a:r>
             <a:r>
               <a:rPr lang="en-US" sz="1400" dirty="0">
-                <a:solidFill>
-                  <a:schemeClr val="accent1"/>
-                </a:solidFill>
-                <a:latin typeface="Medium"/>
+                <a:latin typeface="游ゴシック Medium" panose="020B0500000000000000" pitchFamily="50" charset="-128"/>
               </a:rPr>
               <a:t>: Transform between nodes </a:t>
             </a:r>
             <a:r>
               <a:rPr lang="en-US" sz="1400" dirty="0" err="1">
-                <a:solidFill>
-                  <a:schemeClr val="accent1"/>
-                </a:solidFill>
-                <a:latin typeface="Medium"/>
+                <a:latin typeface="游ゴシック Medium" panose="020B0500000000000000" pitchFamily="50" charset="-128"/>
               </a:rPr>
               <a:t>i</a:t>
             </a:r>
             <a:r>
               <a:rPr lang="en-US" sz="1400" dirty="0">
-                <a:solidFill>
-                  <a:schemeClr val="accent1"/>
-                </a:solidFill>
-                <a:latin typeface="Medium"/>
+                <a:latin typeface="游ゴシック Medium" panose="020B0500000000000000" pitchFamily="50" charset="-128"/>
               </a:rPr>
               <a:t>, j</a:t>
             </a:r>
@@ -28904,7 +29714,7 @@
           <p:nvPr/>
         </p:nvPicPr>
         <p:blipFill>
-          <a:blip r:embed="rId2" cstate="print">
+          <a:blip r:embed="rId3" cstate="print">
             <a:extLst>
               <a:ext uri="{28A0092B-C50C-407E-A947-70E740481C1C}">
                 <a14:useLocalDpi xmlns:a14="http://schemas.microsoft.com/office/drawing/2010/main" val="0"/>
@@ -29216,7 +30026,6 @@
             </a:pPr>
             <a:r>
               <a:rPr lang="en-US" sz="1200" b="0" dirty="0">
-                <a:latin typeface="Times New Roman"/>
                 <a:ea typeface="游ゴシック Medium"/>
                 <a:cs typeface="Times New Roman"/>
               </a:rPr>
@@ -29224,7 +30033,6 @@
             </a:r>
             <a:r>
               <a:rPr lang="en-US" sz="1200" b="0" baseline="-25000" dirty="0">
-                <a:latin typeface="Times New Roman"/>
                 <a:ea typeface="游ゴシック Medium"/>
                 <a:cs typeface="Times New Roman"/>
               </a:rPr>
@@ -29513,7 +30321,6 @@
             </a:pPr>
             <a:r>
               <a:rPr lang="en-US" sz="1200" b="0" dirty="0">
-                <a:latin typeface="Times New Roman"/>
                 <a:ea typeface="游ゴシック Medium"/>
                 <a:cs typeface="Times New Roman"/>
               </a:rPr>
@@ -29521,7 +30328,6 @@
             </a:r>
             <a:r>
               <a:rPr lang="en-US" sz="1200" b="0" baseline="-25000" dirty="0">
-                <a:latin typeface="Times New Roman"/>
                 <a:ea typeface="游ゴシック Medium"/>
                 <a:cs typeface="Times New Roman"/>
               </a:rPr>
@@ -29810,7 +30616,6 @@
             </a:pPr>
             <a:r>
               <a:rPr lang="en-US" sz="1200" b="0" dirty="0">
-                <a:latin typeface="Times New Roman"/>
                 <a:ea typeface="游ゴシック Medium"/>
                 <a:cs typeface="Times New Roman"/>
               </a:rPr>
@@ -29818,7 +30623,6 @@
             </a:r>
             <a:r>
               <a:rPr lang="en-US" sz="1200" b="0" baseline="-25000" dirty="0">
-                <a:latin typeface="Times New Roman"/>
                 <a:ea typeface="游ゴシック Medium"/>
                 <a:cs typeface="Times New Roman"/>
               </a:rPr>
@@ -30107,7 +30911,6 @@
             </a:pPr>
             <a:r>
               <a:rPr lang="en-US" sz="1200" b="0" dirty="0">
-                <a:latin typeface="Times New Roman"/>
                 <a:ea typeface="游ゴシック Medium"/>
                 <a:cs typeface="Times New Roman"/>
               </a:rPr>
@@ -30115,7 +30918,6 @@
             </a:r>
             <a:r>
               <a:rPr lang="en-US" sz="1200" b="0" baseline="-25000" dirty="0">
-                <a:latin typeface="Times New Roman"/>
                 <a:ea typeface="游ゴシック Medium"/>
                 <a:cs typeface="Times New Roman"/>
               </a:rPr>
@@ -30404,10 +31206,6 @@
             </a:pPr>
             <a:r>
               <a:rPr lang="en-US" sz="1200" b="0" dirty="0">
-                <a:solidFill>
-                  <a:schemeClr val="accent1"/>
-                </a:solidFill>
-                <a:latin typeface="Times New Roman"/>
                 <a:ea typeface="游ゴシック Medium"/>
                 <a:cs typeface="Times New Roman"/>
               </a:rPr>
@@ -30415,10 +31213,6 @@
             </a:r>
             <a:r>
               <a:rPr lang="en-US" sz="1200" b="0" baseline="-25000" dirty="0">
-                <a:solidFill>
-                  <a:schemeClr val="accent1"/>
-                </a:solidFill>
-                <a:latin typeface="Times New Roman"/>
                 <a:ea typeface="游ゴシック Medium"/>
                 <a:cs typeface="Times New Roman"/>
               </a:rPr>
@@ -30707,10 +31501,6 @@
             </a:pPr>
             <a:r>
               <a:rPr lang="en-US" sz="1200" b="0" dirty="0">
-                <a:solidFill>
-                  <a:schemeClr val="accent1"/>
-                </a:solidFill>
-                <a:latin typeface="Times New Roman"/>
                 <a:ea typeface="游ゴシック Medium"/>
                 <a:cs typeface="Times New Roman"/>
               </a:rPr>
@@ -30718,10 +31508,6 @@
             </a:r>
             <a:r>
               <a:rPr lang="en-US" sz="1200" b="0" baseline="-25000" dirty="0">
-                <a:solidFill>
-                  <a:schemeClr val="accent1"/>
-                </a:solidFill>
-                <a:latin typeface="Times New Roman"/>
                 <a:ea typeface="游ゴシック Medium"/>
                 <a:cs typeface="Times New Roman"/>
               </a:rPr>
@@ -31010,10 +31796,6 @@
             </a:pPr>
             <a:r>
               <a:rPr lang="en-US" sz="1200" b="0" dirty="0">
-                <a:solidFill>
-                  <a:schemeClr val="accent1"/>
-                </a:solidFill>
-                <a:latin typeface="Times New Roman"/>
                 <a:ea typeface="游ゴシック Medium"/>
                 <a:cs typeface="Times New Roman"/>
               </a:rPr>
@@ -31021,10 +31803,6 @@
             </a:r>
             <a:r>
               <a:rPr lang="en-US" sz="1200" b="0" baseline="-25000" dirty="0">
-                <a:solidFill>
-                  <a:schemeClr val="accent1"/>
-                </a:solidFill>
-                <a:latin typeface="Times New Roman"/>
                 <a:ea typeface="游ゴシック Medium"/>
                 <a:cs typeface="Times New Roman"/>
               </a:rPr>
@@ -31047,8 +31825,8 @@
         </p:nvSpPr>
         <p:spPr>
           <a:xfrm>
-            <a:off x="3346152" y="1004117"/>
-            <a:ext cx="4322192" cy="307777"/>
+            <a:off x="3350910" y="913878"/>
+            <a:ext cx="4322192" cy="523220"/>
           </a:xfrm>
           <a:prstGeom prst="rect">
             <a:avLst/>
@@ -31063,7 +31841,7 @@
           <a:p>
             <a:r>
               <a:rPr lang="en-US" sz="1400" dirty="0">
-                <a:latin typeface="Medium"/>
+                <a:latin typeface="游ゴシック Medium" panose="020B0500000000000000" pitchFamily="50" charset="-128"/>
                 <a:ea typeface="游ゴシック Medium"/>
                 <a:cs typeface="Times New Roman"/>
               </a:rPr>
@@ -31071,7 +31849,7 @@
             </a:r>
             <a:r>
               <a:rPr lang="en-US" sz="1400" baseline="-25000" dirty="0">
-                <a:latin typeface="Medium"/>
+                <a:latin typeface="游ゴシック Medium" panose="020B0500000000000000" pitchFamily="50" charset="-128"/>
                 <a:ea typeface="游ゴシック Medium"/>
                 <a:cs typeface="Times New Roman"/>
               </a:rPr>
@@ -31079,40 +31857,15 @@
             </a:r>
             <a:r>
               <a:rPr lang="en-US" sz="1400" dirty="0">
-                <a:latin typeface="Times New Roman"/>
+                <a:latin typeface="游ゴシック Medium" panose="020B0500000000000000" pitchFamily="50" charset="-128"/>
                 <a:ea typeface="游ゴシック Medium"/>
                 <a:cs typeface="Times New Roman"/>
               </a:rPr>
-              <a:t>/</a:t>
-            </a:r>
-            <a:r>
-              <a:rPr lang="en-US" sz="1400" dirty="0">
-                <a:solidFill>
-                  <a:srgbClr val="FF0000"/>
-                </a:solidFill>
-                <a:latin typeface="Medium"/>
-                <a:ea typeface="游ゴシック Medium"/>
-                <a:cs typeface="Times New Roman"/>
-              </a:rPr>
-              <a:t> </a:t>
-            </a:r>
-            <a:r>
-              <a:rPr lang="en-US" sz="1400" dirty="0">
-                <a:solidFill>
-                  <a:schemeClr val="accent1"/>
-                </a:solidFill>
-                <a:latin typeface="Medium"/>
-                <a:ea typeface="游ゴシック Medium"/>
-                <a:cs typeface="Times New Roman"/>
-              </a:rPr>
-              <a:t>T</a:t>
+              <a:t>/ T</a:t>
             </a:r>
             <a:r>
               <a:rPr lang="en-US" sz="1400" baseline="-25000" dirty="0">
-                <a:solidFill>
-                  <a:schemeClr val="accent1"/>
-                </a:solidFill>
-                <a:latin typeface="Medium"/>
+                <a:latin typeface="游ゴシック Medium" panose="020B0500000000000000" pitchFamily="50" charset="-128"/>
                 <a:ea typeface="游ゴシック Medium"/>
                 <a:cs typeface="Times New Roman"/>
               </a:rPr>
@@ -31120,7 +31873,7 @@
             </a:r>
             <a:r>
               <a:rPr lang="en-US" sz="1400" dirty="0">
-                <a:latin typeface="Times New Roman"/>
+                <a:latin typeface="游ゴシック Medium" panose="020B0500000000000000" pitchFamily="50" charset="-128"/>
                 <a:ea typeface="游ゴシック Medium"/>
                 <a:cs typeface="Times New Roman"/>
               </a:rPr>
@@ -31144,13 +31897,13 @@
           <p:nvPr>
             <p:extLst>
               <p:ext uri="{D42A27DB-BD31-4B8C-83A1-F6EECF244321}">
-                <p14:modId xmlns:p14="http://schemas.microsoft.com/office/powerpoint/2010/main" val="2055243402"/>
+                <p14:modId xmlns:p14="http://schemas.microsoft.com/office/powerpoint/2010/main" val="2147983194"/>
               </p:ext>
             </p:extLst>
           </p:nvPr>
         </p:nvGraphicFramePr>
         <p:xfrm>
-          <a:off x="3985084" y="1634498"/>
+          <a:off x="3989842" y="1544259"/>
           <a:ext cx="2016224" cy="1245822"/>
         </p:xfrm>
         <a:graphic>
@@ -31196,11 +31949,17 @@
                     <a:lstStyle/>
                     <a:p>
                       <a:r>
-                        <a:rPr lang="en-US" dirty="0"/>
+                        <a:rPr lang="en-US" dirty="0">
+                          <a:latin typeface="Cambria Math" panose="02040503050406030204" pitchFamily="18" charset="0"/>
+                          <a:ea typeface="Cambria Math" panose="02040503050406030204" pitchFamily="18" charset="0"/>
+                        </a:rPr>
                         <a:t>r</a:t>
                       </a:r>
                       <a:r>
-                        <a:rPr lang="en-US" baseline="-25000" dirty="0"/>
+                        <a:rPr lang="en-US" baseline="-25000" dirty="0">
+                          <a:latin typeface="Cambria Math" panose="02040503050406030204" pitchFamily="18" charset="0"/>
+                          <a:ea typeface="Cambria Math" panose="02040503050406030204" pitchFamily="18" charset="0"/>
+                        </a:rPr>
                         <a:t>0</a:t>
                       </a:r>
                     </a:p>
@@ -31230,11 +31989,17 @@
                         <a:defRPr/>
                       </a:pPr>
                       <a:r>
-                        <a:rPr lang="en-US" dirty="0"/>
+                        <a:rPr lang="en-US" dirty="0">
+                          <a:latin typeface="Cambria Math" panose="02040503050406030204" pitchFamily="18" charset="0"/>
+                          <a:ea typeface="Cambria Math" panose="02040503050406030204" pitchFamily="18" charset="0"/>
+                        </a:rPr>
                         <a:t>r</a:t>
                       </a:r>
                       <a:r>
-                        <a:rPr lang="en-US" baseline="-25000" dirty="0"/>
+                        <a:rPr lang="en-US" baseline="-25000" dirty="0">
+                          <a:latin typeface="Cambria Math" panose="02040503050406030204" pitchFamily="18" charset="0"/>
+                          <a:ea typeface="Cambria Math" panose="02040503050406030204" pitchFamily="18" charset="0"/>
+                        </a:rPr>
                         <a:t>1</a:t>
                       </a:r>
                     </a:p>
@@ -31264,11 +32029,17 @@
                         <a:defRPr/>
                       </a:pPr>
                       <a:r>
-                        <a:rPr lang="en-US" dirty="0"/>
+                        <a:rPr lang="en-US" dirty="0">
+                          <a:latin typeface="Cambria Math" panose="02040503050406030204" pitchFamily="18" charset="0"/>
+                          <a:ea typeface="Cambria Math" panose="02040503050406030204" pitchFamily="18" charset="0"/>
+                        </a:rPr>
                         <a:t>r</a:t>
                       </a:r>
                       <a:r>
-                        <a:rPr lang="en-US" baseline="-25000" dirty="0"/>
+                        <a:rPr lang="en-US" baseline="-25000" dirty="0">
+                          <a:latin typeface="Cambria Math" panose="02040503050406030204" pitchFamily="18" charset="0"/>
+                          <a:ea typeface="Cambria Math" panose="02040503050406030204" pitchFamily="18" charset="0"/>
+                        </a:rPr>
                         <a:t>2</a:t>
                       </a:r>
                     </a:p>
@@ -31298,11 +32069,17 @@
                         <a:defRPr/>
                       </a:pPr>
                       <a:r>
-                        <a:rPr lang="en-US" dirty="0"/>
+                        <a:rPr lang="en-US" dirty="0">
+                          <a:latin typeface="Cambria Math" panose="02040503050406030204" pitchFamily="18" charset="0"/>
+                          <a:ea typeface="Cambria Math" panose="02040503050406030204" pitchFamily="18" charset="0"/>
+                        </a:rPr>
                         <a:t>t</a:t>
                       </a:r>
                       <a:r>
-                        <a:rPr lang="en-US" baseline="-25000" dirty="0"/>
+                        <a:rPr lang="en-US" baseline="-25000" dirty="0">
+                          <a:latin typeface="Cambria Math" panose="02040503050406030204" pitchFamily="18" charset="0"/>
+                          <a:ea typeface="Cambria Math" panose="02040503050406030204" pitchFamily="18" charset="0"/>
+                        </a:rPr>
                         <a:t>0</a:t>
                       </a:r>
                     </a:p>
@@ -31339,11 +32116,17 @@
                         <a:defRPr/>
                       </a:pPr>
                       <a:r>
-                        <a:rPr lang="en-US" dirty="0"/>
+                        <a:rPr lang="en-US" dirty="0">
+                          <a:latin typeface="Cambria Math" panose="02040503050406030204" pitchFamily="18" charset="0"/>
+                          <a:ea typeface="Cambria Math" panose="02040503050406030204" pitchFamily="18" charset="0"/>
+                        </a:rPr>
                         <a:t>r</a:t>
                       </a:r>
                       <a:r>
-                        <a:rPr lang="en-US" baseline="-25000" dirty="0"/>
+                        <a:rPr lang="en-US" baseline="-25000" dirty="0">
+                          <a:latin typeface="Cambria Math" panose="02040503050406030204" pitchFamily="18" charset="0"/>
+                          <a:ea typeface="Cambria Math" panose="02040503050406030204" pitchFamily="18" charset="0"/>
+                        </a:rPr>
                         <a:t>3</a:t>
                       </a:r>
                     </a:p>
@@ -31373,11 +32156,17 @@
                         <a:defRPr/>
                       </a:pPr>
                       <a:r>
-                        <a:rPr lang="en-US" dirty="0"/>
+                        <a:rPr lang="en-US" dirty="0">
+                          <a:latin typeface="Cambria Math" panose="02040503050406030204" pitchFamily="18" charset="0"/>
+                          <a:ea typeface="Cambria Math" panose="02040503050406030204" pitchFamily="18" charset="0"/>
+                        </a:rPr>
                         <a:t>r</a:t>
                       </a:r>
                       <a:r>
-                        <a:rPr lang="en-US" baseline="-25000" dirty="0"/>
+                        <a:rPr lang="en-US" baseline="-25000" dirty="0">
+                          <a:latin typeface="Cambria Math" panose="02040503050406030204" pitchFamily="18" charset="0"/>
+                          <a:ea typeface="Cambria Math" panose="02040503050406030204" pitchFamily="18" charset="0"/>
+                        </a:rPr>
                         <a:t>4</a:t>
                       </a:r>
                     </a:p>
@@ -31407,11 +32196,17 @@
                         <a:defRPr/>
                       </a:pPr>
                       <a:r>
-                        <a:rPr lang="en-US" dirty="0"/>
+                        <a:rPr lang="en-US" dirty="0">
+                          <a:latin typeface="Cambria Math" panose="02040503050406030204" pitchFamily="18" charset="0"/>
+                          <a:ea typeface="Cambria Math" panose="02040503050406030204" pitchFamily="18" charset="0"/>
+                        </a:rPr>
                         <a:t>r</a:t>
                       </a:r>
                       <a:r>
-                        <a:rPr lang="en-US" baseline="-25000" dirty="0"/>
+                        <a:rPr lang="en-US" baseline="-25000" dirty="0">
+                          <a:latin typeface="Cambria Math" panose="02040503050406030204" pitchFamily="18" charset="0"/>
+                          <a:ea typeface="Cambria Math" panose="02040503050406030204" pitchFamily="18" charset="0"/>
+                        </a:rPr>
                         <a:t>5</a:t>
                       </a:r>
                     </a:p>
@@ -31441,11 +32236,17 @@
                         <a:defRPr/>
                       </a:pPr>
                       <a:r>
-                        <a:rPr lang="en-US" dirty="0"/>
+                        <a:rPr lang="en-US" dirty="0">
+                          <a:latin typeface="Cambria Math" panose="02040503050406030204" pitchFamily="18" charset="0"/>
+                          <a:ea typeface="Cambria Math" panose="02040503050406030204" pitchFamily="18" charset="0"/>
+                        </a:rPr>
                         <a:t>t</a:t>
                       </a:r>
                       <a:r>
-                        <a:rPr lang="en-US" baseline="-25000" dirty="0"/>
+                        <a:rPr lang="en-US" baseline="-25000" dirty="0">
+                          <a:latin typeface="Cambria Math" panose="02040503050406030204" pitchFamily="18" charset="0"/>
+                          <a:ea typeface="Cambria Math" panose="02040503050406030204" pitchFamily="18" charset="0"/>
+                        </a:rPr>
                         <a:t>1</a:t>
                       </a:r>
                     </a:p>
@@ -31482,11 +32283,17 @@
                         <a:defRPr/>
                       </a:pPr>
                       <a:r>
-                        <a:rPr lang="en-US" dirty="0"/>
+                        <a:rPr lang="en-US" dirty="0">
+                          <a:latin typeface="Cambria Math" panose="02040503050406030204" pitchFamily="18" charset="0"/>
+                          <a:ea typeface="Cambria Math" panose="02040503050406030204" pitchFamily="18" charset="0"/>
+                        </a:rPr>
                         <a:t>r</a:t>
                       </a:r>
                       <a:r>
-                        <a:rPr lang="en-US" baseline="-25000" dirty="0"/>
+                        <a:rPr lang="en-US" baseline="-25000" dirty="0">
+                          <a:latin typeface="Cambria Math" panose="02040503050406030204" pitchFamily="18" charset="0"/>
+                          <a:ea typeface="Cambria Math" panose="02040503050406030204" pitchFamily="18" charset="0"/>
+                        </a:rPr>
                         <a:t>6</a:t>
                       </a:r>
                     </a:p>
@@ -31516,11 +32323,17 @@
                         <a:defRPr/>
                       </a:pPr>
                       <a:r>
-                        <a:rPr lang="en-US" dirty="0"/>
+                        <a:rPr lang="en-US" dirty="0">
+                          <a:latin typeface="Cambria Math" panose="02040503050406030204" pitchFamily="18" charset="0"/>
+                          <a:ea typeface="Cambria Math" panose="02040503050406030204" pitchFamily="18" charset="0"/>
+                        </a:rPr>
                         <a:t>r</a:t>
                       </a:r>
                       <a:r>
-                        <a:rPr lang="en-US" baseline="-25000" dirty="0"/>
+                        <a:rPr lang="en-US" baseline="-25000" dirty="0">
+                          <a:latin typeface="Cambria Math" panose="02040503050406030204" pitchFamily="18" charset="0"/>
+                          <a:ea typeface="Cambria Math" panose="02040503050406030204" pitchFamily="18" charset="0"/>
+                        </a:rPr>
                         <a:t>7</a:t>
                       </a:r>
                     </a:p>
@@ -31550,11 +32363,17 @@
                         <a:defRPr/>
                       </a:pPr>
                       <a:r>
-                        <a:rPr lang="en-US" dirty="0"/>
+                        <a:rPr lang="en-US" dirty="0">
+                          <a:latin typeface="Cambria Math" panose="02040503050406030204" pitchFamily="18" charset="0"/>
+                          <a:ea typeface="Cambria Math" panose="02040503050406030204" pitchFamily="18" charset="0"/>
+                        </a:rPr>
                         <a:t>r</a:t>
                       </a:r>
                       <a:r>
-                        <a:rPr lang="en-US" baseline="-25000" dirty="0"/>
+                        <a:rPr lang="en-US" baseline="-25000" dirty="0">
+                          <a:latin typeface="Cambria Math" panose="02040503050406030204" pitchFamily="18" charset="0"/>
+                          <a:ea typeface="Cambria Math" panose="02040503050406030204" pitchFamily="18" charset="0"/>
+                        </a:rPr>
                         <a:t>8</a:t>
                       </a:r>
                     </a:p>
@@ -31584,11 +32403,17 @@
                         <a:defRPr/>
                       </a:pPr>
                       <a:r>
-                        <a:rPr lang="en-US" dirty="0"/>
+                        <a:rPr lang="en-US" dirty="0">
+                          <a:latin typeface="Cambria Math" panose="02040503050406030204" pitchFamily="18" charset="0"/>
+                          <a:ea typeface="Cambria Math" panose="02040503050406030204" pitchFamily="18" charset="0"/>
+                        </a:rPr>
                         <a:t>t</a:t>
                       </a:r>
                       <a:r>
-                        <a:rPr lang="en-US" baseline="-25000" dirty="0"/>
+                        <a:rPr lang="en-US" baseline="-25000" dirty="0">
+                          <a:latin typeface="Cambria Math" panose="02040503050406030204" pitchFamily="18" charset="0"/>
+                          <a:ea typeface="Cambria Math" panose="02040503050406030204" pitchFamily="18" charset="0"/>
+                        </a:rPr>
                         <a:t>2</a:t>
                       </a:r>
                     </a:p>
@@ -31608,7 +32433,10 @@
                     <a:lstStyle/>
                     <a:p>
                       <a:r>
-                        <a:rPr lang="en-US" dirty="0"/>
+                        <a:rPr lang="en-US" dirty="0">
+                          <a:latin typeface="Cambria Math" panose="02040503050406030204" pitchFamily="18" charset="0"/>
+                          <a:ea typeface="Cambria Math" panose="02040503050406030204" pitchFamily="18" charset="0"/>
+                        </a:rPr>
                         <a:t>0</a:t>
                       </a:r>
                     </a:p>
@@ -31621,7 +32449,10 @@
                     <a:lstStyle/>
                     <a:p>
                       <a:r>
-                        <a:rPr lang="en-US" dirty="0"/>
+                        <a:rPr lang="en-US" dirty="0">
+                          <a:latin typeface="Cambria Math" panose="02040503050406030204" pitchFamily="18" charset="0"/>
+                          <a:ea typeface="Cambria Math" panose="02040503050406030204" pitchFamily="18" charset="0"/>
+                        </a:rPr>
                         <a:t>0</a:t>
                       </a:r>
                     </a:p>
@@ -31634,7 +32465,10 @@
                     <a:lstStyle/>
                     <a:p>
                       <a:r>
-                        <a:rPr lang="en-US" dirty="0"/>
+                        <a:rPr lang="en-US" dirty="0">
+                          <a:latin typeface="Cambria Math" panose="02040503050406030204" pitchFamily="18" charset="0"/>
+                          <a:ea typeface="Cambria Math" panose="02040503050406030204" pitchFamily="18" charset="0"/>
+                        </a:rPr>
                         <a:t>0</a:t>
                       </a:r>
                     </a:p>
@@ -31647,7 +32481,10 @@
                     <a:lstStyle/>
                     <a:p>
                       <a:r>
-                        <a:rPr lang="en-US" dirty="0"/>
+                        <a:rPr lang="en-US" dirty="0">
+                          <a:latin typeface="Cambria Math" panose="02040503050406030204" pitchFamily="18" charset="0"/>
+                          <a:ea typeface="Cambria Math" panose="02040503050406030204" pitchFamily="18" charset="0"/>
+                        </a:rPr>
                         <a:t>1</a:t>
                       </a:r>
                     </a:p>
@@ -31678,8 +32515,8 @@
         </p:nvSpPr>
         <p:spPr>
           <a:xfrm>
-            <a:off x="6253777" y="1876889"/>
-            <a:ext cx="1586970" cy="307777"/>
+            <a:off x="6258535" y="1786650"/>
+            <a:ext cx="1586970" cy="523220"/>
           </a:xfrm>
           <a:prstGeom prst="rect">
             <a:avLst/>
@@ -31708,7 +32545,7 @@
             </a:r>
             <a:r>
               <a:rPr lang="en-US" sz="1400" dirty="0">
-                <a:latin typeface="Times New Roman"/>
+                <a:latin typeface="游ゴシック Medium" panose="020B0500000000000000" pitchFamily="50" charset="-128"/>
                 <a:ea typeface="游ゴシック Medium"/>
                 <a:cs typeface="Times New Roman"/>
               </a:rPr>
@@ -31731,8 +32568,8 @@
         </p:nvSpPr>
         <p:spPr>
           <a:xfrm>
-            <a:off x="6253777" y="2263973"/>
-            <a:ext cx="1800741" cy="307777"/>
+            <a:off x="6258535" y="2173734"/>
+            <a:ext cx="1800741" cy="523220"/>
           </a:xfrm>
           <a:prstGeom prst="rect">
             <a:avLst/>
@@ -31761,7 +32598,7 @@
             </a:r>
             <a:r>
               <a:rPr lang="en-US" sz="1400" dirty="0">
-                <a:latin typeface="Times New Roman"/>
+                <a:latin typeface="游ゴシック Medium" panose="020B0500000000000000" pitchFamily="50" charset="-128"/>
                 <a:ea typeface="游ゴシック Medium"/>
                 <a:cs typeface="Times New Roman"/>
               </a:rPr>
@@ -31784,7 +32621,7 @@
         </p:nvSpPr>
         <p:spPr>
           <a:xfrm>
-            <a:off x="3828892" y="1585619"/>
+            <a:off x="3833650" y="1495380"/>
             <a:ext cx="240909" cy="1403872"/>
           </a:xfrm>
           <a:prstGeom prst="leftBracket">
@@ -31830,7 +32667,7 @@
         </p:nvSpPr>
         <p:spPr>
           <a:xfrm rot="10800000">
-            <a:off x="5694513" y="1585619"/>
+            <a:off x="5699271" y="1495380"/>
             <a:ext cx="240909" cy="1403872"/>
           </a:xfrm>
           <a:prstGeom prst="leftBracket">
@@ -31876,8 +32713,8 @@
         </p:nvSpPr>
         <p:spPr>
           <a:xfrm>
-            <a:off x="3346152" y="3214026"/>
-            <a:ext cx="3531866" cy="1600438"/>
+            <a:off x="3330494" y="3220982"/>
+            <a:ext cx="5117108" cy="1600438"/>
           </a:xfrm>
           <a:prstGeom prst="rect">
             <a:avLst/>
@@ -31892,7 +32729,7 @@
           <a:p>
             <a:r>
               <a:rPr lang="en-US" sz="1400" dirty="0">
-                <a:latin typeface="Medium"/>
+                <a:latin typeface="游ゴシック Medium" panose="020B0500000000000000" pitchFamily="50" charset="-128"/>
                 <a:ea typeface="游ゴシック Medium"/>
                 <a:cs typeface="Times New Roman"/>
               </a:rPr>
@@ -31900,7 +32737,7 @@
             </a:r>
             <a:r>
               <a:rPr lang="en-US" sz="1400" baseline="-25000" dirty="0">
-                <a:latin typeface="Medium"/>
+                <a:latin typeface="游ゴシック Medium" panose="020B0500000000000000" pitchFamily="50" charset="-128"/>
                 <a:ea typeface="游ゴシック Medium"/>
                 <a:cs typeface="Times New Roman"/>
               </a:rPr>
@@ -31908,7 +32745,7 @@
             </a:r>
             <a:r>
               <a:rPr lang="en-US" sz="1400" dirty="0">
-                <a:latin typeface="Medium"/>
+                <a:latin typeface="游ゴシック Medium" panose="020B0500000000000000" pitchFamily="50" charset="-128"/>
               </a:rPr>
               <a:t>: Absolute pose (relative to starting point)</a:t>
             </a:r>
@@ -31916,23 +32753,20 @@
           <a:p>
             <a:r>
               <a:rPr lang="en-US" sz="1400" dirty="0">
-                <a:latin typeface="Medium"/>
+                <a:latin typeface="游ゴシック Medium" panose="020B0500000000000000" pitchFamily="50" charset="-128"/>
               </a:rPr>
               <a:t>➔ How do I rotate and translate to get from the starting point to the current node?</a:t>
             </a:r>
           </a:p>
           <a:p>
             <a:endParaRPr lang="en-US" sz="1400" dirty="0">
-              <a:latin typeface="Medium"/>
+              <a:latin typeface="游ゴシック Medium" panose="020B0500000000000000" pitchFamily="50" charset="-128"/>
             </a:endParaRPr>
           </a:p>
           <a:p>
             <a:r>
               <a:rPr lang="en-US" sz="1400" dirty="0">
-                <a:solidFill>
-                  <a:schemeClr val="accent1"/>
-                </a:solidFill>
-                <a:latin typeface="Medium"/>
+                <a:latin typeface="游ゴシック Medium" panose="020B0500000000000000" pitchFamily="50" charset="-128"/>
                 <a:ea typeface="游ゴシック Medium"/>
                 <a:cs typeface="Times New Roman"/>
               </a:rPr>
@@ -31940,10 +32774,7 @@
             </a:r>
             <a:r>
               <a:rPr lang="en-US" sz="1400" baseline="-25000" dirty="0">
-                <a:solidFill>
-                  <a:schemeClr val="accent1"/>
-                </a:solidFill>
-                <a:latin typeface="Medium"/>
+                <a:latin typeface="游ゴシック Medium" panose="020B0500000000000000" pitchFamily="50" charset="-128"/>
                 <a:ea typeface="游ゴシック Medium"/>
                 <a:cs typeface="Times New Roman"/>
               </a:rPr>
@@ -31951,10 +32782,7 @@
             </a:r>
             <a:r>
               <a:rPr lang="en-US" sz="1400" dirty="0">
-                <a:solidFill>
-                  <a:schemeClr val="accent1"/>
-                </a:solidFill>
-                <a:latin typeface="Medium"/>
+                <a:latin typeface="游ゴシック Medium" panose="020B0500000000000000" pitchFamily="50" charset="-128"/>
               </a:rPr>
               <a:t>: Relative transform between nodes</a:t>
             </a:r>
@@ -31962,10 +32790,7 @@
           <a:p>
             <a:r>
               <a:rPr lang="en-US" sz="1400" dirty="0">
-                <a:solidFill>
-                  <a:schemeClr val="accent1"/>
-                </a:solidFill>
-                <a:latin typeface="Medium"/>
+                <a:latin typeface="游ゴシック Medium" panose="020B0500000000000000" pitchFamily="50" charset="-128"/>
               </a:rPr>
               <a:t>➔ How do I rotate and translate to get from one node to the next?</a:t>
             </a:r>
@@ -32083,7 +32908,7 @@
         <p:spPr>
           <a:xfrm>
             <a:off x="899592" y="947090"/>
-            <a:ext cx="4536504" cy="3856908"/>
+            <a:ext cx="5400600" cy="3856908"/>
           </a:xfrm>
           <a:prstGeom prst="rect">
             <a:avLst/>
@@ -32346,7 +33171,6 @@
             </a:pPr>
             <a:r>
               <a:rPr lang="en-US" sz="2000" b="0" dirty="0">
-                <a:latin typeface="Times New Roman"/>
                 <a:ea typeface="游ゴシック Medium"/>
                 <a:cs typeface="Times New Roman"/>
               </a:rPr>
@@ -32362,7 +33186,6 @@
               <a:buNone/>
             </a:pPr>
             <a:endParaRPr lang="en-US" sz="2000" b="0" dirty="0">
-              <a:latin typeface="Times New Roman"/>
               <a:ea typeface="游ゴシック Medium"/>
               <a:cs typeface="Times New Roman"/>
             </a:endParaRPr>
@@ -32376,7 +33199,6 @@
             </a:pPr>
             <a:r>
               <a:rPr lang="en-US" sz="2000" b="0" dirty="0">
-                <a:latin typeface="Times New Roman"/>
                 <a:ea typeface="游ゴシック Medium"/>
                 <a:cs typeface="Times New Roman"/>
               </a:rPr>
@@ -32391,7 +33213,6 @@
               <a:buNone/>
             </a:pPr>
             <a:endParaRPr lang="en-US" sz="2000" b="0" dirty="0">
-              <a:latin typeface="Times New Roman"/>
               <a:ea typeface="游ゴシック Medium"/>
               <a:cs typeface="Times New Roman"/>
             </a:endParaRPr>
@@ -32405,7 +33226,6 @@
             </a:pPr>
             <a:r>
               <a:rPr lang="en-US" sz="2000" b="0" dirty="0">
-                <a:latin typeface="Times New Roman"/>
                 <a:ea typeface="游ゴシック Medium"/>
                 <a:cs typeface="Times New Roman"/>
               </a:rPr>
@@ -32420,7 +33240,6 @@
               <a:buNone/>
             </a:pPr>
             <a:endParaRPr lang="en-US" sz="2000" b="0" dirty="0">
-              <a:latin typeface="Times New Roman"/>
               <a:ea typeface="游ゴシック Medium"/>
               <a:cs typeface="Times New Roman"/>
             </a:endParaRPr>
@@ -32434,7 +33253,6 @@
             </a:pPr>
             <a:r>
               <a:rPr lang="en-US" sz="2000" b="0" dirty="0">
-                <a:latin typeface="Times New Roman"/>
                 <a:ea typeface="游ゴシック Medium"/>
                 <a:cs typeface="Times New Roman"/>
               </a:rPr>
@@ -32449,7 +33267,6 @@
               <a:buNone/>
             </a:pPr>
             <a:endParaRPr lang="en-US" sz="2000" b="0" dirty="0">
-              <a:latin typeface="Times New Roman"/>
               <a:ea typeface="游ゴシック Medium"/>
               <a:cs typeface="Times New Roman"/>
             </a:endParaRPr>
@@ -32463,7 +33280,6 @@
             </a:pPr>
             <a:r>
               <a:rPr lang="en-US" sz="2000" b="0" dirty="0">
-                <a:latin typeface="Times New Roman"/>
                 <a:ea typeface="游ゴシック Medium"/>
                 <a:cs typeface="Times New Roman"/>
               </a:rPr>
@@ -32478,7 +33294,6 @@
               <a:buNone/>
             </a:pPr>
             <a:endParaRPr lang="en-US" sz="2000" b="0" dirty="0">
-              <a:latin typeface="Times New Roman"/>
               <a:ea typeface="游ゴシック Medium"/>
               <a:cs typeface="Times New Roman"/>
             </a:endParaRPr>
@@ -32491,7 +33306,6 @@
               <a:buNone/>
             </a:pPr>
             <a:endParaRPr lang="en-US" sz="2000" b="0" dirty="0">
-              <a:latin typeface="Times New Roman"/>
               <a:ea typeface="游ゴシック Medium"/>
               <a:cs typeface="Times New Roman"/>
             </a:endParaRPr>
@@ -32505,7 +33319,6 @@
               <a:buNone/>
             </a:pPr>
             <a:endParaRPr lang="en-US" sz="2000" b="0" dirty="0">
-              <a:latin typeface="Times New Roman"/>
               <a:ea typeface="游ゴシック Medium"/>
               <a:cs typeface="Times New Roman"/>
             </a:endParaRPr>
@@ -32791,7 +33604,6 @@
               <a:buNone/>
             </a:pPr>
             <a:endParaRPr lang="en-US" sz="2000" b="0" dirty="0">
-              <a:latin typeface="Times New Roman"/>
               <a:ea typeface="游ゴシック Medium"/>
               <a:cs typeface="Times New Roman"/>
             </a:endParaRPr>
@@ -32812,7 +33624,7 @@
         </p:nvSpPr>
         <p:spPr>
           <a:xfrm>
-            <a:off x="522747" y="947090"/>
+            <a:off x="538461" y="923720"/>
             <a:ext cx="360040" cy="360040"/>
           </a:xfrm>
           <a:prstGeom prst="flowChartConnector">
@@ -32864,7 +33676,7 @@
         </p:nvSpPr>
         <p:spPr>
           <a:xfrm>
-            <a:off x="539552" y="1733034"/>
+            <a:off x="538461" y="1689528"/>
             <a:ext cx="360040" cy="360040"/>
           </a:xfrm>
           <a:prstGeom prst="flowChartConnector">
@@ -32916,7 +33728,7 @@
         </p:nvSpPr>
         <p:spPr>
           <a:xfrm>
-            <a:off x="539552" y="2515504"/>
+            <a:off x="538461" y="2452645"/>
             <a:ext cx="360040" cy="360040"/>
           </a:xfrm>
           <a:prstGeom prst="flowChartConnector">
@@ -32968,7 +33780,7 @@
         </p:nvSpPr>
         <p:spPr>
           <a:xfrm>
-            <a:off x="552748" y="3297974"/>
+            <a:off x="537370" y="3246763"/>
             <a:ext cx="360040" cy="360040"/>
           </a:xfrm>
           <a:prstGeom prst="flowChartConnector">
@@ -33020,7 +33832,7 @@
         </p:nvSpPr>
         <p:spPr>
           <a:xfrm>
-            <a:off x="565944" y="4080444"/>
+            <a:off x="550566" y="4040881"/>
             <a:ext cx="360040" cy="360040"/>
           </a:xfrm>
           <a:prstGeom prst="flowChartConnector">
@@ -33156,7 +33968,6 @@
             </a:pPr>
             <a:r>
               <a:rPr lang="en-US" sz="2400" b="0" dirty="0">
-                <a:latin typeface="Times New Roman"/>
                 <a:ea typeface="游ゴシック Medium"/>
                 <a:cs typeface="Times New Roman"/>
               </a:rPr>
@@ -33182,7 +33993,7 @@
         <p:spPr>
           <a:xfrm>
             <a:off x="5174865" y="1957018"/>
-            <a:ext cx="2889523" cy="1885985"/>
+            <a:ext cx="3501591" cy="2054892"/>
           </a:xfrm>
           <a:prstGeom prst="rect">
             <a:avLst/>
@@ -33443,7 +34254,6 @@
             </a:pPr>
             <a:r>
               <a:rPr lang="en-US" sz="2000" b="0" dirty="0">
-                <a:latin typeface="Times New Roman"/>
                 <a:ea typeface="游ゴシック Medium"/>
                 <a:cs typeface="Times New Roman"/>
               </a:rPr>
@@ -33458,15 +34268,37 @@
             </a:pPr>
             <a:r>
               <a:rPr lang="en-US" sz="1850" b="0" dirty="0">
-                <a:latin typeface="Times New Roman"/>
                 <a:ea typeface="游ゴシック Medium"/>
                 <a:cs typeface="Times New Roman"/>
               </a:rPr>
-              <a:t>absolute poses </a:t>
+              <a:t>absolute poses T</a:t>
+            </a:r>
+            <a:r>
+              <a:rPr lang="en-US" sz="1850" b="0" baseline="-25000" dirty="0">
+                <a:ea typeface="游ゴシック Medium"/>
+                <a:cs typeface="Times New Roman"/>
+              </a:rPr>
+              <a:t>i</a:t>
+            </a:r>
+          </a:p>
+          <a:p>
+            <a:pPr lvl="1">
+              <a:buClr>
+                <a:srgbClr val="9E3611"/>
+              </a:buClr>
+            </a:pPr>
+            <a:r>
+              <a:rPr lang="en-US" sz="1850" b="0" dirty="0">
+                <a:ea typeface="游ゴシック Medium"/>
+                <a:cs typeface="Times New Roman"/>
+              </a:rPr>
+              <a:t>relative transforms </a:t>
             </a:r>
             <a:r>
               <a:rPr lang="en-US" sz="1850" b="0" dirty="0">
-                <a:latin typeface="Medium"/>
+                <a:solidFill>
+                  <a:schemeClr val="accent1"/>
+                </a:solidFill>
                 <a:ea typeface="游ゴシック Medium"/>
                 <a:cs typeface="Times New Roman"/>
               </a:rPr>
@@ -33474,49 +34306,9 @@
             </a:r>
             <a:r>
               <a:rPr lang="en-US" sz="1850" b="0" baseline="-25000" dirty="0">
-                <a:latin typeface="Medium"/>
-                <a:ea typeface="游ゴシック Medium"/>
-                <a:cs typeface="Times New Roman"/>
-              </a:rPr>
-              <a:t>i</a:t>
-            </a:r>
-            <a:endParaRPr lang="en-US" sz="1850" b="0" baseline="-25000" dirty="0">
-              <a:latin typeface="Times New Roman"/>
-              <a:ea typeface="游ゴシック Medium"/>
-              <a:cs typeface="Times New Roman"/>
-            </a:endParaRPr>
-          </a:p>
-          <a:p>
-            <a:pPr lvl="1">
-              <a:buClr>
-                <a:srgbClr val="9E3611"/>
-              </a:buClr>
-            </a:pPr>
-            <a:r>
-              <a:rPr lang="en-US" sz="1850" b="0" dirty="0">
-                <a:latin typeface="Times New Roman"/>
-                <a:ea typeface="游ゴシック Medium"/>
-                <a:cs typeface="Times New Roman"/>
-              </a:rPr>
-              <a:t>relative transforms </a:t>
-            </a:r>
-            <a:r>
-              <a:rPr lang="en-US" sz="1850" b="0" dirty="0">
                 <a:solidFill>
                   <a:schemeClr val="accent1"/>
                 </a:solidFill>
-                <a:latin typeface="Medium"/>
-                <a:ea typeface="游ゴシック Medium"/>
-                <a:cs typeface="Times New Roman"/>
-              </a:rPr>
-              <a:t>T</a:t>
-            </a:r>
-            <a:r>
-              <a:rPr lang="en-US" sz="1850" b="0" baseline="-25000" dirty="0">
-                <a:solidFill>
-                  <a:schemeClr val="accent1"/>
-                </a:solidFill>
-                <a:latin typeface="Medium"/>
                 <a:ea typeface="游ゴシック Medium"/>
                 <a:cs typeface="Times New Roman"/>
               </a:rPr>
@@ -33526,7 +34318,6 @@
               <a:solidFill>
                 <a:schemeClr val="accent1"/>
               </a:solidFill>
-              <a:latin typeface="Times New Roman"/>
               <a:ea typeface="游ゴシック Medium"/>
               <a:cs typeface="Times New Roman"/>
             </a:endParaRPr>
@@ -33539,7 +34330,6 @@
             </a:pPr>
             <a:r>
               <a:rPr lang="en-US" sz="2000" b="0" dirty="0">
-                <a:latin typeface="Times New Roman"/>
                 <a:ea typeface="游ゴシック Medium"/>
                 <a:cs typeface="Times New Roman"/>
               </a:rPr>
@@ -33554,7 +34344,6 @@
             </a:pPr>
             <a:r>
               <a:rPr lang="en-US" sz="2000" b="0" dirty="0">
-                <a:latin typeface="Times New Roman"/>
                 <a:ea typeface="游ゴシック Medium"/>
                 <a:cs typeface="Times New Roman"/>
               </a:rPr>
@@ -33569,7 +34358,6 @@
               <a:buNone/>
             </a:pPr>
             <a:endParaRPr lang="en-US" sz="2000" b="0" dirty="0">
-              <a:latin typeface="Times New Roman"/>
               <a:ea typeface="游ゴシック Medium"/>
               <a:cs typeface="Times New Roman"/>
             </a:endParaRPr>
@@ -33583,7 +34371,6 @@
               <a:buNone/>
             </a:pPr>
             <a:endParaRPr lang="en-US" sz="2000" b="0" dirty="0">
-              <a:latin typeface="Times New Roman"/>
               <a:ea typeface="游ゴシック Medium"/>
               <a:cs typeface="Times New Roman"/>
             </a:endParaRPr>
@@ -33740,7 +34527,7 @@
         <p:spPr>
           <a:xfrm>
             <a:off x="1079612" y="2699956"/>
-            <a:ext cx="1267848" cy="400110"/>
+            <a:ext cx="1438214" cy="400110"/>
           </a:xfrm>
           <a:prstGeom prst="rect">
             <a:avLst/>
@@ -33755,7 +34542,7 @@
           <a:p>
             <a:r>
               <a:rPr lang="en-US" sz="2000" dirty="0">
-                <a:latin typeface="Medium"/>
+                <a:latin typeface="游ゴシック Medium" panose="020B0500000000000000" pitchFamily="50" charset="-128"/>
               </a:rPr>
               <a:t>UR frames</a:t>
             </a:r>
@@ -33953,7 +34740,6 @@
             </a:pPr>
             <a:r>
               <a:rPr lang="en-US" sz="2400" b="0" dirty="0">
-                <a:latin typeface="Times New Roman"/>
                 <a:ea typeface="游ゴシック Medium"/>
                 <a:cs typeface="Times New Roman"/>
               </a:rPr>
@@ -33978,8 +34764,8 @@
         </p:nvSpPr>
         <p:spPr>
           <a:xfrm>
-            <a:off x="531559" y="1619015"/>
-            <a:ext cx="797014" cy="720080"/>
+            <a:off x="536218" y="1928804"/>
+            <a:ext cx="939437" cy="720080"/>
           </a:xfrm>
           <a:prstGeom prst="rect">
             <a:avLst/>
@@ -34241,7 +35027,6 @@
             </a:pPr>
             <a:r>
               <a:rPr lang="en-US" sz="2000" b="0" dirty="0">
-                <a:latin typeface="Medium"/>
                 <a:ea typeface="游ゴシック Medium"/>
                 <a:cs typeface="Times New Roman"/>
               </a:rPr>
@@ -34249,7 +35034,6 @@
             </a:r>
             <a:r>
               <a:rPr lang="en-US" sz="2000" b="0" baseline="-25000" dirty="0">
-                <a:latin typeface="Medium"/>
                 <a:ea typeface="游ゴシック Medium"/>
                 <a:cs typeface="Times New Roman"/>
               </a:rPr>
@@ -34264,32 +35048,20 @@
               <a:buNone/>
             </a:pPr>
             <a:r>
-              <a:rPr lang="en-US" sz="2000" dirty="0">
-                <a:solidFill>
-                  <a:schemeClr val="accent1"/>
-                </a:solidFill>
-                <a:latin typeface="Medium"/>
+              <a:rPr lang="en-US" sz="2000" b="0" dirty="0">
                 <a:ea typeface="游ゴシック Medium"/>
                 <a:cs typeface="Times New Roman"/>
               </a:rPr>
               <a:t>T</a:t>
             </a:r>
             <a:r>
-              <a:rPr lang="en-US" sz="2000" baseline="-25000" dirty="0">
-                <a:solidFill>
-                  <a:schemeClr val="accent1"/>
-                </a:solidFill>
-                <a:latin typeface="Medium"/>
+              <a:rPr lang="en-US" sz="2000" b="0" baseline="-25000" dirty="0">
                 <a:ea typeface="游ゴシック Medium"/>
                 <a:cs typeface="Times New Roman"/>
               </a:rPr>
               <a:t>i→i+1</a:t>
             </a:r>
             <a:endParaRPr lang="en-US" sz="2000" b="0" dirty="0">
-              <a:solidFill>
-                <a:schemeClr val="accent1"/>
-              </a:solidFill>
-              <a:latin typeface="Times New Roman"/>
               <a:ea typeface="游ゴシック Medium"/>
               <a:cs typeface="Times New Roman"/>
             </a:endParaRPr>
@@ -34348,308 +35120,6 @@
           </a:p>
         </p:txBody>
       </p:sp>
-      <p:sp>
-        <p:nvSpPr>
-          <p:cNvPr id="7" name="Text Placeholder 1">
-            <a:extLst>
-              <a:ext uri="{FF2B5EF4-FFF2-40B4-BE49-F238E27FC236}">
-                <a16:creationId xmlns:a16="http://schemas.microsoft.com/office/drawing/2014/main" id="{B73B493C-C770-A697-120B-49BE18DA6B0D}"/>
-              </a:ext>
-            </a:extLst>
-          </p:cNvPr>
-          <p:cNvSpPr txBox="1">
-            <a:spLocks/>
-          </p:cNvSpPr>
-          <p:nvPr/>
-        </p:nvSpPr>
-        <p:spPr>
-          <a:xfrm>
-            <a:off x="2413234" y="3460931"/>
-            <a:ext cx="2155313" cy="429556"/>
-          </a:xfrm>
-          <a:prstGeom prst="rect">
-            <a:avLst/>
-          </a:prstGeom>
-          <a:noFill/>
-        </p:spPr>
-        <p:txBody>
-          <a:bodyPr vert="horz" lIns="91440" tIns="45720" rIns="91440" bIns="45720" rtlCol="0" anchor="t">
-            <a:noAutofit/>
-          </a:bodyPr>
-          <a:lstStyle>
-            <a:lvl1pPr marL="137160" indent="-137160" algn="l" defTabSz="685800" rtl="0" eaLnBrk="1" latinLnBrk="0" hangingPunct="1">
-              <a:lnSpc>
-                <a:spcPct val="90000"/>
-              </a:lnSpc>
-              <a:spcBef>
-                <a:spcPts val="900"/>
-              </a:spcBef>
-              <a:buClr>
-                <a:schemeClr val="accent1">
-                  <a:lumMod val="75000"/>
-                </a:schemeClr>
-              </a:buClr>
-              <a:buSzPct val="100000"/>
-              <a:buFont typeface="Arial" panose="020B0604020202020204" pitchFamily="34" charset="0"/>
-              <a:buChar char="•"/>
-              <a:defRPr kumimoji="1" sz="1500" b="1" kern="1200">
-                <a:solidFill>
-                  <a:schemeClr val="tx1"/>
-                </a:solidFill>
-                <a:latin typeface="游ゴシック Medium" panose="020B0500000000000000" pitchFamily="50" charset="-128"/>
-                <a:ea typeface="游ゴシック Medium" panose="020B0500000000000000" pitchFamily="50" charset="-128"/>
-                <a:cs typeface="+mn-cs"/>
-              </a:defRPr>
-            </a:lvl1pPr>
-            <a:lvl2pPr marL="342900" indent="-137160" algn="l" defTabSz="685800" rtl="0" eaLnBrk="1" latinLnBrk="0" hangingPunct="1">
-              <a:lnSpc>
-                <a:spcPct val="90000"/>
-              </a:lnSpc>
-              <a:spcBef>
-                <a:spcPts val="300"/>
-              </a:spcBef>
-              <a:spcAft>
-                <a:spcPts val="150"/>
-              </a:spcAft>
-              <a:buClr>
-                <a:schemeClr val="accent1">
-                  <a:lumMod val="75000"/>
-                </a:schemeClr>
-              </a:buClr>
-              <a:buSzPct val="100000"/>
-              <a:buFont typeface="Arial" panose="020B0604020202020204" pitchFamily="34" charset="0"/>
-              <a:buChar char="•"/>
-              <a:defRPr kumimoji="1" sz="1350" b="1" kern="1200">
-                <a:solidFill>
-                  <a:schemeClr val="tx1"/>
-                </a:solidFill>
-                <a:latin typeface="游ゴシック Medium" panose="020B0500000000000000" pitchFamily="50" charset="-128"/>
-                <a:ea typeface="游ゴシック Medium" panose="020B0500000000000000" pitchFamily="50" charset="-128"/>
-                <a:cs typeface="+mn-cs"/>
-              </a:defRPr>
-            </a:lvl2pPr>
-            <a:lvl3pPr marL="548640" indent="-137160" algn="l" defTabSz="685800" rtl="0" eaLnBrk="1" latinLnBrk="0" hangingPunct="1">
-              <a:lnSpc>
-                <a:spcPct val="90000"/>
-              </a:lnSpc>
-              <a:spcBef>
-                <a:spcPts val="300"/>
-              </a:spcBef>
-              <a:spcAft>
-                <a:spcPts val="150"/>
-              </a:spcAft>
-              <a:buClr>
-                <a:schemeClr val="accent1">
-                  <a:lumMod val="75000"/>
-                </a:schemeClr>
-              </a:buClr>
-              <a:buSzPct val="100000"/>
-              <a:buFont typeface="Arial" panose="020B0604020202020204" pitchFamily="34" charset="0"/>
-              <a:buChar char="•"/>
-              <a:defRPr kumimoji="1" sz="1200" b="1" kern="1200">
-                <a:solidFill>
-                  <a:schemeClr val="tx1"/>
-                </a:solidFill>
-                <a:latin typeface="游ゴシック Medium" panose="020B0500000000000000" pitchFamily="50" charset="-128"/>
-                <a:ea typeface="游ゴシック Medium" panose="020B0500000000000000" pitchFamily="50" charset="-128"/>
-                <a:cs typeface="+mn-cs"/>
-              </a:defRPr>
-            </a:lvl3pPr>
-            <a:lvl4pPr marL="754380" indent="-137160" algn="l" defTabSz="685800" rtl="0" eaLnBrk="1" latinLnBrk="0" hangingPunct="1">
-              <a:lnSpc>
-                <a:spcPct val="90000"/>
-              </a:lnSpc>
-              <a:spcBef>
-                <a:spcPts val="300"/>
-              </a:spcBef>
-              <a:spcAft>
-                <a:spcPts val="150"/>
-              </a:spcAft>
-              <a:buClr>
-                <a:schemeClr val="accent1">
-                  <a:lumMod val="75000"/>
-                </a:schemeClr>
-              </a:buClr>
-              <a:buSzPct val="100000"/>
-              <a:buFont typeface="Arial" panose="020B0604020202020204" pitchFamily="34" charset="0"/>
-              <a:buChar char="•"/>
-              <a:defRPr kumimoji="1" sz="1200" b="1" kern="1200">
-                <a:solidFill>
-                  <a:schemeClr val="tx1"/>
-                </a:solidFill>
-                <a:latin typeface="游ゴシック Medium" panose="020B0500000000000000" pitchFamily="50" charset="-128"/>
-                <a:ea typeface="游ゴシック Medium" panose="020B0500000000000000" pitchFamily="50" charset="-128"/>
-                <a:cs typeface="+mn-cs"/>
-              </a:defRPr>
-            </a:lvl4pPr>
-            <a:lvl5pPr marL="960120" indent="-137160" algn="l" defTabSz="685800" rtl="0" eaLnBrk="1" latinLnBrk="0" hangingPunct="1">
-              <a:lnSpc>
-                <a:spcPct val="90000"/>
-              </a:lnSpc>
-              <a:spcBef>
-                <a:spcPts val="300"/>
-              </a:spcBef>
-              <a:spcAft>
-                <a:spcPts val="150"/>
-              </a:spcAft>
-              <a:buClr>
-                <a:schemeClr val="accent1">
-                  <a:lumMod val="75000"/>
-                </a:schemeClr>
-              </a:buClr>
-              <a:buSzPct val="100000"/>
-              <a:buFont typeface="Arial" panose="020B0604020202020204" pitchFamily="34" charset="0"/>
-              <a:buChar char="•"/>
-              <a:defRPr kumimoji="1" sz="1200" b="1" kern="1200">
-                <a:solidFill>
-                  <a:schemeClr val="tx1"/>
-                </a:solidFill>
-                <a:latin typeface="游ゴシック Medium" panose="020B0500000000000000" pitchFamily="50" charset="-128"/>
-                <a:ea typeface="游ゴシック Medium" panose="020B0500000000000000" pitchFamily="50" charset="-128"/>
-                <a:cs typeface="+mn-cs"/>
-              </a:defRPr>
-            </a:lvl5pPr>
-            <a:lvl6pPr marL="1200000" indent="-171450" algn="l" defTabSz="685800" rtl="0" eaLnBrk="1" latinLnBrk="0" hangingPunct="1">
-              <a:lnSpc>
-                <a:spcPct val="90000"/>
-              </a:lnSpc>
-              <a:spcBef>
-                <a:spcPts val="300"/>
-              </a:spcBef>
-              <a:spcAft>
-                <a:spcPts val="150"/>
-              </a:spcAft>
-              <a:buClr>
-                <a:schemeClr val="accent1">
-                  <a:lumMod val="75000"/>
-                </a:schemeClr>
-              </a:buClr>
-              <a:buSzPct val="100000"/>
-              <a:buFont typeface="Arial" panose="020B0604020202020204" pitchFamily="34" charset="0"/>
-              <a:buChar char="•"/>
-              <a:defRPr kumimoji="1" sz="1200" kern="1200">
-                <a:solidFill>
-                  <a:schemeClr val="tx1"/>
-                </a:solidFill>
-                <a:latin typeface="+mn-lt"/>
-                <a:ea typeface="+mn-ea"/>
-                <a:cs typeface="+mn-cs"/>
-              </a:defRPr>
-            </a:lvl6pPr>
-            <a:lvl7pPr marL="1425000" indent="-171450" algn="l" defTabSz="685800" rtl="0" eaLnBrk="1" latinLnBrk="0" hangingPunct="1">
-              <a:lnSpc>
-                <a:spcPct val="90000"/>
-              </a:lnSpc>
-              <a:spcBef>
-                <a:spcPts val="300"/>
-              </a:spcBef>
-              <a:spcAft>
-                <a:spcPts val="150"/>
-              </a:spcAft>
-              <a:buClr>
-                <a:schemeClr val="accent1">
-                  <a:lumMod val="75000"/>
-                </a:schemeClr>
-              </a:buClr>
-              <a:buSzPct val="100000"/>
-              <a:buFont typeface="Arial" panose="020B0604020202020204" pitchFamily="34" charset="0"/>
-              <a:buChar char="•"/>
-              <a:defRPr kumimoji="1" sz="1200" kern="1200">
-                <a:solidFill>
-                  <a:schemeClr val="tx1"/>
-                </a:solidFill>
-                <a:latin typeface="+mn-lt"/>
-                <a:ea typeface="+mn-ea"/>
-                <a:cs typeface="+mn-cs"/>
-              </a:defRPr>
-            </a:lvl7pPr>
-            <a:lvl8pPr marL="1650000" indent="-171450" algn="l" defTabSz="685800" rtl="0" eaLnBrk="1" latinLnBrk="0" hangingPunct="1">
-              <a:lnSpc>
-                <a:spcPct val="90000"/>
-              </a:lnSpc>
-              <a:spcBef>
-                <a:spcPts val="300"/>
-              </a:spcBef>
-              <a:spcAft>
-                <a:spcPts val="150"/>
-              </a:spcAft>
-              <a:buClr>
-                <a:schemeClr val="accent1">
-                  <a:lumMod val="75000"/>
-                </a:schemeClr>
-              </a:buClr>
-              <a:buSzPct val="100000"/>
-              <a:buFont typeface="Arial" panose="020B0604020202020204" pitchFamily="34" charset="0"/>
-              <a:buChar char="•"/>
-              <a:defRPr kumimoji="1" sz="1200" kern="1200">
-                <a:solidFill>
-                  <a:schemeClr val="tx1"/>
-                </a:solidFill>
-                <a:latin typeface="+mn-lt"/>
-                <a:ea typeface="+mn-ea"/>
-                <a:cs typeface="+mn-cs"/>
-              </a:defRPr>
-            </a:lvl8pPr>
-            <a:lvl9pPr marL="1875000" indent="-171450" algn="l" defTabSz="685800" rtl="0" eaLnBrk="1" latinLnBrk="0" hangingPunct="1">
-              <a:lnSpc>
-                <a:spcPct val="90000"/>
-              </a:lnSpc>
-              <a:spcBef>
-                <a:spcPts val="300"/>
-              </a:spcBef>
-              <a:spcAft>
-                <a:spcPts val="150"/>
-              </a:spcAft>
-              <a:buClr>
-                <a:schemeClr val="accent1">
-                  <a:lumMod val="75000"/>
-                </a:schemeClr>
-              </a:buClr>
-              <a:buSzPct val="100000"/>
-              <a:buFont typeface="Arial" panose="020B0604020202020204" pitchFamily="34" charset="0"/>
-              <a:buChar char="•"/>
-              <a:defRPr kumimoji="1" sz="1200" kern="1200">
-                <a:solidFill>
-                  <a:schemeClr val="tx1"/>
-                </a:solidFill>
-                <a:latin typeface="+mn-lt"/>
-                <a:ea typeface="+mn-ea"/>
-                <a:cs typeface="+mn-cs"/>
-              </a:defRPr>
-            </a:lvl9pPr>
-          </a:lstStyle>
-          <a:p>
-            <a:pPr marL="0" indent="0">
-              <a:buClr>
-                <a:srgbClr val="9E3611"/>
-              </a:buClr>
-              <a:buNone/>
-            </a:pPr>
-            <a:r>
-              <a:rPr lang="en-US" sz="2000" b="0" dirty="0">
-                <a:latin typeface="Medium"/>
-                <a:ea typeface="游ゴシック Medium"/>
-                <a:cs typeface="Times New Roman"/>
-              </a:rPr>
-              <a:t>Initial pose graph</a:t>
-            </a:r>
-          </a:p>
-          <a:p>
-            <a:pPr marL="0" indent="0">
-              <a:buClr>
-                <a:srgbClr val="9E3611"/>
-              </a:buClr>
-              <a:buFont typeface="Arial" panose="020B0604020202020204" pitchFamily="34" charset="0"/>
-              <a:buNone/>
-            </a:pPr>
-            <a:endParaRPr lang="en-US" sz="2000" b="0" dirty="0">
-              <a:latin typeface="Times New Roman"/>
-              <a:ea typeface="游ゴシック Medium"/>
-              <a:cs typeface="Times New Roman"/>
-            </a:endParaRPr>
-          </a:p>
-        </p:txBody>
-      </p:sp>
       <p:pic>
         <p:nvPicPr>
           <p:cNvPr id="8" name="Picture 2" descr="Network Graph Nodes Connections Chart Data Points Trend Analysis ...">
@@ -34679,7 +35149,7 @@
         </p:blipFill>
         <p:spPr bwMode="auto">
           <a:xfrm rot="17180279">
-            <a:off x="2194043" y="1596433"/>
+            <a:off x="2198703" y="1906222"/>
             <a:ext cx="2271720" cy="1095632"/>
           </a:xfrm>
           <a:prstGeom prst="rect">
@@ -34713,7 +35183,7 @@
         </p:nvSpPr>
         <p:spPr>
           <a:xfrm>
-            <a:off x="3636816" y="3030647"/>
+            <a:off x="3641476" y="3340436"/>
             <a:ext cx="538303" cy="288612"/>
           </a:xfrm>
           <a:prstGeom prst="rect">
@@ -34977,7 +35447,6 @@
             </a:pPr>
             <a:r>
               <a:rPr lang="en-US" sz="1200" b="0" dirty="0">
-                <a:latin typeface="Times New Roman"/>
                 <a:ea typeface="游ゴシック Medium"/>
                 <a:cs typeface="Times New Roman"/>
               </a:rPr>
@@ -34985,7 +35454,6 @@
             </a:r>
             <a:r>
               <a:rPr lang="en-US" sz="1200" b="0" baseline="-25000" dirty="0">
-                <a:latin typeface="Times New Roman"/>
                 <a:ea typeface="游ゴシック Medium"/>
                 <a:cs typeface="Times New Roman"/>
               </a:rPr>
@@ -35010,7 +35478,7 @@
         </p:nvSpPr>
         <p:spPr>
           <a:xfrm>
-            <a:off x="3941616" y="1784208"/>
+            <a:off x="3819739" y="2087658"/>
             <a:ext cx="360040" cy="288612"/>
           </a:xfrm>
           <a:prstGeom prst="rect">
@@ -35274,7 +35742,6 @@
             </a:pPr>
             <a:r>
               <a:rPr lang="en-US" sz="1200" b="0" dirty="0">
-                <a:latin typeface="Times New Roman"/>
                 <a:ea typeface="游ゴシック Medium"/>
                 <a:cs typeface="Times New Roman"/>
               </a:rPr>
@@ -35282,7 +35749,6 @@
             </a:r>
             <a:r>
               <a:rPr lang="en-US" sz="1200" b="0" baseline="-25000" dirty="0">
-                <a:latin typeface="Times New Roman"/>
                 <a:ea typeface="游ゴシック Medium"/>
                 <a:cs typeface="Times New Roman"/>
               </a:rPr>
@@ -35307,7 +35773,7 @@
         </p:nvSpPr>
         <p:spPr>
           <a:xfrm>
-            <a:off x="2700712" y="935281"/>
+            <a:off x="2705372" y="1245070"/>
             <a:ext cx="360040" cy="288612"/>
           </a:xfrm>
           <a:prstGeom prst="rect">
@@ -35571,7 +36037,6 @@
             </a:pPr>
             <a:r>
               <a:rPr lang="en-US" sz="1200" b="0" dirty="0">
-                <a:latin typeface="Times New Roman"/>
                 <a:ea typeface="游ゴシック Medium"/>
                 <a:cs typeface="Times New Roman"/>
               </a:rPr>
@@ -35579,7 +36044,6 @@
             </a:r>
             <a:r>
               <a:rPr lang="en-US" sz="1200" b="0" baseline="-25000" dirty="0">
-                <a:latin typeface="Times New Roman"/>
                 <a:ea typeface="游ゴシック Medium"/>
                 <a:cs typeface="Times New Roman"/>
               </a:rPr>
@@ -35604,7 +36068,7 @@
         </p:nvSpPr>
         <p:spPr>
           <a:xfrm>
-            <a:off x="2484687" y="2288264"/>
+            <a:off x="2489347" y="2598053"/>
             <a:ext cx="360040" cy="288612"/>
           </a:xfrm>
           <a:prstGeom prst="rect">
@@ -35868,7 +36332,6 @@
             </a:pPr>
             <a:r>
               <a:rPr lang="en-US" sz="1200" b="0" dirty="0">
-                <a:latin typeface="Times New Roman"/>
                 <a:ea typeface="游ゴシック Medium"/>
                 <a:cs typeface="Times New Roman"/>
               </a:rPr>
@@ -35876,7 +36339,6 @@
             </a:r>
             <a:r>
               <a:rPr lang="en-US" sz="1200" b="0" baseline="-25000" dirty="0">
-                <a:latin typeface="Times New Roman"/>
                 <a:ea typeface="游ゴシック Medium"/>
                 <a:cs typeface="Times New Roman"/>
               </a:rPr>
@@ -35901,7 +36363,7 @@
         </p:nvSpPr>
         <p:spPr>
           <a:xfrm>
-            <a:off x="3430933" y="1257849"/>
+            <a:off x="3435593" y="1567638"/>
             <a:ext cx="538303" cy="288612"/>
           </a:xfrm>
           <a:prstGeom prst="rect">
@@ -36165,10 +36627,6 @@
             </a:pPr>
             <a:r>
               <a:rPr lang="en-US" sz="1200" b="0" dirty="0">
-                <a:solidFill>
-                  <a:schemeClr val="accent1"/>
-                </a:solidFill>
-                <a:latin typeface="Times New Roman"/>
                 <a:ea typeface="游ゴシック Medium"/>
                 <a:cs typeface="Times New Roman"/>
               </a:rPr>
@@ -36176,10 +36634,6 @@
             </a:r>
             <a:r>
               <a:rPr lang="en-US" sz="1200" b="0" baseline="-25000" dirty="0">
-                <a:solidFill>
-                  <a:schemeClr val="accent1"/>
-                </a:solidFill>
-                <a:latin typeface="Times New Roman"/>
                 <a:ea typeface="游ゴシック Medium"/>
                 <a:cs typeface="Times New Roman"/>
               </a:rPr>
@@ -36204,7 +36658,7 @@
         </p:nvSpPr>
         <p:spPr>
           <a:xfrm>
-            <a:off x="2844727" y="1855636"/>
+            <a:off x="2849387" y="2165425"/>
             <a:ext cx="538303" cy="288612"/>
           </a:xfrm>
           <a:prstGeom prst="rect">
@@ -36468,10 +36922,6 @@
             </a:pPr>
             <a:r>
               <a:rPr lang="en-US" sz="1200" b="0" dirty="0">
-                <a:solidFill>
-                  <a:schemeClr val="accent1"/>
-                </a:solidFill>
-                <a:latin typeface="Times New Roman"/>
                 <a:ea typeface="游ゴシック Medium"/>
                 <a:cs typeface="Times New Roman"/>
               </a:rPr>
@@ -36479,10 +36929,6 @@
             </a:r>
             <a:r>
               <a:rPr lang="en-US" sz="1200" b="0" baseline="-25000" dirty="0">
-                <a:solidFill>
-                  <a:schemeClr val="accent1"/>
-                </a:solidFill>
-                <a:latin typeface="Times New Roman"/>
                 <a:ea typeface="游ゴシック Medium"/>
                 <a:cs typeface="Times New Roman"/>
               </a:rPr>
@@ -36507,7 +36953,7 @@
         </p:nvSpPr>
         <p:spPr>
           <a:xfrm>
-            <a:off x="3243445" y="2524516"/>
+            <a:off x="3248105" y="2834305"/>
             <a:ext cx="538303" cy="288612"/>
           </a:xfrm>
           <a:prstGeom prst="rect">
@@ -36771,10 +37217,6 @@
             </a:pPr>
             <a:r>
               <a:rPr lang="en-US" sz="1200" b="0" dirty="0">
-                <a:solidFill>
-                  <a:schemeClr val="accent1"/>
-                </a:solidFill>
-                <a:latin typeface="Times New Roman"/>
                 <a:ea typeface="游ゴシック Medium"/>
                 <a:cs typeface="Times New Roman"/>
               </a:rPr>
@@ -36782,10 +37224,6 @@
             </a:r>
             <a:r>
               <a:rPr lang="en-US" sz="1200" b="0" baseline="-25000" dirty="0">
-                <a:solidFill>
-                  <a:schemeClr val="accent1"/>
-                </a:solidFill>
-                <a:latin typeface="Times New Roman"/>
                 <a:ea typeface="游ゴシック Medium"/>
                 <a:cs typeface="Times New Roman"/>
               </a:rPr>
@@ -36808,7 +37246,7 @@
         </p:nvSpPr>
         <p:spPr>
           <a:xfrm>
-            <a:off x="906670" y="4291401"/>
+            <a:off x="546630" y="4332902"/>
             <a:ext cx="571138" cy="429556"/>
           </a:xfrm>
           <a:prstGeom prst="flowChartExtract">
@@ -36843,7 +37281,7 @@
           <a:p>
             <a:pPr algn="ctr"/>
             <a:endParaRPr lang="en-US" dirty="0">
-              <a:latin typeface="Medium"/>
+              <a:latin typeface="游ゴシック Medium" panose="020B0500000000000000" pitchFamily="50" charset="-128"/>
             </a:endParaRPr>
           </a:p>
         </p:txBody>
@@ -36864,7 +37302,7 @@
         </p:nvSpPr>
         <p:spPr>
           <a:xfrm>
-            <a:off x="1048223" y="4365078"/>
+            <a:off x="688183" y="4406579"/>
             <a:ext cx="288031" cy="304056"/>
           </a:xfrm>
           <a:prstGeom prst="rect">
@@ -37130,7 +37568,6 @@
                 <a:solidFill>
                   <a:schemeClr val="bg1"/>
                 </a:solidFill>
-                <a:latin typeface="Medium"/>
                 <a:ea typeface="游ゴシック Medium"/>
                 <a:cs typeface="Times New Roman"/>
               </a:rPr>
@@ -37146,7 +37583,6 @@
               <a:buNone/>
             </a:pPr>
             <a:endParaRPr lang="en-US" sz="2000" b="0" dirty="0">
-              <a:latin typeface="Times New Roman"/>
               <a:ea typeface="游ゴシック Medium"/>
               <a:cs typeface="Times New Roman"/>
             </a:endParaRPr>
@@ -37169,8 +37605,8 @@
         </p:nvSpPr>
         <p:spPr>
           <a:xfrm>
-            <a:off x="1403336" y="4302327"/>
-            <a:ext cx="6409024" cy="366807"/>
+            <a:off x="1068672" y="4380946"/>
+            <a:ext cx="7273120" cy="366807"/>
           </a:xfrm>
           <a:prstGeom prst="rect">
             <a:avLst/>
@@ -37432,7 +37868,6 @@
             </a:pPr>
             <a:r>
               <a:rPr lang="en-US" sz="2000" b="0" dirty="0">
-                <a:latin typeface="Medium"/>
                 <a:ea typeface="游ゴシック Medium"/>
                 <a:cs typeface="Times New Roman"/>
               </a:rPr>
@@ -37448,7 +37883,6 @@
               <a:buNone/>
             </a:pPr>
             <a:endParaRPr lang="en-US" sz="2000" b="0" dirty="0">
-              <a:latin typeface="Times New Roman"/>
               <a:ea typeface="游ゴシック Medium"/>
               <a:cs typeface="Times New Roman"/>
             </a:endParaRPr>
@@ -37469,7 +37903,7 @@
         </p:nvSpPr>
         <p:spPr>
           <a:xfrm rot="16200000">
-            <a:off x="1599127" y="1739223"/>
+            <a:off x="1603787" y="2049012"/>
             <a:ext cx="576064" cy="623679"/>
           </a:xfrm>
           <a:prstGeom prst="downArrow">
@@ -37522,7 +37956,7 @@
             </p:nvSpPr>
             <p:spPr>
               <a:xfrm>
-                <a:off x="4757691" y="900153"/>
+                <a:off x="4757691" y="818813"/>
                 <a:ext cx="3772482" cy="1455296"/>
               </a:xfrm>
               <a:prstGeom prst="rect">
@@ -37785,7 +38219,6 @@
                 </a:pPr>
                 <a:r>
                   <a:rPr lang="pt-BR" sz="2000" dirty="0">
-                    <a:latin typeface="Medium"/>
                     <a:ea typeface="游ゴシック Medium"/>
                     <a:cs typeface="Times New Roman"/>
                   </a:rPr>
@@ -37801,7 +38234,6 @@
                 </a:pPr>
                 <a:r>
                   <a:rPr lang="pt-BR" sz="2000" b="0" dirty="0">
-                    <a:latin typeface="Medium"/>
                     <a:ea typeface="游ゴシック Medium"/>
                     <a:cs typeface="Times New Roman"/>
                   </a:rPr>
@@ -37811,7 +38243,7 @@
                   <m:oMath xmlns:m="http://schemas.openxmlformats.org/officeDocument/2006/math">
                     <m:r>
                       <a:rPr lang="pt-BR" sz="2000" b="0" i="1" smtClean="0">
-                        <a:latin typeface="Medium"/>
+                        <a:latin typeface="Cambria Math" panose="02040503050406030204" pitchFamily="18" charset="0"/>
                         <a:ea typeface="游ゴシック Medium"/>
                         <a:cs typeface="Times New Roman"/>
                       </a:rPr>
@@ -37822,7 +38254,7 @@
                         <m:chr m:val="∑"/>
                         <m:ctrlPr>
                           <a:rPr lang="pt-BR" sz="2000" b="0" i="1" smtClean="0">
-                            <a:latin typeface="Medium"/>
+                            <a:latin typeface="Cambria Math" panose="02040503050406030204" pitchFamily="18" charset="0"/>
                             <a:ea typeface="游ゴシック Medium"/>
                             <a:cs typeface="Times New Roman"/>
                           </a:rPr>
@@ -37831,7 +38263,7 @@
                       <m:sub>
                         <m:r>
                           <a:rPr lang="pt-BR" sz="2000" b="0" i="1" smtClean="0">
-                            <a:latin typeface="Medium"/>
+                            <a:latin typeface="Cambria Math" panose="02040503050406030204" pitchFamily="18" charset="0"/>
                             <a:ea typeface="游ゴシック Medium"/>
                             <a:cs typeface="Times New Roman"/>
                           </a:rPr>
@@ -37839,7 +38271,7 @@
                         </m:r>
                         <m:r>
                           <a:rPr lang="pt-BR" sz="2000" b="0" i="1" smtClean="0">
-                            <a:latin typeface="Medium"/>
+                            <a:latin typeface="Cambria Math" panose="02040503050406030204" pitchFamily="18" charset="0"/>
                             <a:ea typeface="游ゴシック Medium"/>
                             <a:cs typeface="Times New Roman"/>
                           </a:rPr>
@@ -37849,7 +38281,7 @@
                       <m:sup>
                         <m:r>
                           <a:rPr lang="pt-BR" sz="2000" b="0" i="1" smtClean="0">
-                            <a:latin typeface="Medium"/>
+                            <a:latin typeface="Cambria Math" panose="02040503050406030204" pitchFamily="18" charset="0"/>
                             <a:ea typeface="游ゴシック Medium"/>
                             <a:cs typeface="Times New Roman"/>
                           </a:rPr>
@@ -37862,7 +38294,7 @@
                             <m:sty m:val="p"/>
                           </m:rPr>
                           <a:rPr lang="en-US" sz="2000" b="0" i="0" smtClean="0">
-                            <a:latin typeface="Medium"/>
+                            <a:latin typeface="Cambria Math" panose="02040503050406030204" pitchFamily="18" charset="0"/>
                             <a:ea typeface="游ゴシック Medium"/>
                             <a:cs typeface="Times New Roman"/>
                           </a:rPr>
@@ -37870,7 +38302,7 @@
                         </m:r>
                         <m:r>
                           <a:rPr lang="en-US" sz="2000" b="0" i="1" smtClean="0">
-                            <a:latin typeface="Medium"/>
+                            <a:latin typeface="Cambria Math" panose="02040503050406030204" pitchFamily="18" charset="0"/>
                             <a:ea typeface="游ゴシック Medium"/>
                             <a:cs typeface="Times New Roman"/>
                           </a:rPr>
@@ -37880,7 +38312,7 @@
                           <m:sSupPr>
                             <m:ctrlPr>
                               <a:rPr lang="en-US" sz="2000" b="0" i="1" smtClean="0">
-                                <a:latin typeface="Medium"/>
+                                <a:latin typeface="Cambria Math" panose="02040503050406030204" pitchFamily="18" charset="0"/>
                                 <a:ea typeface="游ゴシック Medium"/>
                                 <a:cs typeface="Times New Roman"/>
                               </a:rPr>
@@ -37889,7 +38321,7 @@
                           <m:e>
                             <m:r>
                               <a:rPr lang="en-US" sz="2000" b="0" i="1">
-                                <a:latin typeface="Medium"/>
+                                <a:latin typeface="Cambria Math" panose="02040503050406030204" pitchFamily="18" charset="0"/>
                                 <a:ea typeface="游ゴシック Medium"/>
                                 <a:cs typeface="Times New Roman"/>
                               </a:rPr>
@@ -37897,7 +38329,7 @@
                             </m:r>
                             <m:r>
                               <a:rPr lang="en-US" sz="2000" b="0" i="1" baseline="-25000">
-                                <a:latin typeface="Medium"/>
+                                <a:latin typeface="Cambria Math" panose="02040503050406030204" pitchFamily="18" charset="0"/>
                                 <a:ea typeface="游ゴシック Medium"/>
                                 <a:cs typeface="Times New Roman"/>
                               </a:rPr>
@@ -37907,7 +38339,7 @@
                           <m:sup>
                             <m:r>
                               <a:rPr lang="en-US" sz="2000" b="0" i="1" smtClean="0">
-                                <a:latin typeface="Medium"/>
+                                <a:latin typeface="Cambria Math" panose="02040503050406030204" pitchFamily="18" charset="0"/>
                                 <a:ea typeface="游ゴシック Medium"/>
                                 <a:cs typeface="Times New Roman"/>
                               </a:rPr>
@@ -37917,7 +38349,7 @@
                         </m:sSup>
                         <m:r>
                           <a:rPr lang="en-US" sz="2000" b="0" i="1">
-                            <a:latin typeface="Medium"/>
+                            <a:latin typeface="Cambria Math" panose="02040503050406030204" pitchFamily="18" charset="0"/>
                             <a:ea typeface="Cambria Math" panose="02040503050406030204" pitchFamily="18" charset="0"/>
                             <a:cs typeface="Times New Roman"/>
                           </a:rPr>
@@ -37927,7 +38359,7 @@
                           <m:sSupPr>
                             <m:ctrlPr>
                               <a:rPr lang="en-US" sz="2000" b="0" i="1">
-                                <a:latin typeface="Medium"/>
+                                <a:latin typeface="Cambria Math" panose="02040503050406030204" pitchFamily="18" charset="0"/>
                                 <a:ea typeface="游ゴシック Medium"/>
                                 <a:cs typeface="Times New Roman"/>
                               </a:rPr>
@@ -37936,7 +38368,7 @@
                           <m:e>
                             <m:r>
                               <a:rPr lang="en-US" sz="2000" b="0" i="1">
-                                <a:latin typeface="Medium"/>
+                                <a:latin typeface="Cambria Math" panose="02040503050406030204" pitchFamily="18" charset="0"/>
                                 <a:ea typeface="游ゴシック Medium"/>
                                 <a:cs typeface="Times New Roman"/>
                               </a:rPr>
@@ -37944,7 +38376,7 @@
                             </m:r>
                             <m:r>
                               <a:rPr lang="en-US" sz="2000" b="0" i="1" baseline="-25000">
-                                <a:latin typeface="Medium"/>
+                                <a:latin typeface="Cambria Math" panose="02040503050406030204" pitchFamily="18" charset="0"/>
                                 <a:ea typeface="游ゴシック Medium"/>
                                 <a:cs typeface="Times New Roman"/>
                               </a:rPr>
@@ -37954,7 +38386,7 @@
                           <m:sup>
                             <m:r>
                               <a:rPr lang="en-US" sz="2000" b="0" i="1">
-                                <a:latin typeface="Medium"/>
+                                <a:latin typeface="Cambria Math" panose="02040503050406030204" pitchFamily="18" charset="0"/>
                                 <a:ea typeface="游ゴシック Medium"/>
                                 <a:cs typeface="Times New Roman"/>
                               </a:rPr>
@@ -37964,7 +38396,7 @@
                         </m:sSup>
                         <m:r>
                           <a:rPr lang="en-US" sz="2000" b="0" i="1">
-                            <a:latin typeface="Medium"/>
+                            <a:latin typeface="Cambria Math" panose="02040503050406030204" pitchFamily="18" charset="0"/>
                             <a:ea typeface="Cambria Math" panose="02040503050406030204" pitchFamily="18" charset="0"/>
                             <a:cs typeface="Times New Roman"/>
                           </a:rPr>
@@ -37972,7 +38404,7 @@
                         </m:r>
                         <m:r>
                           <a:rPr lang="en-US" sz="2000" b="0" i="1">
-                            <a:latin typeface="Medium"/>
+                            <a:latin typeface="Cambria Math" panose="02040503050406030204" pitchFamily="18" charset="0"/>
                             <a:ea typeface="Cambria Math" panose="02040503050406030204" pitchFamily="18" charset="0"/>
                             <a:cs typeface="Times New Roman"/>
                           </a:rPr>
@@ -37980,27 +38412,17 @@
                         </m:r>
                         <m:r>
                           <a:rPr lang="en-US" sz="2000" b="0" i="1">
-                            <a:latin typeface="Medium"/>
+                            <a:latin typeface="Cambria Math" panose="02040503050406030204" pitchFamily="18" charset="0"/>
                             <a:ea typeface="Cambria Math" panose="02040503050406030204" pitchFamily="18" charset="0"/>
                             <a:cs typeface="Times New Roman"/>
                           </a:rPr>
-                          <m:t>)</m:t>
-                        </m:r>
-                        <m:r>
-                          <a:rPr lang="en-US" sz="2000" b="0" i="1" smtClean="0">
-                            <a:latin typeface="Medium"/>
-                            <a:ea typeface="游ゴシック Medium"/>
-                            <a:cs typeface="Times New Roman"/>
-                          </a:rPr>
-                          <m:t>)</m:t>
+                          <m:t>))</m:t>
                         </m:r>
                       </m:e>
                     </m:nary>
                   </m:oMath>
                 </a14:m>
-                <a:endParaRPr lang="en-US" sz="2000" b="0" dirty="0">
-                  <a:latin typeface="Medium"/>
-                </a:endParaRPr>
+                <a:endParaRPr lang="en-US" sz="2000" b="0" dirty="0"/>
               </a:p>
               <a:p>
                 <a:pPr marL="0" indent="0">
@@ -38010,19 +38432,14 @@
                   <a:buNone/>
                 </a:pPr>
                 <a:r>
-                  <a:rPr lang="en-US" sz="2000" b="0" dirty="0">
-                    <a:latin typeface="Medium"/>
-                  </a:rPr>
+                  <a:rPr lang="en-US" sz="2000" b="0" dirty="0"/>
                   <a:t>➔ Minimize inconsistency by adjusting nodes T</a:t>
                 </a:r>
                 <a:r>
-                  <a:rPr lang="en-US" sz="2000" b="0" baseline="-25000" dirty="0">
-                    <a:latin typeface="Medium"/>
-                  </a:rPr>
+                  <a:rPr lang="en-US" sz="2000" b="0" baseline="-25000" dirty="0"/>
                   <a:t>i</a:t>
                 </a:r>
                 <a:endParaRPr lang="en-US" sz="2000" b="0" baseline="-25000" dirty="0">
-                  <a:latin typeface="Medium"/>
                   <a:ea typeface="游ゴシック Medium"/>
                   <a:cs typeface="Times New Roman"/>
                 </a:endParaRPr>
@@ -38047,7 +38464,7 @@
             </p:nvSpPr>
             <p:spPr>
               <a:xfrm>
-                <a:off x="4757691" y="900153"/>
+                <a:off x="4757691" y="818813"/>
                 <a:ext cx="3772482" cy="1455296"/>
               </a:xfrm>
               <a:prstGeom prst="rect">
@@ -38056,7 +38473,7 @@
               <a:blipFill>
                 <a:blip r:embed="rId3"/>
                 <a:stretch>
-                  <a:fillRect l="-1616" t="-8403" b="-6303"/>
+                  <a:fillRect l="-1616" t="-9205" b="-5021"/>
                 </a:stretch>
               </a:blipFill>
             </p:spPr>
@@ -38091,8 +38508,8 @@
         </p:nvSpPr>
         <p:spPr>
           <a:xfrm>
-            <a:off x="4757691" y="2547462"/>
-            <a:ext cx="3772482" cy="1455296"/>
+            <a:off x="4757691" y="2547461"/>
+            <a:ext cx="3772482" cy="1695885"/>
           </a:xfrm>
           <a:prstGeom prst="rect">
             <a:avLst/>
@@ -38354,7 +38771,6 @@
             </a:pPr>
             <a:r>
               <a:rPr lang="pt-BR" sz="2000" dirty="0">
-                <a:latin typeface="Medium"/>
                 <a:ea typeface="游ゴシック Medium"/>
                 <a:cs typeface="Times New Roman"/>
               </a:rPr>
@@ -38370,7 +38786,6 @@
             </a:pPr>
             <a:r>
               <a:rPr lang="en-US" sz="2000" b="0" dirty="0">
-                <a:latin typeface="Medium"/>
                 <a:ea typeface="游ゴシック Medium"/>
                 <a:cs typeface="Times New Roman"/>
               </a:rPr>
@@ -38385,13 +38800,10 @@
               <a:buNone/>
             </a:pPr>
             <a:r>
-              <a:rPr lang="en-US" sz="2000" b="0" dirty="0">
-                <a:latin typeface="Medium"/>
-              </a:rPr>
+              <a:rPr lang="en-US" sz="2000" b="0" dirty="0"/>
               <a:t>➔ Assume small inconsistencies in graph values</a:t>
             </a:r>
             <a:endParaRPr lang="pt-BR" sz="2000" b="0" dirty="0">
-              <a:latin typeface="Medium"/>
               <a:ea typeface="游ゴシック Medium"/>
               <a:cs typeface="Times New Roman"/>
             </a:endParaRPr>
@@ -38924,6 +39336,67 @@
 </file>
 
 <file path=customXml/item1.xml><?xml version="1.0" encoding="utf-8"?>
+<p:properties xmlns:p="http://schemas.microsoft.com/office/2006/metadata/properties" xmlns:xsi="http://www.w3.org/2001/XMLSchema-instance" xmlns:pc="http://schemas.microsoft.com/office/infopath/2007/PartnerControls">
+  <documentManagement>
+    <TaxCatchAll xmlns="bbdc8989-56fb-4b1d-a38b-166581c893ff" xsi:nil="true"/>
+    <lcf76f155ced4ddcb4097134ff3c332f xmlns="f61654bb-b7fc-45ad-85e3-d08f7c4a7ee2">
+      <Terms xmlns="http://schemas.microsoft.com/office/infopath/2007/PartnerControls"/>
+    </lcf76f155ced4ddcb4097134ff3c332f>
+    <Title0 xmlns="f61654bb-b7fc-45ad-85e3-d08f7c4a7ee2" xsi:nil="true"/>
+    <Year xmlns="f61654bb-b7fc-45ad-85e3-d08f7c4a7ee2" xsi:nil="true"/>
+    <Author0 xmlns="f61654bb-b7fc-45ad-85e3-d08f7c4a7ee2" xsi:nil="true"/>
+    <Authors xmlns="f61654bb-b7fc-45ad-85e3-d08f7c4a7ee2" xsi:nil="true"/>
+    <NotebookType xmlns="f61654bb-b7fc-45ad-85e3-d08f7c4a7ee2" xsi:nil="true"/>
+    <Templates xmlns="f61654bb-b7fc-45ad-85e3-d08f7c4a7ee2" xsi:nil="true"/>
+    <AppVersion xmlns="f61654bb-b7fc-45ad-85e3-d08f7c4a7ee2" xsi:nil="true"/>
+    <IsNotebookLocked xmlns="f61654bb-b7fc-45ad-85e3-d08f7c4a7ee2" xsi:nil="true"/>
+    <Self_Registration_Enabled xmlns="f61654bb-b7fc-45ad-85e3-d08f7c4a7ee2" xsi:nil="true"/>
+    <Has_Leaders_Only_SectionGroup xmlns="f61654bb-b7fc-45ad-85e3-d08f7c4a7ee2" xsi:nil="true"/>
+    <Invited_Members xmlns="f61654bb-b7fc-45ad-85e3-d08f7c4a7ee2" xsi:nil="true"/>
+    <Is_Collaboration_Space_Locked xmlns="f61654bb-b7fc-45ad-85e3-d08f7c4a7ee2" xsi:nil="true"/>
+    <LMS_Mappings xmlns="f61654bb-b7fc-45ad-85e3-d08f7c4a7ee2" xsi:nil="true"/>
+    <Invited_Leaders xmlns="f61654bb-b7fc-45ad-85e3-d08f7c4a7ee2" xsi:nil="true"/>
+    <Math_Settings xmlns="f61654bb-b7fc-45ad-85e3-d08f7c4a7ee2" xsi:nil="true"/>
+    <Members xmlns="f61654bb-b7fc-45ad-85e3-d08f7c4a7ee2">
+      <UserInfo>
+        <DisplayName/>
+        <AccountId xsi:nil="true"/>
+        <AccountType/>
+      </UserInfo>
+    </Members>
+    <DefaultSectionNames xmlns="f61654bb-b7fc-45ad-85e3-d08f7c4a7ee2" xsi:nil="true"/>
+    <TeamsChannelId xmlns="f61654bb-b7fc-45ad-85e3-d08f7c4a7ee2" xsi:nil="true"/>
+    <FolderType xmlns="f61654bb-b7fc-45ad-85e3-d08f7c4a7ee2" xsi:nil="true"/>
+    <Leaders xmlns="f61654bb-b7fc-45ad-85e3-d08f7c4a7ee2">
+      <UserInfo>
+        <DisplayName/>
+        <AccountId xsi:nil="true"/>
+        <AccountType/>
+      </UserInfo>
+    </Leaders>
+    <Distribution_Groups xmlns="f61654bb-b7fc-45ad-85e3-d08f7c4a7ee2" xsi:nil="true"/>
+    <Member_Groups xmlns="f61654bb-b7fc-45ad-85e3-d08f7c4a7ee2">
+      <UserInfo>
+        <DisplayName/>
+        <AccountId xsi:nil="true"/>
+        <AccountType/>
+      </UserInfo>
+    </Member_Groups>
+    <Teams_Channel_Section_Location xmlns="f61654bb-b7fc-45ad-85e3-d08f7c4a7ee2" xsi:nil="true"/>
+    <CultureName xmlns="f61654bb-b7fc-45ad-85e3-d08f7c4a7ee2" xsi:nil="true"/>
+    <Owner xmlns="f61654bb-b7fc-45ad-85e3-d08f7c4a7ee2">
+      <UserInfo>
+        <DisplayName/>
+        <AccountId xsi:nil="true"/>
+        <AccountType/>
+      </UserInfo>
+    </Owner>
+    <_x30a2__x30c3__x30d7__x30ed__x30fc__x30c9__x65e5__x4ed8_ xmlns="f61654bb-b7fc-45ad-85e3-d08f7c4a7ee2" xsi:nil="true"/>
+  </documentManagement>
+</p:properties>
+</file>
+
+<file path=customXml/item2.xml><?xml version="1.0" encoding="utf-8"?>
 <ct:contentTypeSchema xmlns:ct="http://schemas.microsoft.com/office/2006/metadata/contentType" xmlns:ma="http://schemas.microsoft.com/office/2006/metadata/properties/metaAttributes" ct:_="" ma:_="" ma:contentTypeName="ドキュメント" ma:contentTypeID="0x010100352A53F757E5E848A18782864458E644" ma:contentTypeVersion="43" ma:contentTypeDescription="新しいドキュメントを作成します。" ma:contentTypeScope="" ma:versionID="e58177412e1512208a553d6b419372bf">
   <xsd:schema xmlns:xsd="http://www.w3.org/2001/XMLSchema" xmlns:xs="http://www.w3.org/2001/XMLSchema" xmlns:p="http://schemas.microsoft.com/office/2006/metadata/properties" xmlns:ns2="f61654bb-b7fc-45ad-85e3-d08f7c4a7ee2" xmlns:ns3="bbdc8989-56fb-4b1d-a38b-166581c893ff" targetNamespace="http://schemas.microsoft.com/office/2006/metadata/properties" ma:root="true" ma:fieldsID="41a5810d8518a876aecc1f17313a65be" ns2:_="" ns3:_="">
     <xsd:import namespace="f61654bb-b7fc-45ad-85e3-d08f7c4a7ee2"/>
@@ -39394,67 +39867,6 @@
 </ct:contentTypeSchema>
 </file>
 
-<file path=customXml/item2.xml><?xml version="1.0" encoding="utf-8"?>
-<p:properties xmlns:p="http://schemas.microsoft.com/office/2006/metadata/properties" xmlns:xsi="http://www.w3.org/2001/XMLSchema-instance" xmlns:pc="http://schemas.microsoft.com/office/infopath/2007/PartnerControls">
-  <documentManagement>
-    <TaxCatchAll xmlns="bbdc8989-56fb-4b1d-a38b-166581c893ff" xsi:nil="true"/>
-    <lcf76f155ced4ddcb4097134ff3c332f xmlns="f61654bb-b7fc-45ad-85e3-d08f7c4a7ee2">
-      <Terms xmlns="http://schemas.microsoft.com/office/infopath/2007/PartnerControls"/>
-    </lcf76f155ced4ddcb4097134ff3c332f>
-    <Title0 xmlns="f61654bb-b7fc-45ad-85e3-d08f7c4a7ee2" xsi:nil="true"/>
-    <Year xmlns="f61654bb-b7fc-45ad-85e3-d08f7c4a7ee2" xsi:nil="true"/>
-    <Author0 xmlns="f61654bb-b7fc-45ad-85e3-d08f7c4a7ee2" xsi:nil="true"/>
-    <Authors xmlns="f61654bb-b7fc-45ad-85e3-d08f7c4a7ee2" xsi:nil="true"/>
-    <NotebookType xmlns="f61654bb-b7fc-45ad-85e3-d08f7c4a7ee2" xsi:nil="true"/>
-    <Templates xmlns="f61654bb-b7fc-45ad-85e3-d08f7c4a7ee2" xsi:nil="true"/>
-    <AppVersion xmlns="f61654bb-b7fc-45ad-85e3-d08f7c4a7ee2" xsi:nil="true"/>
-    <IsNotebookLocked xmlns="f61654bb-b7fc-45ad-85e3-d08f7c4a7ee2" xsi:nil="true"/>
-    <Self_Registration_Enabled xmlns="f61654bb-b7fc-45ad-85e3-d08f7c4a7ee2" xsi:nil="true"/>
-    <Has_Leaders_Only_SectionGroup xmlns="f61654bb-b7fc-45ad-85e3-d08f7c4a7ee2" xsi:nil="true"/>
-    <Invited_Members xmlns="f61654bb-b7fc-45ad-85e3-d08f7c4a7ee2" xsi:nil="true"/>
-    <Is_Collaboration_Space_Locked xmlns="f61654bb-b7fc-45ad-85e3-d08f7c4a7ee2" xsi:nil="true"/>
-    <LMS_Mappings xmlns="f61654bb-b7fc-45ad-85e3-d08f7c4a7ee2" xsi:nil="true"/>
-    <Invited_Leaders xmlns="f61654bb-b7fc-45ad-85e3-d08f7c4a7ee2" xsi:nil="true"/>
-    <Math_Settings xmlns="f61654bb-b7fc-45ad-85e3-d08f7c4a7ee2" xsi:nil="true"/>
-    <Members xmlns="f61654bb-b7fc-45ad-85e3-d08f7c4a7ee2">
-      <UserInfo>
-        <DisplayName/>
-        <AccountId xsi:nil="true"/>
-        <AccountType/>
-      </UserInfo>
-    </Members>
-    <DefaultSectionNames xmlns="f61654bb-b7fc-45ad-85e3-d08f7c4a7ee2" xsi:nil="true"/>
-    <TeamsChannelId xmlns="f61654bb-b7fc-45ad-85e3-d08f7c4a7ee2" xsi:nil="true"/>
-    <FolderType xmlns="f61654bb-b7fc-45ad-85e3-d08f7c4a7ee2" xsi:nil="true"/>
-    <Leaders xmlns="f61654bb-b7fc-45ad-85e3-d08f7c4a7ee2">
-      <UserInfo>
-        <DisplayName/>
-        <AccountId xsi:nil="true"/>
-        <AccountType/>
-      </UserInfo>
-    </Leaders>
-    <Distribution_Groups xmlns="f61654bb-b7fc-45ad-85e3-d08f7c4a7ee2" xsi:nil="true"/>
-    <Member_Groups xmlns="f61654bb-b7fc-45ad-85e3-d08f7c4a7ee2">
-      <UserInfo>
-        <DisplayName/>
-        <AccountId xsi:nil="true"/>
-        <AccountType/>
-      </UserInfo>
-    </Member_Groups>
-    <Teams_Channel_Section_Location xmlns="f61654bb-b7fc-45ad-85e3-d08f7c4a7ee2" xsi:nil="true"/>
-    <CultureName xmlns="f61654bb-b7fc-45ad-85e3-d08f7c4a7ee2" xsi:nil="true"/>
-    <Owner xmlns="f61654bb-b7fc-45ad-85e3-d08f7c4a7ee2">
-      <UserInfo>
-        <DisplayName/>
-        <AccountId xsi:nil="true"/>
-        <AccountType/>
-      </UserInfo>
-    </Owner>
-    <_x30a2__x30c3__x30d7__x30ed__x30fc__x30c9__x65e5__x4ed8_ xmlns="f61654bb-b7fc-45ad-85e3-d08f7c4a7ee2" xsi:nil="true"/>
-  </documentManagement>
-</p:properties>
-</file>
-
 <file path=customXml/item3.xml><?xml version="1.0" encoding="utf-8"?>
 <?mso-contentType ?>
 <FormTemplates xmlns="http://schemas.microsoft.com/sharepoint/v3/contenttype/forms">
@@ -39465,6 +39877,23 @@
 </file>
 
 <file path=customXml/itemProps1.xml><?xml version="1.0" encoding="utf-8"?>
+<ds:datastoreItem xmlns:ds="http://schemas.openxmlformats.org/officeDocument/2006/customXml" ds:itemID="{726A834E-B1B5-46FD-BC6A-86110B9E53A8}">
+  <ds:schemaRefs>
+    <ds:schemaRef ds:uri="f61654bb-b7fc-45ad-85e3-d08f7c4a7ee2"/>
+    <ds:schemaRef ds:uri="http://schemas.microsoft.com/office/infopath/2007/PartnerControls"/>
+    <ds:schemaRef ds:uri="http://purl.org/dc/dcmitype/"/>
+    <ds:schemaRef ds:uri="http://purl.org/dc/elements/1.1/"/>
+    <ds:schemaRef ds:uri="bbdc8989-56fb-4b1d-a38b-166581c893ff"/>
+    <ds:schemaRef ds:uri="http://purl.org/dc/terms/"/>
+    <ds:schemaRef ds:uri="http://schemas.microsoft.com/office/2006/documentManagement/types"/>
+    <ds:schemaRef ds:uri="http://www.w3.org/XML/1998/namespace"/>
+    <ds:schemaRef ds:uri="http://schemas.openxmlformats.org/package/2006/metadata/core-properties"/>
+    <ds:schemaRef ds:uri="http://schemas.microsoft.com/office/2006/metadata/properties"/>
+  </ds:schemaRefs>
+</ds:datastoreItem>
+</file>
+
+<file path=customXml/itemProps2.xml><?xml version="1.0" encoding="utf-8"?>
 <ds:datastoreItem xmlns:ds="http://schemas.openxmlformats.org/officeDocument/2006/customXml" ds:itemID="{F2D09310-C45E-477D-9B05-494A1C2D1783}">
   <ds:schemaRefs>
     <ds:schemaRef ds:uri="http://schemas.microsoft.com/office/2006/metadata/contentType"/>
@@ -39483,23 +39912,6 @@
 </ds:datastoreItem>
 </file>
 
-<file path=customXml/itemProps2.xml><?xml version="1.0" encoding="utf-8"?>
-<ds:datastoreItem xmlns:ds="http://schemas.openxmlformats.org/officeDocument/2006/customXml" ds:itemID="{726A834E-B1B5-46FD-BC6A-86110B9E53A8}">
-  <ds:schemaRefs>
-    <ds:schemaRef ds:uri="f61654bb-b7fc-45ad-85e3-d08f7c4a7ee2"/>
-    <ds:schemaRef ds:uri="http://schemas.microsoft.com/office/infopath/2007/PartnerControls"/>
-    <ds:schemaRef ds:uri="http://purl.org/dc/dcmitype/"/>
-    <ds:schemaRef ds:uri="http://purl.org/dc/elements/1.1/"/>
-    <ds:schemaRef ds:uri="bbdc8989-56fb-4b1d-a38b-166581c893ff"/>
-    <ds:schemaRef ds:uri="http://purl.org/dc/terms/"/>
-    <ds:schemaRef ds:uri="http://schemas.microsoft.com/office/2006/documentManagement/types"/>
-    <ds:schemaRef ds:uri="http://www.w3.org/XML/1998/namespace"/>
-    <ds:schemaRef ds:uri="http://schemas.openxmlformats.org/package/2006/metadata/core-properties"/>
-    <ds:schemaRef ds:uri="http://schemas.microsoft.com/office/2006/metadata/properties"/>
-  </ds:schemaRefs>
-</ds:datastoreItem>
-</file>
-
 <file path=customXml/itemProps3.xml><?xml version="1.0" encoding="utf-8"?>
 <ds:datastoreItem xmlns:ds="http://schemas.openxmlformats.org/officeDocument/2006/customXml" ds:itemID="{0A8BCAEC-5EDD-4F8B-8062-E645C37DABB6}">
   <ds:schemaRefs>

--- a/documents/Jannis_Meyer_Presentation_11_05_2026.pptx
+++ b/documents/Jannis_Meyer_Presentation_11_05_2026.pptx
@@ -13765,7 +13765,7 @@
                 <a:ea typeface="游ゴシック Medium"/>
                 <a:cs typeface="Times New Roman"/>
               </a:rPr>
-              <a:t>   Add extra constraints</a:t>
+              <a:t>   Add additional constraints</a:t>
             </a:r>
           </a:p>
         </p:txBody>
@@ -33229,7 +33229,7 @@
                 <a:ea typeface="游ゴシック Medium"/>
                 <a:cs typeface="Times New Roman"/>
               </a:rPr>
-              <a:t>Add extra constraints</a:t>
+              <a:t>Add additional constraints</a:t>
             </a:r>
           </a:p>
           <a:p>
@@ -37956,8 +37956,8 @@
             </p:nvSpPr>
             <p:spPr>
               <a:xfrm>
-                <a:off x="4757691" y="818813"/>
-                <a:ext cx="3772482" cy="1455296"/>
+                <a:off x="4572000" y="818813"/>
+                <a:ext cx="4320480" cy="1043894"/>
               </a:xfrm>
               <a:prstGeom prst="rect">
                 <a:avLst/>
@@ -38218,7 +38218,7 @@
                   <a:buNone/>
                 </a:pPr>
                 <a:r>
-                  <a:rPr lang="pt-BR" sz="2000" dirty="0">
+                  <a:rPr lang="pt-BR" sz="1400" dirty="0">
                     <a:ea typeface="游ゴシック Medium"/>
                     <a:cs typeface="Times New Roman"/>
                   </a:rPr>
@@ -38233,7 +38233,7 @@
                   <a:buNone/>
                 </a:pPr>
                 <a:r>
-                  <a:rPr lang="pt-BR" sz="2000" b="0" dirty="0">
+                  <a:rPr lang="pt-BR" sz="1400" b="0" dirty="0">
                     <a:ea typeface="游ゴシック Medium"/>
                     <a:cs typeface="Times New Roman"/>
                   </a:rPr>
@@ -38242,7 +38242,7 @@
                 <a14:m>
                   <m:oMath xmlns:m="http://schemas.openxmlformats.org/officeDocument/2006/math">
                     <m:r>
-                      <a:rPr lang="pt-BR" sz="2000" b="0" i="1" smtClean="0">
+                      <a:rPr lang="pt-BR" sz="1400" b="0" i="1" smtClean="0">
                         <a:latin typeface="Cambria Math" panose="02040503050406030204" pitchFamily="18" charset="0"/>
                         <a:ea typeface="游ゴシック Medium"/>
                         <a:cs typeface="Times New Roman"/>
@@ -38253,7 +38253,7 @@
                       <m:naryPr>
                         <m:chr m:val="∑"/>
                         <m:ctrlPr>
-                          <a:rPr lang="pt-BR" sz="2000" b="0" i="1" smtClean="0">
+                          <a:rPr lang="pt-BR" sz="1400" b="0" i="1" smtClean="0">
                             <a:latin typeface="Cambria Math" panose="02040503050406030204" pitchFamily="18" charset="0"/>
                             <a:ea typeface="游ゴシック Medium"/>
                             <a:cs typeface="Times New Roman"/>
@@ -38262,7 +38262,7 @@
                       </m:naryPr>
                       <m:sub>
                         <m:r>
-                          <a:rPr lang="pt-BR" sz="2000" b="0" i="1" smtClean="0">
+                          <a:rPr lang="pt-BR" sz="1400" b="0" i="1" smtClean="0">
                             <a:latin typeface="Cambria Math" panose="02040503050406030204" pitchFamily="18" charset="0"/>
                             <a:ea typeface="游ゴシック Medium"/>
                             <a:cs typeface="Times New Roman"/>
@@ -38270,7 +38270,7 @@
                           <m:t>𝑘</m:t>
                         </m:r>
                         <m:r>
-                          <a:rPr lang="pt-BR" sz="2000" b="0" i="1" smtClean="0">
+                          <a:rPr lang="pt-BR" sz="1400" b="0" i="1" smtClean="0">
                             <a:latin typeface="Cambria Math" panose="02040503050406030204" pitchFamily="18" charset="0"/>
                             <a:ea typeface="游ゴシック Medium"/>
                             <a:cs typeface="Times New Roman"/>
@@ -38280,7 +38280,7 @@
                       </m:sub>
                       <m:sup>
                         <m:r>
-                          <a:rPr lang="pt-BR" sz="2000" b="0" i="1" smtClean="0">
+                          <a:rPr lang="pt-BR" sz="1400" b="0" i="1" smtClean="0">
                             <a:latin typeface="Cambria Math" panose="02040503050406030204" pitchFamily="18" charset="0"/>
                             <a:ea typeface="游ゴシック Medium"/>
                             <a:cs typeface="Times New Roman"/>
@@ -38293,7 +38293,7 @@
                           <m:rPr>
                             <m:sty m:val="p"/>
                           </m:rPr>
-                          <a:rPr lang="en-US" sz="2000" b="0" i="0" smtClean="0">
+                          <a:rPr lang="en-US" sz="1400" b="0" i="0" smtClean="0">
                             <a:latin typeface="Cambria Math" panose="02040503050406030204" pitchFamily="18" charset="0"/>
                             <a:ea typeface="游ゴシック Medium"/>
                             <a:cs typeface="Times New Roman"/>
@@ -38301,7 +38301,7 @@
                           <m:t>log</m:t>
                         </m:r>
                         <m:r>
-                          <a:rPr lang="en-US" sz="2000" b="0" i="1" smtClean="0">
+                          <a:rPr lang="en-US" sz="1400" b="0" i="1" smtClean="0">
                             <a:latin typeface="Cambria Math" panose="02040503050406030204" pitchFamily="18" charset="0"/>
                             <a:ea typeface="游ゴシック Medium"/>
                             <a:cs typeface="Times New Roman"/>
@@ -38311,7 +38311,7 @@
                         <m:sSup>
                           <m:sSupPr>
                             <m:ctrlPr>
-                              <a:rPr lang="en-US" sz="2000" b="0" i="1" smtClean="0">
+                              <a:rPr lang="en-US" sz="1400" b="0" i="1" smtClean="0">
                                 <a:latin typeface="Cambria Math" panose="02040503050406030204" pitchFamily="18" charset="0"/>
                                 <a:ea typeface="游ゴシック Medium"/>
                                 <a:cs typeface="Times New Roman"/>
@@ -38320,7 +38320,7 @@
                           </m:sSupPr>
                           <m:e>
                             <m:r>
-                              <a:rPr lang="en-US" sz="2000" b="0" i="1">
+                              <a:rPr lang="en-US" sz="1400" b="0" i="1">
                                 <a:latin typeface="Cambria Math" panose="02040503050406030204" pitchFamily="18" charset="0"/>
                                 <a:ea typeface="游ゴシック Medium"/>
                                 <a:cs typeface="Times New Roman"/>
@@ -38328,7 +38328,7 @@
                               <m:t>𝑇</m:t>
                             </m:r>
                             <m:r>
-                              <a:rPr lang="en-US" sz="2000" b="0" i="1" baseline="-25000">
+                              <a:rPr lang="en-US" sz="1400" b="0" i="1" baseline="-25000">
                                 <a:latin typeface="Cambria Math" panose="02040503050406030204" pitchFamily="18" charset="0"/>
                                 <a:ea typeface="游ゴシック Medium"/>
                                 <a:cs typeface="Times New Roman"/>
@@ -38338,7 +38338,7 @@
                           </m:e>
                           <m:sup>
                             <m:r>
-                              <a:rPr lang="en-US" sz="2000" b="0" i="1" smtClean="0">
+                              <a:rPr lang="en-US" sz="1400" b="0" i="1" smtClean="0">
                                 <a:latin typeface="Cambria Math" panose="02040503050406030204" pitchFamily="18" charset="0"/>
                                 <a:ea typeface="游ゴシック Medium"/>
                                 <a:cs typeface="Times New Roman"/>
@@ -38348,7 +38348,7 @@
                           </m:sup>
                         </m:sSup>
                         <m:r>
-                          <a:rPr lang="en-US" sz="2000" b="0" i="1">
+                          <a:rPr lang="en-US" sz="1400" b="0" i="1">
                             <a:latin typeface="Cambria Math" panose="02040503050406030204" pitchFamily="18" charset="0"/>
                             <a:ea typeface="Cambria Math" panose="02040503050406030204" pitchFamily="18" charset="0"/>
                             <a:cs typeface="Times New Roman"/>
@@ -38358,7 +38358,7 @@
                         <m:sSup>
                           <m:sSupPr>
                             <m:ctrlPr>
-                              <a:rPr lang="en-US" sz="2000" b="0" i="1">
+                              <a:rPr lang="en-US" sz="1400" b="0" i="1">
                                 <a:latin typeface="Cambria Math" panose="02040503050406030204" pitchFamily="18" charset="0"/>
                                 <a:ea typeface="游ゴシック Medium"/>
                                 <a:cs typeface="Times New Roman"/>
@@ -38367,7 +38367,7 @@
                           </m:sSupPr>
                           <m:e>
                             <m:r>
-                              <a:rPr lang="en-US" sz="2000" b="0" i="1">
+                              <a:rPr lang="en-US" sz="1400" b="0" i="1">
                                 <a:latin typeface="Cambria Math" panose="02040503050406030204" pitchFamily="18" charset="0"/>
                                 <a:ea typeface="游ゴシック Medium"/>
                                 <a:cs typeface="Times New Roman"/>
@@ -38375,7 +38375,7 @@
                               <m:t>𝑇</m:t>
                             </m:r>
                             <m:r>
-                              <a:rPr lang="en-US" sz="2000" b="0" i="1" baseline="-25000">
+                              <a:rPr lang="en-US" sz="1400" b="0" i="1" baseline="-25000">
                                 <a:latin typeface="Cambria Math" panose="02040503050406030204" pitchFamily="18" charset="0"/>
                                 <a:ea typeface="游ゴシック Medium"/>
                                 <a:cs typeface="Times New Roman"/>
@@ -38385,7 +38385,7 @@
                           </m:e>
                           <m:sup>
                             <m:r>
-                              <a:rPr lang="en-US" sz="2000" b="0" i="1">
+                              <a:rPr lang="en-US" sz="1400" b="0" i="1">
                                 <a:latin typeface="Cambria Math" panose="02040503050406030204" pitchFamily="18" charset="0"/>
                                 <a:ea typeface="游ゴシック Medium"/>
                                 <a:cs typeface="Times New Roman"/>
@@ -38395,7 +38395,7 @@
                           </m:sup>
                         </m:sSup>
                         <m:r>
-                          <a:rPr lang="en-US" sz="2000" b="0" i="1">
+                          <a:rPr lang="en-US" sz="1400" b="0" i="1">
                             <a:latin typeface="Cambria Math" panose="02040503050406030204" pitchFamily="18" charset="0"/>
                             <a:ea typeface="Cambria Math" panose="02040503050406030204" pitchFamily="18" charset="0"/>
                             <a:cs typeface="Times New Roman"/>
@@ -38403,7 +38403,7 @@
                           <m:t>∙</m:t>
                         </m:r>
                         <m:r>
-                          <a:rPr lang="en-US" sz="2000" b="0" i="1">
+                          <a:rPr lang="en-US" sz="1400" b="0" i="1">
                             <a:latin typeface="Cambria Math" panose="02040503050406030204" pitchFamily="18" charset="0"/>
                             <a:ea typeface="Cambria Math" panose="02040503050406030204" pitchFamily="18" charset="0"/>
                             <a:cs typeface="Times New Roman"/>
@@ -38411,7 +38411,7 @@
                           <m:t>𝑇𝑗</m:t>
                         </m:r>
                         <m:r>
-                          <a:rPr lang="en-US" sz="2000" b="0" i="1">
+                          <a:rPr lang="en-US" sz="1400" b="0" i="1">
                             <a:latin typeface="Cambria Math" panose="02040503050406030204" pitchFamily="18" charset="0"/>
                             <a:ea typeface="Cambria Math" panose="02040503050406030204" pitchFamily="18" charset="0"/>
                             <a:cs typeface="Times New Roman"/>
@@ -38422,7 +38422,7 @@
                     </m:nary>
                   </m:oMath>
                 </a14:m>
-                <a:endParaRPr lang="en-US" sz="2000" b="0" dirty="0"/>
+                <a:endParaRPr lang="en-US" sz="1400" b="0" dirty="0"/>
               </a:p>
               <a:p>
                 <a:pPr marL="0" indent="0">
@@ -38432,14 +38432,14 @@
                   <a:buNone/>
                 </a:pPr>
                 <a:r>
-                  <a:rPr lang="en-US" sz="2000" b="0" dirty="0"/>
+                  <a:rPr lang="en-US" sz="1400" b="0" dirty="0"/>
                   <a:t>➔ Minimize inconsistency by adjusting nodes T</a:t>
                 </a:r>
                 <a:r>
-                  <a:rPr lang="en-US" sz="2000" b="0" baseline="-25000" dirty="0"/>
+                  <a:rPr lang="en-US" sz="1400" b="0" baseline="-25000" dirty="0"/>
                   <a:t>i</a:t>
                 </a:r>
-                <a:endParaRPr lang="en-US" sz="2000" b="0" baseline="-25000" dirty="0">
+                <a:endParaRPr lang="en-US" sz="1400" b="0" baseline="-25000" dirty="0">
                   <a:ea typeface="游ゴシック Medium"/>
                   <a:cs typeface="Times New Roman"/>
                 </a:endParaRPr>
@@ -38464,8 +38464,8 @@
             </p:nvSpPr>
             <p:spPr>
               <a:xfrm>
-                <a:off x="4757691" y="818813"/>
-                <a:ext cx="3772482" cy="1455296"/>
+                <a:off x="4572000" y="818813"/>
+                <a:ext cx="4320480" cy="1043894"/>
               </a:xfrm>
               <a:prstGeom prst="rect">
                 <a:avLst/>
@@ -38473,7 +38473,7 @@
               <a:blipFill>
                 <a:blip r:embed="rId3"/>
                 <a:stretch>
-                  <a:fillRect l="-1616" t="-9205" b="-5021"/>
+                  <a:fillRect l="-423" t="-2907" b="-3488"/>
                 </a:stretch>
               </a:blipFill>
             </p:spPr>
@@ -38508,8 +38508,8 @@
         </p:nvSpPr>
         <p:spPr>
           <a:xfrm>
-            <a:off x="4757691" y="2547461"/>
-            <a:ext cx="3772482" cy="1695885"/>
+            <a:off x="4572000" y="1920569"/>
+            <a:ext cx="4035782" cy="616498"/>
           </a:xfrm>
           <a:prstGeom prst="rect">
             <a:avLst/>
@@ -38770,11 +38770,11 @@
               <a:buNone/>
             </a:pPr>
             <a:r>
-              <a:rPr lang="pt-BR" sz="2000" dirty="0">
+              <a:rPr lang="pt-BR" sz="1400" dirty="0">
                 <a:ea typeface="游ゴシック Medium"/>
                 <a:cs typeface="Times New Roman"/>
               </a:rPr>
-              <a:t>Noise Model</a:t>
+              <a:t>Optimizer</a:t>
             </a:r>
           </a:p>
           <a:p>
@@ -38785,7 +38785,314 @@
               <a:buNone/>
             </a:pPr>
             <a:r>
-              <a:rPr lang="en-US" sz="2000" b="0" dirty="0">
+              <a:rPr lang="en-US" sz="1400" b="0" dirty="0"/>
+              <a:t>Gauss-Newton</a:t>
+            </a:r>
+            <a:r>
+              <a:rPr lang="en-US" sz="1400" dirty="0"/>
+              <a:t>, </a:t>
+            </a:r>
+            <a:r>
+              <a:rPr lang="en-US" sz="1400" b="0" dirty="0"/>
+              <a:t>Levenberg-Marquardt etc.</a:t>
+            </a:r>
+          </a:p>
+        </p:txBody>
+      </p:sp>
+      <p:sp>
+        <p:nvSpPr>
+          <p:cNvPr id="5" name="Text Placeholder 1">
+            <a:extLst>
+              <a:ext uri="{FF2B5EF4-FFF2-40B4-BE49-F238E27FC236}">
+                <a16:creationId xmlns:a16="http://schemas.microsoft.com/office/drawing/2014/main" id="{FE2A9541-CE2F-6648-E4D0-1B918D62088C}"/>
+              </a:ext>
+            </a:extLst>
+          </p:cNvPr>
+          <p:cNvSpPr txBox="1">
+            <a:spLocks/>
+          </p:cNvSpPr>
+          <p:nvPr/>
+        </p:nvSpPr>
+        <p:spPr>
+          <a:xfrm>
+            <a:off x="4545166" y="2774209"/>
+            <a:ext cx="4347314" cy="1132453"/>
+          </a:xfrm>
+          <a:prstGeom prst="rect">
+            <a:avLst/>
+          </a:prstGeom>
+          <a:noFill/>
+        </p:spPr>
+        <p:txBody>
+          <a:bodyPr vert="horz" lIns="91440" tIns="45720" rIns="91440" bIns="45720" rtlCol="0" anchor="t">
+            <a:noAutofit/>
+          </a:bodyPr>
+          <a:lstStyle>
+            <a:lvl1pPr marL="137160" indent="-137160" algn="l" defTabSz="685800" rtl="0" eaLnBrk="1" latinLnBrk="0" hangingPunct="1">
+              <a:lnSpc>
+                <a:spcPct val="90000"/>
+              </a:lnSpc>
+              <a:spcBef>
+                <a:spcPts val="900"/>
+              </a:spcBef>
+              <a:buClr>
+                <a:schemeClr val="accent1">
+                  <a:lumMod val="75000"/>
+                </a:schemeClr>
+              </a:buClr>
+              <a:buSzPct val="100000"/>
+              <a:buFont typeface="Arial" panose="020B0604020202020204" pitchFamily="34" charset="0"/>
+              <a:buChar char="•"/>
+              <a:defRPr kumimoji="1" sz="1500" b="1" kern="1200">
+                <a:solidFill>
+                  <a:schemeClr val="tx1"/>
+                </a:solidFill>
+                <a:latin typeface="游ゴシック Medium" panose="020B0500000000000000" pitchFamily="50" charset="-128"/>
+                <a:ea typeface="游ゴシック Medium" panose="020B0500000000000000" pitchFamily="50" charset="-128"/>
+                <a:cs typeface="+mn-cs"/>
+              </a:defRPr>
+            </a:lvl1pPr>
+            <a:lvl2pPr marL="342900" indent="-137160" algn="l" defTabSz="685800" rtl="0" eaLnBrk="1" latinLnBrk="0" hangingPunct="1">
+              <a:lnSpc>
+                <a:spcPct val="90000"/>
+              </a:lnSpc>
+              <a:spcBef>
+                <a:spcPts val="300"/>
+              </a:spcBef>
+              <a:spcAft>
+                <a:spcPts val="150"/>
+              </a:spcAft>
+              <a:buClr>
+                <a:schemeClr val="accent1">
+                  <a:lumMod val="75000"/>
+                </a:schemeClr>
+              </a:buClr>
+              <a:buSzPct val="100000"/>
+              <a:buFont typeface="Arial" panose="020B0604020202020204" pitchFamily="34" charset="0"/>
+              <a:buChar char="•"/>
+              <a:defRPr kumimoji="1" sz="1350" b="1" kern="1200">
+                <a:solidFill>
+                  <a:schemeClr val="tx1"/>
+                </a:solidFill>
+                <a:latin typeface="游ゴシック Medium" panose="020B0500000000000000" pitchFamily="50" charset="-128"/>
+                <a:ea typeface="游ゴシック Medium" panose="020B0500000000000000" pitchFamily="50" charset="-128"/>
+                <a:cs typeface="+mn-cs"/>
+              </a:defRPr>
+            </a:lvl2pPr>
+            <a:lvl3pPr marL="548640" indent="-137160" algn="l" defTabSz="685800" rtl="0" eaLnBrk="1" latinLnBrk="0" hangingPunct="1">
+              <a:lnSpc>
+                <a:spcPct val="90000"/>
+              </a:lnSpc>
+              <a:spcBef>
+                <a:spcPts val="300"/>
+              </a:spcBef>
+              <a:spcAft>
+                <a:spcPts val="150"/>
+              </a:spcAft>
+              <a:buClr>
+                <a:schemeClr val="accent1">
+                  <a:lumMod val="75000"/>
+                </a:schemeClr>
+              </a:buClr>
+              <a:buSzPct val="100000"/>
+              <a:buFont typeface="Arial" panose="020B0604020202020204" pitchFamily="34" charset="0"/>
+              <a:buChar char="•"/>
+              <a:defRPr kumimoji="1" sz="1200" b="1" kern="1200">
+                <a:solidFill>
+                  <a:schemeClr val="tx1"/>
+                </a:solidFill>
+                <a:latin typeface="游ゴシック Medium" panose="020B0500000000000000" pitchFamily="50" charset="-128"/>
+                <a:ea typeface="游ゴシック Medium" panose="020B0500000000000000" pitchFamily="50" charset="-128"/>
+                <a:cs typeface="+mn-cs"/>
+              </a:defRPr>
+            </a:lvl3pPr>
+            <a:lvl4pPr marL="754380" indent="-137160" algn="l" defTabSz="685800" rtl="0" eaLnBrk="1" latinLnBrk="0" hangingPunct="1">
+              <a:lnSpc>
+                <a:spcPct val="90000"/>
+              </a:lnSpc>
+              <a:spcBef>
+                <a:spcPts val="300"/>
+              </a:spcBef>
+              <a:spcAft>
+                <a:spcPts val="150"/>
+              </a:spcAft>
+              <a:buClr>
+                <a:schemeClr val="accent1">
+                  <a:lumMod val="75000"/>
+                </a:schemeClr>
+              </a:buClr>
+              <a:buSzPct val="100000"/>
+              <a:buFont typeface="Arial" panose="020B0604020202020204" pitchFamily="34" charset="0"/>
+              <a:buChar char="•"/>
+              <a:defRPr kumimoji="1" sz="1200" b="1" kern="1200">
+                <a:solidFill>
+                  <a:schemeClr val="tx1"/>
+                </a:solidFill>
+                <a:latin typeface="游ゴシック Medium" panose="020B0500000000000000" pitchFamily="50" charset="-128"/>
+                <a:ea typeface="游ゴシック Medium" panose="020B0500000000000000" pitchFamily="50" charset="-128"/>
+                <a:cs typeface="+mn-cs"/>
+              </a:defRPr>
+            </a:lvl4pPr>
+            <a:lvl5pPr marL="960120" indent="-137160" algn="l" defTabSz="685800" rtl="0" eaLnBrk="1" latinLnBrk="0" hangingPunct="1">
+              <a:lnSpc>
+                <a:spcPct val="90000"/>
+              </a:lnSpc>
+              <a:spcBef>
+                <a:spcPts val="300"/>
+              </a:spcBef>
+              <a:spcAft>
+                <a:spcPts val="150"/>
+              </a:spcAft>
+              <a:buClr>
+                <a:schemeClr val="accent1">
+                  <a:lumMod val="75000"/>
+                </a:schemeClr>
+              </a:buClr>
+              <a:buSzPct val="100000"/>
+              <a:buFont typeface="Arial" panose="020B0604020202020204" pitchFamily="34" charset="0"/>
+              <a:buChar char="•"/>
+              <a:defRPr kumimoji="1" sz="1200" b="1" kern="1200">
+                <a:solidFill>
+                  <a:schemeClr val="tx1"/>
+                </a:solidFill>
+                <a:latin typeface="游ゴシック Medium" panose="020B0500000000000000" pitchFamily="50" charset="-128"/>
+                <a:ea typeface="游ゴシック Medium" panose="020B0500000000000000" pitchFamily="50" charset="-128"/>
+                <a:cs typeface="+mn-cs"/>
+              </a:defRPr>
+            </a:lvl5pPr>
+            <a:lvl6pPr marL="1200000" indent="-171450" algn="l" defTabSz="685800" rtl="0" eaLnBrk="1" latinLnBrk="0" hangingPunct="1">
+              <a:lnSpc>
+                <a:spcPct val="90000"/>
+              </a:lnSpc>
+              <a:spcBef>
+                <a:spcPts val="300"/>
+              </a:spcBef>
+              <a:spcAft>
+                <a:spcPts val="150"/>
+              </a:spcAft>
+              <a:buClr>
+                <a:schemeClr val="accent1">
+                  <a:lumMod val="75000"/>
+                </a:schemeClr>
+              </a:buClr>
+              <a:buSzPct val="100000"/>
+              <a:buFont typeface="Arial" panose="020B0604020202020204" pitchFamily="34" charset="0"/>
+              <a:buChar char="•"/>
+              <a:defRPr kumimoji="1" sz="1200" kern="1200">
+                <a:solidFill>
+                  <a:schemeClr val="tx1"/>
+                </a:solidFill>
+                <a:latin typeface="+mn-lt"/>
+                <a:ea typeface="+mn-ea"/>
+                <a:cs typeface="+mn-cs"/>
+              </a:defRPr>
+            </a:lvl6pPr>
+            <a:lvl7pPr marL="1425000" indent="-171450" algn="l" defTabSz="685800" rtl="0" eaLnBrk="1" latinLnBrk="0" hangingPunct="1">
+              <a:lnSpc>
+                <a:spcPct val="90000"/>
+              </a:lnSpc>
+              <a:spcBef>
+                <a:spcPts val="300"/>
+              </a:spcBef>
+              <a:spcAft>
+                <a:spcPts val="150"/>
+              </a:spcAft>
+              <a:buClr>
+                <a:schemeClr val="accent1">
+                  <a:lumMod val="75000"/>
+                </a:schemeClr>
+              </a:buClr>
+              <a:buSzPct val="100000"/>
+              <a:buFont typeface="Arial" panose="020B0604020202020204" pitchFamily="34" charset="0"/>
+              <a:buChar char="•"/>
+              <a:defRPr kumimoji="1" sz="1200" kern="1200">
+                <a:solidFill>
+                  <a:schemeClr val="tx1"/>
+                </a:solidFill>
+                <a:latin typeface="+mn-lt"/>
+                <a:ea typeface="+mn-ea"/>
+                <a:cs typeface="+mn-cs"/>
+              </a:defRPr>
+            </a:lvl7pPr>
+            <a:lvl8pPr marL="1650000" indent="-171450" algn="l" defTabSz="685800" rtl="0" eaLnBrk="1" latinLnBrk="0" hangingPunct="1">
+              <a:lnSpc>
+                <a:spcPct val="90000"/>
+              </a:lnSpc>
+              <a:spcBef>
+                <a:spcPts val="300"/>
+              </a:spcBef>
+              <a:spcAft>
+                <a:spcPts val="150"/>
+              </a:spcAft>
+              <a:buClr>
+                <a:schemeClr val="accent1">
+                  <a:lumMod val="75000"/>
+                </a:schemeClr>
+              </a:buClr>
+              <a:buSzPct val="100000"/>
+              <a:buFont typeface="Arial" panose="020B0604020202020204" pitchFamily="34" charset="0"/>
+              <a:buChar char="•"/>
+              <a:defRPr kumimoji="1" sz="1200" kern="1200">
+                <a:solidFill>
+                  <a:schemeClr val="tx1"/>
+                </a:solidFill>
+                <a:latin typeface="+mn-lt"/>
+                <a:ea typeface="+mn-ea"/>
+                <a:cs typeface="+mn-cs"/>
+              </a:defRPr>
+            </a:lvl8pPr>
+            <a:lvl9pPr marL="1875000" indent="-171450" algn="l" defTabSz="685800" rtl="0" eaLnBrk="1" latinLnBrk="0" hangingPunct="1">
+              <a:lnSpc>
+                <a:spcPct val="90000"/>
+              </a:lnSpc>
+              <a:spcBef>
+                <a:spcPts val="300"/>
+              </a:spcBef>
+              <a:spcAft>
+                <a:spcPts val="150"/>
+              </a:spcAft>
+              <a:buClr>
+                <a:schemeClr val="accent1">
+                  <a:lumMod val="75000"/>
+                </a:schemeClr>
+              </a:buClr>
+              <a:buSzPct val="100000"/>
+              <a:buFont typeface="Arial" panose="020B0604020202020204" pitchFamily="34" charset="0"/>
+              <a:buChar char="•"/>
+              <a:defRPr kumimoji="1" sz="1200" kern="1200">
+                <a:solidFill>
+                  <a:schemeClr val="tx1"/>
+                </a:solidFill>
+                <a:latin typeface="+mn-lt"/>
+                <a:ea typeface="+mn-ea"/>
+                <a:cs typeface="+mn-cs"/>
+              </a:defRPr>
+            </a:lvl9pPr>
+          </a:lstStyle>
+          <a:p>
+            <a:pPr marL="0" indent="0">
+              <a:buClr>
+                <a:srgbClr val="9E3611"/>
+              </a:buClr>
+              <a:buNone/>
+            </a:pPr>
+            <a:r>
+              <a:rPr lang="pt-BR" sz="1400" dirty="0">
+                <a:ea typeface="游ゴシック Medium"/>
+                <a:cs typeface="Times New Roman"/>
+              </a:rPr>
+              <a:t>Noise Model/Weighting</a:t>
+            </a:r>
+          </a:p>
+          <a:p>
+            <a:pPr marL="0" indent="0">
+              <a:buClr>
+                <a:srgbClr val="9E3611"/>
+              </a:buClr>
+              <a:buNone/>
+            </a:pPr>
+            <a:r>
+              <a:rPr lang="en-US" sz="1400" b="0" dirty="0">
                 <a:ea typeface="游ゴシック Medium"/>
                 <a:cs typeface="Times New Roman"/>
               </a:rPr>
@@ -38800,10 +39107,10 @@
               <a:buNone/>
             </a:pPr>
             <a:r>
-              <a:rPr lang="en-US" sz="2000" b="0" dirty="0"/>
-              <a:t>➔ Assume small inconsistencies in graph values</a:t>
+              <a:rPr lang="en-US" sz="1400" b="0" dirty="0"/>
+              <a:t>➔ Assume inconsistencies and errors in edges</a:t>
             </a:r>
-            <a:endParaRPr lang="pt-BR" sz="2000" b="0" dirty="0">
+            <a:endParaRPr lang="pt-BR" sz="1400" b="0" dirty="0">
               <a:ea typeface="游ゴシック Medium"/>
               <a:cs typeface="Times New Roman"/>
             </a:endParaRPr>

--- a/documents/Jannis_Meyer_Presentation_11_05_2026.pptx
+++ b/documents/Jannis_Meyer_Presentation_11_05_2026.pptx
@@ -5,7 +5,7 @@
     <p:sldMasterId id="2284242785" r:id="rId4"/>
   </p:sldMasterIdLst>
   <p:notesMasterIdLst>
-    <p:notesMasterId r:id="rId23"/>
+    <p:notesMasterId r:id="rId24"/>
   </p:notesMasterIdLst>
   <p:sldIdLst>
     <p:sldId id="256" r:id="rId5"/>
@@ -18,14 +18,15 @@
     <p:sldId id="281" r:id="rId12"/>
     <p:sldId id="282" r:id="rId13"/>
     <p:sldId id="284" r:id="rId14"/>
-    <p:sldId id="285" r:id="rId15"/>
-    <p:sldId id="283" r:id="rId16"/>
-    <p:sldId id="286" r:id="rId17"/>
-    <p:sldId id="287" r:id="rId18"/>
-    <p:sldId id="288" r:id="rId19"/>
-    <p:sldId id="276" r:id="rId20"/>
-    <p:sldId id="289" r:id="rId21"/>
-    <p:sldId id="290" r:id="rId22"/>
+    <p:sldId id="292" r:id="rId15"/>
+    <p:sldId id="285" r:id="rId16"/>
+    <p:sldId id="283" r:id="rId17"/>
+    <p:sldId id="286" r:id="rId18"/>
+    <p:sldId id="287" r:id="rId19"/>
+    <p:sldId id="288" r:id="rId20"/>
+    <p:sldId id="276" r:id="rId21"/>
+    <p:sldId id="289" r:id="rId22"/>
+    <p:sldId id="290" r:id="rId23"/>
   </p:sldIdLst>
   <p:sldSz cx="9144000" cy="5143500" type="screen16x9"/>
   <p:notesSz cx="9144000" cy="6858000"/>
@@ -139,6 +140,89 @@
     <p1510:client id="{090E6414-710A-A14B-BA3F-16AC7C122D1A}" v="3" dt="2026-04-19T13:11:33.325"/>
   </p1510:revLst>
 </p1510:revInfo>
+</file>
+
+<file path=ppt/ink/ink1.xml><?xml version="1.0" encoding="utf-8"?>
+<inkml:ink xmlns:inkml="http://www.w3.org/2003/InkML">
+  <inkml:definitions>
+    <inkml:context xml:id="ctx0">
+      <inkml:inkSource xml:id="inkSrc0">
+        <inkml:traceFormat>
+          <inkml:channel name="X" type="integer" min="-2.14748E9" max="2.14748E9" units="cm"/>
+          <inkml:channel name="Y" type="integer" min="-2.14748E9" max="2.14748E9" units="cm"/>
+          <inkml:channel name="F" type="integer" max="32767" units="dev"/>
+        </inkml:traceFormat>
+        <inkml:channelProperties>
+          <inkml:channelProperty channel="X" name="resolution" value="1000" units="1/cm"/>
+          <inkml:channelProperty channel="Y" name="resolution" value="1000" units="1/cm"/>
+          <inkml:channelProperty channel="F" name="resolution" value="0" units="1/dev"/>
+        </inkml:channelProperties>
+      </inkml:inkSource>
+      <inkml:timestamp xml:id="ts0" timeString="2026-05-09T12:10:25.998"/>
+    </inkml:context>
+    <inkml:brush xml:id="br0">
+      <inkml:brushProperty name="width" value="0.035" units="cm"/>
+      <inkml:brushProperty name="height" value="0.035" units="cm"/>
+    </inkml:brush>
+  </inkml:definitions>
+  <inkml:trace contextRef="#ctx0" brushRef="#br0">2205 67 24575,'-12'-5'0,"0"1"0,0 0 0,0 1 0,0 0 0,-20-2 0,-66 1 0,64 3 0,-597-1 0,326 4 0,274-2 0,0 1 0,-1 2 0,1 1 0,-36 10 0,48-8 0,0 0 0,1 2 0,0 0 0,0 1 0,0 0 0,1 2 0,-24 19 0,-59 46 0,42-33 0,-73 69 0,115-95 0,1 2 0,1-1 0,0 2 0,1 0 0,1 1 0,-9 23 0,-48 138 0,66-171 0,-9 30 0,-7 51 0,12-54 0,-1 0 0,-17 43 0,-18 16 0,29-69 0,1 0 0,1 1 0,2 1 0,-9 40 0,-13 241 0,28 1 0,6-274 0,1-1 0,2 0 0,2-1 0,1 1 0,16 42 0,79 170 0,-42-120 0,6-4 0,126 178 0,-164-266 0,2-1 0,1-1 0,56 47 0,122 74 0,-82-59 0,39 25 0,-101-85 0,125 49 0,-67-33 0,-84-34 0,1-3 0,0-1 0,2-2 0,-1-2 0,2-2 0,44 4 0,333-9 0,-232-8 0,-174 4 0,67 1 0,0-5 0,109-17 0,34-17 0,104-23 0,-306 56 0,-1-1 0,0-1 0,-1-1 0,1-1 0,-2-1 0,1-1 0,-2-1 0,1 0 0,-2-1 0,0-2 0,17-16 0,57-64 0,58-51 0,-73 84 0,70-62 0,-88 66 0,54-71 0,-94 104 0,-1-1 0,-1-1 0,-1 0 0,-1-2 0,-2 0 0,11-32 0,-14 23 0,-1 0 0,-1-1 0,3-75 0,-11-120 0,-3 97 0,3-580 0,-1 687 0,-1 0 0,-1 0 0,-14-53 0,1 28 0,-24-53 0,20 58 0,9 19 0,-1-1 0,-2 2 0,-2 0 0,0 0 0,-24-29 0,28 43 0,-199-242 0,187 233 0,0 1 0,-2 1 0,-1 1 0,0 1 0,-2 1 0,-37-19 0,7 10 0,-1 1 0,-85-24 0,108 37 0,1 0 0,-57-35 0,21 10 0,14 11 0,0 3 0,-1 2 0,-82-21 0,101 39 0,0 1 0,-1 2 0,1 2 0,-46 4 0,-2 0 0,-494-3-1365,556 0-5461</inkml:trace>
+</inkml:ink>
+</file>
+
+<file path=ppt/ink/ink2.xml><?xml version="1.0" encoding="utf-8"?>
+<inkml:ink xmlns:inkml="http://www.w3.org/2003/InkML">
+  <inkml:definitions>
+    <inkml:context xml:id="ctx0">
+      <inkml:inkSource xml:id="inkSrc0">
+        <inkml:traceFormat>
+          <inkml:channel name="X" type="integer" min="-2.14748E9" max="2.14748E9" units="cm"/>
+          <inkml:channel name="Y" type="integer" min="-2.14748E9" max="2.14748E9" units="cm"/>
+          <inkml:channel name="F" type="integer" max="32767" units="dev"/>
+        </inkml:traceFormat>
+        <inkml:channelProperties>
+          <inkml:channelProperty channel="X" name="resolution" value="1000" units="1/cm"/>
+          <inkml:channelProperty channel="Y" name="resolution" value="1000" units="1/cm"/>
+          <inkml:channelProperty channel="F" name="resolution" value="0" units="1/dev"/>
+        </inkml:channelProperties>
+      </inkml:inkSource>
+      <inkml:timestamp xml:id="ts0" timeString="2026-05-09T12:12:27.010"/>
+    </inkml:context>
+    <inkml:brush xml:id="br0">
+      <inkml:brushProperty name="width" value="0.035" units="cm"/>
+      <inkml:brushProperty name="height" value="0.035" units="cm"/>
+      <inkml:brushProperty name="color" value="#D34817"/>
+    </inkml:brush>
+  </inkml:definitions>
+  <inkml:trace contextRef="#ctx0" brushRef="#br0">1505 969 24575,'-14'0'0,"-142"4"0,126-2 0,0 2 0,1 1 0,-35 11 0,-40 20 0,1 5 0,3 5 0,1 4 0,3 4 0,2 4 0,-109 89 0,151-106 0,-61 65 0,92-84 0,1 1 0,2 1 0,0 1 0,1 1 0,-14 32 0,13-18 0,2 0 0,2 2 0,2 0 0,2 0 0,2 1 0,1 1 0,3-1 0,0 55 0,6 270 0,0-139 0,-1-158 0,17 122 0,-11-153 0,2-1 0,1 0 0,3-1 0,26 59 0,11 1 0,5-2 0,3-3 0,4-3 0,5-3 0,91 95 0,-116-138 0,92 92 0,-102-108 0,0-1 0,57 35 0,100 33 0,-79-44 0,-62-28 0,2-2 0,0-3 0,1-2 0,1-2 0,0-2 0,96 9 0,450 9 0,-508-29 0,180-6 0,-215 1 0,0-2 0,103-27 0,86-27 0,102-32 0,-284 68 0,0-2 0,-2-3 0,-1-2 0,-2-3 0,70-55 0,-56 36 0,64-52 0,-115 86 0,0 0 0,-2-2 0,0 0 0,19-29 0,-8 1 0,-3-1 0,-2-1 0,-3-1 0,-1-1 0,-3-1 0,10-59 0,-14 43 0,-4-1 0,1-78 0,-13-148 0,0 122 0,2-790 0,0 941 0,-1-1 0,-1 1 0,-1 0 0,-2 1 0,0-1 0,-1 1 0,-2 0 0,-20-40 0,-10-5 0,-64-87 0,70 109 0,-165-209 0,152 206 0,-2 1 0,-95-71 0,-25 7 0,60 43 0,12 0 0,63 42 0,-2 2 0,0 2 0,-75-36 0,24 24 0,-2 4 0,-1 5 0,-1 3 0,-94-11 0,-162-26 0,45 6 0,213 43 0,-130 0 0,102 13 0,-139-3 0,174-11-1365,48 6-5461</inkml:trace>
+</inkml:ink>
+</file>
+
+<file path=ppt/ink/ink3.xml><?xml version="1.0" encoding="utf-8"?>
+<inkml:ink xmlns:inkml="http://www.w3.org/2003/InkML">
+  <inkml:definitions>
+    <inkml:context xml:id="ctx0">
+      <inkml:inkSource xml:id="inkSrc0">
+        <inkml:traceFormat>
+          <inkml:channel name="X" type="integer" min="-2.14748E9" max="2.14748E9" units="cm"/>
+          <inkml:channel name="Y" type="integer" min="-2.14748E9" max="2.14748E9" units="cm"/>
+          <inkml:channel name="F" type="integer" max="32767" units="dev"/>
+        </inkml:traceFormat>
+        <inkml:channelProperties>
+          <inkml:channelProperty channel="X" name="resolution" value="1000" units="1/cm"/>
+          <inkml:channelProperty channel="Y" name="resolution" value="1000" units="1/cm"/>
+          <inkml:channelProperty channel="F" name="resolution" value="0" units="1/dev"/>
+        </inkml:channelProperties>
+      </inkml:inkSource>
+      <inkml:timestamp xml:id="ts0" timeString="2026-05-09T12:12:44.577"/>
+    </inkml:context>
+    <inkml:brush xml:id="br0">
+      <inkml:brushProperty name="width" value="0.035" units="cm"/>
+      <inkml:brushProperty name="height" value="0.035" units="cm"/>
+      <inkml:brushProperty name="color" value="#D34817"/>
+    </inkml:brush>
+  </inkml:definitions>
+  <inkml:trace contextRef="#ctx0" brushRef="#br0">2205 67 24575,'-12'-5'0,"0"1"0,0 0 0,0 1 0,0 0 0,-20-2 0,-66 1 0,64 3 0,-597-1 0,326 4 0,274-2 0,0 1 0,-1 2 0,1 1 0,-36 10 0,48-8 0,0 0 0,1 2 0,0 0 0,0 1 0,0 0 0,1 2 0,-24 19 0,-59 46 0,42-33 0,-73 69 0,115-95 0,1 2 0,1-1 0,0 2 0,1 0 0,1 1 0,-9 23 0,-48 138 0,66-171 0,-9 30 0,-7 51 0,12-54 0,-1 0 0,-17 43 0,-18 16 0,29-69 0,1 0 0,1 1 0,2 1 0,-9 40 0,-13 241 0,28 1 0,6-274 0,1-1 0,2 0 0,2-1 0,1 1 0,16 42 0,79 170 0,-42-120 0,6-4 0,126 178 0,-164-266 0,2-1 0,1-1 0,56 47 0,122 74 0,-82-59 0,39 25 0,-101-85 0,125 49 0,-67-33 0,-84-34 0,1-3 0,0-1 0,2-2 0,-1-2 0,2-2 0,44 4 0,333-9 0,-232-8 0,-174 4 0,67 1 0,0-5 0,109-17 0,34-17 0,104-23 0,-306 56 0,-1-1 0,0-1 0,-1-1 0,1-1 0,-2-1 0,1-1 0,-2-1 0,1 0 0,-2-1 0,0-2 0,17-16 0,57-64 0,58-51 0,-73 84 0,70-62 0,-88 66 0,54-71 0,-94 104 0,-1-1 0,-1-1 0,-1 0 0,-1-2 0,-2 0 0,11-32 0,-14 23 0,-1 0 0,-1-1 0,3-75 0,-11-120 0,-3 97 0,3-580 0,-1 687 0,-1 0 0,-1 0 0,-14-53 0,1 28 0,-24-53 0,20 58 0,9 19 0,-1-1 0,-2 2 0,-2 0 0,0 0 0,-24-29 0,28 43 0,-199-242 0,187 233 0,0 1 0,-2 1 0,-1 1 0,0 1 0,-2 1 0,-37-19 0,7 10 0,-1 1 0,-85-24 0,108 37 0,1 0 0,-57-35 0,21 10 0,14 11 0,0 3 0,-1 2 0,-82-21 0,101 39 0,0 1 0,-1 2 0,1 2 0,-46 4 0,-2 0 0,-494-3-1365,556 0-5461</inkml:trace>
+</inkml:ink>
 </file>
 
 <file path=ppt/notesMasters/notesMaster1.xml><?xml version="1.0" encoding="utf-8"?>
@@ -349,7 +433,1345 @@
 </p:notes>
 </file>
 
+<file path=ppt/notesSlides/notesSlide10.xml><?xml version="1.0" encoding="utf-8"?>
+<p:notes xmlns:a="http://schemas.openxmlformats.org/drawingml/2006/main" xmlns:r="http://schemas.openxmlformats.org/officeDocument/2006/relationships" xmlns:p="http://schemas.openxmlformats.org/presentationml/2006/main">
+  <p:cSld>
+    <p:spTree>
+      <p:nvGrpSpPr>
+        <p:cNvPr id="1" name=""/>
+        <p:cNvGrpSpPr/>
+        <p:nvPr/>
+      </p:nvGrpSpPr>
+      <p:grpSpPr>
+        <a:xfrm>
+          <a:off x="0" y="0"/>
+          <a:ext cx="0" cy="0"/>
+          <a:chOff x="0" y="0"/>
+          <a:chExt cx="0" cy="0"/>
+        </a:xfrm>
+      </p:grpSpPr>
+      <p:sp>
+        <p:nvSpPr>
+          <p:cNvPr id="2" name="Folienbildplatzhalter 1"/>
+          <p:cNvSpPr>
+            <a:spLocks noGrp="1" noRot="1" noChangeAspect="1"/>
+          </p:cNvSpPr>
+          <p:nvPr>
+            <p:ph type="sldImg"/>
+          </p:nvPr>
+        </p:nvSpPr>
+        <p:spPr>
+          <a:xfrm>
+            <a:off x="2514600" y="857250"/>
+            <a:ext cx="4114800" cy="2314575"/>
+          </a:xfrm>
+          <a:prstGeom prst="rect">
+            <a:avLst/>
+          </a:prstGeom>
+          <a:noFill/>
+          <a:ln w="12700">
+            <a:solidFill>
+              <a:prstClr val="black"/>
+            </a:solidFill>
+          </a:ln>
+        </p:spPr>
+      </p:sp>
+      <p:sp>
+        <p:nvSpPr>
+          <p:cNvPr id="3" name="Notizenplatzhalter 2"/>
+          <p:cNvSpPr>
+            <a:spLocks noGrp="1"/>
+          </p:cNvSpPr>
+          <p:nvPr>
+            <p:ph type="body" idx="1"/>
+          </p:nvPr>
+        </p:nvSpPr>
+        <p:spPr>
+          <a:xfrm>
+            <a:off x="914400" y="3300413"/>
+            <a:ext cx="7315200" cy="2700337"/>
+          </a:xfrm>
+          <a:prstGeom prst="rect">
+            <a:avLst/>
+          </a:prstGeom>
+        </p:spPr>
+        <p:txBody>
+          <a:bodyPr/>
+          <a:lstStyle/>
+          <a:p>
+            <a:endParaRPr lang="de-DE" dirty="0"/>
+          </a:p>
+        </p:txBody>
+      </p:sp>
+    </p:spTree>
+    <p:extLst>
+      <p:ext uri="{BB962C8B-B14F-4D97-AF65-F5344CB8AC3E}">
+        <p14:creationId xmlns:p14="http://schemas.microsoft.com/office/powerpoint/2010/main" val="2234573067"/>
+      </p:ext>
+    </p:extLst>
+  </p:cSld>
+  <p:clrMapOvr>
+    <a:masterClrMapping/>
+  </p:clrMapOvr>
+</p:notes>
+</file>
+
 <file path=ppt/notesSlides/notesSlide2.xml><?xml version="1.0" encoding="utf-8"?>
+<p:notes xmlns:a="http://schemas.openxmlformats.org/drawingml/2006/main" xmlns:r="http://schemas.openxmlformats.org/officeDocument/2006/relationships" xmlns:p="http://schemas.openxmlformats.org/presentationml/2006/main">
+  <p:cSld>
+    <p:spTree>
+      <p:nvGrpSpPr>
+        <p:cNvPr id="1" name=""/>
+        <p:cNvGrpSpPr/>
+        <p:nvPr/>
+      </p:nvGrpSpPr>
+      <p:grpSpPr>
+        <a:xfrm>
+          <a:off x="0" y="0"/>
+          <a:ext cx="0" cy="0"/>
+          <a:chOff x="0" y="0"/>
+          <a:chExt cx="0" cy="0"/>
+        </a:xfrm>
+      </p:grpSpPr>
+      <p:sp>
+        <p:nvSpPr>
+          <p:cNvPr id="2" name="Folienbildplatzhalter 1"/>
+          <p:cNvSpPr>
+            <a:spLocks noGrp="1" noRot="1" noChangeAspect="1"/>
+          </p:cNvSpPr>
+          <p:nvPr>
+            <p:ph type="sldImg"/>
+          </p:nvPr>
+        </p:nvSpPr>
+        <p:spPr>
+          <a:xfrm>
+            <a:off x="2514600" y="857250"/>
+            <a:ext cx="4114800" cy="2314575"/>
+          </a:xfrm>
+          <a:prstGeom prst="rect">
+            <a:avLst/>
+          </a:prstGeom>
+          <a:noFill/>
+          <a:ln w="12700">
+            <a:solidFill>
+              <a:prstClr val="black"/>
+            </a:solidFill>
+          </a:ln>
+        </p:spPr>
+      </p:sp>
+      <p:sp>
+        <p:nvSpPr>
+          <p:cNvPr id="3" name="Notizenplatzhalter 2"/>
+          <p:cNvSpPr>
+            <a:spLocks noGrp="1"/>
+          </p:cNvSpPr>
+          <p:nvPr>
+            <p:ph type="body" idx="1"/>
+          </p:nvPr>
+        </p:nvSpPr>
+        <p:spPr>
+          <a:xfrm>
+            <a:off x="914400" y="3300413"/>
+            <a:ext cx="7315200" cy="2700337"/>
+          </a:xfrm>
+          <a:prstGeom prst="rect">
+            <a:avLst/>
+          </a:prstGeom>
+        </p:spPr>
+        <p:txBody>
+          <a:bodyPr/>
+          <a:lstStyle/>
+          <a:p>
+            <a:pPr marL="171450" indent="-171450">
+              <a:buFontTx/>
+              <a:buChar char="-"/>
+            </a:pPr>
+            <a:r>
+              <a:rPr lang="de-DE" dirty="0" err="1"/>
+              <a:t>There</a:t>
+            </a:r>
+            <a:r>
+              <a:rPr lang="de-DE" dirty="0"/>
+              <a:t> </a:t>
+            </a:r>
+            <a:r>
+              <a:rPr lang="de-DE" dirty="0" err="1"/>
+              <a:t>are</a:t>
+            </a:r>
+            <a:r>
+              <a:rPr lang="de-DE" dirty="0"/>
+              <a:t> 3d and 2d UR </a:t>
+            </a:r>
+            <a:r>
+              <a:rPr lang="de-DE" dirty="0" err="1"/>
+              <a:t>devices</a:t>
+            </a:r>
+            <a:endParaRPr lang="de-DE" dirty="0"/>
+          </a:p>
+          <a:p>
+            <a:pPr marL="171450" indent="-171450">
+              <a:buFontTx/>
+              <a:buChar char="-"/>
+            </a:pPr>
+            <a:r>
+              <a:rPr lang="de-DE" dirty="0"/>
+              <a:t>3d </a:t>
+            </a:r>
+            <a:r>
+              <a:rPr lang="de-DE" dirty="0" err="1"/>
+              <a:t>allows</a:t>
+            </a:r>
+            <a:r>
+              <a:rPr lang="de-DE" dirty="0"/>
+              <a:t> </a:t>
+            </a:r>
+            <a:r>
+              <a:rPr lang="de-DE" dirty="0" err="1"/>
+              <a:t>for</a:t>
+            </a:r>
+            <a:r>
+              <a:rPr lang="de-DE" dirty="0"/>
+              <a:t> </a:t>
+            </a:r>
+            <a:r>
+              <a:rPr lang="de-DE" dirty="0" err="1"/>
+              <a:t>better</a:t>
+            </a:r>
+            <a:r>
+              <a:rPr lang="de-DE" dirty="0"/>
+              <a:t> </a:t>
+            </a:r>
+            <a:r>
+              <a:rPr lang="de-DE" dirty="0" err="1"/>
+              <a:t>overview</a:t>
+            </a:r>
+            <a:r>
+              <a:rPr lang="de-DE" dirty="0"/>
+              <a:t> and </a:t>
+            </a:r>
+            <a:r>
+              <a:rPr lang="de-DE" dirty="0" err="1"/>
+              <a:t>diagnosis</a:t>
+            </a:r>
+            <a:endParaRPr lang="de-DE" dirty="0"/>
+          </a:p>
+          <a:p>
+            <a:pPr marL="171450" indent="-171450">
+              <a:buFontTx/>
+              <a:buChar char="-"/>
+            </a:pPr>
+            <a:r>
+              <a:rPr lang="de-DE" dirty="0"/>
+              <a:t>3d UR </a:t>
+            </a:r>
+            <a:r>
+              <a:rPr lang="de-DE" dirty="0" err="1"/>
+              <a:t>has</a:t>
+            </a:r>
+            <a:r>
+              <a:rPr lang="de-DE" dirty="0"/>
+              <a:t> </a:t>
+            </a:r>
+            <a:r>
+              <a:rPr lang="de-DE" dirty="0" err="1"/>
+              <a:t>lower</a:t>
+            </a:r>
+            <a:r>
+              <a:rPr lang="de-DE" dirty="0"/>
+              <a:t> </a:t>
+            </a:r>
+            <a:r>
+              <a:rPr lang="de-DE" dirty="0" err="1"/>
+              <a:t>resolution</a:t>
+            </a:r>
+            <a:r>
+              <a:rPr lang="de-DE" dirty="0"/>
+              <a:t> </a:t>
+            </a:r>
+            <a:r>
+              <a:rPr lang="de-DE" dirty="0" err="1"/>
+              <a:t>as</a:t>
+            </a:r>
+            <a:r>
+              <a:rPr lang="de-DE" dirty="0"/>
+              <a:t> </a:t>
+            </a:r>
+            <a:r>
+              <a:rPr lang="de-DE" dirty="0" err="1"/>
+              <a:t>more</a:t>
+            </a:r>
+            <a:r>
+              <a:rPr lang="de-DE" dirty="0"/>
+              <a:t> </a:t>
+            </a:r>
+            <a:r>
+              <a:rPr lang="de-DE" dirty="0" err="1"/>
+              <a:t>volume</a:t>
+            </a:r>
+            <a:r>
+              <a:rPr lang="de-DE" dirty="0"/>
+              <a:t> </a:t>
+            </a:r>
+            <a:r>
+              <a:rPr lang="de-DE" dirty="0" err="1"/>
+              <a:t>has</a:t>
+            </a:r>
+            <a:r>
+              <a:rPr lang="de-DE" dirty="0"/>
+              <a:t> </a:t>
+            </a:r>
+            <a:r>
+              <a:rPr lang="de-DE" dirty="0" err="1"/>
+              <a:t>to</a:t>
+            </a:r>
+            <a:r>
+              <a:rPr lang="de-DE" dirty="0"/>
+              <a:t> </a:t>
+            </a:r>
+            <a:r>
+              <a:rPr lang="de-DE" dirty="0" err="1"/>
+              <a:t>be</a:t>
+            </a:r>
+            <a:r>
+              <a:rPr lang="de-DE" dirty="0"/>
+              <a:t> </a:t>
+            </a:r>
+            <a:r>
+              <a:rPr lang="de-DE" dirty="0" err="1"/>
+              <a:t>scanned</a:t>
+            </a:r>
+            <a:r>
+              <a:rPr lang="de-DE" dirty="0"/>
+              <a:t> </a:t>
+            </a:r>
+            <a:r>
+              <a:rPr lang="de-DE" dirty="0" err="1"/>
+              <a:t>with</a:t>
+            </a:r>
+            <a:r>
+              <a:rPr lang="de-DE" dirty="0"/>
+              <a:t> </a:t>
+            </a:r>
+            <a:r>
+              <a:rPr lang="de-DE" dirty="0" err="1"/>
+              <a:t>the</a:t>
+            </a:r>
+            <a:r>
+              <a:rPr lang="de-DE" dirty="0"/>
+              <a:t> same UR beam</a:t>
+            </a:r>
+          </a:p>
+          <a:p>
+            <a:pPr marL="171450" indent="-171450">
+              <a:buFontTx/>
+              <a:buChar char="-"/>
+            </a:pPr>
+            <a:r>
+              <a:rPr lang="de-DE" dirty="0" err="1"/>
+              <a:t>reconstruct</a:t>
+            </a:r>
+            <a:r>
+              <a:rPr lang="de-DE" dirty="0"/>
+              <a:t> </a:t>
+            </a:r>
+            <a:r>
+              <a:rPr lang="de-DE" dirty="0" err="1"/>
+              <a:t>volumetric</a:t>
+            </a:r>
+            <a:r>
+              <a:rPr lang="de-DE" dirty="0"/>
+              <a:t> </a:t>
+            </a:r>
+            <a:r>
+              <a:rPr lang="de-DE" dirty="0" err="1"/>
+              <a:t>data</a:t>
+            </a:r>
+            <a:r>
+              <a:rPr lang="de-DE" dirty="0"/>
+              <a:t> </a:t>
+            </a:r>
+            <a:r>
+              <a:rPr lang="de-DE" dirty="0" err="1"/>
+              <a:t>from</a:t>
+            </a:r>
+            <a:r>
+              <a:rPr lang="de-DE" dirty="0"/>
+              <a:t> </a:t>
+            </a:r>
+            <a:r>
+              <a:rPr lang="de-DE" dirty="0" err="1"/>
+              <a:t>freehand</a:t>
+            </a:r>
+            <a:r>
+              <a:rPr lang="de-DE" dirty="0"/>
+              <a:t> 2d UR + probe </a:t>
+            </a:r>
+            <a:r>
+              <a:rPr lang="de-DE" dirty="0" err="1"/>
+              <a:t>pose</a:t>
+            </a:r>
+            <a:endParaRPr lang="de-DE" dirty="0"/>
+          </a:p>
+        </p:txBody>
+      </p:sp>
+    </p:spTree>
+    <p:extLst>
+      <p:ext uri="{BB962C8B-B14F-4D97-AF65-F5344CB8AC3E}">
+        <p14:creationId xmlns:p14="http://schemas.microsoft.com/office/powerpoint/2010/main" val="69922130"/>
+      </p:ext>
+    </p:extLst>
+  </p:cSld>
+  <p:clrMapOvr>
+    <a:masterClrMapping/>
+  </p:clrMapOvr>
+</p:notes>
+</file>
+
+<file path=ppt/notesSlides/notesSlide3.xml><?xml version="1.0" encoding="utf-8"?>
+<p:notes xmlns:a="http://schemas.openxmlformats.org/drawingml/2006/main" xmlns:r="http://schemas.openxmlformats.org/officeDocument/2006/relationships" xmlns:p="http://schemas.openxmlformats.org/presentationml/2006/main">
+  <p:cSld>
+    <p:spTree>
+      <p:nvGrpSpPr>
+        <p:cNvPr id="1" name=""/>
+        <p:cNvGrpSpPr/>
+        <p:nvPr/>
+      </p:nvGrpSpPr>
+      <p:grpSpPr>
+        <a:xfrm>
+          <a:off x="0" y="0"/>
+          <a:ext cx="0" cy="0"/>
+          <a:chOff x="0" y="0"/>
+          <a:chExt cx="0" cy="0"/>
+        </a:xfrm>
+      </p:grpSpPr>
+      <p:sp>
+        <p:nvSpPr>
+          <p:cNvPr id="2" name="Folienbildplatzhalter 1"/>
+          <p:cNvSpPr>
+            <a:spLocks noGrp="1" noRot="1" noChangeAspect="1"/>
+          </p:cNvSpPr>
+          <p:nvPr>
+            <p:ph type="sldImg"/>
+          </p:nvPr>
+        </p:nvSpPr>
+        <p:spPr>
+          <a:xfrm>
+            <a:off x="2514600" y="857250"/>
+            <a:ext cx="4114800" cy="2314575"/>
+          </a:xfrm>
+          <a:prstGeom prst="rect">
+            <a:avLst/>
+          </a:prstGeom>
+          <a:noFill/>
+          <a:ln w="12700">
+            <a:solidFill>
+              <a:prstClr val="black"/>
+            </a:solidFill>
+          </a:ln>
+        </p:spPr>
+      </p:sp>
+      <p:sp>
+        <p:nvSpPr>
+          <p:cNvPr id="3" name="Notizenplatzhalter 2"/>
+          <p:cNvSpPr>
+            <a:spLocks noGrp="1"/>
+          </p:cNvSpPr>
+          <p:nvPr>
+            <p:ph type="body" idx="1"/>
+          </p:nvPr>
+        </p:nvSpPr>
+        <p:spPr>
+          <a:xfrm>
+            <a:off x="914400" y="3300413"/>
+            <a:ext cx="7315200" cy="2700337"/>
+          </a:xfrm>
+          <a:prstGeom prst="rect">
+            <a:avLst/>
+          </a:prstGeom>
+        </p:spPr>
+        <p:txBody>
+          <a:bodyPr/>
+          <a:lstStyle/>
+          <a:p>
+            <a:pPr marL="171450" indent="-171450">
+              <a:buFontTx/>
+              <a:buChar char="-"/>
+            </a:pPr>
+            <a:r>
+              <a:rPr lang="de-DE" dirty="0"/>
+              <a:t>Tracking probe </a:t>
+            </a:r>
+            <a:r>
+              <a:rPr lang="de-DE" dirty="0" err="1"/>
+              <a:t>using</a:t>
+            </a:r>
+            <a:r>
+              <a:rPr lang="de-DE" dirty="0"/>
+              <a:t> </a:t>
+            </a:r>
+            <a:r>
+              <a:rPr lang="de-DE" dirty="0" err="1"/>
+              <a:t>cameras</a:t>
+            </a:r>
+            <a:r>
+              <a:rPr lang="de-DE" dirty="0"/>
+              <a:t>, </a:t>
+            </a:r>
+            <a:r>
+              <a:rPr lang="de-DE" dirty="0" err="1"/>
+              <a:t>electromagentic</a:t>
+            </a:r>
+            <a:r>
+              <a:rPr lang="de-DE" dirty="0"/>
+              <a:t> </a:t>
+            </a:r>
+            <a:r>
+              <a:rPr lang="de-DE" dirty="0" err="1"/>
+              <a:t>sensors</a:t>
+            </a:r>
+            <a:r>
+              <a:rPr lang="de-DE" dirty="0"/>
+              <a:t> etc.: </a:t>
+            </a:r>
+            <a:r>
+              <a:rPr lang="de-DE" dirty="0" err="1"/>
+              <a:t>hassle</a:t>
+            </a:r>
+            <a:r>
+              <a:rPr lang="de-DE" dirty="0"/>
+              <a:t> </a:t>
+            </a:r>
+            <a:r>
+              <a:rPr lang="de-DE" dirty="0" err="1"/>
+              <a:t>to</a:t>
+            </a:r>
+            <a:r>
+              <a:rPr lang="de-DE" dirty="0"/>
+              <a:t> </a:t>
+            </a:r>
+            <a:r>
+              <a:rPr lang="de-DE" dirty="0" err="1"/>
+              <a:t>setup</a:t>
+            </a:r>
+            <a:r>
+              <a:rPr lang="de-DE" dirty="0"/>
+              <a:t>, </a:t>
+            </a:r>
+            <a:r>
+              <a:rPr lang="de-DE" dirty="0" err="1"/>
+              <a:t>sensors</a:t>
+            </a:r>
+            <a:r>
+              <a:rPr lang="de-DE" dirty="0"/>
+              <a:t> </a:t>
+            </a:r>
+            <a:r>
+              <a:rPr lang="de-DE" dirty="0" err="1"/>
+              <a:t>can</a:t>
+            </a:r>
+            <a:r>
+              <a:rPr lang="de-DE" dirty="0"/>
+              <a:t> fail, </a:t>
+            </a:r>
+            <a:r>
+              <a:rPr lang="de-DE" dirty="0" err="1"/>
+              <a:t>interference</a:t>
+            </a:r>
+            <a:endParaRPr lang="de-DE" dirty="0"/>
+          </a:p>
+          <a:p>
+            <a:pPr marL="171450" indent="-171450">
+              <a:buFontTx/>
+              <a:buChar char="-"/>
+            </a:pPr>
+            <a:r>
+              <a:rPr lang="de-DE" dirty="0"/>
+              <a:t>Speckle </a:t>
+            </a:r>
+            <a:r>
+              <a:rPr lang="de-DE" dirty="0" err="1"/>
+              <a:t>Decorrelation</a:t>
+            </a:r>
+            <a:r>
+              <a:rPr lang="de-DE" dirty="0"/>
+              <a:t>: Speckle </a:t>
+            </a:r>
+            <a:r>
+              <a:rPr lang="de-DE" dirty="0" err="1"/>
+              <a:t>is</a:t>
+            </a:r>
+            <a:r>
+              <a:rPr lang="de-DE" dirty="0"/>
+              <a:t> </a:t>
+            </a:r>
+            <a:r>
+              <a:rPr lang="de-DE" dirty="0" err="1"/>
+              <a:t>essentially</a:t>
+            </a:r>
+            <a:r>
+              <a:rPr lang="de-DE" dirty="0"/>
+              <a:t> </a:t>
+            </a:r>
+            <a:r>
+              <a:rPr lang="de-DE" dirty="0" err="1"/>
+              <a:t>blurry</a:t>
+            </a:r>
+            <a:r>
+              <a:rPr lang="de-DE" dirty="0"/>
+              <a:t> </a:t>
+            </a:r>
+            <a:r>
+              <a:rPr lang="de-DE" dirty="0" err="1"/>
+              <a:t>part</a:t>
+            </a:r>
+            <a:r>
+              <a:rPr lang="de-DE" dirty="0"/>
+              <a:t> </a:t>
+            </a:r>
+            <a:r>
+              <a:rPr lang="de-DE" dirty="0" err="1"/>
+              <a:t>of</a:t>
+            </a:r>
+            <a:r>
+              <a:rPr lang="de-DE" dirty="0"/>
+              <a:t> UR </a:t>
+            </a:r>
+            <a:r>
+              <a:rPr lang="de-DE" dirty="0" err="1"/>
+              <a:t>images</a:t>
+            </a:r>
+            <a:r>
+              <a:rPr lang="de-DE" dirty="0"/>
+              <a:t>, </a:t>
+            </a:r>
+            <a:r>
+              <a:rPr lang="de-DE" dirty="0" err="1"/>
+              <a:t>dependant</a:t>
+            </a:r>
+            <a:r>
+              <a:rPr lang="de-DE" dirty="0"/>
+              <a:t> on </a:t>
+            </a:r>
+            <a:r>
+              <a:rPr lang="de-DE" dirty="0" err="1"/>
+              <a:t>scanned</a:t>
+            </a:r>
+            <a:r>
+              <a:rPr lang="de-DE" dirty="0"/>
+              <a:t> </a:t>
+            </a:r>
+            <a:r>
+              <a:rPr lang="de-DE" dirty="0" err="1"/>
+              <a:t>tissue</a:t>
+            </a:r>
+            <a:r>
+              <a:rPr lang="de-DE" dirty="0"/>
+              <a:t>, </a:t>
+            </a:r>
+            <a:r>
+              <a:rPr lang="de-DE" dirty="0" err="1"/>
+              <a:t>motion</a:t>
+            </a:r>
+            <a:r>
+              <a:rPr lang="de-DE" dirty="0"/>
+              <a:t> </a:t>
+            </a:r>
+            <a:r>
+              <a:rPr lang="de-DE" dirty="0" err="1"/>
+              <a:t>can</a:t>
+            </a:r>
+            <a:r>
+              <a:rPr lang="de-DE" dirty="0"/>
+              <a:t> </a:t>
+            </a:r>
+            <a:r>
+              <a:rPr lang="de-DE" dirty="0" err="1"/>
+              <a:t>be</a:t>
+            </a:r>
+            <a:r>
+              <a:rPr lang="de-DE" dirty="0"/>
+              <a:t> </a:t>
+            </a:r>
+            <a:r>
+              <a:rPr lang="de-DE" dirty="0" err="1"/>
+              <a:t>estimated</a:t>
+            </a:r>
+            <a:r>
+              <a:rPr lang="de-DE" dirty="0"/>
+              <a:t> </a:t>
+            </a:r>
+            <a:r>
+              <a:rPr lang="de-DE" dirty="0" err="1"/>
+              <a:t>from</a:t>
+            </a:r>
+            <a:r>
+              <a:rPr lang="de-DE" dirty="0"/>
+              <a:t> </a:t>
+            </a:r>
+            <a:r>
+              <a:rPr lang="de-DE" dirty="0" err="1"/>
+              <a:t>how</a:t>
+            </a:r>
+            <a:r>
+              <a:rPr lang="de-DE" dirty="0"/>
+              <a:t> </a:t>
+            </a:r>
+            <a:r>
+              <a:rPr lang="de-DE" dirty="0" err="1"/>
+              <a:t>speckle</a:t>
+            </a:r>
+            <a:r>
+              <a:rPr lang="de-DE" dirty="0"/>
+              <a:t> </a:t>
+            </a:r>
+            <a:r>
+              <a:rPr lang="de-DE" dirty="0" err="1"/>
+              <a:t>changes</a:t>
+            </a:r>
+            <a:r>
+              <a:rPr lang="de-DE" dirty="0"/>
+              <a:t>: not </a:t>
+            </a:r>
+            <a:r>
+              <a:rPr lang="de-DE" dirty="0" err="1"/>
+              <a:t>always</a:t>
+            </a:r>
+            <a:r>
+              <a:rPr lang="de-DE" dirty="0"/>
+              <a:t> reliable, </a:t>
+            </a:r>
+            <a:r>
+              <a:rPr lang="de-DE" dirty="0" err="1"/>
+              <a:t>speckle</a:t>
+            </a:r>
+            <a:r>
+              <a:rPr lang="de-DE" dirty="0"/>
+              <a:t> </a:t>
+            </a:r>
+            <a:r>
+              <a:rPr lang="de-DE" dirty="0" err="1"/>
+              <a:t>filtering</a:t>
+            </a:r>
+            <a:endParaRPr lang="de-DE" dirty="0"/>
+          </a:p>
+          <a:p>
+            <a:pPr marL="171450" indent="-171450">
+              <a:buFontTx/>
+              <a:buChar char="-"/>
+            </a:pPr>
+            <a:r>
+              <a:rPr lang="de-DE" dirty="0"/>
+              <a:t>DL: </a:t>
+            </a:r>
+            <a:r>
+              <a:rPr lang="de-DE" dirty="0" err="1"/>
+              <a:t>feed</a:t>
+            </a:r>
+            <a:r>
+              <a:rPr lang="de-DE" dirty="0"/>
+              <a:t> DL </a:t>
+            </a:r>
+            <a:r>
+              <a:rPr lang="de-DE" dirty="0" err="1"/>
+              <a:t>model</a:t>
+            </a:r>
+            <a:r>
+              <a:rPr lang="de-DE" dirty="0"/>
+              <a:t> </a:t>
+            </a:r>
+            <a:r>
+              <a:rPr lang="de-DE" dirty="0" err="1"/>
+              <a:t>images</a:t>
+            </a:r>
+            <a:r>
+              <a:rPr lang="de-DE" dirty="0"/>
+              <a:t> + </a:t>
+            </a:r>
+            <a:r>
+              <a:rPr lang="de-DE" dirty="0" err="1"/>
+              <a:t>maybe</a:t>
+            </a:r>
+            <a:r>
+              <a:rPr lang="de-DE" dirty="0"/>
+              <a:t> extra </a:t>
+            </a:r>
+            <a:r>
+              <a:rPr lang="de-DE" dirty="0" err="1"/>
+              <a:t>data</a:t>
+            </a:r>
+            <a:r>
+              <a:rPr lang="de-DE" dirty="0"/>
+              <a:t>, </a:t>
+            </a:r>
+            <a:r>
+              <a:rPr lang="de-DE" dirty="0" err="1"/>
+              <a:t>it</a:t>
+            </a:r>
+            <a:r>
+              <a:rPr lang="de-DE" dirty="0"/>
+              <a:t> </a:t>
+            </a:r>
+            <a:r>
+              <a:rPr lang="de-DE" dirty="0" err="1"/>
+              <a:t>then</a:t>
+            </a:r>
+            <a:r>
+              <a:rPr lang="de-DE" dirty="0"/>
+              <a:t> </a:t>
+            </a:r>
+            <a:r>
+              <a:rPr lang="de-DE" dirty="0" err="1"/>
+              <a:t>estimates</a:t>
+            </a:r>
+            <a:r>
+              <a:rPr lang="de-DE" dirty="0"/>
+              <a:t> </a:t>
+            </a:r>
+            <a:r>
+              <a:rPr lang="de-DE" dirty="0" err="1"/>
+              <a:t>poses</a:t>
+            </a:r>
+            <a:endParaRPr lang="de-DE" dirty="0"/>
+          </a:p>
+          <a:p>
+            <a:pPr marL="0" indent="0">
+              <a:buFontTx/>
+              <a:buNone/>
+            </a:pPr>
+            <a:endParaRPr lang="de-DE" dirty="0"/>
+          </a:p>
+          <a:p>
+            <a:pPr marL="0" indent="0">
+              <a:buFontTx/>
+              <a:buNone/>
+            </a:pPr>
+            <a:endParaRPr lang="de-DE" dirty="0"/>
+          </a:p>
+          <a:p>
+            <a:pPr marL="171450" indent="-171450">
+              <a:buFontTx/>
+              <a:buChar char="-"/>
+            </a:pPr>
+            <a:r>
+              <a:rPr lang="de-DE" dirty="0"/>
+              <a:t>Problems: Drift (</a:t>
+            </a:r>
+            <a:r>
+              <a:rPr lang="de-DE" dirty="0" err="1"/>
+              <a:t>accumulated</a:t>
+            </a:r>
+            <a:r>
+              <a:rPr lang="de-DE" dirty="0"/>
+              <a:t> </a:t>
+            </a:r>
+            <a:r>
+              <a:rPr lang="de-DE" dirty="0" err="1"/>
+              <a:t>error</a:t>
+            </a:r>
+            <a:r>
+              <a:rPr lang="de-DE" dirty="0"/>
+              <a:t> in </a:t>
+            </a:r>
+            <a:r>
+              <a:rPr lang="de-DE" dirty="0" err="1"/>
+              <a:t>estimated</a:t>
+            </a:r>
+            <a:r>
+              <a:rPr lang="de-DE" dirty="0"/>
+              <a:t> </a:t>
+            </a:r>
+            <a:r>
+              <a:rPr lang="de-DE" dirty="0" err="1"/>
+              <a:t>trajectory</a:t>
+            </a:r>
+            <a:r>
+              <a:rPr lang="de-DE" dirty="0"/>
+              <a:t> vs. </a:t>
+            </a:r>
+            <a:r>
+              <a:rPr lang="de-DE" dirty="0" err="1"/>
+              <a:t>actual</a:t>
+            </a:r>
+            <a:r>
+              <a:rPr lang="de-DE" dirty="0"/>
+              <a:t> </a:t>
+            </a:r>
+            <a:r>
+              <a:rPr lang="de-DE" dirty="0" err="1"/>
+              <a:t>trajectory</a:t>
+            </a:r>
+            <a:r>
+              <a:rPr lang="de-DE" dirty="0"/>
+              <a:t>), G and R (</a:t>
+            </a:r>
+            <a:r>
+              <a:rPr lang="de-DE" dirty="0" err="1"/>
+              <a:t>no</a:t>
+            </a:r>
+            <a:r>
+              <a:rPr lang="de-DE" dirty="0"/>
+              <a:t> </a:t>
+            </a:r>
+            <a:r>
+              <a:rPr lang="de-DE" dirty="0" err="1"/>
+              <a:t>public</a:t>
+            </a:r>
+            <a:r>
+              <a:rPr lang="de-DE" dirty="0"/>
+              <a:t> </a:t>
+            </a:r>
+            <a:r>
+              <a:rPr lang="de-DE" dirty="0" err="1"/>
+              <a:t>data</a:t>
+            </a:r>
+            <a:r>
+              <a:rPr lang="de-DE" dirty="0"/>
+              <a:t>, </a:t>
+            </a:r>
+            <a:r>
+              <a:rPr lang="de-DE" dirty="0" err="1"/>
+              <a:t>perfect</a:t>
+            </a:r>
+            <a:r>
+              <a:rPr lang="de-DE" dirty="0"/>
+              <a:t> </a:t>
+            </a:r>
+            <a:r>
+              <a:rPr lang="de-DE" dirty="0" err="1"/>
+              <a:t>setups</a:t>
+            </a:r>
+            <a:r>
+              <a:rPr lang="de-DE" dirty="0"/>
+              <a:t>, )</a:t>
+            </a:r>
+          </a:p>
+          <a:p>
+            <a:pPr marL="171450" indent="-171450">
+              <a:buFontTx/>
+              <a:buChar char="-"/>
+            </a:pPr>
+            <a:endParaRPr lang="de-DE" dirty="0"/>
+          </a:p>
+          <a:p>
+            <a:pPr marL="171450" indent="-171450">
+              <a:buFontTx/>
+              <a:buChar char="-"/>
+            </a:pPr>
+            <a:r>
+              <a:rPr lang="de-DE" dirty="0"/>
+              <a:t>Many </a:t>
+            </a:r>
+            <a:r>
+              <a:rPr lang="de-DE" dirty="0" err="1"/>
+              <a:t>models</a:t>
+            </a:r>
+            <a:r>
+              <a:rPr lang="de-DE" dirty="0"/>
+              <a:t> out </a:t>
+            </a:r>
+            <a:r>
+              <a:rPr lang="de-DE" dirty="0" err="1"/>
+              <a:t>there</a:t>
+            </a:r>
+            <a:r>
+              <a:rPr lang="de-DE" dirty="0"/>
+              <a:t> </a:t>
+            </a:r>
+            <a:r>
+              <a:rPr lang="de-DE" dirty="0" err="1"/>
+              <a:t>which</a:t>
+            </a:r>
+            <a:r>
+              <a:rPr lang="de-DE" dirty="0"/>
+              <a:t> </a:t>
+            </a:r>
+            <a:r>
+              <a:rPr lang="de-DE" dirty="0" err="1"/>
+              <a:t>are</a:t>
+            </a:r>
+            <a:r>
+              <a:rPr lang="de-DE" dirty="0"/>
+              <a:t> </a:t>
+            </a:r>
+            <a:r>
+              <a:rPr lang="de-DE" dirty="0" err="1"/>
+              <a:t>already</a:t>
+            </a:r>
+            <a:r>
+              <a:rPr lang="de-DE" dirty="0"/>
+              <a:t> </a:t>
+            </a:r>
+            <a:r>
+              <a:rPr lang="de-DE" dirty="0" err="1"/>
+              <a:t>pretty</a:t>
+            </a:r>
+            <a:r>
+              <a:rPr lang="de-DE" dirty="0"/>
+              <a:t> </a:t>
+            </a:r>
+            <a:r>
+              <a:rPr lang="de-DE" dirty="0" err="1"/>
+              <a:t>good</a:t>
+            </a:r>
+            <a:r>
+              <a:rPr lang="de-DE" dirty="0"/>
+              <a:t> (</a:t>
+            </a:r>
+            <a:r>
+              <a:rPr lang="de-DE" dirty="0" err="1"/>
+              <a:t>given</a:t>
+            </a:r>
+            <a:r>
+              <a:rPr lang="de-DE" dirty="0"/>
+              <a:t> </a:t>
+            </a:r>
+            <a:r>
+              <a:rPr lang="de-DE" dirty="0" err="1"/>
+              <a:t>only</a:t>
+            </a:r>
+            <a:r>
+              <a:rPr lang="de-DE" dirty="0"/>
+              <a:t> </a:t>
+            </a:r>
+            <a:r>
+              <a:rPr lang="de-DE" dirty="0" err="1"/>
+              <a:t>images</a:t>
+            </a:r>
+            <a:r>
+              <a:rPr lang="de-DE" dirty="0"/>
+              <a:t> </a:t>
+            </a:r>
+            <a:r>
+              <a:rPr lang="de-DE" dirty="0" err="1"/>
+              <a:t>are</a:t>
+            </a:r>
+            <a:r>
+              <a:rPr lang="de-DE" dirty="0"/>
+              <a:t> </a:t>
+            </a:r>
+            <a:r>
+              <a:rPr lang="de-DE" dirty="0" err="1"/>
+              <a:t>used</a:t>
+            </a:r>
+            <a:r>
+              <a:rPr lang="de-DE" dirty="0"/>
+              <a:t>)</a:t>
+            </a:r>
+          </a:p>
+          <a:p>
+            <a:pPr marL="171450" indent="-171450">
+              <a:buFontTx/>
+              <a:buChar char="-"/>
+            </a:pPr>
+            <a:r>
+              <a:rPr lang="de-DE" dirty="0"/>
+              <a:t>Here </a:t>
+            </a:r>
+            <a:r>
+              <a:rPr lang="de-DE" dirty="0" err="1"/>
+              <a:t>my</a:t>
+            </a:r>
+            <a:r>
+              <a:rPr lang="de-DE" dirty="0"/>
+              <a:t> </a:t>
+            </a:r>
+            <a:r>
+              <a:rPr lang="de-DE" dirty="0" err="1"/>
+              <a:t>research</a:t>
+            </a:r>
+            <a:r>
+              <a:rPr lang="de-DE" dirty="0"/>
+              <a:t> </a:t>
+            </a:r>
+            <a:r>
+              <a:rPr lang="de-DE" dirty="0" err="1"/>
+              <a:t>comes</a:t>
+            </a:r>
+            <a:r>
+              <a:rPr lang="de-DE" dirty="0"/>
+              <a:t> </a:t>
+            </a:r>
+            <a:r>
+              <a:rPr lang="de-DE" dirty="0" err="1"/>
+              <a:t>into</a:t>
+            </a:r>
+            <a:r>
+              <a:rPr lang="de-DE" dirty="0"/>
+              <a:t> </a:t>
+            </a:r>
+            <a:r>
+              <a:rPr lang="de-DE" dirty="0" err="1"/>
+              <a:t>play</a:t>
+            </a:r>
+            <a:r>
+              <a:rPr lang="de-DE" dirty="0"/>
+              <a:t>: </a:t>
+            </a:r>
+            <a:r>
+              <a:rPr lang="de-DE" dirty="0" err="1"/>
+              <a:t>increase</a:t>
+            </a:r>
+            <a:r>
+              <a:rPr lang="de-DE" dirty="0"/>
+              <a:t> </a:t>
+            </a:r>
+            <a:r>
+              <a:rPr lang="de-DE" dirty="0" err="1"/>
+              <a:t>pose</a:t>
+            </a:r>
+            <a:r>
+              <a:rPr lang="de-DE" dirty="0"/>
+              <a:t> </a:t>
+            </a:r>
+            <a:r>
+              <a:rPr lang="de-DE" dirty="0" err="1"/>
+              <a:t>estimation</a:t>
+            </a:r>
+            <a:r>
+              <a:rPr lang="de-DE" dirty="0"/>
+              <a:t> </a:t>
+            </a:r>
+            <a:r>
+              <a:rPr lang="de-DE" dirty="0" err="1"/>
+              <a:t>quality</a:t>
+            </a:r>
+            <a:r>
+              <a:rPr lang="de-DE" dirty="0"/>
+              <a:t> </a:t>
+            </a:r>
+            <a:r>
+              <a:rPr lang="de-DE" dirty="0" err="1"/>
+              <a:t>retrospectively</a:t>
+            </a:r>
+            <a:r>
+              <a:rPr lang="de-DE" dirty="0"/>
+              <a:t> </a:t>
+            </a:r>
+            <a:r>
+              <a:rPr lang="de-DE" dirty="0" err="1"/>
+              <a:t>for</a:t>
+            </a:r>
+            <a:r>
+              <a:rPr lang="de-DE" dirty="0"/>
+              <a:t> </a:t>
+            </a:r>
+            <a:r>
+              <a:rPr lang="de-DE" dirty="0" err="1"/>
+              <a:t>given</a:t>
+            </a:r>
+            <a:r>
+              <a:rPr lang="de-DE" dirty="0"/>
+              <a:t> </a:t>
+            </a:r>
+            <a:r>
+              <a:rPr lang="de-DE" dirty="0" err="1"/>
+              <a:t>model</a:t>
+            </a:r>
+            <a:r>
+              <a:rPr lang="de-DE" dirty="0"/>
+              <a:t> </a:t>
+            </a:r>
+            <a:r>
+              <a:rPr lang="de-DE" dirty="0" err="1"/>
+              <a:t>estimations</a:t>
+            </a:r>
+            <a:endParaRPr lang="de-DE" dirty="0"/>
+          </a:p>
+        </p:txBody>
+      </p:sp>
+    </p:spTree>
+    <p:extLst>
+      <p:ext uri="{BB962C8B-B14F-4D97-AF65-F5344CB8AC3E}">
+        <p14:creationId xmlns:p14="http://schemas.microsoft.com/office/powerpoint/2010/main" val="3439404708"/>
+      </p:ext>
+    </p:extLst>
+  </p:cSld>
+  <p:clrMapOvr>
+    <a:masterClrMapping/>
+  </p:clrMapOvr>
+</p:notes>
+</file>
+
+<file path=ppt/notesSlides/notesSlide4.xml><?xml version="1.0" encoding="utf-8"?>
+<p:notes xmlns:a="http://schemas.openxmlformats.org/drawingml/2006/main" xmlns:r="http://schemas.openxmlformats.org/officeDocument/2006/relationships" xmlns:p="http://schemas.openxmlformats.org/presentationml/2006/main">
+  <p:cSld>
+    <p:spTree>
+      <p:nvGrpSpPr>
+        <p:cNvPr id="1" name=""/>
+        <p:cNvGrpSpPr/>
+        <p:nvPr/>
+      </p:nvGrpSpPr>
+      <p:grpSpPr>
+        <a:xfrm>
+          <a:off x="0" y="0"/>
+          <a:ext cx="0" cy="0"/>
+          <a:chOff x="0" y="0"/>
+          <a:chExt cx="0" cy="0"/>
+        </a:xfrm>
+      </p:grpSpPr>
+      <p:sp>
+        <p:nvSpPr>
+          <p:cNvPr id="2" name="Folienbildplatzhalter 1"/>
+          <p:cNvSpPr>
+            <a:spLocks noGrp="1" noRot="1" noChangeAspect="1"/>
+          </p:cNvSpPr>
+          <p:nvPr>
+            <p:ph type="sldImg"/>
+          </p:nvPr>
+        </p:nvSpPr>
+        <p:spPr>
+          <a:xfrm>
+            <a:off x="2514600" y="857250"/>
+            <a:ext cx="4114800" cy="2314575"/>
+          </a:xfrm>
+          <a:prstGeom prst="rect">
+            <a:avLst/>
+          </a:prstGeom>
+          <a:noFill/>
+          <a:ln w="12700">
+            <a:solidFill>
+              <a:prstClr val="black"/>
+            </a:solidFill>
+          </a:ln>
+        </p:spPr>
+      </p:sp>
+      <p:sp>
+        <p:nvSpPr>
+          <p:cNvPr id="3" name="Notizenplatzhalter 2"/>
+          <p:cNvSpPr>
+            <a:spLocks noGrp="1"/>
+          </p:cNvSpPr>
+          <p:nvPr>
+            <p:ph type="body" idx="1"/>
+          </p:nvPr>
+        </p:nvSpPr>
+        <p:spPr>
+          <a:xfrm>
+            <a:off x="914400" y="3300413"/>
+            <a:ext cx="7315200" cy="2700337"/>
+          </a:xfrm>
+          <a:prstGeom prst="rect">
+            <a:avLst/>
+          </a:prstGeom>
+        </p:spPr>
+        <p:txBody>
+          <a:bodyPr/>
+          <a:lstStyle/>
+          <a:p>
+            <a:pPr marL="171450" indent="-171450">
+              <a:buFontTx/>
+              <a:buChar char="-"/>
+            </a:pPr>
+            <a:r>
+              <a:rPr lang="de-DE" dirty="0" err="1"/>
+              <a:t>pose</a:t>
+            </a:r>
+            <a:r>
+              <a:rPr lang="de-DE" dirty="0"/>
+              <a:t> </a:t>
+            </a:r>
+            <a:r>
+              <a:rPr lang="de-DE" dirty="0" err="1"/>
+              <a:t>graph</a:t>
+            </a:r>
+            <a:r>
+              <a:rPr lang="de-DE" dirty="0"/>
+              <a:t>: </a:t>
+            </a:r>
+            <a:r>
+              <a:rPr lang="de-DE" dirty="0" err="1"/>
+              <a:t>nodes</a:t>
+            </a:r>
+            <a:r>
+              <a:rPr lang="de-DE" dirty="0"/>
+              <a:t> </a:t>
+            </a:r>
+            <a:r>
+              <a:rPr lang="de-DE" dirty="0" err="1"/>
+              <a:t>as</a:t>
+            </a:r>
+            <a:r>
+              <a:rPr lang="de-DE" dirty="0"/>
+              <a:t> </a:t>
+            </a:r>
+            <a:r>
+              <a:rPr lang="de-DE" dirty="0" err="1"/>
+              <a:t>poses</a:t>
+            </a:r>
+            <a:r>
+              <a:rPr lang="de-DE" dirty="0"/>
+              <a:t> at </a:t>
+            </a:r>
+            <a:r>
+              <a:rPr lang="de-DE" dirty="0" err="1"/>
+              <a:t>frames</a:t>
+            </a:r>
+            <a:r>
+              <a:rPr lang="de-DE" dirty="0"/>
+              <a:t>, </a:t>
+            </a:r>
+            <a:r>
+              <a:rPr lang="de-DE" dirty="0" err="1"/>
+              <a:t>edges</a:t>
+            </a:r>
+            <a:r>
+              <a:rPr lang="de-DE" dirty="0"/>
+              <a:t> </a:t>
+            </a:r>
+            <a:r>
+              <a:rPr lang="de-DE" dirty="0" err="1"/>
+              <a:t>as</a:t>
+            </a:r>
+            <a:r>
+              <a:rPr lang="de-DE" dirty="0"/>
+              <a:t> relative </a:t>
+            </a:r>
+            <a:r>
+              <a:rPr lang="de-DE" dirty="0" err="1"/>
+              <a:t>transforms</a:t>
+            </a:r>
+            <a:r>
+              <a:rPr lang="de-DE" dirty="0"/>
+              <a:t>/</a:t>
+            </a:r>
+            <a:r>
+              <a:rPr lang="de-DE" dirty="0" err="1"/>
+              <a:t>movement</a:t>
+            </a:r>
+            <a:r>
+              <a:rPr lang="de-DE" dirty="0"/>
+              <a:t> </a:t>
+            </a:r>
+            <a:r>
+              <a:rPr lang="de-DE" dirty="0" err="1"/>
+              <a:t>between</a:t>
+            </a:r>
+            <a:r>
+              <a:rPr lang="de-DE" dirty="0"/>
+              <a:t> </a:t>
+            </a:r>
+            <a:r>
+              <a:rPr lang="de-DE" dirty="0" err="1"/>
+              <a:t>those</a:t>
+            </a:r>
+            <a:endParaRPr lang="de-DE" dirty="0"/>
+          </a:p>
+        </p:txBody>
+      </p:sp>
+    </p:spTree>
+    <p:extLst>
+      <p:ext uri="{BB962C8B-B14F-4D97-AF65-F5344CB8AC3E}">
+        <p14:creationId xmlns:p14="http://schemas.microsoft.com/office/powerpoint/2010/main" val="2567396944"/>
+      </p:ext>
+    </p:extLst>
+  </p:cSld>
+  <p:clrMapOvr>
+    <a:masterClrMapping/>
+  </p:clrMapOvr>
+</p:notes>
+</file>
+
+<file path=ppt/notesSlides/notesSlide5.xml><?xml version="1.0" encoding="utf-8"?>
 <p:notes xmlns:a="http://schemas.openxmlformats.org/drawingml/2006/main" xmlns:r="http://schemas.openxmlformats.org/officeDocument/2006/relationships" xmlns:p="http://schemas.openxmlformats.org/presentationml/2006/main">
   <p:cSld>
     <p:spTree>
@@ -415,7 +1837,34 @@
           <a:bodyPr/>
           <a:lstStyle/>
           <a:p>
-            <a:endParaRPr lang="en-US" dirty="0"/>
+            <a:pPr marL="171450" indent="-171450">
+              <a:buFontTx/>
+              <a:buChar char="-"/>
+            </a:pPr>
+            <a:r>
+              <a:rPr lang="en-US" dirty="0"/>
+              <a:t>What do nodes and edges even mean in a pose graph?</a:t>
+            </a:r>
+          </a:p>
+          <a:p>
+            <a:pPr marL="171450" indent="-171450">
+              <a:buFontTx/>
+              <a:buChar char="-"/>
+            </a:pPr>
+            <a:r>
+              <a:rPr lang="en-US" dirty="0"/>
+              <a:t>6dof matrix represents a pose: matrix multiplied with object will translate and rotate it by the given values</a:t>
+            </a:r>
+          </a:p>
+          <a:p>
+            <a:pPr marL="171450" indent="-171450">
+              <a:buFontTx/>
+              <a:buChar char="-"/>
+            </a:pPr>
+            <a:r>
+              <a:rPr lang="en-US" dirty="0"/>
+              <a:t>node: pose relative to starting point, edge: relative pose between two nodes</a:t>
+            </a:r>
           </a:p>
         </p:txBody>
       </p:sp>
@@ -423,6 +1872,784 @@
     <p:extLst>
       <p:ext uri="{BB962C8B-B14F-4D97-AF65-F5344CB8AC3E}">
         <p14:creationId xmlns:p14="http://schemas.microsoft.com/office/powerpoint/2010/main" val="828316252"/>
+      </p:ext>
+    </p:extLst>
+  </p:cSld>
+  <p:clrMapOvr>
+    <a:masterClrMapping/>
+  </p:clrMapOvr>
+</p:notes>
+</file>
+
+<file path=ppt/notesSlides/notesSlide6.xml><?xml version="1.0" encoding="utf-8"?>
+<p:notes xmlns:a="http://schemas.openxmlformats.org/drawingml/2006/main" xmlns:r="http://schemas.openxmlformats.org/officeDocument/2006/relationships" xmlns:p="http://schemas.openxmlformats.org/presentationml/2006/main">
+  <p:cSld>
+    <p:spTree>
+      <p:nvGrpSpPr>
+        <p:cNvPr id="1" name=""/>
+        <p:cNvGrpSpPr/>
+        <p:nvPr/>
+      </p:nvGrpSpPr>
+      <p:grpSpPr>
+        <a:xfrm>
+          <a:off x="0" y="0"/>
+          <a:ext cx="0" cy="0"/>
+          <a:chOff x="0" y="0"/>
+          <a:chExt cx="0" cy="0"/>
+        </a:xfrm>
+      </p:grpSpPr>
+      <p:sp>
+        <p:nvSpPr>
+          <p:cNvPr id="2" name="Folienbildplatzhalter 1"/>
+          <p:cNvSpPr>
+            <a:spLocks noGrp="1" noRot="1" noChangeAspect="1"/>
+          </p:cNvSpPr>
+          <p:nvPr>
+            <p:ph type="sldImg"/>
+          </p:nvPr>
+        </p:nvSpPr>
+        <p:spPr>
+          <a:xfrm>
+            <a:off x="2514600" y="857250"/>
+            <a:ext cx="4114800" cy="2314575"/>
+          </a:xfrm>
+          <a:prstGeom prst="rect">
+            <a:avLst/>
+          </a:prstGeom>
+          <a:noFill/>
+          <a:ln w="12700">
+            <a:solidFill>
+              <a:prstClr val="black"/>
+            </a:solidFill>
+          </a:ln>
+        </p:spPr>
+      </p:sp>
+      <p:sp>
+        <p:nvSpPr>
+          <p:cNvPr id="3" name="Notizenplatzhalter 2"/>
+          <p:cNvSpPr>
+            <a:spLocks noGrp="1"/>
+          </p:cNvSpPr>
+          <p:nvPr>
+            <p:ph type="body" idx="1"/>
+          </p:nvPr>
+        </p:nvSpPr>
+        <p:spPr>
+          <a:xfrm>
+            <a:off x="914400" y="3300413"/>
+            <a:ext cx="7315200" cy="2700337"/>
+          </a:xfrm>
+          <a:prstGeom prst="rect">
+            <a:avLst/>
+          </a:prstGeom>
+        </p:spPr>
+        <p:txBody>
+          <a:bodyPr/>
+          <a:lstStyle/>
+          <a:p>
+            <a:pPr marL="171450" indent="-171450">
+              <a:buFontTx/>
+              <a:buChar char="-"/>
+            </a:pPr>
+            <a:r>
+              <a:rPr lang="de-DE" dirty="0" err="1"/>
+              <a:t>build</a:t>
+            </a:r>
+            <a:r>
+              <a:rPr lang="de-DE" dirty="0"/>
+              <a:t> initial </a:t>
+            </a:r>
+            <a:r>
+              <a:rPr lang="de-DE" dirty="0" err="1"/>
+              <a:t>graph</a:t>
+            </a:r>
+            <a:r>
+              <a:rPr lang="de-DE" dirty="0"/>
+              <a:t> </a:t>
+            </a:r>
+            <a:r>
+              <a:rPr lang="de-DE" dirty="0" err="1"/>
+              <a:t>from</a:t>
+            </a:r>
+            <a:r>
+              <a:rPr lang="de-DE" dirty="0"/>
+              <a:t> </a:t>
+            </a:r>
+            <a:r>
+              <a:rPr lang="de-DE" dirty="0" err="1"/>
+              <a:t>estimated</a:t>
+            </a:r>
+            <a:r>
+              <a:rPr lang="de-DE" dirty="0"/>
+              <a:t> </a:t>
+            </a:r>
+            <a:r>
+              <a:rPr lang="de-DE" dirty="0" err="1"/>
+              <a:t>poses</a:t>
+            </a:r>
+            <a:endParaRPr lang="de-DE" dirty="0"/>
+          </a:p>
+          <a:p>
+            <a:pPr marL="171450" indent="-171450">
+              <a:buFontTx/>
+              <a:buChar char="-"/>
+            </a:pPr>
+            <a:r>
+              <a:rPr lang="de-DE" dirty="0" err="1"/>
+              <a:t>cost</a:t>
+            </a:r>
+            <a:r>
+              <a:rPr lang="de-DE" dirty="0"/>
+              <a:t> </a:t>
+            </a:r>
+            <a:r>
+              <a:rPr lang="de-DE" dirty="0" err="1"/>
+              <a:t>function</a:t>
+            </a:r>
+            <a:r>
+              <a:rPr lang="de-DE" dirty="0"/>
+              <a:t>: check </a:t>
+            </a:r>
+            <a:r>
+              <a:rPr lang="de-DE" dirty="0" err="1"/>
+              <a:t>if</a:t>
+            </a:r>
+            <a:r>
+              <a:rPr lang="de-DE" dirty="0"/>
+              <a:t> </a:t>
+            </a:r>
+            <a:r>
+              <a:rPr lang="de-DE" dirty="0" err="1"/>
+              <a:t>edge</a:t>
+            </a:r>
+            <a:r>
+              <a:rPr lang="de-DE" dirty="0"/>
+              <a:t> and </a:t>
+            </a:r>
+            <a:r>
+              <a:rPr lang="de-DE" dirty="0" err="1"/>
+              <a:t>two</a:t>
+            </a:r>
+            <a:r>
+              <a:rPr lang="de-DE" dirty="0"/>
+              <a:t> </a:t>
+            </a:r>
+            <a:r>
+              <a:rPr lang="de-DE" dirty="0" err="1"/>
+              <a:t>node</a:t>
+            </a:r>
+            <a:r>
+              <a:rPr lang="de-DE" dirty="0"/>
+              <a:t> </a:t>
+            </a:r>
+            <a:r>
+              <a:rPr lang="de-DE" dirty="0" err="1"/>
+              <a:t>values</a:t>
+            </a:r>
+            <a:r>
+              <a:rPr lang="de-DE" dirty="0"/>
+              <a:t> </a:t>
+            </a:r>
+            <a:r>
+              <a:rPr lang="de-DE" dirty="0" err="1"/>
+              <a:t>are</a:t>
+            </a:r>
+            <a:r>
+              <a:rPr lang="de-DE" dirty="0"/>
+              <a:t> </a:t>
+            </a:r>
+            <a:r>
+              <a:rPr lang="de-DE" dirty="0" err="1"/>
+              <a:t>consistent</a:t>
+            </a:r>
+            <a:r>
+              <a:rPr lang="de-DE" dirty="0"/>
+              <a:t> -&gt; </a:t>
+            </a:r>
+            <a:r>
+              <a:rPr lang="de-DE" dirty="0" err="1"/>
+              <a:t>minimize</a:t>
+            </a:r>
+            <a:r>
+              <a:rPr lang="de-DE" dirty="0"/>
+              <a:t> </a:t>
+            </a:r>
+            <a:r>
+              <a:rPr lang="de-DE" dirty="0" err="1"/>
+              <a:t>inconsistencies</a:t>
+            </a:r>
+            <a:endParaRPr lang="de-DE" dirty="0"/>
+          </a:p>
+          <a:p>
+            <a:pPr marL="171450" indent="-171450">
+              <a:buFontTx/>
+              <a:buChar char="-"/>
+            </a:pPr>
+            <a:r>
+              <a:rPr lang="de-DE" dirty="0" err="1"/>
+              <a:t>noise</a:t>
+            </a:r>
+            <a:r>
+              <a:rPr lang="de-DE" dirty="0"/>
+              <a:t> </a:t>
+            </a:r>
+            <a:r>
+              <a:rPr lang="de-DE" dirty="0" err="1"/>
+              <a:t>model</a:t>
+            </a:r>
+            <a:r>
+              <a:rPr lang="de-DE" dirty="0"/>
+              <a:t>: </a:t>
+            </a:r>
+            <a:r>
+              <a:rPr lang="de-DE" dirty="0" err="1"/>
+              <a:t>assume</a:t>
+            </a:r>
+            <a:r>
+              <a:rPr lang="de-DE" dirty="0"/>
+              <a:t> </a:t>
+            </a:r>
+            <a:r>
+              <a:rPr lang="de-DE" dirty="0" err="1"/>
+              <a:t>small</a:t>
+            </a:r>
+            <a:r>
+              <a:rPr lang="de-DE" dirty="0"/>
+              <a:t> </a:t>
+            </a:r>
+            <a:r>
+              <a:rPr lang="de-DE" dirty="0" err="1"/>
+              <a:t>inconsistencies</a:t>
+            </a:r>
+            <a:r>
+              <a:rPr lang="de-DE" dirty="0"/>
+              <a:t>, </a:t>
+            </a:r>
+            <a:r>
+              <a:rPr lang="de-DE" dirty="0" err="1"/>
+              <a:t>distribution</a:t>
+            </a:r>
+            <a:r>
+              <a:rPr lang="de-DE" dirty="0"/>
+              <a:t> </a:t>
+            </a:r>
+            <a:r>
+              <a:rPr lang="de-DE" dirty="0" err="1"/>
+              <a:t>of</a:t>
+            </a:r>
+            <a:r>
+              <a:rPr lang="de-DE" dirty="0"/>
+              <a:t> </a:t>
+            </a:r>
+            <a:r>
+              <a:rPr lang="de-DE" dirty="0" err="1"/>
+              <a:t>inconsistency</a:t>
+            </a:r>
+            <a:r>
+              <a:rPr lang="de-DE" dirty="0"/>
+              <a:t> -&gt; </a:t>
+            </a:r>
+            <a:r>
+              <a:rPr lang="de-DE" dirty="0" err="1"/>
+              <a:t>weighting</a:t>
+            </a:r>
+            <a:r>
+              <a:rPr lang="de-DE" dirty="0"/>
+              <a:t> </a:t>
+            </a:r>
+            <a:r>
+              <a:rPr lang="de-DE" dirty="0" err="1"/>
+              <a:t>of</a:t>
+            </a:r>
+            <a:r>
+              <a:rPr lang="de-DE" dirty="0"/>
+              <a:t> </a:t>
+            </a:r>
+            <a:r>
+              <a:rPr lang="de-DE" dirty="0" err="1"/>
+              <a:t>edges</a:t>
+            </a:r>
+            <a:endParaRPr lang="de-DE" dirty="0"/>
+          </a:p>
+        </p:txBody>
+      </p:sp>
+    </p:spTree>
+    <p:extLst>
+      <p:ext uri="{BB962C8B-B14F-4D97-AF65-F5344CB8AC3E}">
+        <p14:creationId xmlns:p14="http://schemas.microsoft.com/office/powerpoint/2010/main" val="960279639"/>
+      </p:ext>
+    </p:extLst>
+  </p:cSld>
+  <p:clrMapOvr>
+    <a:masterClrMapping/>
+  </p:clrMapOvr>
+</p:notes>
+</file>
+
+<file path=ppt/notesSlides/notesSlide7.xml><?xml version="1.0" encoding="utf-8"?>
+<p:notes xmlns:a="http://schemas.openxmlformats.org/drawingml/2006/main" xmlns:r="http://schemas.openxmlformats.org/officeDocument/2006/relationships" xmlns:p="http://schemas.openxmlformats.org/presentationml/2006/main">
+  <p:cSld>
+    <p:spTree>
+      <p:nvGrpSpPr>
+        <p:cNvPr id="1" name=""/>
+        <p:cNvGrpSpPr/>
+        <p:nvPr/>
+      </p:nvGrpSpPr>
+      <p:grpSpPr>
+        <a:xfrm>
+          <a:off x="0" y="0"/>
+          <a:ext cx="0" cy="0"/>
+          <a:chOff x="0" y="0"/>
+          <a:chExt cx="0" cy="0"/>
+        </a:xfrm>
+      </p:grpSpPr>
+      <p:sp>
+        <p:nvSpPr>
+          <p:cNvPr id="2" name="Folienbildplatzhalter 1"/>
+          <p:cNvSpPr>
+            <a:spLocks noGrp="1" noRot="1" noChangeAspect="1"/>
+          </p:cNvSpPr>
+          <p:nvPr>
+            <p:ph type="sldImg"/>
+          </p:nvPr>
+        </p:nvSpPr>
+        <p:spPr>
+          <a:xfrm>
+            <a:off x="2514600" y="857250"/>
+            <a:ext cx="4114800" cy="2314575"/>
+          </a:xfrm>
+          <a:prstGeom prst="rect">
+            <a:avLst/>
+          </a:prstGeom>
+          <a:noFill/>
+          <a:ln w="12700">
+            <a:solidFill>
+              <a:prstClr val="black"/>
+            </a:solidFill>
+          </a:ln>
+        </p:spPr>
+      </p:sp>
+      <p:sp>
+        <p:nvSpPr>
+          <p:cNvPr id="3" name="Notizenplatzhalter 2"/>
+          <p:cNvSpPr>
+            <a:spLocks noGrp="1"/>
+          </p:cNvSpPr>
+          <p:nvPr>
+            <p:ph type="body" idx="1"/>
+          </p:nvPr>
+        </p:nvSpPr>
+        <p:spPr>
+          <a:xfrm>
+            <a:off x="914400" y="3300413"/>
+            <a:ext cx="7315200" cy="2700337"/>
+          </a:xfrm>
+          <a:prstGeom prst="rect">
+            <a:avLst/>
+          </a:prstGeom>
+        </p:spPr>
+        <p:txBody>
+          <a:bodyPr/>
+          <a:lstStyle/>
+          <a:p>
+            <a:pPr marL="171450" indent="-171450">
+              <a:buFontTx/>
+              <a:buChar char="-"/>
+            </a:pPr>
+            <a:r>
+              <a:rPr lang="de-DE" dirty="0"/>
+              <a:t>quick </a:t>
+            </a:r>
+            <a:r>
+              <a:rPr lang="de-DE" dirty="0" err="1"/>
+              <a:t>detours</a:t>
+            </a:r>
+            <a:r>
+              <a:rPr lang="de-DE" dirty="0"/>
+              <a:t> </a:t>
+            </a:r>
+            <a:r>
+              <a:rPr lang="de-DE" dirty="0" err="1"/>
+              <a:t>before</a:t>
+            </a:r>
+            <a:r>
+              <a:rPr lang="de-DE" dirty="0"/>
+              <a:t> </a:t>
+            </a:r>
+            <a:r>
+              <a:rPr lang="de-DE" dirty="0" err="1"/>
+              <a:t>step</a:t>
+            </a:r>
+            <a:r>
+              <a:rPr lang="de-DE" dirty="0"/>
+              <a:t> 3</a:t>
+            </a:r>
+          </a:p>
+          <a:p>
+            <a:pPr marL="171450" indent="-171450">
+              <a:buFontTx/>
+              <a:buChar char="-"/>
+            </a:pPr>
+            <a:r>
+              <a:rPr lang="de-DE" dirty="0" err="1"/>
+              <a:t>what</a:t>
+            </a:r>
+            <a:r>
+              <a:rPr lang="de-DE" dirty="0"/>
+              <a:t> </a:t>
+            </a:r>
+            <a:r>
+              <a:rPr lang="de-DE" dirty="0" err="1"/>
+              <a:t>we</a:t>
+            </a:r>
+            <a:r>
+              <a:rPr lang="de-DE" dirty="0"/>
+              <a:t> </a:t>
+            </a:r>
+            <a:r>
+              <a:rPr lang="de-DE" dirty="0" err="1"/>
+              <a:t>are</a:t>
+            </a:r>
+            <a:r>
+              <a:rPr lang="de-DE" dirty="0"/>
+              <a:t> </a:t>
+            </a:r>
+            <a:r>
+              <a:rPr lang="de-DE" dirty="0" err="1"/>
+              <a:t>doing</a:t>
+            </a:r>
+            <a:r>
+              <a:rPr lang="de-DE" dirty="0"/>
+              <a:t> </a:t>
+            </a:r>
+            <a:r>
+              <a:rPr lang="de-DE" dirty="0" err="1"/>
+              <a:t>here</a:t>
+            </a:r>
+            <a:r>
+              <a:rPr lang="de-DE" dirty="0"/>
+              <a:t> </a:t>
+            </a:r>
+            <a:r>
+              <a:rPr lang="de-DE" dirty="0" err="1"/>
+              <a:t>is</a:t>
+            </a:r>
+            <a:r>
+              <a:rPr lang="de-DE" dirty="0"/>
+              <a:t> </a:t>
+            </a:r>
+            <a:r>
+              <a:rPr lang="de-DE" dirty="0" err="1"/>
+              <a:t>essentially</a:t>
+            </a:r>
+            <a:r>
+              <a:rPr lang="de-DE" dirty="0"/>
+              <a:t> just IR </a:t>
+            </a:r>
+            <a:r>
+              <a:rPr lang="de-DE" dirty="0" err="1"/>
+              <a:t>with</a:t>
+            </a:r>
+            <a:r>
+              <a:rPr lang="de-DE" dirty="0"/>
+              <a:t> </a:t>
+            </a:r>
+            <a:r>
+              <a:rPr lang="de-DE" dirty="0" err="1"/>
+              <a:t>transform</a:t>
+            </a:r>
+            <a:r>
+              <a:rPr lang="de-DE" dirty="0"/>
+              <a:t> </a:t>
+            </a:r>
+            <a:r>
+              <a:rPr lang="de-DE" dirty="0" err="1"/>
+              <a:t>consisting</a:t>
+            </a:r>
+            <a:r>
+              <a:rPr lang="de-DE" dirty="0"/>
+              <a:t> </a:t>
+            </a:r>
+            <a:r>
+              <a:rPr lang="de-DE" dirty="0" err="1"/>
+              <a:t>of</a:t>
+            </a:r>
+            <a:r>
+              <a:rPr lang="de-DE" dirty="0"/>
+              <a:t> </a:t>
+            </a:r>
+            <a:r>
+              <a:rPr lang="de-DE" dirty="0" err="1"/>
+              <a:t>translation</a:t>
+            </a:r>
+            <a:r>
+              <a:rPr lang="de-DE" dirty="0"/>
+              <a:t> and </a:t>
+            </a:r>
+            <a:r>
+              <a:rPr lang="de-DE" dirty="0" err="1"/>
+              <a:t>rotation</a:t>
+            </a:r>
+            <a:endParaRPr lang="de-DE" dirty="0"/>
+          </a:p>
+          <a:p>
+            <a:pPr marL="171450" indent="-171450">
+              <a:buFontTx/>
+              <a:buChar char="-"/>
+            </a:pPr>
+            <a:r>
+              <a:rPr lang="de-DE" dirty="0" err="1"/>
+              <a:t>add</a:t>
+            </a:r>
+            <a:r>
+              <a:rPr lang="de-DE" dirty="0"/>
+              <a:t> </a:t>
+            </a:r>
+            <a:r>
+              <a:rPr lang="de-DE" dirty="0" err="1"/>
+              <a:t>new</a:t>
+            </a:r>
+            <a:r>
+              <a:rPr lang="de-DE" dirty="0"/>
+              <a:t> </a:t>
+            </a:r>
+            <a:r>
+              <a:rPr lang="de-DE" dirty="0" err="1"/>
+              <a:t>edges</a:t>
+            </a:r>
+            <a:endParaRPr lang="de-DE" dirty="0"/>
+          </a:p>
+        </p:txBody>
+      </p:sp>
+    </p:spTree>
+    <p:extLst>
+      <p:ext uri="{BB962C8B-B14F-4D97-AF65-F5344CB8AC3E}">
+        <p14:creationId xmlns:p14="http://schemas.microsoft.com/office/powerpoint/2010/main" val="808251590"/>
+      </p:ext>
+    </p:extLst>
+  </p:cSld>
+  <p:clrMapOvr>
+    <a:masterClrMapping/>
+  </p:clrMapOvr>
+</p:notes>
+</file>
+
+<file path=ppt/notesSlides/notesSlide8.xml><?xml version="1.0" encoding="utf-8"?>
+<p:notes xmlns:a="http://schemas.openxmlformats.org/drawingml/2006/main" xmlns:r="http://schemas.openxmlformats.org/officeDocument/2006/relationships" xmlns:p="http://schemas.openxmlformats.org/presentationml/2006/main">
+  <p:cSld>
+    <p:spTree>
+      <p:nvGrpSpPr>
+        <p:cNvPr id="1" name=""/>
+        <p:cNvGrpSpPr/>
+        <p:nvPr/>
+      </p:nvGrpSpPr>
+      <p:grpSpPr>
+        <a:xfrm>
+          <a:off x="0" y="0"/>
+          <a:ext cx="0" cy="0"/>
+          <a:chOff x="0" y="0"/>
+          <a:chExt cx="0" cy="0"/>
+        </a:xfrm>
+      </p:grpSpPr>
+      <p:sp>
+        <p:nvSpPr>
+          <p:cNvPr id="2" name="Folienbildplatzhalter 1"/>
+          <p:cNvSpPr>
+            <a:spLocks noGrp="1" noRot="1" noChangeAspect="1"/>
+          </p:cNvSpPr>
+          <p:nvPr>
+            <p:ph type="sldImg"/>
+          </p:nvPr>
+        </p:nvSpPr>
+        <p:spPr>
+          <a:xfrm>
+            <a:off x="2514600" y="857250"/>
+            <a:ext cx="4114800" cy="2314575"/>
+          </a:xfrm>
+          <a:prstGeom prst="rect">
+            <a:avLst/>
+          </a:prstGeom>
+          <a:noFill/>
+          <a:ln w="12700">
+            <a:solidFill>
+              <a:prstClr val="black"/>
+            </a:solidFill>
+          </a:ln>
+        </p:spPr>
+      </p:sp>
+      <p:sp>
+        <p:nvSpPr>
+          <p:cNvPr id="3" name="Notizenplatzhalter 2"/>
+          <p:cNvSpPr>
+            <a:spLocks noGrp="1"/>
+          </p:cNvSpPr>
+          <p:nvPr>
+            <p:ph type="body" idx="1"/>
+          </p:nvPr>
+        </p:nvSpPr>
+        <p:spPr>
+          <a:xfrm>
+            <a:off x="914400" y="3300413"/>
+            <a:ext cx="7315200" cy="2700337"/>
+          </a:xfrm>
+          <a:prstGeom prst="rect">
+            <a:avLst/>
+          </a:prstGeom>
+        </p:spPr>
+        <p:txBody>
+          <a:bodyPr/>
+          <a:lstStyle/>
+          <a:p>
+            <a:endParaRPr lang="de-DE" dirty="0"/>
+          </a:p>
+        </p:txBody>
+      </p:sp>
+    </p:spTree>
+    <p:extLst>
+      <p:ext uri="{BB962C8B-B14F-4D97-AF65-F5344CB8AC3E}">
+        <p14:creationId xmlns:p14="http://schemas.microsoft.com/office/powerpoint/2010/main" val="791212187"/>
+      </p:ext>
+    </p:extLst>
+  </p:cSld>
+  <p:clrMapOvr>
+    <a:masterClrMapping/>
+  </p:clrMapOvr>
+</p:notes>
+</file>
+
+<file path=ppt/notesSlides/notesSlide9.xml><?xml version="1.0" encoding="utf-8"?>
+<p:notes xmlns:a="http://schemas.openxmlformats.org/drawingml/2006/main" xmlns:r="http://schemas.openxmlformats.org/officeDocument/2006/relationships" xmlns:p="http://schemas.openxmlformats.org/presentationml/2006/main">
+  <p:cSld>
+    <p:spTree>
+      <p:nvGrpSpPr>
+        <p:cNvPr id="1" name=""/>
+        <p:cNvGrpSpPr/>
+        <p:nvPr/>
+      </p:nvGrpSpPr>
+      <p:grpSpPr>
+        <a:xfrm>
+          <a:off x="0" y="0"/>
+          <a:ext cx="0" cy="0"/>
+          <a:chOff x="0" y="0"/>
+          <a:chExt cx="0" cy="0"/>
+        </a:xfrm>
+      </p:grpSpPr>
+      <p:sp>
+        <p:nvSpPr>
+          <p:cNvPr id="2" name="Folienbildplatzhalter 1"/>
+          <p:cNvSpPr>
+            <a:spLocks noGrp="1" noRot="1" noChangeAspect="1"/>
+          </p:cNvSpPr>
+          <p:nvPr>
+            <p:ph type="sldImg"/>
+          </p:nvPr>
+        </p:nvSpPr>
+        <p:spPr>
+          <a:xfrm>
+            <a:off x="2514600" y="857250"/>
+            <a:ext cx="4114800" cy="2314575"/>
+          </a:xfrm>
+          <a:prstGeom prst="rect">
+            <a:avLst/>
+          </a:prstGeom>
+          <a:noFill/>
+          <a:ln w="12700">
+            <a:solidFill>
+              <a:prstClr val="black"/>
+            </a:solidFill>
+          </a:ln>
+        </p:spPr>
+      </p:sp>
+      <p:sp>
+        <p:nvSpPr>
+          <p:cNvPr id="3" name="Notizenplatzhalter 2"/>
+          <p:cNvSpPr>
+            <a:spLocks noGrp="1"/>
+          </p:cNvSpPr>
+          <p:nvPr>
+            <p:ph type="body" idx="1"/>
+          </p:nvPr>
+        </p:nvSpPr>
+        <p:spPr>
+          <a:xfrm>
+            <a:off x="914400" y="3300413"/>
+            <a:ext cx="7315200" cy="2700337"/>
+          </a:xfrm>
+          <a:prstGeom prst="rect">
+            <a:avLst/>
+          </a:prstGeom>
+        </p:spPr>
+        <p:txBody>
+          <a:bodyPr/>
+          <a:lstStyle/>
+          <a:p>
+            <a:pPr marL="171450" indent="-171450">
+              <a:buFontTx/>
+              <a:buChar char="-"/>
+            </a:pPr>
+            <a:r>
+              <a:rPr lang="de-DE" dirty="0" err="1"/>
+              <a:t>many</a:t>
+            </a:r>
+            <a:r>
+              <a:rPr lang="de-DE" dirty="0"/>
+              <a:t> </a:t>
+            </a:r>
+            <a:r>
+              <a:rPr lang="de-DE" dirty="0" err="1"/>
+              <a:t>error</a:t>
+            </a:r>
+            <a:r>
+              <a:rPr lang="de-DE" dirty="0"/>
+              <a:t> </a:t>
+            </a:r>
+            <a:r>
+              <a:rPr lang="de-DE" dirty="0" err="1"/>
+              <a:t>metrics</a:t>
+            </a:r>
+            <a:endParaRPr lang="de-DE" dirty="0"/>
+          </a:p>
+          <a:p>
+            <a:pPr marL="171450" indent="-171450">
+              <a:buFontTx/>
+              <a:buChar char="-"/>
+            </a:pPr>
+            <a:r>
+              <a:rPr lang="de-DE" dirty="0" err="1"/>
+              <a:t>useful</a:t>
+            </a:r>
+            <a:r>
+              <a:rPr lang="de-DE" dirty="0"/>
+              <a:t> </a:t>
+            </a:r>
+            <a:r>
+              <a:rPr lang="de-DE" dirty="0" err="1"/>
+              <a:t>selection</a:t>
+            </a:r>
+            <a:r>
+              <a:rPr lang="de-DE" dirty="0"/>
+              <a:t> </a:t>
+            </a:r>
+            <a:r>
+              <a:rPr lang="de-DE" dirty="0" err="1"/>
+              <a:t>listed</a:t>
+            </a:r>
+            <a:r>
+              <a:rPr lang="de-DE" dirty="0"/>
+              <a:t> </a:t>
+            </a:r>
+            <a:r>
+              <a:rPr lang="de-DE" dirty="0" err="1"/>
+              <a:t>here</a:t>
+            </a:r>
+            <a:endParaRPr lang="de-DE" dirty="0"/>
+          </a:p>
+        </p:txBody>
+      </p:sp>
+    </p:spTree>
+    <p:extLst>
+      <p:ext uri="{BB962C8B-B14F-4D97-AF65-F5344CB8AC3E}">
+        <p14:creationId xmlns:p14="http://schemas.microsoft.com/office/powerpoint/2010/main" val="2571591151"/>
       </p:ext>
     </p:extLst>
   </p:cSld>
@@ -976,7 +3203,7 @@
           </a:lstStyle>
           <a:p>
             <a:fld id="{7475F232-FFFE-5E6C-5554-2F165DAD28C0}" type="slidenum">
-              <a:t>‹#›</a:t>
+              <a:t>‹Nr.›</a:t>
             </a:fld>
             <a:endParaRPr dirty="0"/>
           </a:p>
@@ -1404,7 +3631,7 @@
           <a:p>
             <a:fld id="{8664C608-40B1-4030-A28D-5B74BC98ADCE}" type="datetimeFigureOut">
               <a:rPr lang="en-US" dirty="0"/>
-              <a:t>5/8/2026</a:t>
+              <a:t>5/9/2026</a:t>
             </a:fld>
             <a:endParaRPr lang="en-US" dirty="0"/>
           </a:p>
@@ -1582,7 +3809,7 @@
           <a:p>
             <a:fld id="{D8EC5374-57E1-C524-E947-346F474B0D38}" type="slidenum">
               <a:rPr lang="en-US" altLang="ja-JP" smtClean="0"/>
-              <a:t>‹#›</a:t>
+              <a:t>‹Nr.›</a:t>
             </a:fld>
             <a:endParaRPr lang="ja-JP" altLang="en-US"/>
           </a:p>
@@ -2634,7 +4861,7 @@
           <p:nvPr/>
         </p:nvPicPr>
         <p:blipFill>
-          <a:blip r:embed="rId2">
+          <a:blip r:embed="rId3">
             <a:extLst>
               <a:ext uri="{28A0092B-C50C-407E-A947-70E740481C1C}">
                 <a14:useLocalDpi xmlns:a14="http://schemas.microsoft.com/office/drawing/2010/main" val="0"/>
@@ -2718,7 +4945,7 @@
         <p:spPr>
           <a:xfrm>
             <a:off x="284138" y="4084367"/>
-            <a:ext cx="8361904" cy="400110"/>
+            <a:ext cx="8709436" cy="707886"/>
           </a:xfrm>
           <a:prstGeom prst="rect">
             <a:avLst/>
@@ -2744,7 +4971,7 @@
               <a:rPr lang="en-US" sz="2000" dirty="0">
                 <a:latin typeface="游ゴシック Medium" panose="020B0500000000000000" pitchFamily="50" charset="-128"/>
               </a:rPr>
-              <a:t>Create new edges for non-adjacent pairs of frame (</a:t>
+              <a:t>Add new edges between non-adjacent pairs of frame (</a:t>
             </a:r>
             <a:r>
               <a:rPr lang="en-US" sz="2000" dirty="0" err="1">
@@ -2765,6 +4992,23 @@
                 <a:latin typeface="游ゴシック Medium" panose="020B0500000000000000" pitchFamily="50" charset="-128"/>
               </a:rPr>
               <a:t>)</a:t>
+            </a:r>
+          </a:p>
+          <a:p>
+            <a:r>
+              <a:rPr lang="en-US" sz="2000" dirty="0">
+                <a:solidFill>
+                  <a:schemeClr val="accent1"/>
+                </a:solidFill>
+                <a:latin typeface="游ゴシック Medium" panose="020B0500000000000000" pitchFamily="50" charset="-128"/>
+              </a:rPr>
+              <a:t>➔ </a:t>
+            </a:r>
+            <a:r>
+              <a:rPr lang="en-US" sz="2000" dirty="0">
+                <a:latin typeface="游ゴシック Medium" panose="020B0500000000000000" pitchFamily="50" charset="-128"/>
+              </a:rPr>
+              <a:t>Create redundancy</a:t>
             </a:r>
           </a:p>
         </p:txBody>
@@ -2783,6 +5027,1823 @@
 </file>
 
 <file path=ppt/slides/slide11.xml><?xml version="1.0" encoding="utf-8"?>
+<p:sld xmlns:a="http://schemas.openxmlformats.org/drawingml/2006/main" xmlns:r="http://schemas.openxmlformats.org/officeDocument/2006/relationships" xmlns:p="http://schemas.openxmlformats.org/presentationml/2006/main">
+  <p:cSld>
+    <p:spTree>
+      <p:nvGrpSpPr>
+        <p:cNvPr id="1" name="">
+          <a:extLst>
+            <a:ext uri="{FF2B5EF4-FFF2-40B4-BE49-F238E27FC236}">
+              <a16:creationId xmlns:a16="http://schemas.microsoft.com/office/drawing/2014/main" id="{519EF47E-879A-FD63-A692-9F8F88DD9B37}"/>
+            </a:ext>
+          </a:extLst>
+        </p:cNvPr>
+        <p:cNvGrpSpPr/>
+        <p:nvPr/>
+      </p:nvGrpSpPr>
+      <p:grpSpPr>
+        <a:xfrm>
+          <a:off x="0" y="0"/>
+          <a:ext cx="0" cy="0"/>
+          <a:chOff x="0" y="0"/>
+          <a:chExt cx="0" cy="0"/>
+        </a:xfrm>
+      </p:grpSpPr>
+      <p:sp>
+        <p:nvSpPr>
+          <p:cNvPr id="3" name="Slide Number Placeholder 2">
+            <a:extLst>
+              <a:ext uri="{FF2B5EF4-FFF2-40B4-BE49-F238E27FC236}">
+                <a16:creationId xmlns:a16="http://schemas.microsoft.com/office/drawing/2014/main" id="{86A8DC6E-9E27-C46B-1DBB-2F8F208F8896}"/>
+              </a:ext>
+            </a:extLst>
+          </p:cNvPr>
+          <p:cNvSpPr>
+            <a:spLocks noGrp="1"/>
+          </p:cNvSpPr>
+          <p:nvPr>
+            <p:ph type="sldNum" idx="1"/>
+          </p:nvPr>
+        </p:nvSpPr>
+        <p:spPr/>
+        <p:txBody>
+          <a:bodyPr/>
+          <a:lstStyle/>
+          <a:p>
+            <a:fld id="{7475F232-FFFE-5E6C-5554-2F165DAD28C0}" type="slidenum">
+              <a:rPr lang="en-JP" smtClean="0"/>
+              <a:t>11</a:t>
+            </a:fld>
+            <a:endParaRPr lang="en-JP" dirty="0"/>
+          </a:p>
+        </p:txBody>
+      </p:sp>
+      <p:sp>
+        <p:nvSpPr>
+          <p:cNvPr id="4" name="Title 3">
+            <a:extLst>
+              <a:ext uri="{FF2B5EF4-FFF2-40B4-BE49-F238E27FC236}">
+                <a16:creationId xmlns:a16="http://schemas.microsoft.com/office/drawing/2014/main" id="{9BFDC312-D032-D227-1396-A68187D076C4}"/>
+              </a:ext>
+            </a:extLst>
+          </p:cNvPr>
+          <p:cNvSpPr>
+            <a:spLocks noGrp="1"/>
+          </p:cNvSpPr>
+          <p:nvPr>
+            <p:ph type="title" idx="2"/>
+          </p:nvPr>
+        </p:nvSpPr>
+        <p:spPr/>
+        <p:txBody>
+          <a:bodyPr/>
+          <a:lstStyle/>
+          <a:p>
+            <a:pPr marL="0">
+              <a:buClr>
+                <a:srgbClr val="9E3611"/>
+              </a:buClr>
+            </a:pPr>
+            <a:r>
+              <a:rPr lang="en-US" sz="2400" b="0" dirty="0">
+                <a:ea typeface="游ゴシック Medium"/>
+                <a:cs typeface="Times New Roman"/>
+              </a:rPr>
+              <a:t>   Detour</a:t>
+            </a:r>
+          </a:p>
+        </p:txBody>
+      </p:sp>
+      <mc:AlternateContent xmlns:mc="http://schemas.openxmlformats.org/markup-compatibility/2006">
+        <mc:Choice xmlns:p14="http://schemas.microsoft.com/office/powerpoint/2010/main" Requires="p14">
+          <p:contentPart p14:bwMode="auto" r:id="rId2">
+            <p14:nvContentPartPr>
+              <p14:cNvPr id="38" name="Freihand 37">
+                <a:extLst>
+                  <a:ext uri="{FF2B5EF4-FFF2-40B4-BE49-F238E27FC236}">
+                    <a16:creationId xmlns:a16="http://schemas.microsoft.com/office/drawing/2014/main" id="{319541A0-87EE-280C-23EA-A8C5D5BD61EB}"/>
+                  </a:ext>
+                </a:extLst>
+              </p14:cNvPr>
+              <p14:cNvContentPartPr/>
+              <p14:nvPr/>
+            </p14:nvContentPartPr>
+            <p14:xfrm>
+              <a:off x="820500" y="1858184"/>
+              <a:ext cx="1610280" cy="1380960"/>
+            </p14:xfrm>
+          </p:contentPart>
+        </mc:Choice>
+        <mc:Fallback>
+          <p:pic>
+            <p:nvPicPr>
+              <p:cNvPr id="38" name="Freihand 37">
+                <a:extLst>
+                  <a:ext uri="{FF2B5EF4-FFF2-40B4-BE49-F238E27FC236}">
+                    <a16:creationId xmlns:a16="http://schemas.microsoft.com/office/drawing/2014/main" id="{319541A0-87EE-280C-23EA-A8C5D5BD61EB}"/>
+                  </a:ext>
+                </a:extLst>
+              </p:cNvPr>
+              <p:cNvPicPr/>
+              <p:nvPr/>
+            </p:nvPicPr>
+            <p:blipFill>
+              <a:blip r:embed="rId3"/>
+              <a:stretch>
+                <a:fillRect/>
+              </a:stretch>
+            </p:blipFill>
+            <p:spPr>
+              <a:xfrm>
+                <a:off x="814380" y="1852064"/>
+                <a:ext cx="1622520" cy="1393200"/>
+              </a:xfrm>
+              <a:prstGeom prst="rect">
+                <a:avLst/>
+              </a:prstGeom>
+            </p:spPr>
+          </p:pic>
+        </mc:Fallback>
+      </mc:AlternateContent>
+      <mc:AlternateContent xmlns:mc="http://schemas.openxmlformats.org/markup-compatibility/2006">
+        <mc:Choice xmlns:p14="http://schemas.microsoft.com/office/powerpoint/2010/main" Requires="p14">
+          <p:contentPart p14:bwMode="auto" r:id="rId4">
+            <p14:nvContentPartPr>
+              <p14:cNvPr id="45" name="Freihand 44">
+                <a:extLst>
+                  <a:ext uri="{FF2B5EF4-FFF2-40B4-BE49-F238E27FC236}">
+                    <a16:creationId xmlns:a16="http://schemas.microsoft.com/office/drawing/2014/main" id="{50A74015-146D-B550-C8BC-D2EA081090C2}"/>
+                  </a:ext>
+                </a:extLst>
+              </p14:cNvPr>
+              <p14:cNvContentPartPr/>
+              <p14:nvPr/>
+            </p14:nvContentPartPr>
+            <p14:xfrm>
+              <a:off x="3781980" y="1601144"/>
+              <a:ext cx="1580040" cy="1638000"/>
+            </p14:xfrm>
+          </p:contentPart>
+        </mc:Choice>
+        <mc:Fallback>
+          <p:pic>
+            <p:nvPicPr>
+              <p:cNvPr id="45" name="Freihand 44">
+                <a:extLst>
+                  <a:ext uri="{FF2B5EF4-FFF2-40B4-BE49-F238E27FC236}">
+                    <a16:creationId xmlns:a16="http://schemas.microsoft.com/office/drawing/2014/main" id="{50A74015-146D-B550-C8BC-D2EA081090C2}"/>
+                  </a:ext>
+                </a:extLst>
+              </p:cNvPr>
+              <p:cNvPicPr/>
+              <p:nvPr/>
+            </p:nvPicPr>
+            <p:blipFill>
+              <a:blip r:embed="rId5"/>
+              <a:stretch>
+                <a:fillRect/>
+              </a:stretch>
+            </p:blipFill>
+            <p:spPr>
+              <a:xfrm>
+                <a:off x="3775860" y="1595024"/>
+                <a:ext cx="1592280" cy="1650240"/>
+              </a:xfrm>
+              <a:prstGeom prst="rect">
+                <a:avLst/>
+              </a:prstGeom>
+            </p:spPr>
+          </p:pic>
+        </mc:Fallback>
+      </mc:AlternateContent>
+      <mc:AlternateContent xmlns:mc="http://schemas.openxmlformats.org/markup-compatibility/2006">
+        <mc:Choice xmlns:p14="http://schemas.microsoft.com/office/powerpoint/2010/main" Requires="p14">
+          <p:contentPart p14:bwMode="auto" r:id="rId6">
+            <p14:nvContentPartPr>
+              <p14:cNvPr id="61" name="Freihand 60">
+                <a:extLst>
+                  <a:ext uri="{FF2B5EF4-FFF2-40B4-BE49-F238E27FC236}">
+                    <a16:creationId xmlns:a16="http://schemas.microsoft.com/office/drawing/2014/main" id="{FEB3842C-898B-45FD-1820-7D390BD9ACAF}"/>
+                  </a:ext>
+                </a:extLst>
+              </p14:cNvPr>
+              <p14:cNvContentPartPr/>
+              <p14:nvPr/>
+            </p14:nvContentPartPr>
+            <p14:xfrm>
+              <a:off x="6713220" y="1858184"/>
+              <a:ext cx="1610280" cy="1380960"/>
+            </p14:xfrm>
+          </p:contentPart>
+        </mc:Choice>
+        <mc:Fallback>
+          <p:pic>
+            <p:nvPicPr>
+              <p:cNvPr id="61" name="Freihand 60">
+                <a:extLst>
+                  <a:ext uri="{FF2B5EF4-FFF2-40B4-BE49-F238E27FC236}">
+                    <a16:creationId xmlns:a16="http://schemas.microsoft.com/office/drawing/2014/main" id="{FEB3842C-898B-45FD-1820-7D390BD9ACAF}"/>
+                  </a:ext>
+                </a:extLst>
+              </p:cNvPr>
+              <p:cNvPicPr/>
+              <p:nvPr/>
+            </p:nvPicPr>
+            <p:blipFill>
+              <a:blip r:embed="rId7"/>
+              <a:stretch>
+                <a:fillRect/>
+              </a:stretch>
+            </p:blipFill>
+            <p:spPr>
+              <a:xfrm>
+                <a:off x="6707100" y="1852064"/>
+                <a:ext cx="1622520" cy="1393200"/>
+              </a:xfrm>
+              <a:prstGeom prst="rect">
+                <a:avLst/>
+              </a:prstGeom>
+            </p:spPr>
+          </p:pic>
+        </mc:Fallback>
+      </mc:AlternateContent>
+      <p:sp>
+        <p:nvSpPr>
+          <p:cNvPr id="4098" name="Arrow: Down 24">
+            <a:extLst>
+              <a:ext uri="{FF2B5EF4-FFF2-40B4-BE49-F238E27FC236}">
+                <a16:creationId xmlns:a16="http://schemas.microsoft.com/office/drawing/2014/main" id="{8EAB7CA8-AC2E-E988-9204-471FA329FE81}"/>
+              </a:ext>
+            </a:extLst>
+          </p:cNvPr>
+          <p:cNvSpPr/>
+          <p:nvPr/>
+        </p:nvSpPr>
+        <p:spPr>
+          <a:xfrm rot="16200000">
+            <a:off x="5757329" y="2093681"/>
+            <a:ext cx="576064" cy="623679"/>
+          </a:xfrm>
+          <a:prstGeom prst="downArrow">
+            <a:avLst/>
+          </a:prstGeom>
+          <a:ln>
+            <a:noFill/>
+          </a:ln>
+        </p:spPr>
+        <p:style>
+          <a:lnRef idx="2">
+            <a:schemeClr val="accent1">
+              <a:shade val="15000"/>
+            </a:schemeClr>
+          </a:lnRef>
+          <a:fillRef idx="1">
+            <a:schemeClr val="accent1"/>
+          </a:fillRef>
+          <a:effectRef idx="0">
+            <a:schemeClr val="accent1"/>
+          </a:effectRef>
+          <a:fontRef idx="minor">
+            <a:schemeClr val="lt1"/>
+          </a:fontRef>
+        </p:style>
+        <p:txBody>
+          <a:bodyPr rtlCol="0" anchor="ctr"/>
+          <a:lstStyle/>
+          <a:p>
+            <a:pPr algn="ctr"/>
+            <a:endParaRPr lang="en-US"/>
+          </a:p>
+        </p:txBody>
+      </p:sp>
+      <p:sp>
+        <p:nvSpPr>
+          <p:cNvPr id="4099" name="Text Placeholder 1">
+            <a:extLst>
+              <a:ext uri="{FF2B5EF4-FFF2-40B4-BE49-F238E27FC236}">
+                <a16:creationId xmlns:a16="http://schemas.microsoft.com/office/drawing/2014/main" id="{C1E23479-AF10-D686-4FBC-28E5D96D72EF}"/>
+              </a:ext>
+            </a:extLst>
+          </p:cNvPr>
+          <p:cNvSpPr txBox="1">
+            <a:spLocks/>
+          </p:cNvSpPr>
+          <p:nvPr/>
+        </p:nvSpPr>
+        <p:spPr>
+          <a:xfrm>
+            <a:off x="1306216" y="3529994"/>
+            <a:ext cx="634950" cy="337900"/>
+          </a:xfrm>
+          <a:prstGeom prst="rect">
+            <a:avLst/>
+          </a:prstGeom>
+          <a:noFill/>
+        </p:spPr>
+        <p:txBody>
+          <a:bodyPr vert="horz" lIns="91440" tIns="45720" rIns="91440" bIns="45720" rtlCol="0" anchor="t">
+            <a:noAutofit/>
+          </a:bodyPr>
+          <a:lstStyle>
+            <a:lvl1pPr marL="137160" indent="-137160" algn="l" defTabSz="685800" rtl="0" eaLnBrk="1" latinLnBrk="0" hangingPunct="1">
+              <a:lnSpc>
+                <a:spcPct val="90000"/>
+              </a:lnSpc>
+              <a:spcBef>
+                <a:spcPts val="900"/>
+              </a:spcBef>
+              <a:buClr>
+                <a:schemeClr val="accent1">
+                  <a:lumMod val="75000"/>
+                </a:schemeClr>
+              </a:buClr>
+              <a:buSzPct val="100000"/>
+              <a:buFont typeface="Arial" panose="020B0604020202020204" pitchFamily="34" charset="0"/>
+              <a:buChar char="•"/>
+              <a:defRPr kumimoji="1" sz="1500" b="1" kern="1200">
+                <a:solidFill>
+                  <a:schemeClr val="tx1"/>
+                </a:solidFill>
+                <a:latin typeface="游ゴシック Medium" panose="020B0500000000000000" pitchFamily="50" charset="-128"/>
+                <a:ea typeface="游ゴシック Medium" panose="020B0500000000000000" pitchFamily="50" charset="-128"/>
+                <a:cs typeface="+mn-cs"/>
+              </a:defRPr>
+            </a:lvl1pPr>
+            <a:lvl2pPr marL="342900" indent="-137160" algn="l" defTabSz="685800" rtl="0" eaLnBrk="1" latinLnBrk="0" hangingPunct="1">
+              <a:lnSpc>
+                <a:spcPct val="90000"/>
+              </a:lnSpc>
+              <a:spcBef>
+                <a:spcPts val="300"/>
+              </a:spcBef>
+              <a:spcAft>
+                <a:spcPts val="150"/>
+              </a:spcAft>
+              <a:buClr>
+                <a:schemeClr val="accent1">
+                  <a:lumMod val="75000"/>
+                </a:schemeClr>
+              </a:buClr>
+              <a:buSzPct val="100000"/>
+              <a:buFont typeface="Arial" panose="020B0604020202020204" pitchFamily="34" charset="0"/>
+              <a:buChar char="•"/>
+              <a:defRPr kumimoji="1" sz="1350" b="1" kern="1200">
+                <a:solidFill>
+                  <a:schemeClr val="tx1"/>
+                </a:solidFill>
+                <a:latin typeface="游ゴシック Medium" panose="020B0500000000000000" pitchFamily="50" charset="-128"/>
+                <a:ea typeface="游ゴシック Medium" panose="020B0500000000000000" pitchFamily="50" charset="-128"/>
+                <a:cs typeface="+mn-cs"/>
+              </a:defRPr>
+            </a:lvl2pPr>
+            <a:lvl3pPr marL="548640" indent="-137160" algn="l" defTabSz="685800" rtl="0" eaLnBrk="1" latinLnBrk="0" hangingPunct="1">
+              <a:lnSpc>
+                <a:spcPct val="90000"/>
+              </a:lnSpc>
+              <a:spcBef>
+                <a:spcPts val="300"/>
+              </a:spcBef>
+              <a:spcAft>
+                <a:spcPts val="150"/>
+              </a:spcAft>
+              <a:buClr>
+                <a:schemeClr val="accent1">
+                  <a:lumMod val="75000"/>
+                </a:schemeClr>
+              </a:buClr>
+              <a:buSzPct val="100000"/>
+              <a:buFont typeface="Arial" panose="020B0604020202020204" pitchFamily="34" charset="0"/>
+              <a:buChar char="•"/>
+              <a:defRPr kumimoji="1" sz="1200" b="1" kern="1200">
+                <a:solidFill>
+                  <a:schemeClr val="tx1"/>
+                </a:solidFill>
+                <a:latin typeface="游ゴシック Medium" panose="020B0500000000000000" pitchFamily="50" charset="-128"/>
+                <a:ea typeface="游ゴシック Medium" panose="020B0500000000000000" pitchFamily="50" charset="-128"/>
+                <a:cs typeface="+mn-cs"/>
+              </a:defRPr>
+            </a:lvl3pPr>
+            <a:lvl4pPr marL="754380" indent="-137160" algn="l" defTabSz="685800" rtl="0" eaLnBrk="1" latinLnBrk="0" hangingPunct="1">
+              <a:lnSpc>
+                <a:spcPct val="90000"/>
+              </a:lnSpc>
+              <a:spcBef>
+                <a:spcPts val="300"/>
+              </a:spcBef>
+              <a:spcAft>
+                <a:spcPts val="150"/>
+              </a:spcAft>
+              <a:buClr>
+                <a:schemeClr val="accent1">
+                  <a:lumMod val="75000"/>
+                </a:schemeClr>
+              </a:buClr>
+              <a:buSzPct val="100000"/>
+              <a:buFont typeface="Arial" panose="020B0604020202020204" pitchFamily="34" charset="0"/>
+              <a:buChar char="•"/>
+              <a:defRPr kumimoji="1" sz="1200" b="1" kern="1200">
+                <a:solidFill>
+                  <a:schemeClr val="tx1"/>
+                </a:solidFill>
+                <a:latin typeface="游ゴシック Medium" panose="020B0500000000000000" pitchFamily="50" charset="-128"/>
+                <a:ea typeface="游ゴシック Medium" panose="020B0500000000000000" pitchFamily="50" charset="-128"/>
+                <a:cs typeface="+mn-cs"/>
+              </a:defRPr>
+            </a:lvl4pPr>
+            <a:lvl5pPr marL="960120" indent="-137160" algn="l" defTabSz="685800" rtl="0" eaLnBrk="1" latinLnBrk="0" hangingPunct="1">
+              <a:lnSpc>
+                <a:spcPct val="90000"/>
+              </a:lnSpc>
+              <a:spcBef>
+                <a:spcPts val="300"/>
+              </a:spcBef>
+              <a:spcAft>
+                <a:spcPts val="150"/>
+              </a:spcAft>
+              <a:buClr>
+                <a:schemeClr val="accent1">
+                  <a:lumMod val="75000"/>
+                </a:schemeClr>
+              </a:buClr>
+              <a:buSzPct val="100000"/>
+              <a:buFont typeface="Arial" panose="020B0604020202020204" pitchFamily="34" charset="0"/>
+              <a:buChar char="•"/>
+              <a:defRPr kumimoji="1" sz="1200" b="1" kern="1200">
+                <a:solidFill>
+                  <a:schemeClr val="tx1"/>
+                </a:solidFill>
+                <a:latin typeface="游ゴシック Medium" panose="020B0500000000000000" pitchFamily="50" charset="-128"/>
+                <a:ea typeface="游ゴシック Medium" panose="020B0500000000000000" pitchFamily="50" charset="-128"/>
+                <a:cs typeface="+mn-cs"/>
+              </a:defRPr>
+            </a:lvl5pPr>
+            <a:lvl6pPr marL="1200000" indent="-171450" algn="l" defTabSz="685800" rtl="0" eaLnBrk="1" latinLnBrk="0" hangingPunct="1">
+              <a:lnSpc>
+                <a:spcPct val="90000"/>
+              </a:lnSpc>
+              <a:spcBef>
+                <a:spcPts val="300"/>
+              </a:spcBef>
+              <a:spcAft>
+                <a:spcPts val="150"/>
+              </a:spcAft>
+              <a:buClr>
+                <a:schemeClr val="accent1">
+                  <a:lumMod val="75000"/>
+                </a:schemeClr>
+              </a:buClr>
+              <a:buSzPct val="100000"/>
+              <a:buFont typeface="Arial" panose="020B0604020202020204" pitchFamily="34" charset="0"/>
+              <a:buChar char="•"/>
+              <a:defRPr kumimoji="1" sz="1200" kern="1200">
+                <a:solidFill>
+                  <a:schemeClr val="tx1"/>
+                </a:solidFill>
+                <a:latin typeface="+mn-lt"/>
+                <a:ea typeface="+mn-ea"/>
+                <a:cs typeface="+mn-cs"/>
+              </a:defRPr>
+            </a:lvl6pPr>
+            <a:lvl7pPr marL="1425000" indent="-171450" algn="l" defTabSz="685800" rtl="0" eaLnBrk="1" latinLnBrk="0" hangingPunct="1">
+              <a:lnSpc>
+                <a:spcPct val="90000"/>
+              </a:lnSpc>
+              <a:spcBef>
+                <a:spcPts val="300"/>
+              </a:spcBef>
+              <a:spcAft>
+                <a:spcPts val="150"/>
+              </a:spcAft>
+              <a:buClr>
+                <a:schemeClr val="accent1">
+                  <a:lumMod val="75000"/>
+                </a:schemeClr>
+              </a:buClr>
+              <a:buSzPct val="100000"/>
+              <a:buFont typeface="Arial" panose="020B0604020202020204" pitchFamily="34" charset="0"/>
+              <a:buChar char="•"/>
+              <a:defRPr kumimoji="1" sz="1200" kern="1200">
+                <a:solidFill>
+                  <a:schemeClr val="tx1"/>
+                </a:solidFill>
+                <a:latin typeface="+mn-lt"/>
+                <a:ea typeface="+mn-ea"/>
+                <a:cs typeface="+mn-cs"/>
+              </a:defRPr>
+            </a:lvl7pPr>
+            <a:lvl8pPr marL="1650000" indent="-171450" algn="l" defTabSz="685800" rtl="0" eaLnBrk="1" latinLnBrk="0" hangingPunct="1">
+              <a:lnSpc>
+                <a:spcPct val="90000"/>
+              </a:lnSpc>
+              <a:spcBef>
+                <a:spcPts val="300"/>
+              </a:spcBef>
+              <a:spcAft>
+                <a:spcPts val="150"/>
+              </a:spcAft>
+              <a:buClr>
+                <a:schemeClr val="accent1">
+                  <a:lumMod val="75000"/>
+                </a:schemeClr>
+              </a:buClr>
+              <a:buSzPct val="100000"/>
+              <a:buFont typeface="Arial" panose="020B0604020202020204" pitchFamily="34" charset="0"/>
+              <a:buChar char="•"/>
+              <a:defRPr kumimoji="1" sz="1200" kern="1200">
+                <a:solidFill>
+                  <a:schemeClr val="tx1"/>
+                </a:solidFill>
+                <a:latin typeface="+mn-lt"/>
+                <a:ea typeface="+mn-ea"/>
+                <a:cs typeface="+mn-cs"/>
+              </a:defRPr>
+            </a:lvl8pPr>
+            <a:lvl9pPr marL="1875000" indent="-171450" algn="l" defTabSz="685800" rtl="0" eaLnBrk="1" latinLnBrk="0" hangingPunct="1">
+              <a:lnSpc>
+                <a:spcPct val="90000"/>
+              </a:lnSpc>
+              <a:spcBef>
+                <a:spcPts val="300"/>
+              </a:spcBef>
+              <a:spcAft>
+                <a:spcPts val="150"/>
+              </a:spcAft>
+              <a:buClr>
+                <a:schemeClr val="accent1">
+                  <a:lumMod val="75000"/>
+                </a:schemeClr>
+              </a:buClr>
+              <a:buSzPct val="100000"/>
+              <a:buFont typeface="Arial" panose="020B0604020202020204" pitchFamily="34" charset="0"/>
+              <a:buChar char="•"/>
+              <a:defRPr kumimoji="1" sz="1200" kern="1200">
+                <a:solidFill>
+                  <a:schemeClr val="tx1"/>
+                </a:solidFill>
+                <a:latin typeface="+mn-lt"/>
+                <a:ea typeface="+mn-ea"/>
+                <a:cs typeface="+mn-cs"/>
+              </a:defRPr>
+            </a:lvl9pPr>
+          </a:lstStyle>
+          <a:p>
+            <a:pPr marL="0" indent="0">
+              <a:buClr>
+                <a:srgbClr val="9E3611"/>
+              </a:buClr>
+              <a:buNone/>
+            </a:pPr>
+            <a:r>
+              <a:rPr lang="en-US" sz="2000" dirty="0">
+                <a:ea typeface="游ゴシック Medium"/>
+                <a:cs typeface="Times New Roman"/>
+              </a:rPr>
+              <a:t>GT</a:t>
+            </a:r>
+            <a:endParaRPr lang="en-US" sz="2000" b="0" dirty="0">
+              <a:ea typeface="游ゴシック Medium"/>
+              <a:cs typeface="Times New Roman"/>
+            </a:endParaRPr>
+          </a:p>
+          <a:p>
+            <a:pPr>
+              <a:buClr>
+                <a:srgbClr val="9E3611"/>
+              </a:buClr>
+            </a:pPr>
+            <a:endParaRPr lang="en-US" sz="2000" b="0" dirty="0">
+              <a:ea typeface="游ゴシック Medium"/>
+              <a:cs typeface="Times New Roman"/>
+            </a:endParaRPr>
+          </a:p>
+          <a:p>
+            <a:pPr marL="0" indent="0">
+              <a:buClr>
+                <a:srgbClr val="9E3611"/>
+              </a:buClr>
+              <a:buNone/>
+            </a:pPr>
+            <a:endParaRPr lang="en-US" sz="2000" b="0" dirty="0">
+              <a:ea typeface="游ゴシック Medium"/>
+              <a:cs typeface="Times New Roman"/>
+            </a:endParaRPr>
+          </a:p>
+          <a:p>
+            <a:pPr marL="0" indent="0">
+              <a:buClr>
+                <a:srgbClr val="9E3611"/>
+              </a:buClr>
+              <a:buFont typeface="Arial" panose="020B0604020202020204" pitchFamily="34" charset="0"/>
+              <a:buNone/>
+            </a:pPr>
+            <a:endParaRPr lang="en-US" sz="2000" b="0" dirty="0">
+              <a:ea typeface="游ゴシック Medium"/>
+              <a:cs typeface="Times New Roman"/>
+            </a:endParaRPr>
+          </a:p>
+        </p:txBody>
+      </p:sp>
+      <p:sp>
+        <p:nvSpPr>
+          <p:cNvPr id="4100" name="Text Placeholder 1">
+            <a:extLst>
+              <a:ext uri="{FF2B5EF4-FFF2-40B4-BE49-F238E27FC236}">
+                <a16:creationId xmlns:a16="http://schemas.microsoft.com/office/drawing/2014/main" id="{B3A5A607-40B6-7A9F-DECD-B9E7E962403F}"/>
+              </a:ext>
+            </a:extLst>
+          </p:cNvPr>
+          <p:cNvSpPr txBox="1">
+            <a:spLocks/>
+          </p:cNvSpPr>
+          <p:nvPr/>
+        </p:nvSpPr>
+        <p:spPr>
+          <a:xfrm>
+            <a:off x="3945210" y="3529994"/>
+            <a:ext cx="1253579" cy="431607"/>
+          </a:xfrm>
+          <a:prstGeom prst="rect">
+            <a:avLst/>
+          </a:prstGeom>
+          <a:noFill/>
+        </p:spPr>
+        <p:txBody>
+          <a:bodyPr vert="horz" lIns="91440" tIns="45720" rIns="91440" bIns="45720" rtlCol="0" anchor="t">
+            <a:noAutofit/>
+          </a:bodyPr>
+          <a:lstStyle>
+            <a:lvl1pPr marL="137160" indent="-137160" algn="l" defTabSz="685800" rtl="0" eaLnBrk="1" latinLnBrk="0" hangingPunct="1">
+              <a:lnSpc>
+                <a:spcPct val="90000"/>
+              </a:lnSpc>
+              <a:spcBef>
+                <a:spcPts val="900"/>
+              </a:spcBef>
+              <a:buClr>
+                <a:schemeClr val="accent1">
+                  <a:lumMod val="75000"/>
+                </a:schemeClr>
+              </a:buClr>
+              <a:buSzPct val="100000"/>
+              <a:buFont typeface="Arial" panose="020B0604020202020204" pitchFamily="34" charset="0"/>
+              <a:buChar char="•"/>
+              <a:defRPr kumimoji="1" sz="1500" b="1" kern="1200">
+                <a:solidFill>
+                  <a:schemeClr val="tx1"/>
+                </a:solidFill>
+                <a:latin typeface="游ゴシック Medium" panose="020B0500000000000000" pitchFamily="50" charset="-128"/>
+                <a:ea typeface="游ゴシック Medium" panose="020B0500000000000000" pitchFamily="50" charset="-128"/>
+                <a:cs typeface="+mn-cs"/>
+              </a:defRPr>
+            </a:lvl1pPr>
+            <a:lvl2pPr marL="342900" indent="-137160" algn="l" defTabSz="685800" rtl="0" eaLnBrk="1" latinLnBrk="0" hangingPunct="1">
+              <a:lnSpc>
+                <a:spcPct val="90000"/>
+              </a:lnSpc>
+              <a:spcBef>
+                <a:spcPts val="300"/>
+              </a:spcBef>
+              <a:spcAft>
+                <a:spcPts val="150"/>
+              </a:spcAft>
+              <a:buClr>
+                <a:schemeClr val="accent1">
+                  <a:lumMod val="75000"/>
+                </a:schemeClr>
+              </a:buClr>
+              <a:buSzPct val="100000"/>
+              <a:buFont typeface="Arial" panose="020B0604020202020204" pitchFamily="34" charset="0"/>
+              <a:buChar char="•"/>
+              <a:defRPr kumimoji="1" sz="1350" b="1" kern="1200">
+                <a:solidFill>
+                  <a:schemeClr val="tx1"/>
+                </a:solidFill>
+                <a:latin typeface="游ゴシック Medium" panose="020B0500000000000000" pitchFamily="50" charset="-128"/>
+                <a:ea typeface="游ゴシック Medium" panose="020B0500000000000000" pitchFamily="50" charset="-128"/>
+                <a:cs typeface="+mn-cs"/>
+              </a:defRPr>
+            </a:lvl2pPr>
+            <a:lvl3pPr marL="548640" indent="-137160" algn="l" defTabSz="685800" rtl="0" eaLnBrk="1" latinLnBrk="0" hangingPunct="1">
+              <a:lnSpc>
+                <a:spcPct val="90000"/>
+              </a:lnSpc>
+              <a:spcBef>
+                <a:spcPts val="300"/>
+              </a:spcBef>
+              <a:spcAft>
+                <a:spcPts val="150"/>
+              </a:spcAft>
+              <a:buClr>
+                <a:schemeClr val="accent1">
+                  <a:lumMod val="75000"/>
+                </a:schemeClr>
+              </a:buClr>
+              <a:buSzPct val="100000"/>
+              <a:buFont typeface="Arial" panose="020B0604020202020204" pitchFamily="34" charset="0"/>
+              <a:buChar char="•"/>
+              <a:defRPr kumimoji="1" sz="1200" b="1" kern="1200">
+                <a:solidFill>
+                  <a:schemeClr val="tx1"/>
+                </a:solidFill>
+                <a:latin typeface="游ゴシック Medium" panose="020B0500000000000000" pitchFamily="50" charset="-128"/>
+                <a:ea typeface="游ゴシック Medium" panose="020B0500000000000000" pitchFamily="50" charset="-128"/>
+                <a:cs typeface="+mn-cs"/>
+              </a:defRPr>
+            </a:lvl3pPr>
+            <a:lvl4pPr marL="754380" indent="-137160" algn="l" defTabSz="685800" rtl="0" eaLnBrk="1" latinLnBrk="0" hangingPunct="1">
+              <a:lnSpc>
+                <a:spcPct val="90000"/>
+              </a:lnSpc>
+              <a:spcBef>
+                <a:spcPts val="300"/>
+              </a:spcBef>
+              <a:spcAft>
+                <a:spcPts val="150"/>
+              </a:spcAft>
+              <a:buClr>
+                <a:schemeClr val="accent1">
+                  <a:lumMod val="75000"/>
+                </a:schemeClr>
+              </a:buClr>
+              <a:buSzPct val="100000"/>
+              <a:buFont typeface="Arial" panose="020B0604020202020204" pitchFamily="34" charset="0"/>
+              <a:buChar char="•"/>
+              <a:defRPr kumimoji="1" sz="1200" b="1" kern="1200">
+                <a:solidFill>
+                  <a:schemeClr val="tx1"/>
+                </a:solidFill>
+                <a:latin typeface="游ゴシック Medium" panose="020B0500000000000000" pitchFamily="50" charset="-128"/>
+                <a:ea typeface="游ゴシック Medium" panose="020B0500000000000000" pitchFamily="50" charset="-128"/>
+                <a:cs typeface="+mn-cs"/>
+              </a:defRPr>
+            </a:lvl4pPr>
+            <a:lvl5pPr marL="960120" indent="-137160" algn="l" defTabSz="685800" rtl="0" eaLnBrk="1" latinLnBrk="0" hangingPunct="1">
+              <a:lnSpc>
+                <a:spcPct val="90000"/>
+              </a:lnSpc>
+              <a:spcBef>
+                <a:spcPts val="300"/>
+              </a:spcBef>
+              <a:spcAft>
+                <a:spcPts val="150"/>
+              </a:spcAft>
+              <a:buClr>
+                <a:schemeClr val="accent1">
+                  <a:lumMod val="75000"/>
+                </a:schemeClr>
+              </a:buClr>
+              <a:buSzPct val="100000"/>
+              <a:buFont typeface="Arial" panose="020B0604020202020204" pitchFamily="34" charset="0"/>
+              <a:buChar char="•"/>
+              <a:defRPr kumimoji="1" sz="1200" b="1" kern="1200">
+                <a:solidFill>
+                  <a:schemeClr val="tx1"/>
+                </a:solidFill>
+                <a:latin typeface="游ゴシック Medium" panose="020B0500000000000000" pitchFamily="50" charset="-128"/>
+                <a:ea typeface="游ゴシック Medium" panose="020B0500000000000000" pitchFamily="50" charset="-128"/>
+                <a:cs typeface="+mn-cs"/>
+              </a:defRPr>
+            </a:lvl5pPr>
+            <a:lvl6pPr marL="1200000" indent="-171450" algn="l" defTabSz="685800" rtl="0" eaLnBrk="1" latinLnBrk="0" hangingPunct="1">
+              <a:lnSpc>
+                <a:spcPct val="90000"/>
+              </a:lnSpc>
+              <a:spcBef>
+                <a:spcPts val="300"/>
+              </a:spcBef>
+              <a:spcAft>
+                <a:spcPts val="150"/>
+              </a:spcAft>
+              <a:buClr>
+                <a:schemeClr val="accent1">
+                  <a:lumMod val="75000"/>
+                </a:schemeClr>
+              </a:buClr>
+              <a:buSzPct val="100000"/>
+              <a:buFont typeface="Arial" panose="020B0604020202020204" pitchFamily="34" charset="0"/>
+              <a:buChar char="•"/>
+              <a:defRPr kumimoji="1" sz="1200" kern="1200">
+                <a:solidFill>
+                  <a:schemeClr val="tx1"/>
+                </a:solidFill>
+                <a:latin typeface="+mn-lt"/>
+                <a:ea typeface="+mn-ea"/>
+                <a:cs typeface="+mn-cs"/>
+              </a:defRPr>
+            </a:lvl6pPr>
+            <a:lvl7pPr marL="1425000" indent="-171450" algn="l" defTabSz="685800" rtl="0" eaLnBrk="1" latinLnBrk="0" hangingPunct="1">
+              <a:lnSpc>
+                <a:spcPct val="90000"/>
+              </a:lnSpc>
+              <a:spcBef>
+                <a:spcPts val="300"/>
+              </a:spcBef>
+              <a:spcAft>
+                <a:spcPts val="150"/>
+              </a:spcAft>
+              <a:buClr>
+                <a:schemeClr val="accent1">
+                  <a:lumMod val="75000"/>
+                </a:schemeClr>
+              </a:buClr>
+              <a:buSzPct val="100000"/>
+              <a:buFont typeface="Arial" panose="020B0604020202020204" pitchFamily="34" charset="0"/>
+              <a:buChar char="•"/>
+              <a:defRPr kumimoji="1" sz="1200" kern="1200">
+                <a:solidFill>
+                  <a:schemeClr val="tx1"/>
+                </a:solidFill>
+                <a:latin typeface="+mn-lt"/>
+                <a:ea typeface="+mn-ea"/>
+                <a:cs typeface="+mn-cs"/>
+              </a:defRPr>
+            </a:lvl7pPr>
+            <a:lvl8pPr marL="1650000" indent="-171450" algn="l" defTabSz="685800" rtl="0" eaLnBrk="1" latinLnBrk="0" hangingPunct="1">
+              <a:lnSpc>
+                <a:spcPct val="90000"/>
+              </a:lnSpc>
+              <a:spcBef>
+                <a:spcPts val="300"/>
+              </a:spcBef>
+              <a:spcAft>
+                <a:spcPts val="150"/>
+              </a:spcAft>
+              <a:buClr>
+                <a:schemeClr val="accent1">
+                  <a:lumMod val="75000"/>
+                </a:schemeClr>
+              </a:buClr>
+              <a:buSzPct val="100000"/>
+              <a:buFont typeface="Arial" panose="020B0604020202020204" pitchFamily="34" charset="0"/>
+              <a:buChar char="•"/>
+              <a:defRPr kumimoji="1" sz="1200" kern="1200">
+                <a:solidFill>
+                  <a:schemeClr val="tx1"/>
+                </a:solidFill>
+                <a:latin typeface="+mn-lt"/>
+                <a:ea typeface="+mn-ea"/>
+                <a:cs typeface="+mn-cs"/>
+              </a:defRPr>
+            </a:lvl8pPr>
+            <a:lvl9pPr marL="1875000" indent="-171450" algn="l" defTabSz="685800" rtl="0" eaLnBrk="1" latinLnBrk="0" hangingPunct="1">
+              <a:lnSpc>
+                <a:spcPct val="90000"/>
+              </a:lnSpc>
+              <a:spcBef>
+                <a:spcPts val="300"/>
+              </a:spcBef>
+              <a:spcAft>
+                <a:spcPts val="150"/>
+              </a:spcAft>
+              <a:buClr>
+                <a:schemeClr val="accent1">
+                  <a:lumMod val="75000"/>
+                </a:schemeClr>
+              </a:buClr>
+              <a:buSzPct val="100000"/>
+              <a:buFont typeface="Arial" panose="020B0604020202020204" pitchFamily="34" charset="0"/>
+              <a:buChar char="•"/>
+              <a:defRPr kumimoji="1" sz="1200" kern="1200">
+                <a:solidFill>
+                  <a:schemeClr val="tx1"/>
+                </a:solidFill>
+                <a:latin typeface="+mn-lt"/>
+                <a:ea typeface="+mn-ea"/>
+                <a:cs typeface="+mn-cs"/>
+              </a:defRPr>
+            </a:lvl9pPr>
+          </a:lstStyle>
+          <a:p>
+            <a:pPr marL="0" indent="0">
+              <a:buClr>
+                <a:srgbClr val="9E3611"/>
+              </a:buClr>
+              <a:buNone/>
+            </a:pPr>
+            <a:r>
+              <a:rPr lang="en-US" sz="2000" dirty="0">
+                <a:ea typeface="游ゴシック Medium"/>
+                <a:cs typeface="Times New Roman"/>
+              </a:rPr>
+              <a:t>Estimate</a:t>
+            </a:r>
+            <a:endParaRPr lang="en-US" sz="2000" b="0" dirty="0">
+              <a:ea typeface="游ゴシック Medium"/>
+              <a:cs typeface="Times New Roman"/>
+            </a:endParaRPr>
+          </a:p>
+          <a:p>
+            <a:pPr>
+              <a:buClr>
+                <a:srgbClr val="9E3611"/>
+              </a:buClr>
+            </a:pPr>
+            <a:endParaRPr lang="en-US" sz="2000" b="0" dirty="0">
+              <a:ea typeface="游ゴシック Medium"/>
+              <a:cs typeface="Times New Roman"/>
+            </a:endParaRPr>
+          </a:p>
+          <a:p>
+            <a:pPr marL="0" indent="0">
+              <a:buClr>
+                <a:srgbClr val="9E3611"/>
+              </a:buClr>
+              <a:buNone/>
+            </a:pPr>
+            <a:endParaRPr lang="en-US" sz="2000" b="0" dirty="0">
+              <a:ea typeface="游ゴシック Medium"/>
+              <a:cs typeface="Times New Roman"/>
+            </a:endParaRPr>
+          </a:p>
+          <a:p>
+            <a:pPr marL="0" indent="0">
+              <a:buClr>
+                <a:srgbClr val="9E3611"/>
+              </a:buClr>
+              <a:buFont typeface="Arial" panose="020B0604020202020204" pitchFamily="34" charset="0"/>
+              <a:buNone/>
+            </a:pPr>
+            <a:endParaRPr lang="en-US" sz="2000" b="0" dirty="0">
+              <a:ea typeface="游ゴシック Medium"/>
+              <a:cs typeface="Times New Roman"/>
+            </a:endParaRPr>
+          </a:p>
+        </p:txBody>
+      </p:sp>
+      <p:sp>
+        <p:nvSpPr>
+          <p:cNvPr id="4101" name="Text Placeholder 1">
+            <a:extLst>
+              <a:ext uri="{FF2B5EF4-FFF2-40B4-BE49-F238E27FC236}">
+                <a16:creationId xmlns:a16="http://schemas.microsoft.com/office/drawing/2014/main" id="{FF28F587-9559-CB5A-CCC4-78A28FE320C5}"/>
+              </a:ext>
+            </a:extLst>
+          </p:cNvPr>
+          <p:cNvSpPr txBox="1">
+            <a:spLocks/>
+          </p:cNvSpPr>
+          <p:nvPr/>
+        </p:nvSpPr>
+        <p:spPr>
+          <a:xfrm>
+            <a:off x="7308304" y="3529993"/>
+            <a:ext cx="634951" cy="431607"/>
+          </a:xfrm>
+          <a:prstGeom prst="rect">
+            <a:avLst/>
+          </a:prstGeom>
+          <a:noFill/>
+        </p:spPr>
+        <p:txBody>
+          <a:bodyPr vert="horz" lIns="91440" tIns="45720" rIns="91440" bIns="45720" rtlCol="0" anchor="t">
+            <a:noAutofit/>
+          </a:bodyPr>
+          <a:lstStyle>
+            <a:lvl1pPr marL="137160" indent="-137160" algn="l" defTabSz="685800" rtl="0" eaLnBrk="1" latinLnBrk="0" hangingPunct="1">
+              <a:lnSpc>
+                <a:spcPct val="90000"/>
+              </a:lnSpc>
+              <a:spcBef>
+                <a:spcPts val="900"/>
+              </a:spcBef>
+              <a:buClr>
+                <a:schemeClr val="accent1">
+                  <a:lumMod val="75000"/>
+                </a:schemeClr>
+              </a:buClr>
+              <a:buSzPct val="100000"/>
+              <a:buFont typeface="Arial" panose="020B0604020202020204" pitchFamily="34" charset="0"/>
+              <a:buChar char="•"/>
+              <a:defRPr kumimoji="1" sz="1500" b="1" kern="1200">
+                <a:solidFill>
+                  <a:schemeClr val="tx1"/>
+                </a:solidFill>
+                <a:latin typeface="游ゴシック Medium" panose="020B0500000000000000" pitchFamily="50" charset="-128"/>
+                <a:ea typeface="游ゴシック Medium" panose="020B0500000000000000" pitchFamily="50" charset="-128"/>
+                <a:cs typeface="+mn-cs"/>
+              </a:defRPr>
+            </a:lvl1pPr>
+            <a:lvl2pPr marL="342900" indent="-137160" algn="l" defTabSz="685800" rtl="0" eaLnBrk="1" latinLnBrk="0" hangingPunct="1">
+              <a:lnSpc>
+                <a:spcPct val="90000"/>
+              </a:lnSpc>
+              <a:spcBef>
+                <a:spcPts val="300"/>
+              </a:spcBef>
+              <a:spcAft>
+                <a:spcPts val="150"/>
+              </a:spcAft>
+              <a:buClr>
+                <a:schemeClr val="accent1">
+                  <a:lumMod val="75000"/>
+                </a:schemeClr>
+              </a:buClr>
+              <a:buSzPct val="100000"/>
+              <a:buFont typeface="Arial" panose="020B0604020202020204" pitchFamily="34" charset="0"/>
+              <a:buChar char="•"/>
+              <a:defRPr kumimoji="1" sz="1350" b="1" kern="1200">
+                <a:solidFill>
+                  <a:schemeClr val="tx1"/>
+                </a:solidFill>
+                <a:latin typeface="游ゴシック Medium" panose="020B0500000000000000" pitchFamily="50" charset="-128"/>
+                <a:ea typeface="游ゴシック Medium" panose="020B0500000000000000" pitchFamily="50" charset="-128"/>
+                <a:cs typeface="+mn-cs"/>
+              </a:defRPr>
+            </a:lvl2pPr>
+            <a:lvl3pPr marL="548640" indent="-137160" algn="l" defTabSz="685800" rtl="0" eaLnBrk="1" latinLnBrk="0" hangingPunct="1">
+              <a:lnSpc>
+                <a:spcPct val="90000"/>
+              </a:lnSpc>
+              <a:spcBef>
+                <a:spcPts val="300"/>
+              </a:spcBef>
+              <a:spcAft>
+                <a:spcPts val="150"/>
+              </a:spcAft>
+              <a:buClr>
+                <a:schemeClr val="accent1">
+                  <a:lumMod val="75000"/>
+                </a:schemeClr>
+              </a:buClr>
+              <a:buSzPct val="100000"/>
+              <a:buFont typeface="Arial" panose="020B0604020202020204" pitchFamily="34" charset="0"/>
+              <a:buChar char="•"/>
+              <a:defRPr kumimoji="1" sz="1200" b="1" kern="1200">
+                <a:solidFill>
+                  <a:schemeClr val="tx1"/>
+                </a:solidFill>
+                <a:latin typeface="游ゴシック Medium" panose="020B0500000000000000" pitchFamily="50" charset="-128"/>
+                <a:ea typeface="游ゴシック Medium" panose="020B0500000000000000" pitchFamily="50" charset="-128"/>
+                <a:cs typeface="+mn-cs"/>
+              </a:defRPr>
+            </a:lvl3pPr>
+            <a:lvl4pPr marL="754380" indent="-137160" algn="l" defTabSz="685800" rtl="0" eaLnBrk="1" latinLnBrk="0" hangingPunct="1">
+              <a:lnSpc>
+                <a:spcPct val="90000"/>
+              </a:lnSpc>
+              <a:spcBef>
+                <a:spcPts val="300"/>
+              </a:spcBef>
+              <a:spcAft>
+                <a:spcPts val="150"/>
+              </a:spcAft>
+              <a:buClr>
+                <a:schemeClr val="accent1">
+                  <a:lumMod val="75000"/>
+                </a:schemeClr>
+              </a:buClr>
+              <a:buSzPct val="100000"/>
+              <a:buFont typeface="Arial" panose="020B0604020202020204" pitchFamily="34" charset="0"/>
+              <a:buChar char="•"/>
+              <a:defRPr kumimoji="1" sz="1200" b="1" kern="1200">
+                <a:solidFill>
+                  <a:schemeClr val="tx1"/>
+                </a:solidFill>
+                <a:latin typeface="游ゴシック Medium" panose="020B0500000000000000" pitchFamily="50" charset="-128"/>
+                <a:ea typeface="游ゴシック Medium" panose="020B0500000000000000" pitchFamily="50" charset="-128"/>
+                <a:cs typeface="+mn-cs"/>
+              </a:defRPr>
+            </a:lvl4pPr>
+            <a:lvl5pPr marL="960120" indent="-137160" algn="l" defTabSz="685800" rtl="0" eaLnBrk="1" latinLnBrk="0" hangingPunct="1">
+              <a:lnSpc>
+                <a:spcPct val="90000"/>
+              </a:lnSpc>
+              <a:spcBef>
+                <a:spcPts val="300"/>
+              </a:spcBef>
+              <a:spcAft>
+                <a:spcPts val="150"/>
+              </a:spcAft>
+              <a:buClr>
+                <a:schemeClr val="accent1">
+                  <a:lumMod val="75000"/>
+                </a:schemeClr>
+              </a:buClr>
+              <a:buSzPct val="100000"/>
+              <a:buFont typeface="Arial" panose="020B0604020202020204" pitchFamily="34" charset="0"/>
+              <a:buChar char="•"/>
+              <a:defRPr kumimoji="1" sz="1200" b="1" kern="1200">
+                <a:solidFill>
+                  <a:schemeClr val="tx1"/>
+                </a:solidFill>
+                <a:latin typeface="游ゴシック Medium" panose="020B0500000000000000" pitchFamily="50" charset="-128"/>
+                <a:ea typeface="游ゴシック Medium" panose="020B0500000000000000" pitchFamily="50" charset="-128"/>
+                <a:cs typeface="+mn-cs"/>
+              </a:defRPr>
+            </a:lvl5pPr>
+            <a:lvl6pPr marL="1200000" indent="-171450" algn="l" defTabSz="685800" rtl="0" eaLnBrk="1" latinLnBrk="0" hangingPunct="1">
+              <a:lnSpc>
+                <a:spcPct val="90000"/>
+              </a:lnSpc>
+              <a:spcBef>
+                <a:spcPts val="300"/>
+              </a:spcBef>
+              <a:spcAft>
+                <a:spcPts val="150"/>
+              </a:spcAft>
+              <a:buClr>
+                <a:schemeClr val="accent1">
+                  <a:lumMod val="75000"/>
+                </a:schemeClr>
+              </a:buClr>
+              <a:buSzPct val="100000"/>
+              <a:buFont typeface="Arial" panose="020B0604020202020204" pitchFamily="34" charset="0"/>
+              <a:buChar char="•"/>
+              <a:defRPr kumimoji="1" sz="1200" kern="1200">
+                <a:solidFill>
+                  <a:schemeClr val="tx1"/>
+                </a:solidFill>
+                <a:latin typeface="+mn-lt"/>
+                <a:ea typeface="+mn-ea"/>
+                <a:cs typeface="+mn-cs"/>
+              </a:defRPr>
+            </a:lvl6pPr>
+            <a:lvl7pPr marL="1425000" indent="-171450" algn="l" defTabSz="685800" rtl="0" eaLnBrk="1" latinLnBrk="0" hangingPunct="1">
+              <a:lnSpc>
+                <a:spcPct val="90000"/>
+              </a:lnSpc>
+              <a:spcBef>
+                <a:spcPts val="300"/>
+              </a:spcBef>
+              <a:spcAft>
+                <a:spcPts val="150"/>
+              </a:spcAft>
+              <a:buClr>
+                <a:schemeClr val="accent1">
+                  <a:lumMod val="75000"/>
+                </a:schemeClr>
+              </a:buClr>
+              <a:buSzPct val="100000"/>
+              <a:buFont typeface="Arial" panose="020B0604020202020204" pitchFamily="34" charset="0"/>
+              <a:buChar char="•"/>
+              <a:defRPr kumimoji="1" sz="1200" kern="1200">
+                <a:solidFill>
+                  <a:schemeClr val="tx1"/>
+                </a:solidFill>
+                <a:latin typeface="+mn-lt"/>
+                <a:ea typeface="+mn-ea"/>
+                <a:cs typeface="+mn-cs"/>
+              </a:defRPr>
+            </a:lvl7pPr>
+            <a:lvl8pPr marL="1650000" indent="-171450" algn="l" defTabSz="685800" rtl="0" eaLnBrk="1" latinLnBrk="0" hangingPunct="1">
+              <a:lnSpc>
+                <a:spcPct val="90000"/>
+              </a:lnSpc>
+              <a:spcBef>
+                <a:spcPts val="300"/>
+              </a:spcBef>
+              <a:spcAft>
+                <a:spcPts val="150"/>
+              </a:spcAft>
+              <a:buClr>
+                <a:schemeClr val="accent1">
+                  <a:lumMod val="75000"/>
+                </a:schemeClr>
+              </a:buClr>
+              <a:buSzPct val="100000"/>
+              <a:buFont typeface="Arial" panose="020B0604020202020204" pitchFamily="34" charset="0"/>
+              <a:buChar char="•"/>
+              <a:defRPr kumimoji="1" sz="1200" kern="1200">
+                <a:solidFill>
+                  <a:schemeClr val="tx1"/>
+                </a:solidFill>
+                <a:latin typeface="+mn-lt"/>
+                <a:ea typeface="+mn-ea"/>
+                <a:cs typeface="+mn-cs"/>
+              </a:defRPr>
+            </a:lvl8pPr>
+            <a:lvl9pPr marL="1875000" indent="-171450" algn="l" defTabSz="685800" rtl="0" eaLnBrk="1" latinLnBrk="0" hangingPunct="1">
+              <a:lnSpc>
+                <a:spcPct val="90000"/>
+              </a:lnSpc>
+              <a:spcBef>
+                <a:spcPts val="300"/>
+              </a:spcBef>
+              <a:spcAft>
+                <a:spcPts val="150"/>
+              </a:spcAft>
+              <a:buClr>
+                <a:schemeClr val="accent1">
+                  <a:lumMod val="75000"/>
+                </a:schemeClr>
+              </a:buClr>
+              <a:buSzPct val="100000"/>
+              <a:buFont typeface="Arial" panose="020B0604020202020204" pitchFamily="34" charset="0"/>
+              <a:buChar char="•"/>
+              <a:defRPr kumimoji="1" sz="1200" kern="1200">
+                <a:solidFill>
+                  <a:schemeClr val="tx1"/>
+                </a:solidFill>
+                <a:latin typeface="+mn-lt"/>
+                <a:ea typeface="+mn-ea"/>
+                <a:cs typeface="+mn-cs"/>
+              </a:defRPr>
+            </a:lvl9pPr>
+          </a:lstStyle>
+          <a:p>
+            <a:pPr marL="0" indent="0">
+              <a:buClr>
+                <a:srgbClr val="9E3611"/>
+              </a:buClr>
+              <a:buNone/>
+            </a:pPr>
+            <a:r>
+              <a:rPr lang="en-US" sz="2000" dirty="0">
+                <a:ea typeface="游ゴシック Medium"/>
+                <a:cs typeface="Times New Roman"/>
+              </a:rPr>
+              <a:t>LC</a:t>
+            </a:r>
+            <a:endParaRPr lang="en-US" sz="2000" b="0" dirty="0">
+              <a:ea typeface="游ゴシック Medium"/>
+              <a:cs typeface="Times New Roman"/>
+            </a:endParaRPr>
+          </a:p>
+          <a:p>
+            <a:pPr>
+              <a:buClr>
+                <a:srgbClr val="9E3611"/>
+              </a:buClr>
+            </a:pPr>
+            <a:endParaRPr lang="en-US" sz="2000" b="0" dirty="0">
+              <a:ea typeface="游ゴシック Medium"/>
+              <a:cs typeface="Times New Roman"/>
+            </a:endParaRPr>
+          </a:p>
+          <a:p>
+            <a:pPr marL="0" indent="0">
+              <a:buClr>
+                <a:srgbClr val="9E3611"/>
+              </a:buClr>
+              <a:buNone/>
+            </a:pPr>
+            <a:endParaRPr lang="en-US" sz="2000" b="0" dirty="0">
+              <a:ea typeface="游ゴシック Medium"/>
+              <a:cs typeface="Times New Roman"/>
+            </a:endParaRPr>
+          </a:p>
+          <a:p>
+            <a:pPr marL="0" indent="0">
+              <a:buClr>
+                <a:srgbClr val="9E3611"/>
+              </a:buClr>
+              <a:buFont typeface="Arial" panose="020B0604020202020204" pitchFamily="34" charset="0"/>
+              <a:buNone/>
+            </a:pPr>
+            <a:endParaRPr lang="en-US" sz="2000" b="0" dirty="0">
+              <a:ea typeface="游ゴシック Medium"/>
+              <a:cs typeface="Times New Roman"/>
+            </a:endParaRPr>
+          </a:p>
+        </p:txBody>
+      </p:sp>
+      <p:sp>
+        <p:nvSpPr>
+          <p:cNvPr id="4103" name="Flussdiagramm: Verbinder 4102">
+            <a:extLst>
+              <a:ext uri="{FF2B5EF4-FFF2-40B4-BE49-F238E27FC236}">
+                <a16:creationId xmlns:a16="http://schemas.microsoft.com/office/drawing/2014/main" id="{727C016B-3BCF-C475-13E9-978C91B43891}"/>
+              </a:ext>
+            </a:extLst>
+          </p:cNvPr>
+          <p:cNvSpPr/>
+          <p:nvPr/>
+        </p:nvSpPr>
+        <p:spPr>
+          <a:xfrm>
+            <a:off x="4247964" y="1877161"/>
+            <a:ext cx="124996" cy="121877"/>
+          </a:xfrm>
+          <a:prstGeom prst="flowChartConnector">
+            <a:avLst/>
+          </a:prstGeom>
+          <a:ln>
+            <a:noFill/>
+          </a:ln>
+        </p:spPr>
+        <p:style>
+          <a:lnRef idx="2">
+            <a:schemeClr val="accent1">
+              <a:shade val="15000"/>
+            </a:schemeClr>
+          </a:lnRef>
+          <a:fillRef idx="1">
+            <a:schemeClr val="accent1"/>
+          </a:fillRef>
+          <a:effectRef idx="0">
+            <a:schemeClr val="accent1"/>
+          </a:effectRef>
+          <a:fontRef idx="minor">
+            <a:schemeClr val="lt1"/>
+          </a:fontRef>
+        </p:style>
+        <p:txBody>
+          <a:bodyPr rtlCol="0" anchor="ctr"/>
+          <a:lstStyle/>
+          <a:p>
+            <a:pPr algn="ctr"/>
+            <a:endParaRPr lang="de-DE"/>
+          </a:p>
+        </p:txBody>
+      </p:sp>
+      <p:sp>
+        <p:nvSpPr>
+          <p:cNvPr id="4104" name="Flussdiagramm: Verbinder 4103">
+            <a:extLst>
+              <a:ext uri="{FF2B5EF4-FFF2-40B4-BE49-F238E27FC236}">
+                <a16:creationId xmlns:a16="http://schemas.microsoft.com/office/drawing/2014/main" id="{78C1B40A-801F-93B4-B556-CC6DE4D6CC5B}"/>
+              </a:ext>
+            </a:extLst>
+          </p:cNvPr>
+          <p:cNvSpPr/>
+          <p:nvPr/>
+        </p:nvSpPr>
+        <p:spPr>
+          <a:xfrm>
+            <a:off x="4112940" y="1569037"/>
+            <a:ext cx="124996" cy="121877"/>
+          </a:xfrm>
+          <a:prstGeom prst="flowChartConnector">
+            <a:avLst/>
+          </a:prstGeom>
+          <a:ln>
+            <a:noFill/>
+          </a:ln>
+        </p:spPr>
+        <p:style>
+          <a:lnRef idx="2">
+            <a:schemeClr val="accent1">
+              <a:shade val="15000"/>
+            </a:schemeClr>
+          </a:lnRef>
+          <a:fillRef idx="1">
+            <a:schemeClr val="accent1"/>
+          </a:fillRef>
+          <a:effectRef idx="0">
+            <a:schemeClr val="accent1"/>
+          </a:effectRef>
+          <a:fontRef idx="minor">
+            <a:schemeClr val="lt1"/>
+          </a:fontRef>
+        </p:style>
+        <p:txBody>
+          <a:bodyPr rtlCol="0" anchor="ctr"/>
+          <a:lstStyle/>
+          <a:p>
+            <a:pPr algn="ctr"/>
+            <a:endParaRPr lang="de-DE"/>
+          </a:p>
+        </p:txBody>
+      </p:sp>
+      <p:sp>
+        <p:nvSpPr>
+          <p:cNvPr id="4105" name="Flussdiagramm: Verbinder 4104">
+            <a:extLst>
+              <a:ext uri="{FF2B5EF4-FFF2-40B4-BE49-F238E27FC236}">
+                <a16:creationId xmlns:a16="http://schemas.microsoft.com/office/drawing/2014/main" id="{4DD7AFCB-6C9F-8F31-EE08-7E924CB9CDF2}"/>
+              </a:ext>
+            </a:extLst>
+          </p:cNvPr>
+          <p:cNvSpPr/>
+          <p:nvPr/>
+        </p:nvSpPr>
+        <p:spPr>
+          <a:xfrm>
+            <a:off x="7395313" y="1797245"/>
+            <a:ext cx="124996" cy="121877"/>
+          </a:xfrm>
+          <a:prstGeom prst="flowChartConnector">
+            <a:avLst/>
+          </a:prstGeom>
+          <a:ln>
+            <a:noFill/>
+          </a:ln>
+        </p:spPr>
+        <p:style>
+          <a:lnRef idx="2">
+            <a:schemeClr val="accent1">
+              <a:shade val="15000"/>
+            </a:schemeClr>
+          </a:lnRef>
+          <a:fillRef idx="1">
+            <a:schemeClr val="accent1"/>
+          </a:fillRef>
+          <a:effectRef idx="0">
+            <a:schemeClr val="accent1"/>
+          </a:effectRef>
+          <a:fontRef idx="minor">
+            <a:schemeClr val="lt1"/>
+          </a:fontRef>
+        </p:style>
+        <p:txBody>
+          <a:bodyPr rtlCol="0" anchor="ctr"/>
+          <a:lstStyle/>
+          <a:p>
+            <a:pPr algn="ctr"/>
+            <a:endParaRPr lang="de-DE"/>
+          </a:p>
+        </p:txBody>
+      </p:sp>
+      <p:sp>
+        <p:nvSpPr>
+          <p:cNvPr id="4106" name="Text Placeholder 1">
+            <a:extLst>
+              <a:ext uri="{FF2B5EF4-FFF2-40B4-BE49-F238E27FC236}">
+                <a16:creationId xmlns:a16="http://schemas.microsoft.com/office/drawing/2014/main" id="{A5BD82B6-0171-ECD2-9FDA-2B378FA49B26}"/>
+              </a:ext>
+            </a:extLst>
+          </p:cNvPr>
+          <p:cNvSpPr txBox="1">
+            <a:spLocks/>
+          </p:cNvSpPr>
+          <p:nvPr/>
+        </p:nvSpPr>
+        <p:spPr>
+          <a:xfrm>
+            <a:off x="180924" y="699983"/>
+            <a:ext cx="8640960" cy="3808060"/>
+          </a:xfrm>
+          <a:prstGeom prst="rect">
+            <a:avLst/>
+          </a:prstGeom>
+          <a:noFill/>
+        </p:spPr>
+        <p:txBody>
+          <a:bodyPr vert="horz" lIns="91440" tIns="45720" rIns="91440" bIns="45720" rtlCol="0" anchor="t">
+            <a:noAutofit/>
+          </a:bodyPr>
+          <a:lstStyle>
+            <a:lvl1pPr marL="137160" indent="-137160" algn="l" defTabSz="685800" rtl="0" eaLnBrk="1" latinLnBrk="0" hangingPunct="1">
+              <a:lnSpc>
+                <a:spcPct val="90000"/>
+              </a:lnSpc>
+              <a:spcBef>
+                <a:spcPts val="900"/>
+              </a:spcBef>
+              <a:buClr>
+                <a:schemeClr val="accent1">
+                  <a:lumMod val="75000"/>
+                </a:schemeClr>
+              </a:buClr>
+              <a:buSzPct val="100000"/>
+              <a:buFont typeface="Arial" panose="020B0604020202020204" pitchFamily="34" charset="0"/>
+              <a:buChar char="•"/>
+              <a:defRPr kumimoji="1" sz="1500" b="1" kern="1200">
+                <a:solidFill>
+                  <a:schemeClr val="tx1"/>
+                </a:solidFill>
+                <a:latin typeface="游ゴシック Medium" panose="020B0500000000000000" pitchFamily="50" charset="-128"/>
+                <a:ea typeface="游ゴシック Medium" panose="020B0500000000000000" pitchFamily="50" charset="-128"/>
+                <a:cs typeface="+mn-cs"/>
+              </a:defRPr>
+            </a:lvl1pPr>
+            <a:lvl2pPr marL="342900" indent="-137160" algn="l" defTabSz="685800" rtl="0" eaLnBrk="1" latinLnBrk="0" hangingPunct="1">
+              <a:lnSpc>
+                <a:spcPct val="90000"/>
+              </a:lnSpc>
+              <a:spcBef>
+                <a:spcPts val="300"/>
+              </a:spcBef>
+              <a:spcAft>
+                <a:spcPts val="150"/>
+              </a:spcAft>
+              <a:buClr>
+                <a:schemeClr val="accent1">
+                  <a:lumMod val="75000"/>
+                </a:schemeClr>
+              </a:buClr>
+              <a:buSzPct val="100000"/>
+              <a:buFont typeface="Arial" panose="020B0604020202020204" pitchFamily="34" charset="0"/>
+              <a:buChar char="•"/>
+              <a:defRPr kumimoji="1" sz="1350" b="1" kern="1200">
+                <a:solidFill>
+                  <a:schemeClr val="tx1"/>
+                </a:solidFill>
+                <a:latin typeface="游ゴシック Medium" panose="020B0500000000000000" pitchFamily="50" charset="-128"/>
+                <a:ea typeface="游ゴシック Medium" panose="020B0500000000000000" pitchFamily="50" charset="-128"/>
+                <a:cs typeface="+mn-cs"/>
+              </a:defRPr>
+            </a:lvl2pPr>
+            <a:lvl3pPr marL="548640" indent="-137160" algn="l" defTabSz="685800" rtl="0" eaLnBrk="1" latinLnBrk="0" hangingPunct="1">
+              <a:lnSpc>
+                <a:spcPct val="90000"/>
+              </a:lnSpc>
+              <a:spcBef>
+                <a:spcPts val="300"/>
+              </a:spcBef>
+              <a:spcAft>
+                <a:spcPts val="150"/>
+              </a:spcAft>
+              <a:buClr>
+                <a:schemeClr val="accent1">
+                  <a:lumMod val="75000"/>
+                </a:schemeClr>
+              </a:buClr>
+              <a:buSzPct val="100000"/>
+              <a:buFont typeface="Arial" panose="020B0604020202020204" pitchFamily="34" charset="0"/>
+              <a:buChar char="•"/>
+              <a:defRPr kumimoji="1" sz="1200" b="1" kern="1200">
+                <a:solidFill>
+                  <a:schemeClr val="tx1"/>
+                </a:solidFill>
+                <a:latin typeface="游ゴシック Medium" panose="020B0500000000000000" pitchFamily="50" charset="-128"/>
+                <a:ea typeface="游ゴシック Medium" panose="020B0500000000000000" pitchFamily="50" charset="-128"/>
+                <a:cs typeface="+mn-cs"/>
+              </a:defRPr>
+            </a:lvl3pPr>
+            <a:lvl4pPr marL="754380" indent="-137160" algn="l" defTabSz="685800" rtl="0" eaLnBrk="1" latinLnBrk="0" hangingPunct="1">
+              <a:lnSpc>
+                <a:spcPct val="90000"/>
+              </a:lnSpc>
+              <a:spcBef>
+                <a:spcPts val="300"/>
+              </a:spcBef>
+              <a:spcAft>
+                <a:spcPts val="150"/>
+              </a:spcAft>
+              <a:buClr>
+                <a:schemeClr val="accent1">
+                  <a:lumMod val="75000"/>
+                </a:schemeClr>
+              </a:buClr>
+              <a:buSzPct val="100000"/>
+              <a:buFont typeface="Arial" panose="020B0604020202020204" pitchFamily="34" charset="0"/>
+              <a:buChar char="•"/>
+              <a:defRPr kumimoji="1" sz="1200" b="1" kern="1200">
+                <a:solidFill>
+                  <a:schemeClr val="tx1"/>
+                </a:solidFill>
+                <a:latin typeface="游ゴシック Medium" panose="020B0500000000000000" pitchFamily="50" charset="-128"/>
+                <a:ea typeface="游ゴシック Medium" panose="020B0500000000000000" pitchFamily="50" charset="-128"/>
+                <a:cs typeface="+mn-cs"/>
+              </a:defRPr>
+            </a:lvl4pPr>
+            <a:lvl5pPr marL="960120" indent="-137160" algn="l" defTabSz="685800" rtl="0" eaLnBrk="1" latinLnBrk="0" hangingPunct="1">
+              <a:lnSpc>
+                <a:spcPct val="90000"/>
+              </a:lnSpc>
+              <a:spcBef>
+                <a:spcPts val="300"/>
+              </a:spcBef>
+              <a:spcAft>
+                <a:spcPts val="150"/>
+              </a:spcAft>
+              <a:buClr>
+                <a:schemeClr val="accent1">
+                  <a:lumMod val="75000"/>
+                </a:schemeClr>
+              </a:buClr>
+              <a:buSzPct val="100000"/>
+              <a:buFont typeface="Arial" panose="020B0604020202020204" pitchFamily="34" charset="0"/>
+              <a:buChar char="•"/>
+              <a:defRPr kumimoji="1" sz="1200" b="1" kern="1200">
+                <a:solidFill>
+                  <a:schemeClr val="tx1"/>
+                </a:solidFill>
+                <a:latin typeface="游ゴシック Medium" panose="020B0500000000000000" pitchFamily="50" charset="-128"/>
+                <a:ea typeface="游ゴシック Medium" panose="020B0500000000000000" pitchFamily="50" charset="-128"/>
+                <a:cs typeface="+mn-cs"/>
+              </a:defRPr>
+            </a:lvl5pPr>
+            <a:lvl6pPr marL="1200000" indent="-171450" algn="l" defTabSz="685800" rtl="0" eaLnBrk="1" latinLnBrk="0" hangingPunct="1">
+              <a:lnSpc>
+                <a:spcPct val="90000"/>
+              </a:lnSpc>
+              <a:spcBef>
+                <a:spcPts val="300"/>
+              </a:spcBef>
+              <a:spcAft>
+                <a:spcPts val="150"/>
+              </a:spcAft>
+              <a:buClr>
+                <a:schemeClr val="accent1">
+                  <a:lumMod val="75000"/>
+                </a:schemeClr>
+              </a:buClr>
+              <a:buSzPct val="100000"/>
+              <a:buFont typeface="Arial" panose="020B0604020202020204" pitchFamily="34" charset="0"/>
+              <a:buChar char="•"/>
+              <a:defRPr kumimoji="1" sz="1200" kern="1200">
+                <a:solidFill>
+                  <a:schemeClr val="tx1"/>
+                </a:solidFill>
+                <a:latin typeface="+mn-lt"/>
+                <a:ea typeface="+mn-ea"/>
+                <a:cs typeface="+mn-cs"/>
+              </a:defRPr>
+            </a:lvl6pPr>
+            <a:lvl7pPr marL="1425000" indent="-171450" algn="l" defTabSz="685800" rtl="0" eaLnBrk="1" latinLnBrk="0" hangingPunct="1">
+              <a:lnSpc>
+                <a:spcPct val="90000"/>
+              </a:lnSpc>
+              <a:spcBef>
+                <a:spcPts val="300"/>
+              </a:spcBef>
+              <a:spcAft>
+                <a:spcPts val="150"/>
+              </a:spcAft>
+              <a:buClr>
+                <a:schemeClr val="accent1">
+                  <a:lumMod val="75000"/>
+                </a:schemeClr>
+              </a:buClr>
+              <a:buSzPct val="100000"/>
+              <a:buFont typeface="Arial" panose="020B0604020202020204" pitchFamily="34" charset="0"/>
+              <a:buChar char="•"/>
+              <a:defRPr kumimoji="1" sz="1200" kern="1200">
+                <a:solidFill>
+                  <a:schemeClr val="tx1"/>
+                </a:solidFill>
+                <a:latin typeface="+mn-lt"/>
+                <a:ea typeface="+mn-ea"/>
+                <a:cs typeface="+mn-cs"/>
+              </a:defRPr>
+            </a:lvl7pPr>
+            <a:lvl8pPr marL="1650000" indent="-171450" algn="l" defTabSz="685800" rtl="0" eaLnBrk="1" latinLnBrk="0" hangingPunct="1">
+              <a:lnSpc>
+                <a:spcPct val="90000"/>
+              </a:lnSpc>
+              <a:spcBef>
+                <a:spcPts val="300"/>
+              </a:spcBef>
+              <a:spcAft>
+                <a:spcPts val="150"/>
+              </a:spcAft>
+              <a:buClr>
+                <a:schemeClr val="accent1">
+                  <a:lumMod val="75000"/>
+                </a:schemeClr>
+              </a:buClr>
+              <a:buSzPct val="100000"/>
+              <a:buFont typeface="Arial" panose="020B0604020202020204" pitchFamily="34" charset="0"/>
+              <a:buChar char="•"/>
+              <a:defRPr kumimoji="1" sz="1200" kern="1200">
+                <a:solidFill>
+                  <a:schemeClr val="tx1"/>
+                </a:solidFill>
+                <a:latin typeface="+mn-lt"/>
+                <a:ea typeface="+mn-ea"/>
+                <a:cs typeface="+mn-cs"/>
+              </a:defRPr>
+            </a:lvl8pPr>
+            <a:lvl9pPr marL="1875000" indent="-171450" algn="l" defTabSz="685800" rtl="0" eaLnBrk="1" latinLnBrk="0" hangingPunct="1">
+              <a:lnSpc>
+                <a:spcPct val="90000"/>
+              </a:lnSpc>
+              <a:spcBef>
+                <a:spcPts val="300"/>
+              </a:spcBef>
+              <a:spcAft>
+                <a:spcPts val="150"/>
+              </a:spcAft>
+              <a:buClr>
+                <a:schemeClr val="accent1">
+                  <a:lumMod val="75000"/>
+                </a:schemeClr>
+              </a:buClr>
+              <a:buSzPct val="100000"/>
+              <a:buFont typeface="Arial" panose="020B0604020202020204" pitchFamily="34" charset="0"/>
+              <a:buChar char="•"/>
+              <a:defRPr kumimoji="1" sz="1200" kern="1200">
+                <a:solidFill>
+                  <a:schemeClr val="tx1"/>
+                </a:solidFill>
+                <a:latin typeface="+mn-lt"/>
+                <a:ea typeface="+mn-ea"/>
+                <a:cs typeface="+mn-cs"/>
+              </a:defRPr>
+            </a:lvl9pPr>
+          </a:lstStyle>
+          <a:p>
+            <a:pPr marL="0" indent="0">
+              <a:buClr>
+                <a:srgbClr val="9E3611"/>
+              </a:buClr>
+              <a:buNone/>
+            </a:pPr>
+            <a:r>
+              <a:rPr lang="en-US" sz="2000" dirty="0">
+                <a:ea typeface="游ゴシック Medium"/>
+                <a:cs typeface="Times New Roman"/>
+              </a:rPr>
+              <a:t>Loop Closure (LC)</a:t>
+            </a:r>
+          </a:p>
+          <a:p>
+            <a:pPr marL="0" indent="0">
+              <a:buClr>
+                <a:srgbClr val="9E3611"/>
+              </a:buClr>
+              <a:buNone/>
+            </a:pPr>
+            <a:r>
+              <a:rPr lang="en-US" sz="1800" b="0" dirty="0">
+                <a:ea typeface="游ゴシック Medium"/>
+                <a:cs typeface="Times New Roman"/>
+              </a:rPr>
+              <a:t>Recognize already visited areas</a:t>
+            </a:r>
+          </a:p>
+          <a:p>
+            <a:pPr>
+              <a:buClr>
+                <a:srgbClr val="9E3611"/>
+              </a:buClr>
+            </a:pPr>
+            <a:endParaRPr lang="en-US" sz="2000" b="0" dirty="0">
+              <a:ea typeface="游ゴシック Medium"/>
+              <a:cs typeface="Times New Roman"/>
+            </a:endParaRPr>
+          </a:p>
+          <a:p>
+            <a:pPr>
+              <a:buClr>
+                <a:srgbClr val="9E3611"/>
+              </a:buClr>
+            </a:pPr>
+            <a:endParaRPr lang="en-US" sz="2000" b="0" dirty="0">
+              <a:ea typeface="游ゴシック Medium"/>
+              <a:cs typeface="Times New Roman"/>
+            </a:endParaRPr>
+          </a:p>
+          <a:p>
+            <a:pPr marL="0" indent="0">
+              <a:buClr>
+                <a:srgbClr val="9E3611"/>
+              </a:buClr>
+              <a:buNone/>
+            </a:pPr>
+            <a:endParaRPr lang="en-US" sz="2000" b="0" dirty="0">
+              <a:ea typeface="游ゴシック Medium"/>
+              <a:cs typeface="Times New Roman"/>
+            </a:endParaRPr>
+          </a:p>
+          <a:p>
+            <a:pPr marL="0" indent="0">
+              <a:buClr>
+                <a:srgbClr val="9E3611"/>
+              </a:buClr>
+              <a:buFont typeface="Arial" panose="020B0604020202020204" pitchFamily="34" charset="0"/>
+              <a:buNone/>
+            </a:pPr>
+            <a:endParaRPr lang="en-US" sz="2000" b="0" dirty="0">
+              <a:ea typeface="游ゴシック Medium"/>
+              <a:cs typeface="Times New Roman"/>
+            </a:endParaRPr>
+          </a:p>
+        </p:txBody>
+      </p:sp>
+      <p:sp>
+        <p:nvSpPr>
+          <p:cNvPr id="4107" name="TextBox 61">
+            <a:extLst>
+              <a:ext uri="{FF2B5EF4-FFF2-40B4-BE49-F238E27FC236}">
+                <a16:creationId xmlns:a16="http://schemas.microsoft.com/office/drawing/2014/main" id="{DABD6FC2-9AF7-E9A0-8DEE-1341E5C26A37}"/>
+              </a:ext>
+            </a:extLst>
+          </p:cNvPr>
+          <p:cNvSpPr txBox="1"/>
+          <p:nvPr/>
+        </p:nvSpPr>
+        <p:spPr>
+          <a:xfrm>
+            <a:off x="5517011" y="2611223"/>
+            <a:ext cx="1056700" cy="400110"/>
+          </a:xfrm>
+          <a:prstGeom prst="rect">
+            <a:avLst/>
+          </a:prstGeom>
+          <a:noFill/>
+        </p:spPr>
+        <p:txBody>
+          <a:bodyPr wrap="none" rtlCol="0">
+            <a:spAutoFit/>
+          </a:bodyPr>
+          <a:lstStyle/>
+          <a:p>
+            <a:r>
+              <a:rPr lang="en-US" sz="2000" dirty="0">
+                <a:latin typeface="游ゴシック Medium" panose="020B0500000000000000" pitchFamily="50" charset="-128"/>
+              </a:rPr>
+              <a:t>Correct</a:t>
+            </a:r>
+          </a:p>
+        </p:txBody>
+      </p:sp>
+    </p:spTree>
+    <p:extLst>
+      <p:ext uri="{BB962C8B-B14F-4D97-AF65-F5344CB8AC3E}">
+        <p14:creationId xmlns:p14="http://schemas.microsoft.com/office/powerpoint/2010/main" val="1820236222"/>
+      </p:ext>
+    </p:extLst>
+  </p:cSld>
+  <p:clrMapOvr>
+    <a:masterClrMapping/>
+  </p:clrMapOvr>
+</p:sld>
+</file>
+
+<file path=ppt/slides/slide12.xml><?xml version="1.0" encoding="utf-8"?>
 <p:sld xmlns:a="http://schemas.openxmlformats.org/drawingml/2006/main" xmlns:r="http://schemas.openxmlformats.org/officeDocument/2006/relationships" xmlns:p="http://schemas.openxmlformats.org/presentationml/2006/main">
   <p:cSld>
     <p:spTree>
@@ -3032,7 +7093,7 @@
           <a:p>
             <a:fld id="{7475F232-FFFE-5E6C-5554-2F165DAD28C0}" type="slidenum">
               <a:rPr lang="en-JP" smtClean="0"/>
-              <a:t>11</a:t>
+              <a:t>12</a:t>
             </a:fld>
             <a:endParaRPr lang="en-JP" dirty="0"/>
           </a:p>
@@ -3371,7 +7432,7 @@
                 <a:ea typeface="游ゴシック Medium"/>
                 <a:cs typeface="Times New Roman"/>
               </a:rPr>
-              <a:t>Recognize already visited scan areas by comparing FVs found by DL model</a:t>
+              <a:t>Recognize already visited scan areas by comparing FVs of frames</a:t>
             </a:r>
           </a:p>
           <a:p>
@@ -3438,7 +7499,7 @@
           <p:nvPr/>
         </p:nvPicPr>
         <p:blipFill>
-          <a:blip r:embed="rId2" cstate="print">
+          <a:blip r:embed="rId3" cstate="print">
             <a:extLst>
               <a:ext uri="{28A0092B-C50C-407E-A947-70E740481C1C}">
                 <a14:useLocalDpi xmlns:a14="http://schemas.microsoft.com/office/drawing/2010/main" val="0"/>
@@ -6291,7 +10352,7 @@
           <p:nvPr/>
         </p:nvPicPr>
         <p:blipFill>
-          <a:blip r:embed="rId2" cstate="print">
+          <a:blip r:embed="rId3" cstate="print">
             <a:extLst>
               <a:ext uri="{28A0092B-C50C-407E-A947-70E740481C1C}">
                 <a14:useLocalDpi xmlns:a14="http://schemas.microsoft.com/office/drawing/2010/main" val="0"/>
@@ -9048,7 +13109,7 @@
           <p:nvPr/>
         </p:nvPicPr>
         <p:blipFill>
-          <a:blip r:embed="rId3">
+          <a:blip r:embed="rId4">
             <a:extLst>
               <a:ext uri="{28A0092B-C50C-407E-A947-70E740481C1C}">
                 <a14:useLocalDpi xmlns:a14="http://schemas.microsoft.com/office/drawing/2010/main" val="0"/>
@@ -9084,7 +13145,7 @@
           <p:nvPr/>
         </p:nvPicPr>
         <p:blipFill>
-          <a:blip r:embed="rId3">
+          <a:blip r:embed="rId4">
             <a:extLst>
               <a:ext uri="{28A0092B-C50C-407E-A947-70E740481C1C}">
                 <a14:useLocalDpi xmlns:a14="http://schemas.microsoft.com/office/drawing/2010/main" val="0"/>
@@ -9483,7 +13544,7 @@
           <p:nvPr/>
         </p:nvPicPr>
         <p:blipFill>
-          <a:blip r:embed="rId3">
+          <a:blip r:embed="rId4">
             <a:extLst>
               <a:ext uri="{28A0092B-C50C-407E-A947-70E740481C1C}">
                 <a14:useLocalDpi xmlns:a14="http://schemas.microsoft.com/office/drawing/2010/main" val="0"/>
@@ -12487,7 +16548,7 @@
         <p:spPr>
           <a:xfrm>
             <a:off x="322116" y="4417248"/>
-            <a:ext cx="6742551" cy="400110"/>
+            <a:ext cx="7106433" cy="707886"/>
           </a:xfrm>
           <a:prstGeom prst="rect">
             <a:avLst/>
@@ -12513,7 +16574,24 @@
               <a:rPr lang="en-US" sz="2000" dirty="0">
                 <a:latin typeface="游ゴシック Medium" panose="020B0500000000000000" pitchFamily="50" charset="-128"/>
               </a:rPr>
-              <a:t>Create new edges for pairs of frames exhibiting a LC</a:t>
+              <a:t>Add new edges between pairs of frames exhibiting a LC</a:t>
+            </a:r>
+          </a:p>
+          <a:p>
+            <a:r>
+              <a:rPr lang="en-US" sz="2000" dirty="0">
+                <a:solidFill>
+                  <a:schemeClr val="accent1"/>
+                </a:solidFill>
+                <a:latin typeface="游ゴシック Medium" panose="020B0500000000000000" pitchFamily="50" charset="-128"/>
+              </a:rPr>
+              <a:t>➔ </a:t>
+            </a:r>
+            <a:r>
+              <a:rPr lang="en-US" sz="2000" dirty="0">
+                <a:latin typeface="游ゴシック Medium" panose="020B0500000000000000" pitchFamily="50" charset="-128"/>
+              </a:rPr>
+              <a:t>Correct graph</a:t>
             </a:r>
           </a:p>
         </p:txBody>
@@ -13532,7 +17610,7 @@
 </p:sld>
 </file>
 
-<file path=ppt/slides/slide12.xml><?xml version="1.0" encoding="utf-8"?>
+<file path=ppt/slides/slide13.xml><?xml version="1.0" encoding="utf-8"?>
 <p:sld xmlns:a="http://schemas.openxmlformats.org/drawingml/2006/main" xmlns:r="http://schemas.openxmlformats.org/officeDocument/2006/relationships" xmlns:p="http://schemas.openxmlformats.org/presentationml/2006/main">
   <p:cSld>
     <p:spTree>
@@ -13569,7 +17647,7 @@
         </p:nvSpPr>
         <p:spPr>
           <a:xfrm rot="16200000">
-            <a:off x="6167078" y="2201520"/>
+            <a:off x="6616254" y="1966292"/>
             <a:ext cx="1289512" cy="330308"/>
           </a:xfrm>
           <a:prstGeom prst="blockArc">
@@ -13626,7 +17704,7 @@
         </p:nvSpPr>
         <p:spPr>
           <a:xfrm rot="5977851">
-            <a:off x="6664063" y="3007857"/>
+            <a:off x="7113239" y="2772629"/>
             <a:ext cx="1289512" cy="330308"/>
           </a:xfrm>
           <a:prstGeom prst="blockArc">
@@ -13697,7 +17775,7 @@
         </p:blipFill>
         <p:spPr>
           <a:xfrm>
-            <a:off x="6188720" y="1527335"/>
+            <a:off x="6637896" y="1292107"/>
             <a:ext cx="1690432" cy="2485929"/>
           </a:xfrm>
           <a:prstGeom prst="rect">
@@ -13728,7 +17806,7 @@
           <a:p>
             <a:fld id="{7475F232-FFFE-5E6C-5554-2F165DAD28C0}" type="slidenum">
               <a:rPr lang="en-JP" smtClean="0"/>
-              <a:t>12</a:t>
+              <a:t>13</a:t>
             </a:fld>
             <a:endParaRPr lang="en-JP" dirty="0"/>
           </a:p>
@@ -13838,8 +17916,8 @@
         </p:nvSpPr>
         <p:spPr>
           <a:xfrm>
-            <a:off x="467544" y="4119549"/>
-            <a:ext cx="2155313" cy="429556"/>
+            <a:off x="574086" y="3929727"/>
+            <a:ext cx="2359136" cy="363658"/>
           </a:xfrm>
           <a:prstGeom prst="rect">
             <a:avLst/>
@@ -14151,7 +18229,7 @@
         </p:blipFill>
         <p:spPr bwMode="auto">
           <a:xfrm rot="17180279">
-            <a:off x="27958" y="2114653"/>
+            <a:off x="488554" y="1979439"/>
             <a:ext cx="2271720" cy="1095632"/>
           </a:xfrm>
           <a:prstGeom prst="rect">
@@ -14185,7 +18263,7 @@
         </p:nvSpPr>
         <p:spPr>
           <a:xfrm>
-            <a:off x="1470731" y="3548867"/>
+            <a:off x="1931327" y="3413653"/>
             <a:ext cx="538303" cy="288612"/>
           </a:xfrm>
           <a:prstGeom prst="rect">
@@ -14480,7 +18558,7 @@
         </p:nvSpPr>
         <p:spPr>
           <a:xfrm>
-            <a:off x="1775531" y="2302428"/>
+            <a:off x="2236127" y="2167214"/>
             <a:ext cx="360040" cy="288612"/>
           </a:xfrm>
           <a:prstGeom prst="rect">
@@ -14775,7 +18853,7 @@
         </p:nvSpPr>
         <p:spPr>
           <a:xfrm>
-            <a:off x="534627" y="1453501"/>
+            <a:off x="995223" y="1318287"/>
             <a:ext cx="360040" cy="288612"/>
           </a:xfrm>
           <a:prstGeom prst="rect">
@@ -15070,7 +19148,7 @@
         </p:nvSpPr>
         <p:spPr>
           <a:xfrm>
-            <a:off x="318602" y="2806484"/>
+            <a:off x="779198" y="2671270"/>
             <a:ext cx="360040" cy="288612"/>
           </a:xfrm>
           <a:prstGeom prst="rect">
@@ -15365,7 +19443,7 @@
         </p:nvSpPr>
         <p:spPr>
           <a:xfrm>
-            <a:off x="1264848" y="1776069"/>
+            <a:off x="1725444" y="1640855"/>
             <a:ext cx="538303" cy="288612"/>
           </a:xfrm>
           <a:prstGeom prst="rect">
@@ -15660,7 +19738,7 @@
         </p:nvSpPr>
         <p:spPr>
           <a:xfrm>
-            <a:off x="678642" y="2373856"/>
+            <a:off x="1139238" y="2238642"/>
             <a:ext cx="538303" cy="288612"/>
           </a:xfrm>
           <a:prstGeom prst="rect">
@@ -15955,7 +20033,7 @@
         </p:nvSpPr>
         <p:spPr>
           <a:xfrm>
-            <a:off x="1077360" y="3042736"/>
+            <a:off x="1537956" y="2907522"/>
             <a:ext cx="538303" cy="288612"/>
           </a:xfrm>
           <a:prstGeom prst="rect">
@@ -16250,8 +20328,8 @@
         </p:nvSpPr>
         <p:spPr>
           <a:xfrm>
-            <a:off x="6049015" y="4121398"/>
-            <a:ext cx="2562042" cy="429556"/>
+            <a:off x="6210779" y="3912833"/>
+            <a:ext cx="2914391" cy="429556"/>
           </a:xfrm>
           <a:prstGeom prst="rect">
             <a:avLst/>
@@ -16550,7 +20628,7 @@
         </p:nvSpPr>
         <p:spPr>
           <a:xfrm>
-            <a:off x="7330036" y="3649708"/>
+            <a:off x="7779212" y="3414480"/>
             <a:ext cx="538303" cy="288612"/>
           </a:xfrm>
           <a:prstGeom prst="rect">
@@ -16845,7 +20923,7 @@
         </p:nvSpPr>
         <p:spPr>
           <a:xfrm>
-            <a:off x="7634836" y="2403269"/>
+            <a:off x="8084012" y="2168041"/>
             <a:ext cx="360040" cy="288612"/>
           </a:xfrm>
           <a:prstGeom prst="rect">
@@ -17140,7 +21218,7 @@
         </p:nvSpPr>
         <p:spPr>
           <a:xfrm>
-            <a:off x="6393932" y="1554342"/>
+            <a:off x="6843108" y="1319114"/>
             <a:ext cx="360040" cy="288612"/>
           </a:xfrm>
           <a:prstGeom prst="rect">
@@ -17435,7 +21513,7 @@
         </p:nvSpPr>
         <p:spPr>
           <a:xfrm>
-            <a:off x="6177907" y="2907325"/>
+            <a:off x="6627083" y="2672097"/>
             <a:ext cx="360040" cy="288612"/>
           </a:xfrm>
           <a:prstGeom prst="rect">
@@ -17730,7 +21808,7 @@
         </p:nvSpPr>
         <p:spPr>
           <a:xfrm>
-            <a:off x="7124153" y="1876910"/>
+            <a:off x="7573329" y="1641682"/>
             <a:ext cx="538303" cy="288612"/>
           </a:xfrm>
           <a:prstGeom prst="rect">
@@ -18025,7 +22103,7 @@
         </p:nvSpPr>
         <p:spPr>
           <a:xfrm>
-            <a:off x="6680496" y="2467559"/>
+            <a:off x="7129672" y="2232331"/>
             <a:ext cx="538303" cy="288612"/>
           </a:xfrm>
           <a:prstGeom prst="rect">
@@ -18320,7 +22398,7 @@
         </p:nvSpPr>
         <p:spPr>
           <a:xfrm>
-            <a:off x="6936665" y="3143577"/>
+            <a:off x="7385841" y="2908349"/>
             <a:ext cx="538303" cy="288612"/>
           </a:xfrm>
           <a:prstGeom prst="rect">
@@ -18615,7 +22693,7 @@
         </p:nvSpPr>
         <p:spPr>
           <a:xfrm>
-            <a:off x="7477136" y="2904185"/>
+            <a:off x="7926312" y="2668957"/>
             <a:ext cx="825658" cy="373595"/>
           </a:xfrm>
           <a:prstGeom prst="rect">
@@ -18916,7 +22994,7 @@
         </p:nvSpPr>
         <p:spPr>
           <a:xfrm>
-            <a:off x="5983157" y="2151896"/>
+            <a:off x="6432333" y="1916668"/>
             <a:ext cx="746625" cy="429556"/>
           </a:xfrm>
           <a:prstGeom prst="rect">
@@ -19217,7 +23295,7 @@
         </p:nvSpPr>
         <p:spPr>
           <a:xfrm>
-            <a:off x="2826680" y="2446938"/>
+            <a:off x="3275856" y="2211710"/>
             <a:ext cx="2990513" cy="1094240"/>
           </a:xfrm>
           <a:prstGeom prst="rect">
@@ -19530,7 +23608,7 @@
         </p:nvSpPr>
         <p:spPr>
           <a:xfrm rot="16200000">
-            <a:off x="3875728" y="1752262"/>
+            <a:off x="4324904" y="1517034"/>
             <a:ext cx="576064" cy="623679"/>
           </a:xfrm>
           <a:prstGeom prst="downArrow">
@@ -19578,7 +23656,7 @@
 </p:sld>
 </file>
 
-<file path=ppt/slides/slide13.xml><?xml version="1.0" encoding="utf-8"?>
+<file path=ppt/slides/slide14.xml><?xml version="1.0" encoding="utf-8"?>
 <p:sld xmlns:a="http://schemas.openxmlformats.org/drawingml/2006/main" xmlns:r="http://schemas.openxmlformats.org/officeDocument/2006/relationships" xmlns:p="http://schemas.openxmlformats.org/presentationml/2006/main">
   <p:cSld>
     <p:spTree>
@@ -19624,7 +23702,7 @@
           <a:p>
             <a:fld id="{7475F232-FFFE-5E6C-5554-2F165DAD28C0}" type="slidenum">
               <a:rPr lang="en-JP" smtClean="0"/>
-              <a:t>13</a:t>
+              <a:t>14</a:t>
             </a:fld>
             <a:endParaRPr lang="en-JP" dirty="0"/>
           </a:p>
@@ -22616,8 +26694,8 @@
           </a:p>
         </p:txBody>
       </p:sp>
-      <mc:AlternateContent xmlns:mc="http://schemas.openxmlformats.org/markup-compatibility/2006">
-        <mc:Choice xmlns:a14="http://schemas.microsoft.com/office/drawing/2010/main" Requires="a14">
+      <mc:AlternateContent xmlns:mc="http://schemas.openxmlformats.org/markup-compatibility/2006" xmlns:a14="http://schemas.microsoft.com/office/drawing/2010/main">
+        <mc:Choice Requires="a14">
           <p:sp>
             <p:nvSpPr>
               <p:cNvPr id="29" name="TextBox 28">
@@ -22868,7 +26946,7 @@
             </p:txBody>
           </p:sp>
         </mc:Choice>
-        <mc:Fallback>
+        <mc:Fallback xmlns="">
           <p:sp>
             <p:nvSpPr>
               <p:cNvPr id="29" name="TextBox 28">
@@ -22928,7 +27006,7 @@
         <p:spPr>
           <a:xfrm>
             <a:off x="2836894" y="3962150"/>
-            <a:ext cx="6072496" cy="646331"/>
+            <a:ext cx="5775940" cy="646331"/>
           </a:xfrm>
           <a:prstGeom prst="rect">
             <a:avLst/>
@@ -22941,21 +27019,6 @@
           </a:bodyPr>
           <a:lstStyle/>
           <a:p>
-            <a:r>
-              <a:rPr lang="en-US" dirty="0">
-                <a:latin typeface="游ゴシック Medium" panose="020B0500000000000000" pitchFamily="50" charset="-128"/>
-              </a:rPr>
-              <a:t>➔</a:t>
-            </a:r>
-            <a:r>
-              <a:rPr lang="en-US" dirty="0">
-                <a:solidFill>
-                  <a:schemeClr val="accent1"/>
-                </a:solidFill>
-                <a:latin typeface="游ゴシック Medium" panose="020B0500000000000000" pitchFamily="50" charset="-128"/>
-              </a:rPr>
-              <a:t> </a:t>
-            </a:r>
             <a:r>
               <a:rPr lang="en-US" dirty="0">
                 <a:latin typeface="游ゴシック Medium" panose="020B0500000000000000" pitchFamily="50" charset="-128"/>
@@ -22986,7 +27049,7 @@
 </p:sld>
 </file>
 
-<file path=ppt/slides/slide14.xml><?xml version="1.0" encoding="utf-8"?>
+<file path=ppt/slides/slide15.xml><?xml version="1.0" encoding="utf-8"?>
 <p:sld xmlns:a="http://schemas.openxmlformats.org/drawingml/2006/main" xmlns:r="http://schemas.openxmlformats.org/officeDocument/2006/relationships" xmlns:p="http://schemas.openxmlformats.org/presentationml/2006/main">
   <p:cSld>
     <p:spTree>
@@ -23032,7 +27095,7 @@
           <a:p>
             <a:fld id="{7475F232-FFFE-5E6C-5554-2F165DAD28C0}" type="slidenum">
               <a:rPr lang="en-JP" smtClean="0"/>
-              <a:t>14</a:t>
+              <a:t>15</a:t>
             </a:fld>
             <a:endParaRPr lang="en-JP" dirty="0"/>
           </a:p>
@@ -23524,7 +27587,7 @@
 </p:sld>
 </file>
 
-<file path=ppt/slides/slide15.xml><?xml version="1.0" encoding="utf-8"?>
+<file path=ppt/slides/slide16.xml><?xml version="1.0" encoding="utf-8"?>
 <p:sld xmlns:a="http://schemas.openxmlformats.org/drawingml/2006/main" xmlns:r="http://schemas.openxmlformats.org/officeDocument/2006/relationships" xmlns:p="http://schemas.openxmlformats.org/presentationml/2006/main">
   <p:cSld>
     <p:spTree>
@@ -23570,7 +27633,7 @@
           <a:p>
             <a:fld id="{7475F232-FFFE-5E6C-5554-2F165DAD28C0}" type="slidenum">
               <a:rPr lang="en-JP" smtClean="0"/>
-              <a:t>15</a:t>
+              <a:t>16</a:t>
             </a:fld>
             <a:endParaRPr lang="en-JP" dirty="0"/>
           </a:p>
@@ -23959,21 +28022,7 @@
                 <a:ea typeface="游ゴシック Medium"/>
                 <a:cs typeface="Times New Roman"/>
               </a:rPr>
-              <a:t>Use adequate noise functions to handle outliers</a:t>
-            </a:r>
-          </a:p>
-          <a:p>
-            <a:pPr>
-              <a:buClr>
-                <a:srgbClr val="9E3611"/>
-              </a:buClr>
-            </a:pPr>
-            <a:r>
-              <a:rPr lang="en-US" sz="2000" b="0" dirty="0">
-                <a:ea typeface="游ゴシック Medium"/>
-                <a:cs typeface="Times New Roman"/>
-              </a:rPr>
-              <a:t>Compare optimized node values (absolute poses) with GT </a:t>
+              <a:t>Compare optimized absolute poses (nodes) with GT </a:t>
             </a:r>
           </a:p>
         </p:txBody>
@@ -23991,7 +28040,7 @@
 </p:sld>
 </file>
 
-<file path=ppt/slides/slide16.xml><?xml version="1.0" encoding="utf-8"?>
+<file path=ppt/slides/slide17.xml><?xml version="1.0" encoding="utf-8"?>
 <p:sld xmlns:a="http://schemas.openxmlformats.org/drawingml/2006/main" xmlns:r="http://schemas.openxmlformats.org/officeDocument/2006/relationships" xmlns:p="http://schemas.openxmlformats.org/presentationml/2006/main">
   <p:cSld>
     <p:spTree>
@@ -24061,7 +28110,7 @@
             </a:pPr>
             <a:r>
               <a:rPr lang="en-US" sz="2000" b="0" dirty="0"/>
-              <a:t>Final Drift (FD): Offset of final frame compared to GT</a:t>
+              <a:t>Final Drift (FD): Offset of final frame pose compared to GT</a:t>
             </a:r>
           </a:p>
           <a:p>
@@ -24083,7 +28132,7 @@
             </a:pPr>
             <a:r>
               <a:rPr lang="en-US" sz="2000" b="0" dirty="0"/>
-              <a:t>Average error for relative transforms between frames</a:t>
+              <a:t>Average error of relative transforms between frames (edges)</a:t>
             </a:r>
           </a:p>
           <a:p>
@@ -24094,7 +28143,7 @@
             </a:pPr>
             <a:r>
               <a:rPr lang="en-US" sz="2000" b="0" dirty="0"/>
-              <a:t>Average error for absolute poses</a:t>
+              <a:t>Average error of absolute poses (nodes)</a:t>
             </a:r>
           </a:p>
           <a:p>
@@ -24105,7 +28154,7 @@
             </a:pPr>
             <a:r>
               <a:rPr lang="en-US" sz="2000" b="0" dirty="0"/>
-              <a:t>Maximum error in absolute poses</a:t>
+              <a:t>Maximum error of absolute poses</a:t>
             </a:r>
           </a:p>
           <a:p>
@@ -24142,7 +28191,7 @@
             </a:r>
             <a:r>
               <a:rPr lang="en-US" sz="2000" b="0" dirty="0"/>
-              <a:t>Use these to compare optimized poses with GT</a:t>
+              <a:t>Use these to compare optimized poses with GT and initial DL estimations</a:t>
             </a:r>
           </a:p>
           <a:p>
@@ -24161,16 +28210,8 @@
               <a:t>➔</a:t>
             </a:r>
             <a:r>
-              <a:rPr lang="en-US" sz="2000" dirty="0">
-                <a:solidFill>
-                  <a:schemeClr val="accent1"/>
-                </a:solidFill>
-              </a:rPr>
-              <a:t> </a:t>
-            </a:r>
-            <a:r>
               <a:rPr lang="en-US" sz="2000" b="0" dirty="0"/>
-              <a:t>Learn for fitting parameters or find heuristic for PGO</a:t>
+              <a:t>Find heuristic for/learn PGO parameters</a:t>
             </a:r>
           </a:p>
         </p:txBody>
@@ -24198,7 +28239,7 @@
           <a:p>
             <a:fld id="{7475F232-FFFE-5E6C-5554-2F165DAD28C0}" type="slidenum">
               <a:rPr lang="en-JP" smtClean="0"/>
-              <a:t>16</a:t>
+              <a:t>17</a:t>
             </a:fld>
             <a:endParaRPr lang="en-JP" dirty="0"/>
           </a:p>
@@ -24246,7 +28287,7 @@
 </p:sld>
 </file>
 
-<file path=ppt/slides/slide17.xml><?xml version="1.0" encoding="utf-8"?>
+<file path=ppt/slides/slide18.xml><?xml version="1.0" encoding="utf-8"?>
 <p:sld xmlns:a="http://schemas.openxmlformats.org/drawingml/2006/main" xmlns:r="http://schemas.openxmlformats.org/officeDocument/2006/relationships" xmlns:p="http://schemas.openxmlformats.org/presentationml/2006/main">
   <p:cSld>
     <p:spTree>
@@ -24293,7 +28334,7 @@
         </p:spPr>
         <p:txBody>
           <a:bodyPr vert="horz" lIns="91440" tIns="45720" rIns="91440" bIns="45720" rtlCol="0" anchor="t">
-            <a:normAutofit fontScale="92500" lnSpcReduction="10000"/>
+            <a:normAutofit fontScale="92500" lnSpcReduction="20000"/>
           </a:bodyPr>
           <a:lstStyle/>
           <a:p>
@@ -24354,7 +28395,7 @@
             </a:r>
             <a:r>
               <a:rPr lang="en-US" sz="2000" b="0" dirty="0"/>
-              <a:t> 	FD of 8mm</a:t>
+              <a:t>FD of 8mm</a:t>
             </a:r>
           </a:p>
           <a:p>
@@ -24452,8 +28493,13 @@
             </a:r>
             <a:r>
               <a:rPr lang="en-US" sz="2000" b="0" dirty="0"/>
-              <a:t>	TUS-REC challenge 2025</a:t>
-            </a:r>
+              <a:t>	TUS-REC </a:t>
+            </a:r>
+            <a:r>
+              <a:rPr lang="en-US" sz="2000" b="0"/>
+              <a:t>challenge 2025</a:t>
+            </a:r>
+            <a:endParaRPr lang="en-US" sz="2000" b="0" dirty="0"/>
           </a:p>
           <a:p>
             <a:pPr marL="0" indent="0">
@@ -24480,7 +28526,7 @@
             </a:r>
             <a:r>
               <a:rPr lang="en-US" sz="2000" b="0" dirty="0"/>
-              <a:t>Realistic, publicly available data sets with 3d UR frames and GT poses</a:t>
+              <a:t>Realistic, publicly available data sets with UR frames, estimated and GT poses</a:t>
             </a:r>
           </a:p>
           <a:p>
@@ -24516,7 +28562,7 @@
           <a:p>
             <a:fld id="{7475F232-FFFE-5E6C-5554-2F165DAD28C0}" type="slidenum">
               <a:rPr lang="en-JP" smtClean="0"/>
-              <a:t>17</a:t>
+              <a:t>18</a:t>
             </a:fld>
             <a:endParaRPr lang="en-JP" dirty="0"/>
           </a:p>
@@ -24564,7 +28610,7 @@
 </p:sld>
 </file>
 
-<file path=ppt/slides/slide18.xml><?xml version="1.0" encoding="utf-8"?>
+<file path=ppt/slides/slide19.xml><?xml version="1.0" encoding="utf-8"?>
 <p:sld xmlns:a="http://schemas.openxmlformats.org/drawingml/2006/main" xmlns:r="http://schemas.openxmlformats.org/officeDocument/2006/relationships" xmlns:p="http://schemas.openxmlformats.org/presentationml/2006/main">
   <p:cSld>
     <p:spTree>
@@ -24839,7 +28885,7 @@
           <a:p>
             <a:fld id="{7475F232-FFFE-5E6C-5554-2F165DAD28C0}" type="slidenum">
               <a:rPr lang="en-JP" smtClean="0"/>
-              <a:t>18</a:t>
+              <a:t>19</a:t>
             </a:fld>
             <a:endParaRPr lang="en-JP" dirty="0"/>
           </a:p>
@@ -25059,7 +29105,7 @@
           <p:nvPr/>
         </p:nvPicPr>
         <p:blipFill>
-          <a:blip r:embed="rId2" cstate="print">
+          <a:blip r:embed="rId3" cstate="print">
             <a:extLst>
               <a:ext uri="{28A0092B-C50C-407E-A947-70E740481C1C}">
                 <a14:useLocalDpi xmlns:a14="http://schemas.microsoft.com/office/drawing/2010/main" val="0"/>
@@ -25095,7 +29141,7 @@
           <p:nvPr/>
         </p:nvPicPr>
         <p:blipFill>
-          <a:blip r:embed="rId3" cstate="print">
+          <a:blip r:embed="rId4" cstate="print">
             <a:extLst>
               <a:ext uri="{28A0092B-C50C-407E-A947-70E740481C1C}">
                 <a14:useLocalDpi xmlns:a14="http://schemas.microsoft.com/office/drawing/2010/main" val="0"/>
@@ -25486,7 +29532,7 @@
           <p:nvPr/>
         </p:nvPicPr>
         <p:blipFill>
-          <a:blip r:embed="rId4" cstate="print">
+          <a:blip r:embed="rId5" cstate="print">
             <a:extLst>
               <a:ext uri="{28A0092B-C50C-407E-A947-70E740481C1C}">
                 <a14:useLocalDpi xmlns:a14="http://schemas.microsoft.com/office/drawing/2010/main" val="0"/>
@@ -25797,7 +29843,7 @@
           <p:nvPr/>
         </p:nvPicPr>
         <p:blipFill>
-          <a:blip r:embed="rId2" cstate="print">
+          <a:blip r:embed="rId3" cstate="print">
             <a:extLst>
               <a:ext uri="{28A0092B-C50C-407E-A947-70E740481C1C}">
                 <a14:useLocalDpi xmlns:a14="http://schemas.microsoft.com/office/drawing/2010/main" val="0"/>
@@ -25833,7 +29879,7 @@
           <p:nvPr/>
         </p:nvPicPr>
         <p:blipFill>
-          <a:blip r:embed="rId3" cstate="print">
+          <a:blip r:embed="rId4" cstate="print">
             <a:extLst>
               <a:ext uri="{28A0092B-C50C-407E-A947-70E740481C1C}">
                 <a14:useLocalDpi xmlns:a14="http://schemas.microsoft.com/office/drawing/2010/main" val="0"/>
@@ -26169,7 +30215,7 @@
           <p:nvPr/>
         </p:nvPicPr>
         <p:blipFill>
-          <a:blip r:embed="rId4" cstate="print">
+          <a:blip r:embed="rId5" cstate="print">
             <a:extLst>
               <a:ext uri="{28A0092B-C50C-407E-A947-70E740481C1C}">
                 <a14:useLocalDpi xmlns:a14="http://schemas.microsoft.com/office/drawing/2010/main" val="0"/>
@@ -26505,7 +30551,7 @@
           <p:nvPr/>
         </p:nvPicPr>
         <p:blipFill>
-          <a:blip r:embed="rId5" cstate="print">
+          <a:blip r:embed="rId6" cstate="print">
             <a:extLst>
               <a:ext uri="{28A0092B-C50C-407E-A947-70E740481C1C}">
                 <a14:useLocalDpi xmlns:a14="http://schemas.microsoft.com/office/drawing/2010/main" val="0"/>
@@ -27055,7 +31101,7 @@
             </a:pPr>
             <a:r>
               <a:rPr lang="en-US" sz="2000" b="0" dirty="0"/>
-              <a:t>Use Pose Graph Optimization (PGO) to increase pose reconstruction accuracy</a:t>
+              <a:t>Use Pose Graph Optimization (PGO) to increase pose estimation accuracy</a:t>
             </a:r>
           </a:p>
           <a:p>
@@ -31897,7 +35943,7 @@
           <p:nvPr>
             <p:extLst>
               <p:ext uri="{D42A27DB-BD31-4B8C-83A1-F6EECF244321}">
-                <p14:modId xmlns:p14="http://schemas.microsoft.com/office/powerpoint/2010/main" val="2147983194"/>
+                <p14:modId xmlns:p14="http://schemas.microsoft.com/office/powerpoint/2010/main" val="1307205324"/>
               </p:ext>
             </p:extLst>
           </p:nvPr>
@@ -34292,32 +38338,16 @@
                 <a:ea typeface="游ゴシック Medium"/>
                 <a:cs typeface="Times New Roman"/>
               </a:rPr>
-              <a:t>relative transforms </a:t>
-            </a:r>
-            <a:r>
-              <a:rPr lang="en-US" sz="1850" b="0" dirty="0">
-                <a:solidFill>
-                  <a:schemeClr val="accent1"/>
-                </a:solidFill>
-                <a:ea typeface="游ゴシック Medium"/>
-                <a:cs typeface="Times New Roman"/>
-              </a:rPr>
-              <a:t>T</a:t>
+              <a:t>relative transforms T</a:t>
             </a:r>
             <a:r>
               <a:rPr lang="en-US" sz="1850" b="0" baseline="-25000" dirty="0">
-                <a:solidFill>
-                  <a:schemeClr val="accent1"/>
-                </a:solidFill>
                 <a:ea typeface="游ゴシック Medium"/>
                 <a:cs typeface="Times New Roman"/>
               </a:rPr>
               <a:t>i→i+1</a:t>
             </a:r>
             <a:endParaRPr lang="en-US" sz="1850" b="0" dirty="0">
-              <a:solidFill>
-                <a:schemeClr val="accent1"/>
-              </a:solidFill>
               <a:ea typeface="游ゴシック Medium"/>
               <a:cs typeface="Times New Roman"/>
             </a:endParaRPr>
@@ -35135,7 +39165,7 @@
           <p:nvPr/>
         </p:nvPicPr>
         <p:blipFill>
-          <a:blip r:embed="rId2" cstate="print">
+          <a:blip r:embed="rId3" cstate="print">
             <a:extLst>
               <a:ext uri="{28A0092B-C50C-407E-A947-70E740481C1C}">
                 <a14:useLocalDpi xmlns:a14="http://schemas.microsoft.com/office/drawing/2010/main" val="0"/>
@@ -38433,7 +42463,7 @@
                 </a:pPr>
                 <a:r>
                   <a:rPr lang="en-US" sz="2000" b="0" dirty="0"/>
-                  <a:t>➔ Minimize inconsistency by adjusting nodes T</a:t>
+                  <a:t>➔ Minimize inconsistency by adjusting node values T</a:t>
                 </a:r>
                 <a:r>
                   <a:rPr lang="en-US" sz="2000" b="0" baseline="-25000" dirty="0"/>
@@ -38471,7 +42501,7 @@
                 <a:avLst/>
               </a:prstGeom>
               <a:blipFill>
-                <a:blip r:embed="rId3"/>
+                <a:blip r:embed="rId4"/>
                 <a:stretch>
                   <a:fillRect l="-1616" t="-9205" b="-5021"/>
                 </a:stretch>
@@ -38482,7 +42512,7 @@
               <a:lstStyle/>
               <a:p>
                 <a:r>
-                  <a:rPr lang="en-US">
+                  <a:rPr lang="de-DE">
                     <a:noFill/>
                   </a:rPr>
                   <a:t> </a:t>
@@ -38508,8 +42538,8 @@
         </p:nvSpPr>
         <p:spPr>
           <a:xfrm>
-            <a:off x="4757691" y="2547461"/>
-            <a:ext cx="3772482" cy="1695885"/>
+            <a:off x="4757691" y="2547462"/>
+            <a:ext cx="3772482" cy="1455296"/>
           </a:xfrm>
           <a:prstGeom prst="rect">
             <a:avLst/>
@@ -38801,7 +42831,7 @@
             </a:pPr>
             <a:r>
               <a:rPr lang="en-US" sz="2000" b="0" dirty="0"/>
-              <a:t>➔ Assume small inconsistencies in graph values</a:t>
+              <a:t>➔ Assume small inconsistencies in graph</a:t>
             </a:r>
             <a:endParaRPr lang="pt-BR" sz="2000" b="0" dirty="0">
               <a:ea typeface="游ゴシック Medium"/>
@@ -39336,67 +43366,6 @@
 </file>
 
 <file path=customXml/item1.xml><?xml version="1.0" encoding="utf-8"?>
-<p:properties xmlns:p="http://schemas.microsoft.com/office/2006/metadata/properties" xmlns:xsi="http://www.w3.org/2001/XMLSchema-instance" xmlns:pc="http://schemas.microsoft.com/office/infopath/2007/PartnerControls">
-  <documentManagement>
-    <TaxCatchAll xmlns="bbdc8989-56fb-4b1d-a38b-166581c893ff" xsi:nil="true"/>
-    <lcf76f155ced4ddcb4097134ff3c332f xmlns="f61654bb-b7fc-45ad-85e3-d08f7c4a7ee2">
-      <Terms xmlns="http://schemas.microsoft.com/office/infopath/2007/PartnerControls"/>
-    </lcf76f155ced4ddcb4097134ff3c332f>
-    <Title0 xmlns="f61654bb-b7fc-45ad-85e3-d08f7c4a7ee2" xsi:nil="true"/>
-    <Year xmlns="f61654bb-b7fc-45ad-85e3-d08f7c4a7ee2" xsi:nil="true"/>
-    <Author0 xmlns="f61654bb-b7fc-45ad-85e3-d08f7c4a7ee2" xsi:nil="true"/>
-    <Authors xmlns="f61654bb-b7fc-45ad-85e3-d08f7c4a7ee2" xsi:nil="true"/>
-    <NotebookType xmlns="f61654bb-b7fc-45ad-85e3-d08f7c4a7ee2" xsi:nil="true"/>
-    <Templates xmlns="f61654bb-b7fc-45ad-85e3-d08f7c4a7ee2" xsi:nil="true"/>
-    <AppVersion xmlns="f61654bb-b7fc-45ad-85e3-d08f7c4a7ee2" xsi:nil="true"/>
-    <IsNotebookLocked xmlns="f61654bb-b7fc-45ad-85e3-d08f7c4a7ee2" xsi:nil="true"/>
-    <Self_Registration_Enabled xmlns="f61654bb-b7fc-45ad-85e3-d08f7c4a7ee2" xsi:nil="true"/>
-    <Has_Leaders_Only_SectionGroup xmlns="f61654bb-b7fc-45ad-85e3-d08f7c4a7ee2" xsi:nil="true"/>
-    <Invited_Members xmlns="f61654bb-b7fc-45ad-85e3-d08f7c4a7ee2" xsi:nil="true"/>
-    <Is_Collaboration_Space_Locked xmlns="f61654bb-b7fc-45ad-85e3-d08f7c4a7ee2" xsi:nil="true"/>
-    <LMS_Mappings xmlns="f61654bb-b7fc-45ad-85e3-d08f7c4a7ee2" xsi:nil="true"/>
-    <Invited_Leaders xmlns="f61654bb-b7fc-45ad-85e3-d08f7c4a7ee2" xsi:nil="true"/>
-    <Math_Settings xmlns="f61654bb-b7fc-45ad-85e3-d08f7c4a7ee2" xsi:nil="true"/>
-    <Members xmlns="f61654bb-b7fc-45ad-85e3-d08f7c4a7ee2">
-      <UserInfo>
-        <DisplayName/>
-        <AccountId xsi:nil="true"/>
-        <AccountType/>
-      </UserInfo>
-    </Members>
-    <DefaultSectionNames xmlns="f61654bb-b7fc-45ad-85e3-d08f7c4a7ee2" xsi:nil="true"/>
-    <TeamsChannelId xmlns="f61654bb-b7fc-45ad-85e3-d08f7c4a7ee2" xsi:nil="true"/>
-    <FolderType xmlns="f61654bb-b7fc-45ad-85e3-d08f7c4a7ee2" xsi:nil="true"/>
-    <Leaders xmlns="f61654bb-b7fc-45ad-85e3-d08f7c4a7ee2">
-      <UserInfo>
-        <DisplayName/>
-        <AccountId xsi:nil="true"/>
-        <AccountType/>
-      </UserInfo>
-    </Leaders>
-    <Distribution_Groups xmlns="f61654bb-b7fc-45ad-85e3-d08f7c4a7ee2" xsi:nil="true"/>
-    <Member_Groups xmlns="f61654bb-b7fc-45ad-85e3-d08f7c4a7ee2">
-      <UserInfo>
-        <DisplayName/>
-        <AccountId xsi:nil="true"/>
-        <AccountType/>
-      </UserInfo>
-    </Member_Groups>
-    <Teams_Channel_Section_Location xmlns="f61654bb-b7fc-45ad-85e3-d08f7c4a7ee2" xsi:nil="true"/>
-    <CultureName xmlns="f61654bb-b7fc-45ad-85e3-d08f7c4a7ee2" xsi:nil="true"/>
-    <Owner xmlns="f61654bb-b7fc-45ad-85e3-d08f7c4a7ee2">
-      <UserInfo>
-        <DisplayName/>
-        <AccountId xsi:nil="true"/>
-        <AccountType/>
-      </UserInfo>
-    </Owner>
-    <_x30a2__x30c3__x30d7__x30ed__x30fc__x30c9__x65e5__x4ed8_ xmlns="f61654bb-b7fc-45ad-85e3-d08f7c4a7ee2" xsi:nil="true"/>
-  </documentManagement>
-</p:properties>
-</file>
-
-<file path=customXml/item2.xml><?xml version="1.0" encoding="utf-8"?>
 <ct:contentTypeSchema xmlns:ct="http://schemas.microsoft.com/office/2006/metadata/contentType" xmlns:ma="http://schemas.microsoft.com/office/2006/metadata/properties/metaAttributes" ct:_="" ma:_="" ma:contentTypeName="ドキュメント" ma:contentTypeID="0x010100352A53F757E5E848A18782864458E644" ma:contentTypeVersion="43" ma:contentTypeDescription="新しいドキュメントを作成します。" ma:contentTypeScope="" ma:versionID="e58177412e1512208a553d6b419372bf">
   <xsd:schema xmlns:xsd="http://www.w3.org/2001/XMLSchema" xmlns:xs="http://www.w3.org/2001/XMLSchema" xmlns:p="http://schemas.microsoft.com/office/2006/metadata/properties" xmlns:ns2="f61654bb-b7fc-45ad-85e3-d08f7c4a7ee2" xmlns:ns3="bbdc8989-56fb-4b1d-a38b-166581c893ff" targetNamespace="http://schemas.microsoft.com/office/2006/metadata/properties" ma:root="true" ma:fieldsID="41a5810d8518a876aecc1f17313a65be" ns2:_="" ns3:_="">
     <xsd:import namespace="f61654bb-b7fc-45ad-85e3-d08f7c4a7ee2"/>
@@ -39867,6 +43836,67 @@
 </ct:contentTypeSchema>
 </file>
 
+<file path=customXml/item2.xml><?xml version="1.0" encoding="utf-8"?>
+<p:properties xmlns:p="http://schemas.microsoft.com/office/2006/metadata/properties" xmlns:xsi="http://www.w3.org/2001/XMLSchema-instance" xmlns:pc="http://schemas.microsoft.com/office/infopath/2007/PartnerControls">
+  <documentManagement>
+    <TaxCatchAll xmlns="bbdc8989-56fb-4b1d-a38b-166581c893ff" xsi:nil="true"/>
+    <lcf76f155ced4ddcb4097134ff3c332f xmlns="f61654bb-b7fc-45ad-85e3-d08f7c4a7ee2">
+      <Terms xmlns="http://schemas.microsoft.com/office/infopath/2007/PartnerControls"/>
+    </lcf76f155ced4ddcb4097134ff3c332f>
+    <Title0 xmlns="f61654bb-b7fc-45ad-85e3-d08f7c4a7ee2" xsi:nil="true"/>
+    <Year xmlns="f61654bb-b7fc-45ad-85e3-d08f7c4a7ee2" xsi:nil="true"/>
+    <Author0 xmlns="f61654bb-b7fc-45ad-85e3-d08f7c4a7ee2" xsi:nil="true"/>
+    <Authors xmlns="f61654bb-b7fc-45ad-85e3-d08f7c4a7ee2" xsi:nil="true"/>
+    <NotebookType xmlns="f61654bb-b7fc-45ad-85e3-d08f7c4a7ee2" xsi:nil="true"/>
+    <Templates xmlns="f61654bb-b7fc-45ad-85e3-d08f7c4a7ee2" xsi:nil="true"/>
+    <AppVersion xmlns="f61654bb-b7fc-45ad-85e3-d08f7c4a7ee2" xsi:nil="true"/>
+    <IsNotebookLocked xmlns="f61654bb-b7fc-45ad-85e3-d08f7c4a7ee2" xsi:nil="true"/>
+    <Self_Registration_Enabled xmlns="f61654bb-b7fc-45ad-85e3-d08f7c4a7ee2" xsi:nil="true"/>
+    <Has_Leaders_Only_SectionGroup xmlns="f61654bb-b7fc-45ad-85e3-d08f7c4a7ee2" xsi:nil="true"/>
+    <Invited_Members xmlns="f61654bb-b7fc-45ad-85e3-d08f7c4a7ee2" xsi:nil="true"/>
+    <Is_Collaboration_Space_Locked xmlns="f61654bb-b7fc-45ad-85e3-d08f7c4a7ee2" xsi:nil="true"/>
+    <LMS_Mappings xmlns="f61654bb-b7fc-45ad-85e3-d08f7c4a7ee2" xsi:nil="true"/>
+    <Invited_Leaders xmlns="f61654bb-b7fc-45ad-85e3-d08f7c4a7ee2" xsi:nil="true"/>
+    <Math_Settings xmlns="f61654bb-b7fc-45ad-85e3-d08f7c4a7ee2" xsi:nil="true"/>
+    <Members xmlns="f61654bb-b7fc-45ad-85e3-d08f7c4a7ee2">
+      <UserInfo>
+        <DisplayName/>
+        <AccountId xsi:nil="true"/>
+        <AccountType/>
+      </UserInfo>
+    </Members>
+    <DefaultSectionNames xmlns="f61654bb-b7fc-45ad-85e3-d08f7c4a7ee2" xsi:nil="true"/>
+    <TeamsChannelId xmlns="f61654bb-b7fc-45ad-85e3-d08f7c4a7ee2" xsi:nil="true"/>
+    <FolderType xmlns="f61654bb-b7fc-45ad-85e3-d08f7c4a7ee2" xsi:nil="true"/>
+    <Leaders xmlns="f61654bb-b7fc-45ad-85e3-d08f7c4a7ee2">
+      <UserInfo>
+        <DisplayName/>
+        <AccountId xsi:nil="true"/>
+        <AccountType/>
+      </UserInfo>
+    </Leaders>
+    <Distribution_Groups xmlns="f61654bb-b7fc-45ad-85e3-d08f7c4a7ee2" xsi:nil="true"/>
+    <Member_Groups xmlns="f61654bb-b7fc-45ad-85e3-d08f7c4a7ee2">
+      <UserInfo>
+        <DisplayName/>
+        <AccountId xsi:nil="true"/>
+        <AccountType/>
+      </UserInfo>
+    </Member_Groups>
+    <Teams_Channel_Section_Location xmlns="f61654bb-b7fc-45ad-85e3-d08f7c4a7ee2" xsi:nil="true"/>
+    <CultureName xmlns="f61654bb-b7fc-45ad-85e3-d08f7c4a7ee2" xsi:nil="true"/>
+    <Owner xmlns="f61654bb-b7fc-45ad-85e3-d08f7c4a7ee2">
+      <UserInfo>
+        <DisplayName/>
+        <AccountId xsi:nil="true"/>
+        <AccountType/>
+      </UserInfo>
+    </Owner>
+    <_x30a2__x30c3__x30d7__x30ed__x30fc__x30c9__x65e5__x4ed8_ xmlns="f61654bb-b7fc-45ad-85e3-d08f7c4a7ee2" xsi:nil="true"/>
+  </documentManagement>
+</p:properties>
+</file>
+
 <file path=customXml/item3.xml><?xml version="1.0" encoding="utf-8"?>
 <?mso-contentType ?>
 <FormTemplates xmlns="http://schemas.microsoft.com/sharepoint/v3/contenttype/forms">
@@ -39877,23 +43907,6 @@
 </file>
 
 <file path=customXml/itemProps1.xml><?xml version="1.0" encoding="utf-8"?>
-<ds:datastoreItem xmlns:ds="http://schemas.openxmlformats.org/officeDocument/2006/customXml" ds:itemID="{726A834E-B1B5-46FD-BC6A-86110B9E53A8}">
-  <ds:schemaRefs>
-    <ds:schemaRef ds:uri="f61654bb-b7fc-45ad-85e3-d08f7c4a7ee2"/>
-    <ds:schemaRef ds:uri="http://schemas.microsoft.com/office/infopath/2007/PartnerControls"/>
-    <ds:schemaRef ds:uri="http://purl.org/dc/dcmitype/"/>
-    <ds:schemaRef ds:uri="http://purl.org/dc/elements/1.1/"/>
-    <ds:schemaRef ds:uri="bbdc8989-56fb-4b1d-a38b-166581c893ff"/>
-    <ds:schemaRef ds:uri="http://purl.org/dc/terms/"/>
-    <ds:schemaRef ds:uri="http://schemas.microsoft.com/office/2006/documentManagement/types"/>
-    <ds:schemaRef ds:uri="http://www.w3.org/XML/1998/namespace"/>
-    <ds:schemaRef ds:uri="http://schemas.openxmlformats.org/package/2006/metadata/core-properties"/>
-    <ds:schemaRef ds:uri="http://schemas.microsoft.com/office/2006/metadata/properties"/>
-  </ds:schemaRefs>
-</ds:datastoreItem>
-</file>
-
-<file path=customXml/itemProps2.xml><?xml version="1.0" encoding="utf-8"?>
 <ds:datastoreItem xmlns:ds="http://schemas.openxmlformats.org/officeDocument/2006/customXml" ds:itemID="{F2D09310-C45E-477D-9B05-494A1C2D1783}">
   <ds:schemaRefs>
     <ds:schemaRef ds:uri="http://schemas.microsoft.com/office/2006/metadata/contentType"/>
@@ -39912,6 +43925,23 @@
 </ds:datastoreItem>
 </file>
 
+<file path=customXml/itemProps2.xml><?xml version="1.0" encoding="utf-8"?>
+<ds:datastoreItem xmlns:ds="http://schemas.openxmlformats.org/officeDocument/2006/customXml" ds:itemID="{726A834E-B1B5-46FD-BC6A-86110B9E53A8}">
+  <ds:schemaRefs>
+    <ds:schemaRef ds:uri="f61654bb-b7fc-45ad-85e3-d08f7c4a7ee2"/>
+    <ds:schemaRef ds:uri="http://schemas.microsoft.com/office/infopath/2007/PartnerControls"/>
+    <ds:schemaRef ds:uri="http://purl.org/dc/dcmitype/"/>
+    <ds:schemaRef ds:uri="http://purl.org/dc/elements/1.1/"/>
+    <ds:schemaRef ds:uri="bbdc8989-56fb-4b1d-a38b-166581c893ff"/>
+    <ds:schemaRef ds:uri="http://purl.org/dc/terms/"/>
+    <ds:schemaRef ds:uri="http://schemas.microsoft.com/office/2006/documentManagement/types"/>
+    <ds:schemaRef ds:uri="http://www.w3.org/XML/1998/namespace"/>
+    <ds:schemaRef ds:uri="http://schemas.openxmlformats.org/package/2006/metadata/core-properties"/>
+    <ds:schemaRef ds:uri="http://schemas.microsoft.com/office/2006/metadata/properties"/>
+  </ds:schemaRefs>
+</ds:datastoreItem>
+</file>
+
 <file path=customXml/itemProps3.xml><?xml version="1.0" encoding="utf-8"?>
 <ds:datastoreItem xmlns:ds="http://schemas.openxmlformats.org/officeDocument/2006/customXml" ds:itemID="{0A8BCAEC-5EDD-4F8B-8062-E645C37DABB6}">
   <ds:schemaRefs>

--- a/documents/Jannis_Meyer_Presentation_11_05_2026.pptx
+++ b/documents/Jannis_Meyer_Presentation_11_05_2026.pptx
@@ -2615,6 +2615,163 @@
               <a:buChar char="-"/>
             </a:pPr>
             <a:r>
+              <a:rPr lang="de-DE" dirty="0"/>
+              <a:t>Average </a:t>
+            </a:r>
+            <a:r>
+              <a:rPr lang="de-DE" dirty="0" err="1"/>
+              <a:t>edge</a:t>
+            </a:r>
+            <a:r>
+              <a:rPr lang="de-DE" dirty="0"/>
+              <a:t> </a:t>
+            </a:r>
+            <a:r>
+              <a:rPr lang="de-DE" dirty="0" err="1"/>
+              <a:t>error</a:t>
+            </a:r>
+            <a:r>
+              <a:rPr lang="de-DE" dirty="0"/>
+              <a:t>: </a:t>
+            </a:r>
+            <a:r>
+              <a:rPr lang="de-DE" dirty="0" err="1"/>
+              <a:t>How</a:t>
+            </a:r>
+            <a:r>
+              <a:rPr lang="de-DE" dirty="0"/>
+              <a:t> </a:t>
+            </a:r>
+            <a:r>
+              <a:rPr lang="de-DE" dirty="0" err="1"/>
+              <a:t>incorrect</a:t>
+            </a:r>
+            <a:r>
+              <a:rPr lang="de-DE" dirty="0"/>
+              <a:t> </a:t>
+            </a:r>
+            <a:r>
+              <a:rPr lang="de-DE" dirty="0" err="1"/>
+              <a:t>is</a:t>
+            </a:r>
+            <a:r>
+              <a:rPr lang="de-DE" dirty="0"/>
+              <a:t> </a:t>
+            </a:r>
+            <a:r>
+              <a:rPr lang="de-DE" dirty="0" err="1"/>
+              <a:t>the</a:t>
+            </a:r>
+            <a:r>
+              <a:rPr lang="de-DE" dirty="0"/>
+              <a:t> </a:t>
+            </a:r>
+            <a:r>
+              <a:rPr lang="de-DE" dirty="0" err="1"/>
+              <a:t>estimated</a:t>
+            </a:r>
+            <a:r>
+              <a:rPr lang="de-DE" dirty="0"/>
+              <a:t> </a:t>
+            </a:r>
+            <a:r>
+              <a:rPr lang="de-DE" dirty="0" err="1"/>
+              <a:t>motion</a:t>
+            </a:r>
+            <a:r>
+              <a:rPr lang="de-DE" dirty="0"/>
+              <a:t>?</a:t>
+            </a:r>
+          </a:p>
+          <a:p>
+            <a:pPr marL="171450" indent="-171450">
+              <a:buFontTx/>
+              <a:buChar char="-"/>
+            </a:pPr>
+            <a:r>
+              <a:rPr lang="de-DE" dirty="0"/>
+              <a:t>Average </a:t>
+            </a:r>
+            <a:r>
+              <a:rPr lang="de-DE" dirty="0" err="1"/>
+              <a:t>node</a:t>
+            </a:r>
+            <a:r>
+              <a:rPr lang="de-DE" dirty="0"/>
+              <a:t> </a:t>
+            </a:r>
+            <a:r>
+              <a:rPr lang="de-DE" dirty="0" err="1"/>
+              <a:t>error</a:t>
+            </a:r>
+            <a:r>
+              <a:rPr lang="de-DE" dirty="0"/>
+              <a:t>: </a:t>
+            </a:r>
+            <a:r>
+              <a:rPr lang="de-DE" dirty="0" err="1"/>
+              <a:t>How</a:t>
+            </a:r>
+            <a:r>
+              <a:rPr lang="de-DE" dirty="0"/>
+              <a:t> </a:t>
+            </a:r>
+            <a:r>
+              <a:rPr lang="de-DE" dirty="0" err="1"/>
+              <a:t>incorrect</a:t>
+            </a:r>
+            <a:r>
+              <a:rPr lang="de-DE" dirty="0"/>
+              <a:t> </a:t>
+            </a:r>
+            <a:r>
+              <a:rPr lang="de-DE" dirty="0" err="1"/>
+              <a:t>are</a:t>
+            </a:r>
+            <a:r>
+              <a:rPr lang="de-DE" dirty="0"/>
+              <a:t> </a:t>
+            </a:r>
+            <a:r>
+              <a:rPr lang="de-DE" dirty="0" err="1"/>
+              <a:t>the</a:t>
+            </a:r>
+            <a:r>
+              <a:rPr lang="de-DE" dirty="0"/>
+              <a:t> </a:t>
+            </a:r>
+            <a:r>
+              <a:rPr lang="de-DE" dirty="0" err="1"/>
+              <a:t>estimated</a:t>
+            </a:r>
+            <a:r>
+              <a:rPr lang="de-DE" dirty="0"/>
+              <a:t> </a:t>
+            </a:r>
+            <a:r>
+              <a:rPr lang="de-DE" dirty="0" err="1"/>
+              <a:t>poses</a:t>
+            </a:r>
+            <a:r>
+              <a:rPr lang="de-DE" dirty="0"/>
+              <a:t>/</a:t>
+            </a:r>
+            <a:r>
+              <a:rPr lang="de-DE" dirty="0" err="1"/>
+              <a:t>postions</a:t>
+            </a:r>
+            <a:r>
+              <a:rPr lang="de-DE"/>
+              <a:t>?</a:t>
+            </a:r>
+            <a:endParaRPr lang="de-DE" dirty="0"/>
+          </a:p>
+          <a:p>
+            <a:pPr marL="171450" indent="-171450">
+              <a:buFontTx/>
+              <a:buChar char="-"/>
+            </a:pPr>
+            <a:r>
               <a:rPr lang="de-DE" dirty="0" err="1"/>
               <a:t>useful</a:t>
             </a:r>
@@ -3631,7 +3788,7 @@
           <a:p>
             <a:fld id="{8664C608-40B1-4030-A28D-5B74BC98ADCE}" type="datetimeFigureOut">
               <a:rPr lang="en-US" dirty="0"/>
-              <a:t>5/9/2026</a:t>
+              <a:t>5/10/2026</a:t>
             </a:fld>
             <a:endParaRPr lang="en-US" dirty="0"/>
           </a:p>
@@ -5114,8 +5271,8 @@
           </a:p>
         </p:txBody>
       </p:sp>
-      <mc:AlternateContent xmlns:mc="http://schemas.openxmlformats.org/markup-compatibility/2006">
-        <mc:Choice xmlns:p14="http://schemas.microsoft.com/office/powerpoint/2010/main" Requires="p14">
+      <mc:AlternateContent xmlns:mc="http://schemas.openxmlformats.org/markup-compatibility/2006" xmlns:p14="http://schemas.microsoft.com/office/powerpoint/2010/main">
+        <mc:Choice Requires="p14">
           <p:contentPart p14:bwMode="auto" r:id="rId2">
             <p14:nvContentPartPr>
               <p14:cNvPr id="38" name="Freihand 37">
@@ -5134,7 +5291,7 @@
             </p14:xfrm>
           </p:contentPart>
         </mc:Choice>
-        <mc:Fallback>
+        <mc:Fallback xmlns="">
           <p:pic>
             <p:nvPicPr>
               <p:cNvPr id="38" name="Freihand 37">
@@ -5165,8 +5322,8 @@
           </p:pic>
         </mc:Fallback>
       </mc:AlternateContent>
-      <mc:AlternateContent xmlns:mc="http://schemas.openxmlformats.org/markup-compatibility/2006">
-        <mc:Choice xmlns:p14="http://schemas.microsoft.com/office/powerpoint/2010/main" Requires="p14">
+      <mc:AlternateContent xmlns:mc="http://schemas.openxmlformats.org/markup-compatibility/2006" xmlns:p14="http://schemas.microsoft.com/office/powerpoint/2010/main">
+        <mc:Choice Requires="p14">
           <p:contentPart p14:bwMode="auto" r:id="rId4">
             <p14:nvContentPartPr>
               <p14:cNvPr id="45" name="Freihand 44">
@@ -5185,7 +5342,7 @@
             </p14:xfrm>
           </p:contentPart>
         </mc:Choice>
-        <mc:Fallback>
+        <mc:Fallback xmlns="">
           <p:pic>
             <p:nvPicPr>
               <p:cNvPr id="45" name="Freihand 44">
@@ -5216,8 +5373,8 @@
           </p:pic>
         </mc:Fallback>
       </mc:AlternateContent>
-      <mc:AlternateContent xmlns:mc="http://schemas.openxmlformats.org/markup-compatibility/2006">
-        <mc:Choice xmlns:p14="http://schemas.microsoft.com/office/powerpoint/2010/main" Requires="p14">
+      <mc:AlternateContent xmlns:mc="http://schemas.openxmlformats.org/markup-compatibility/2006" xmlns:p14="http://schemas.microsoft.com/office/powerpoint/2010/main">
+        <mc:Choice Requires="p14">
           <p:contentPart p14:bwMode="auto" r:id="rId6">
             <p14:nvContentPartPr>
               <p14:cNvPr id="61" name="Freihand 60">
@@ -5236,7 +5393,7 @@
             </p14:xfrm>
           </p:contentPart>
         </mc:Choice>
-        <mc:Fallback>
+        <mc:Fallback xmlns="">
           <p:pic>
             <p:nvPicPr>
               <p:cNvPr id="61" name="Freihand 60">
@@ -41968,8 +42125,8 @@
           </a:p>
         </p:txBody>
       </p:sp>
-      <mc:AlternateContent xmlns:mc="http://schemas.openxmlformats.org/markup-compatibility/2006">
-        <mc:Choice xmlns:a14="http://schemas.microsoft.com/office/drawing/2010/main" Requires="a14">
+      <mc:AlternateContent xmlns:mc="http://schemas.openxmlformats.org/markup-compatibility/2006" xmlns:a14="http://schemas.microsoft.com/office/drawing/2010/main">
+        <mc:Choice Requires="a14">
           <p:sp>
             <p:nvSpPr>
               <p:cNvPr id="26" name="Text Placeholder 1">
@@ -42477,7 +42634,7 @@
             </p:txBody>
           </p:sp>
         </mc:Choice>
-        <mc:Fallback>
+        <mc:Fallback xmlns="">
           <p:sp>
             <p:nvSpPr>
               <p:cNvPr id="26" name="Text Placeholder 1">
@@ -43837,6 +43994,15 @@
 </file>
 
 <file path=customXml/item2.xml><?xml version="1.0" encoding="utf-8"?>
+<?mso-contentType ?>
+<FormTemplates xmlns="http://schemas.microsoft.com/sharepoint/v3/contenttype/forms">
+  <Display>DocumentLibraryForm</Display>
+  <Edit>DocumentLibraryForm</Edit>
+  <New>DocumentLibraryForm</New>
+</FormTemplates>
+</file>
+
+<file path=customXml/item3.xml><?xml version="1.0" encoding="utf-8"?>
 <p:properties xmlns:p="http://schemas.microsoft.com/office/2006/metadata/properties" xmlns:xsi="http://www.w3.org/2001/XMLSchema-instance" xmlns:pc="http://schemas.microsoft.com/office/infopath/2007/PartnerControls">
   <documentManagement>
     <TaxCatchAll xmlns="bbdc8989-56fb-4b1d-a38b-166581c893ff" xsi:nil="true"/>
@@ -43897,15 +44063,6 @@
 </p:properties>
 </file>
 
-<file path=customXml/item3.xml><?xml version="1.0" encoding="utf-8"?>
-<?mso-contentType ?>
-<FormTemplates xmlns="http://schemas.microsoft.com/sharepoint/v3/contenttype/forms">
-  <Display>DocumentLibraryForm</Display>
-  <Edit>DocumentLibraryForm</Edit>
-  <New>DocumentLibraryForm</New>
-</FormTemplates>
-</file>
-
 <file path=customXml/itemProps1.xml><?xml version="1.0" encoding="utf-8"?>
 <ds:datastoreItem xmlns:ds="http://schemas.openxmlformats.org/officeDocument/2006/customXml" ds:itemID="{F2D09310-C45E-477D-9B05-494A1C2D1783}">
   <ds:schemaRefs>
@@ -43926,6 +44083,14 @@
 </file>
 
 <file path=customXml/itemProps2.xml><?xml version="1.0" encoding="utf-8"?>
+<ds:datastoreItem xmlns:ds="http://schemas.openxmlformats.org/officeDocument/2006/customXml" ds:itemID="{0A8BCAEC-5EDD-4F8B-8062-E645C37DABB6}">
+  <ds:schemaRefs>
+    <ds:schemaRef ds:uri="http://schemas.microsoft.com/sharepoint/v3/contenttype/forms"/>
+  </ds:schemaRefs>
+</ds:datastoreItem>
+</file>
+
+<file path=customXml/itemProps3.xml><?xml version="1.0" encoding="utf-8"?>
 <ds:datastoreItem xmlns:ds="http://schemas.openxmlformats.org/officeDocument/2006/customXml" ds:itemID="{726A834E-B1B5-46FD-BC6A-86110B9E53A8}">
   <ds:schemaRefs>
     <ds:schemaRef ds:uri="f61654bb-b7fc-45ad-85e3-d08f7c4a7ee2"/>
@@ -43940,12 +44105,4 @@
     <ds:schemaRef ds:uri="http://schemas.microsoft.com/office/2006/metadata/properties"/>
   </ds:schemaRefs>
 </ds:datastoreItem>
-</file>
-
-<file path=customXml/itemProps3.xml><?xml version="1.0" encoding="utf-8"?>
-<ds:datastoreItem xmlns:ds="http://schemas.openxmlformats.org/officeDocument/2006/customXml" ds:itemID="{0A8BCAEC-5EDD-4F8B-8062-E645C37DABB6}">
-  <ds:schemaRefs>
-    <ds:schemaRef ds:uri="http://schemas.microsoft.com/sharepoint/v3/contenttype/forms"/>
-  </ds:schemaRefs>
-</ds:datastoreItem>
 </file>